--- a/examples/pptx/claude-code-for-data-scientists.pptx
+++ b/examples/pptx/claude-code-for-data-scientists.pptx
@@ -3151,7 +3151,7 @@
           <a:noFill/>
         </p:spPr>
         <p:txBody>
-          <a:bodyPr wrap="square">
+          <a:bodyPr wrap="none">
             <a:noAutofit/>
           </a:bodyPr>
           <a:lstStyle/>
@@ -3212,7 +3212,7 @@
           <a:noFill/>
         </p:spPr>
         <p:txBody>
-          <a:bodyPr wrap="square">
+          <a:bodyPr wrap="none">
             <a:noAutofit/>
           </a:bodyPr>
           <a:lstStyle/>
@@ -3247,7 +3247,7 @@
           <a:noFill/>
         </p:spPr>
         <p:txBody>
-          <a:bodyPr wrap="square">
+          <a:bodyPr wrap="none">
             <a:noAutofit/>
           </a:bodyPr>
           <a:lstStyle/>
@@ -3282,7 +3282,7 @@
           <a:noFill/>
         </p:spPr>
         <p:txBody>
-          <a:bodyPr wrap="square">
+          <a:bodyPr wrap="none">
             <a:noAutofit/>
           </a:bodyPr>
           <a:lstStyle/>
@@ -3317,7 +3317,7 @@
           <a:noFill/>
         </p:spPr>
         <p:txBody>
-          <a:bodyPr wrap="square">
+          <a:bodyPr wrap="none">
             <a:noAutofit/>
           </a:bodyPr>
           <a:lstStyle/>
@@ -3352,7 +3352,7 @@
           <a:noFill/>
         </p:spPr>
         <p:txBody>
-          <a:bodyPr wrap="square">
+          <a:bodyPr wrap="none">
             <a:noAutofit/>
           </a:bodyPr>
           <a:lstStyle/>
@@ -3387,7 +3387,7 @@
           <a:noFill/>
         </p:spPr>
         <p:txBody>
-          <a:bodyPr wrap="square">
+          <a:bodyPr wrap="none">
             <a:noAutofit/>
           </a:bodyPr>
           <a:lstStyle/>
@@ -3422,7 +3422,7 @@
           <a:noFill/>
         </p:spPr>
         <p:txBody>
-          <a:bodyPr wrap="square">
+          <a:bodyPr wrap="none">
             <a:noAutofit/>
           </a:bodyPr>
           <a:lstStyle/>
@@ -3484,7 +3484,7 @@
           <a:noFill/>
         </p:spPr>
         <p:txBody>
-          <a:bodyPr wrap="square">
+          <a:bodyPr wrap="none">
             <a:noAutofit/>
           </a:bodyPr>
           <a:lstStyle/>
@@ -3519,7 +3519,7 @@
           <a:noFill/>
         </p:spPr>
         <p:txBody>
-          <a:bodyPr wrap="square">
+          <a:bodyPr wrap="none">
             <a:noAutofit/>
           </a:bodyPr>
           <a:lstStyle/>
@@ -3554,7 +3554,7 @@
           <a:noFill/>
         </p:spPr>
         <p:txBody>
-          <a:bodyPr wrap="square">
+          <a:bodyPr wrap="none">
             <a:noAutofit/>
           </a:bodyPr>
           <a:lstStyle/>
@@ -3589,7 +3589,7 @@
           <a:noFill/>
         </p:spPr>
         <p:txBody>
-          <a:bodyPr wrap="square">
+          <a:bodyPr wrap="none">
             <a:noAutofit/>
           </a:bodyPr>
           <a:lstStyle/>
@@ -3624,7 +3624,7 @@
           <a:noFill/>
         </p:spPr>
         <p:txBody>
-          <a:bodyPr wrap="square">
+          <a:bodyPr wrap="none">
             <a:noAutofit/>
           </a:bodyPr>
           <a:lstStyle/>
@@ -3659,7 +3659,7 @@
           <a:noFill/>
         </p:spPr>
         <p:txBody>
-          <a:bodyPr wrap="square">
+          <a:bodyPr wrap="none">
             <a:noAutofit/>
           </a:bodyPr>
           <a:lstStyle/>
@@ -3764,7 +3764,7 @@
           <a:noFill/>
         </p:spPr>
         <p:txBody>
-          <a:bodyPr wrap="square">
+          <a:bodyPr wrap="none">
             <a:noAutofit/>
           </a:bodyPr>
           <a:lstStyle/>
@@ -3799,7 +3799,7 @@
           <a:noFill/>
         </p:spPr>
         <p:txBody>
-          <a:bodyPr wrap="square">
+          <a:bodyPr wrap="none">
             <a:noAutofit/>
           </a:bodyPr>
           <a:lstStyle/>
@@ -3834,7 +3834,7 @@
           <a:noFill/>
         </p:spPr>
         <p:txBody>
-          <a:bodyPr wrap="square">
+          <a:bodyPr wrap="none">
             <a:noAutofit/>
           </a:bodyPr>
           <a:lstStyle/>
@@ -3895,7 +3895,7 @@
           <a:noFill/>
         </p:spPr>
         <p:txBody>
-          <a:bodyPr wrap="square">
+          <a:bodyPr wrap="none">
             <a:noAutofit/>
           </a:bodyPr>
           <a:lstStyle/>
@@ -3930,7 +3930,7 @@
           <a:noFill/>
         </p:spPr>
         <p:txBody>
-          <a:bodyPr wrap="square">
+          <a:bodyPr wrap="none">
             <a:noAutofit/>
           </a:bodyPr>
           <a:lstStyle/>
@@ -3965,7 +3965,7 @@
           <a:noFill/>
         </p:spPr>
         <p:txBody>
-          <a:bodyPr wrap="square">
+          <a:bodyPr wrap="none">
             <a:noAutofit/>
           </a:bodyPr>
           <a:lstStyle/>
@@ -4000,7 +4000,7 @@
           <a:noFill/>
         </p:spPr>
         <p:txBody>
-          <a:bodyPr wrap="square">
+          <a:bodyPr wrap="none">
             <a:noAutofit/>
           </a:bodyPr>
           <a:lstStyle/>
@@ -4035,7 +4035,7 @@
           <a:noFill/>
         </p:spPr>
         <p:txBody>
-          <a:bodyPr wrap="square">
+          <a:bodyPr wrap="none">
             <a:noAutofit/>
           </a:bodyPr>
           <a:lstStyle/>
@@ -4070,7 +4070,7 @@
           <a:noFill/>
         </p:spPr>
         <p:txBody>
-          <a:bodyPr wrap="square">
+          <a:bodyPr wrap="none">
             <a:noAutofit/>
           </a:bodyPr>
           <a:lstStyle/>
@@ -4132,7 +4132,7 @@
           <a:noFill/>
         </p:spPr>
         <p:txBody>
-          <a:bodyPr wrap="square">
+          <a:bodyPr wrap="none">
             <a:noAutofit/>
           </a:bodyPr>
           <a:lstStyle/>
@@ -4167,7 +4167,7 @@
           <a:noFill/>
         </p:spPr>
         <p:txBody>
-          <a:bodyPr wrap="square">
+          <a:bodyPr wrap="none">
             <a:noAutofit/>
           </a:bodyPr>
           <a:lstStyle/>
@@ -4202,7 +4202,7 @@
           <a:noFill/>
         </p:spPr>
         <p:txBody>
-          <a:bodyPr wrap="square">
+          <a:bodyPr wrap="none">
             <a:noAutofit/>
           </a:bodyPr>
           <a:lstStyle/>
@@ -4237,7 +4237,7 @@
           <a:noFill/>
         </p:spPr>
         <p:txBody>
-          <a:bodyPr wrap="square">
+          <a:bodyPr wrap="none">
             <a:noAutofit/>
           </a:bodyPr>
           <a:lstStyle/>
@@ -4316,7 +4316,7 @@
           <a:noFill/>
         </p:spPr>
         <p:txBody>
-          <a:bodyPr wrap="square">
+          <a:bodyPr wrap="none">
             <a:noAutofit/>
           </a:bodyPr>
           <a:lstStyle/>
@@ -4386,7 +4386,7 @@
           <a:noFill/>
         </p:spPr>
         <p:txBody>
-          <a:bodyPr wrap="square">
+          <a:bodyPr wrap="none">
             <a:noAutofit/>
           </a:bodyPr>
           <a:lstStyle/>
@@ -4456,7 +4456,7 @@
           <a:noFill/>
         </p:spPr>
         <p:txBody>
-          <a:bodyPr wrap="square">
+          <a:bodyPr wrap="none">
             <a:noAutofit/>
           </a:bodyPr>
           <a:lstStyle/>
@@ -4491,7 +4491,7 @@
           <a:noFill/>
         </p:spPr>
         <p:txBody>
-          <a:bodyPr wrap="square">
+          <a:bodyPr wrap="none">
             <a:noAutofit/>
           </a:bodyPr>
           <a:lstStyle/>
@@ -4570,7 +4570,7 @@
           <a:noFill/>
         </p:spPr>
         <p:txBody>
-          <a:bodyPr wrap="square">
+          <a:bodyPr wrap="none">
             <a:noAutofit/>
           </a:bodyPr>
           <a:lstStyle/>
@@ -4605,7 +4605,7 @@
           <a:noFill/>
         </p:spPr>
         <p:txBody>
-          <a:bodyPr wrap="square">
+          <a:bodyPr wrap="none">
             <a:noAutofit/>
           </a:bodyPr>
           <a:lstStyle/>
@@ -4640,7 +4640,7 @@
           <a:noFill/>
         </p:spPr>
         <p:txBody>
-          <a:bodyPr wrap="square">
+          <a:bodyPr wrap="none">
             <a:noAutofit/>
           </a:bodyPr>
           <a:lstStyle/>
@@ -4675,7 +4675,7 @@
           <a:noFill/>
         </p:spPr>
         <p:txBody>
-          <a:bodyPr wrap="square">
+          <a:bodyPr wrap="none">
             <a:noAutofit/>
           </a:bodyPr>
           <a:lstStyle/>
@@ -4737,7 +4737,7 @@
           <a:noFill/>
         </p:spPr>
         <p:txBody>
-          <a:bodyPr wrap="square">
+          <a:bodyPr wrap="none">
             <a:noAutofit/>
           </a:bodyPr>
           <a:lstStyle/>
@@ -4772,7 +4772,7 @@
           <a:noFill/>
         </p:spPr>
         <p:txBody>
-          <a:bodyPr wrap="square">
+          <a:bodyPr wrap="none">
             <a:noAutofit/>
           </a:bodyPr>
           <a:lstStyle/>
@@ -4807,7 +4807,7 @@
           <a:noFill/>
         </p:spPr>
         <p:txBody>
-          <a:bodyPr wrap="square">
+          <a:bodyPr wrap="none">
             <a:noAutofit/>
           </a:bodyPr>
           <a:lstStyle/>
@@ -4842,7 +4842,7 @@
           <a:noFill/>
         </p:spPr>
         <p:txBody>
-          <a:bodyPr wrap="square">
+          <a:bodyPr wrap="none">
             <a:noAutofit/>
           </a:bodyPr>
           <a:lstStyle/>
@@ -4877,7 +4877,7 @@
           <a:noFill/>
         </p:spPr>
         <p:txBody>
-          <a:bodyPr wrap="square">
+          <a:bodyPr wrap="none">
             <a:noAutofit/>
           </a:bodyPr>
           <a:lstStyle/>
@@ -4912,7 +4912,7 @@
           <a:noFill/>
         </p:spPr>
         <p:txBody>
-          <a:bodyPr wrap="square">
+          <a:bodyPr wrap="none">
             <a:noAutofit/>
           </a:bodyPr>
           <a:lstStyle/>
@@ -4947,7 +4947,7 @@
           <a:noFill/>
         </p:spPr>
         <p:txBody>
-          <a:bodyPr wrap="square">
+          <a:bodyPr wrap="none">
             <a:noAutofit/>
           </a:bodyPr>
           <a:lstStyle/>
@@ -4982,7 +4982,7 @@
           <a:noFill/>
         </p:spPr>
         <p:txBody>
-          <a:bodyPr wrap="square">
+          <a:bodyPr wrap="none">
             <a:noAutofit/>
           </a:bodyPr>
           <a:lstStyle/>
@@ -5017,7 +5017,7 @@
           <a:noFill/>
         </p:spPr>
         <p:txBody>
-          <a:bodyPr wrap="square">
+          <a:bodyPr wrap="none">
             <a:noAutofit/>
           </a:bodyPr>
           <a:lstStyle/>
@@ -5079,7 +5079,7 @@
           <a:noFill/>
         </p:spPr>
         <p:txBody>
-          <a:bodyPr wrap="square">
+          <a:bodyPr wrap="none">
             <a:noAutofit/>
           </a:bodyPr>
           <a:lstStyle/>
@@ -5114,7 +5114,7 @@
           <a:noFill/>
         </p:spPr>
         <p:txBody>
-          <a:bodyPr wrap="square">
+          <a:bodyPr wrap="none">
             <a:noAutofit/>
           </a:bodyPr>
           <a:lstStyle/>
@@ -5149,7 +5149,7 @@
           <a:noFill/>
         </p:spPr>
         <p:txBody>
-          <a:bodyPr wrap="square">
+          <a:bodyPr wrap="none">
             <a:noAutofit/>
           </a:bodyPr>
           <a:lstStyle/>
@@ -5184,7 +5184,7 @@
           <a:noFill/>
         </p:spPr>
         <p:txBody>
-          <a:bodyPr wrap="square">
+          <a:bodyPr wrap="none">
             <a:noAutofit/>
           </a:bodyPr>
           <a:lstStyle/>
@@ -5219,7 +5219,7 @@
           <a:noFill/>
         </p:spPr>
         <p:txBody>
-          <a:bodyPr wrap="square">
+          <a:bodyPr wrap="none">
             <a:noAutofit/>
           </a:bodyPr>
           <a:lstStyle/>
@@ -5254,7 +5254,7 @@
           <a:noFill/>
         </p:spPr>
         <p:txBody>
-          <a:bodyPr wrap="square">
+          <a:bodyPr wrap="none">
             <a:noAutofit/>
           </a:bodyPr>
           <a:lstStyle/>
@@ -5360,7 +5360,7 @@
           <a:noFill/>
         </p:spPr>
         <p:txBody>
-          <a:bodyPr wrap="square">
+          <a:bodyPr wrap="none">
             <a:noAutofit/>
           </a:bodyPr>
           <a:lstStyle/>
@@ -5395,7 +5395,7 @@
           <a:noFill/>
         </p:spPr>
         <p:txBody>
-          <a:bodyPr wrap="square">
+          <a:bodyPr wrap="none">
             <a:noAutofit/>
           </a:bodyPr>
           <a:lstStyle/>
@@ -5430,7 +5430,7 @@
           <a:noFill/>
         </p:spPr>
         <p:txBody>
-          <a:bodyPr wrap="square">
+          <a:bodyPr wrap="none">
             <a:noAutofit/>
           </a:bodyPr>
           <a:lstStyle/>
@@ -5491,7 +5491,7 @@
           <a:noFill/>
         </p:spPr>
         <p:txBody>
-          <a:bodyPr wrap="square">
+          <a:bodyPr wrap="none">
             <a:noAutofit/>
           </a:bodyPr>
           <a:lstStyle/>
@@ -5526,7 +5526,7 @@
           <a:noFill/>
         </p:spPr>
         <p:txBody>
-          <a:bodyPr wrap="square">
+          <a:bodyPr wrap="none">
             <a:noAutofit/>
           </a:bodyPr>
           <a:lstStyle/>
@@ -5561,7 +5561,7 @@
           <a:noFill/>
         </p:spPr>
         <p:txBody>
-          <a:bodyPr wrap="square">
+          <a:bodyPr wrap="none">
             <a:noAutofit/>
           </a:bodyPr>
           <a:lstStyle/>
@@ -5596,7 +5596,7 @@
           <a:noFill/>
         </p:spPr>
         <p:txBody>
-          <a:bodyPr wrap="square">
+          <a:bodyPr wrap="none">
             <a:noAutofit/>
           </a:bodyPr>
           <a:lstStyle/>
@@ -5631,7 +5631,7 @@
           <a:noFill/>
         </p:spPr>
         <p:txBody>
-          <a:bodyPr wrap="square">
+          <a:bodyPr wrap="none">
             <a:noAutofit/>
           </a:bodyPr>
           <a:lstStyle/>
@@ -5666,7 +5666,7 @@
           <a:noFill/>
         </p:spPr>
         <p:txBody>
-          <a:bodyPr wrap="square">
+          <a:bodyPr wrap="none">
             <a:noAutofit/>
           </a:bodyPr>
           <a:lstStyle/>
@@ -5701,7 +5701,7 @@
           <a:noFill/>
         </p:spPr>
         <p:txBody>
-          <a:bodyPr wrap="square">
+          <a:bodyPr wrap="none">
             <a:noAutofit/>
           </a:bodyPr>
           <a:lstStyle/>
@@ -5736,7 +5736,7 @@
           <a:noFill/>
         </p:spPr>
         <p:txBody>
-          <a:bodyPr wrap="square">
+          <a:bodyPr wrap="none">
             <a:noAutofit/>
           </a:bodyPr>
           <a:lstStyle/>
@@ -5771,7 +5771,7 @@
           <a:noFill/>
         </p:spPr>
         <p:txBody>
-          <a:bodyPr wrap="square">
+          <a:bodyPr wrap="none">
             <a:noAutofit/>
           </a:bodyPr>
           <a:lstStyle/>
@@ -5806,7 +5806,7 @@
           <a:noFill/>
         </p:spPr>
         <p:txBody>
-          <a:bodyPr wrap="square">
+          <a:bodyPr wrap="none">
             <a:noAutofit/>
           </a:bodyPr>
           <a:lstStyle/>
@@ -5841,7 +5841,7 @@
           <a:noFill/>
         </p:spPr>
         <p:txBody>
-          <a:bodyPr wrap="square">
+          <a:bodyPr wrap="none">
             <a:noAutofit/>
           </a:bodyPr>
           <a:lstStyle/>
@@ -5876,7 +5876,7 @@
           <a:noFill/>
         </p:spPr>
         <p:txBody>
-          <a:bodyPr wrap="square">
+          <a:bodyPr wrap="none">
             <a:noAutofit/>
           </a:bodyPr>
           <a:lstStyle/>
@@ -5938,7 +5938,7 @@
           <a:noFill/>
         </p:spPr>
         <p:txBody>
-          <a:bodyPr wrap="square">
+          <a:bodyPr wrap="none">
             <a:noAutofit/>
           </a:bodyPr>
           <a:lstStyle/>
@@ -5973,7 +5973,7 @@
           <a:noFill/>
         </p:spPr>
         <p:txBody>
-          <a:bodyPr wrap="square">
+          <a:bodyPr wrap="none">
             <a:noAutofit/>
           </a:bodyPr>
           <a:lstStyle/>
@@ -6008,7 +6008,7 @@
           <a:noFill/>
         </p:spPr>
         <p:txBody>
-          <a:bodyPr wrap="square">
+          <a:bodyPr wrap="none">
             <a:noAutofit/>
           </a:bodyPr>
           <a:lstStyle/>
@@ -6043,7 +6043,7 @@
           <a:noFill/>
         </p:spPr>
         <p:txBody>
-          <a:bodyPr wrap="square">
+          <a:bodyPr wrap="none">
             <a:noAutofit/>
           </a:bodyPr>
           <a:lstStyle/>
@@ -6078,7 +6078,7 @@
           <a:noFill/>
         </p:spPr>
         <p:txBody>
-          <a:bodyPr wrap="square">
+          <a:bodyPr wrap="none">
             <a:noAutofit/>
           </a:bodyPr>
           <a:lstStyle/>
@@ -6113,7 +6113,7 @@
           <a:noFill/>
         </p:spPr>
         <p:txBody>
-          <a:bodyPr wrap="square">
+          <a:bodyPr wrap="none">
             <a:noAutofit/>
           </a:bodyPr>
           <a:lstStyle/>
@@ -6148,7 +6148,7 @@
           <a:noFill/>
         </p:spPr>
         <p:txBody>
-          <a:bodyPr wrap="square">
+          <a:bodyPr wrap="none">
             <a:noAutofit/>
           </a:bodyPr>
           <a:lstStyle/>
@@ -6183,7 +6183,7 @@
           <a:noFill/>
         </p:spPr>
         <p:txBody>
-          <a:bodyPr wrap="square">
+          <a:bodyPr wrap="none">
             <a:noAutofit/>
           </a:bodyPr>
           <a:lstStyle/>
@@ -6218,7 +6218,7 @@
           <a:noFill/>
         </p:spPr>
         <p:txBody>
-          <a:bodyPr wrap="square">
+          <a:bodyPr wrap="none">
             <a:noAutofit/>
           </a:bodyPr>
           <a:lstStyle/>
@@ -6253,7 +6253,7 @@
           <a:noFill/>
         </p:spPr>
         <p:txBody>
-          <a:bodyPr wrap="square">
+          <a:bodyPr wrap="none">
             <a:noAutofit/>
           </a:bodyPr>
           <a:lstStyle/>
@@ -6288,7 +6288,7 @@
           <a:noFill/>
         </p:spPr>
         <p:txBody>
-          <a:bodyPr wrap="square">
+          <a:bodyPr wrap="none">
             <a:noAutofit/>
           </a:bodyPr>
           <a:lstStyle/>
@@ -6323,7 +6323,7 @@
           <a:noFill/>
         </p:spPr>
         <p:txBody>
-          <a:bodyPr wrap="square">
+          <a:bodyPr wrap="none">
             <a:noAutofit/>
           </a:bodyPr>
           <a:lstStyle/>
@@ -6429,7 +6429,7 @@
           <a:noFill/>
         </p:spPr>
         <p:txBody>
-          <a:bodyPr wrap="square">
+          <a:bodyPr wrap="none">
             <a:noAutofit/>
           </a:bodyPr>
           <a:lstStyle/>
@@ -6499,7 +6499,7 @@
           <a:noFill/>
         </p:spPr>
         <p:txBody>
-          <a:bodyPr wrap="square">
+          <a:bodyPr wrap="none">
             <a:noAutofit/>
           </a:bodyPr>
           <a:lstStyle/>
@@ -6560,7 +6560,7 @@
           <a:noFill/>
         </p:spPr>
         <p:txBody>
-          <a:bodyPr wrap="square">
+          <a:bodyPr wrap="none">
             <a:noAutofit/>
           </a:bodyPr>
           <a:lstStyle/>
@@ -6595,7 +6595,7 @@
           <a:noFill/>
         </p:spPr>
         <p:txBody>
-          <a:bodyPr wrap="square">
+          <a:bodyPr wrap="none">
             <a:noAutofit/>
           </a:bodyPr>
           <a:lstStyle/>
@@ -6630,7 +6630,7 @@
           <a:noFill/>
         </p:spPr>
         <p:txBody>
-          <a:bodyPr wrap="square">
+          <a:bodyPr wrap="none">
             <a:noAutofit/>
           </a:bodyPr>
           <a:lstStyle/>
@@ -6665,7 +6665,7 @@
           <a:noFill/>
         </p:spPr>
         <p:txBody>
-          <a:bodyPr wrap="square">
+          <a:bodyPr wrap="none">
             <a:noAutofit/>
           </a:bodyPr>
           <a:lstStyle/>
@@ -6700,7 +6700,7 @@
           <a:noFill/>
         </p:spPr>
         <p:txBody>
-          <a:bodyPr wrap="square">
+          <a:bodyPr wrap="none">
             <a:noAutofit/>
           </a:bodyPr>
           <a:lstStyle/>
@@ -6894,7 +6894,7 @@
           <a:noFill/>
         </p:spPr>
         <p:txBody>
-          <a:bodyPr wrap="square">
+          <a:bodyPr wrap="none">
             <a:noAutofit/>
           </a:bodyPr>
           <a:lstStyle/>
@@ -6929,7 +6929,7 @@
           <a:noFill/>
         </p:spPr>
         <p:txBody>
-          <a:bodyPr wrap="square">
+          <a:bodyPr wrap="none">
             <a:noAutofit/>
           </a:bodyPr>
           <a:lstStyle/>
@@ -6964,7 +6964,7 @@
           <a:noFill/>
         </p:spPr>
         <p:txBody>
-          <a:bodyPr wrap="square">
+          <a:bodyPr wrap="none">
             <a:noAutofit/>
           </a:bodyPr>
           <a:lstStyle/>
@@ -6999,7 +6999,7 @@
           <a:noFill/>
         </p:spPr>
         <p:txBody>
-          <a:bodyPr wrap="square">
+          <a:bodyPr wrap="none">
             <a:noAutofit/>
           </a:bodyPr>
           <a:lstStyle/>
@@ -7034,7 +7034,7 @@
           <a:noFill/>
         </p:spPr>
         <p:txBody>
-          <a:bodyPr wrap="square">
+          <a:bodyPr wrap="none">
             <a:noAutofit/>
           </a:bodyPr>
           <a:lstStyle/>
@@ -7069,7 +7069,7 @@
           <a:noFill/>
         </p:spPr>
         <p:txBody>
-          <a:bodyPr wrap="square">
+          <a:bodyPr wrap="none">
             <a:noAutofit/>
           </a:bodyPr>
           <a:lstStyle/>
@@ -7104,7 +7104,7 @@
           <a:noFill/>
         </p:spPr>
         <p:txBody>
-          <a:bodyPr wrap="square">
+          <a:bodyPr wrap="none">
             <a:noAutofit/>
           </a:bodyPr>
           <a:lstStyle/>
@@ -7139,7 +7139,7 @@
           <a:noFill/>
         </p:spPr>
         <p:txBody>
-          <a:bodyPr wrap="square">
+          <a:bodyPr wrap="none">
             <a:noAutofit/>
           </a:bodyPr>
           <a:lstStyle/>
@@ -7174,7 +7174,7 @@
           <a:noFill/>
         </p:spPr>
         <p:txBody>
-          <a:bodyPr wrap="square">
+          <a:bodyPr wrap="none">
             <a:noAutofit/>
           </a:bodyPr>
           <a:lstStyle/>
@@ -7209,7 +7209,7 @@
           <a:noFill/>
         </p:spPr>
         <p:txBody>
-          <a:bodyPr wrap="square">
+          <a:bodyPr wrap="none">
             <a:noAutofit/>
           </a:bodyPr>
           <a:lstStyle/>
@@ -7244,7 +7244,7 @@
           <a:noFill/>
         </p:spPr>
         <p:txBody>
-          <a:bodyPr wrap="square">
+          <a:bodyPr wrap="none">
             <a:noAutofit/>
           </a:bodyPr>
           <a:lstStyle/>
@@ -7279,7 +7279,7 @@
           <a:noFill/>
         </p:spPr>
         <p:txBody>
-          <a:bodyPr wrap="square">
+          <a:bodyPr wrap="none">
             <a:noAutofit/>
           </a:bodyPr>
           <a:lstStyle/>
@@ -7314,7 +7314,7 @@
           <a:noFill/>
         </p:spPr>
         <p:txBody>
-          <a:bodyPr wrap="square">
+          <a:bodyPr wrap="none">
             <a:noAutofit/>
           </a:bodyPr>
           <a:lstStyle/>
@@ -7349,7 +7349,7 @@
           <a:noFill/>
         </p:spPr>
         <p:txBody>
-          <a:bodyPr wrap="square">
+          <a:bodyPr wrap="none">
             <a:noAutofit/>
           </a:bodyPr>
           <a:lstStyle/>
@@ -7454,7 +7454,7 @@
           <a:noFill/>
         </p:spPr>
         <p:txBody>
-          <a:bodyPr wrap="square">
+          <a:bodyPr wrap="none">
             <a:noAutofit/>
           </a:bodyPr>
           <a:lstStyle/>
@@ -7489,7 +7489,7 @@
           <a:noFill/>
         </p:spPr>
         <p:txBody>
-          <a:bodyPr wrap="square">
+          <a:bodyPr wrap="none">
             <a:noAutofit/>
           </a:bodyPr>
           <a:lstStyle/>
@@ -7524,7 +7524,7 @@
           <a:noFill/>
         </p:spPr>
         <p:txBody>
-          <a:bodyPr wrap="square">
+          <a:bodyPr wrap="none">
             <a:noAutofit/>
           </a:bodyPr>
           <a:lstStyle/>
@@ -7629,7 +7629,7 @@
           <a:noFill/>
         </p:spPr>
         <p:txBody>
-          <a:bodyPr wrap="square">
+          <a:bodyPr wrap="none">
             <a:noAutofit/>
           </a:bodyPr>
           <a:lstStyle/>
@@ -7699,7 +7699,7 @@
           <a:noFill/>
         </p:spPr>
         <p:txBody>
-          <a:bodyPr wrap="square">
+          <a:bodyPr wrap="none">
             <a:noAutofit/>
           </a:bodyPr>
           <a:lstStyle/>
@@ -7734,7 +7734,7 @@
           <a:noFill/>
         </p:spPr>
         <p:txBody>
-          <a:bodyPr wrap="square">
+          <a:bodyPr wrap="none">
             <a:noAutofit/>
           </a:bodyPr>
           <a:lstStyle/>
@@ -7796,7 +7796,7 @@
           <a:noFill/>
         </p:spPr>
         <p:txBody>
-          <a:bodyPr wrap="square">
+          <a:bodyPr wrap="none">
             <a:noAutofit/>
           </a:bodyPr>
           <a:lstStyle/>
@@ -7831,7 +7831,7 @@
           <a:noFill/>
         </p:spPr>
         <p:txBody>
-          <a:bodyPr wrap="square">
+          <a:bodyPr wrap="none">
             <a:noAutofit/>
           </a:bodyPr>
           <a:lstStyle/>
@@ -7866,7 +7866,7 @@
           <a:noFill/>
         </p:spPr>
         <p:txBody>
-          <a:bodyPr wrap="square">
+          <a:bodyPr wrap="none">
             <a:noAutofit/>
           </a:bodyPr>
           <a:lstStyle/>
@@ -7901,7 +7901,7 @@
           <a:noFill/>
         </p:spPr>
         <p:txBody>
-          <a:bodyPr wrap="square">
+          <a:bodyPr wrap="none">
             <a:noAutofit/>
           </a:bodyPr>
           <a:lstStyle/>
@@ -7936,7 +7936,7 @@
           <a:noFill/>
         </p:spPr>
         <p:txBody>
-          <a:bodyPr wrap="square">
+          <a:bodyPr wrap="none">
             <a:noAutofit/>
           </a:bodyPr>
           <a:lstStyle/>
@@ -7971,7 +7971,7 @@
           <a:noFill/>
         </p:spPr>
         <p:txBody>
-          <a:bodyPr wrap="square">
+          <a:bodyPr wrap="none">
             <a:noAutofit/>
           </a:bodyPr>
           <a:lstStyle/>
@@ -8033,7 +8033,7 @@
           <a:noFill/>
         </p:spPr>
         <p:txBody>
-          <a:bodyPr wrap="square">
+          <a:bodyPr wrap="none">
             <a:noAutofit/>
           </a:bodyPr>
           <a:lstStyle/>
@@ -8068,7 +8068,7 @@
           <a:noFill/>
         </p:spPr>
         <p:txBody>
-          <a:bodyPr wrap="square">
+          <a:bodyPr wrap="none">
             <a:noAutofit/>
           </a:bodyPr>
           <a:lstStyle/>
@@ -8147,7 +8147,7 @@
           <a:noFill/>
         </p:spPr>
         <p:txBody>
-          <a:bodyPr wrap="square">
+          <a:bodyPr wrap="none">
             <a:noAutofit/>
           </a:bodyPr>
           <a:lstStyle/>
@@ -8226,7 +8226,7 @@
           <a:noFill/>
         </p:spPr>
         <p:txBody>
-          <a:bodyPr wrap="square">
+          <a:bodyPr wrap="none">
             <a:noAutofit/>
           </a:bodyPr>
           <a:lstStyle/>
@@ -8261,7 +8261,7 @@
           <a:noFill/>
         </p:spPr>
         <p:txBody>
-          <a:bodyPr wrap="square">
+          <a:bodyPr wrap="none">
             <a:noAutofit/>
           </a:bodyPr>
           <a:lstStyle/>
@@ -8296,7 +8296,7 @@
           <a:noFill/>
         </p:spPr>
         <p:txBody>
-          <a:bodyPr wrap="square">
+          <a:bodyPr wrap="none">
             <a:noAutofit/>
           </a:bodyPr>
           <a:lstStyle/>
@@ -8331,7 +8331,7 @@
           <a:noFill/>
         </p:spPr>
         <p:txBody>
-          <a:bodyPr wrap="square">
+          <a:bodyPr wrap="none">
             <a:noAutofit/>
           </a:bodyPr>
           <a:lstStyle/>
@@ -8366,7 +8366,7 @@
           <a:noFill/>
         </p:spPr>
         <p:txBody>
-          <a:bodyPr wrap="square">
+          <a:bodyPr wrap="none">
             <a:noAutofit/>
           </a:bodyPr>
           <a:lstStyle/>
@@ -8401,7 +8401,7 @@
           <a:noFill/>
         </p:spPr>
         <p:txBody>
-          <a:bodyPr wrap="square">
+          <a:bodyPr wrap="none">
             <a:noAutofit/>
           </a:bodyPr>
           <a:lstStyle/>
@@ -8436,7 +8436,7 @@
           <a:noFill/>
         </p:spPr>
         <p:txBody>
-          <a:bodyPr wrap="square">
+          <a:bodyPr wrap="none">
             <a:noAutofit/>
           </a:bodyPr>
           <a:lstStyle/>
@@ -8471,7 +8471,7 @@
           <a:noFill/>
         </p:spPr>
         <p:txBody>
-          <a:bodyPr wrap="square">
+          <a:bodyPr wrap="none">
             <a:noAutofit/>
           </a:bodyPr>
           <a:lstStyle/>
@@ -8533,7 +8533,7 @@
           <a:noFill/>
         </p:spPr>
         <p:txBody>
-          <a:bodyPr wrap="square">
+          <a:bodyPr wrap="none">
             <a:noAutofit/>
           </a:bodyPr>
           <a:lstStyle/>
@@ -8568,7 +8568,7 @@
           <a:noFill/>
         </p:spPr>
         <p:txBody>
-          <a:bodyPr wrap="square">
+          <a:bodyPr wrap="none">
             <a:noAutofit/>
           </a:bodyPr>
           <a:lstStyle/>
@@ -8603,7 +8603,7 @@
           <a:noFill/>
         </p:spPr>
         <p:txBody>
-          <a:bodyPr wrap="square">
+          <a:bodyPr wrap="none">
             <a:noAutofit/>
           </a:bodyPr>
           <a:lstStyle/>
@@ -8682,7 +8682,7 @@
           <a:noFill/>
         </p:spPr>
         <p:txBody>
-          <a:bodyPr wrap="square">
+          <a:bodyPr wrap="none">
             <a:noAutofit/>
           </a:bodyPr>
           <a:lstStyle/>
@@ -8717,7 +8717,7 @@
           <a:noFill/>
         </p:spPr>
         <p:txBody>
-          <a:bodyPr wrap="square">
+          <a:bodyPr wrap="none">
             <a:noAutofit/>
           </a:bodyPr>
           <a:lstStyle/>
@@ -8752,7 +8752,7 @@
           <a:noFill/>
         </p:spPr>
         <p:txBody>
-          <a:bodyPr wrap="square">
+          <a:bodyPr wrap="none">
             <a:noAutofit/>
           </a:bodyPr>
           <a:lstStyle/>
@@ -8787,7 +8787,7 @@
           <a:noFill/>
         </p:spPr>
         <p:txBody>
-          <a:bodyPr wrap="square">
+          <a:bodyPr wrap="none">
             <a:noAutofit/>
           </a:bodyPr>
           <a:lstStyle/>
@@ -8822,7 +8822,7 @@
           <a:noFill/>
         </p:spPr>
         <p:txBody>
-          <a:bodyPr wrap="square">
+          <a:bodyPr wrap="none">
             <a:noAutofit/>
           </a:bodyPr>
           <a:lstStyle/>
@@ -8857,7 +8857,7 @@
           <a:noFill/>
         </p:spPr>
         <p:txBody>
-          <a:bodyPr wrap="square">
+          <a:bodyPr wrap="none">
             <a:noAutofit/>
           </a:bodyPr>
           <a:lstStyle/>
@@ -8892,7 +8892,7 @@
           <a:noFill/>
         </p:spPr>
         <p:txBody>
-          <a:bodyPr wrap="square">
+          <a:bodyPr wrap="none">
             <a:noAutofit/>
           </a:bodyPr>
           <a:lstStyle/>
@@ -8927,7 +8927,7 @@
           <a:noFill/>
         </p:spPr>
         <p:txBody>
-          <a:bodyPr wrap="square">
+          <a:bodyPr wrap="none">
             <a:noAutofit/>
           </a:bodyPr>
           <a:lstStyle/>
@@ -8962,7 +8962,7 @@
           <a:noFill/>
         </p:spPr>
         <p:txBody>
-          <a:bodyPr wrap="square">
+          <a:bodyPr wrap="none">
             <a:noAutofit/>
           </a:bodyPr>
           <a:lstStyle/>
@@ -8997,7 +8997,7 @@
           <a:noFill/>
         </p:spPr>
         <p:txBody>
-          <a:bodyPr wrap="square">
+          <a:bodyPr wrap="none">
             <a:noAutofit/>
           </a:bodyPr>
           <a:lstStyle/>
@@ -9103,7 +9103,7 @@
           <a:noFill/>
         </p:spPr>
         <p:txBody>
-          <a:bodyPr wrap="square">
+          <a:bodyPr wrap="none">
             <a:noAutofit/>
           </a:bodyPr>
           <a:lstStyle/>
@@ -9138,7 +9138,7 @@
           <a:noFill/>
         </p:spPr>
         <p:txBody>
-          <a:bodyPr wrap="square">
+          <a:bodyPr wrap="none">
             <a:noAutofit/>
           </a:bodyPr>
           <a:lstStyle/>
@@ -9173,7 +9173,7 @@
           <a:noFill/>
         </p:spPr>
         <p:txBody>
-          <a:bodyPr wrap="square">
+          <a:bodyPr wrap="none">
             <a:noAutofit/>
           </a:bodyPr>
           <a:lstStyle/>
@@ -9278,7 +9278,7 @@
           <a:noFill/>
         </p:spPr>
         <p:txBody>
-          <a:bodyPr wrap="square">
+          <a:bodyPr wrap="none">
             <a:noAutofit/>
           </a:bodyPr>
           <a:lstStyle/>
@@ -9348,7 +9348,7 @@
           <a:noFill/>
         </p:spPr>
         <p:txBody>
-          <a:bodyPr wrap="square">
+          <a:bodyPr wrap="none">
             <a:noAutofit/>
           </a:bodyPr>
           <a:lstStyle/>
@@ -9383,7 +9383,7 @@
           <a:noFill/>
         </p:spPr>
         <p:txBody>
-          <a:bodyPr wrap="square">
+          <a:bodyPr wrap="none">
             <a:noAutofit/>
           </a:bodyPr>
           <a:lstStyle/>
@@ -9445,7 +9445,7 @@
           <a:noFill/>
         </p:spPr>
         <p:txBody>
-          <a:bodyPr wrap="square">
+          <a:bodyPr wrap="none">
             <a:noAutofit/>
           </a:bodyPr>
           <a:lstStyle/>
@@ -9480,7 +9480,7 @@
           <a:noFill/>
         </p:spPr>
         <p:txBody>
-          <a:bodyPr wrap="square">
+          <a:bodyPr wrap="none">
             <a:noAutofit/>
           </a:bodyPr>
           <a:lstStyle/>
@@ -9515,7 +9515,7 @@
           <a:noFill/>
         </p:spPr>
         <p:txBody>
-          <a:bodyPr wrap="square">
+          <a:bodyPr wrap="none">
             <a:noAutofit/>
           </a:bodyPr>
           <a:lstStyle/>
@@ -9550,7 +9550,7 @@
           <a:noFill/>
         </p:spPr>
         <p:txBody>
-          <a:bodyPr wrap="square">
+          <a:bodyPr wrap="none">
             <a:noAutofit/>
           </a:bodyPr>
           <a:lstStyle/>
@@ -9585,7 +9585,7 @@
           <a:noFill/>
         </p:spPr>
         <p:txBody>
-          <a:bodyPr wrap="square">
+          <a:bodyPr wrap="none">
             <a:noAutofit/>
           </a:bodyPr>
           <a:lstStyle/>
@@ -9620,7 +9620,7 @@
           <a:noFill/>
         </p:spPr>
         <p:txBody>
-          <a:bodyPr wrap="square">
+          <a:bodyPr wrap="none">
             <a:noAutofit/>
           </a:bodyPr>
           <a:lstStyle/>
@@ -9682,7 +9682,7 @@
           <a:noFill/>
         </p:spPr>
         <p:txBody>
-          <a:bodyPr wrap="square">
+          <a:bodyPr wrap="none">
             <a:noAutofit/>
           </a:bodyPr>
           <a:lstStyle/>
@@ -9717,7 +9717,7 @@
           <a:noFill/>
         </p:spPr>
         <p:txBody>
-          <a:bodyPr wrap="square">
+          <a:bodyPr wrap="none">
             <a:noAutofit/>
           </a:bodyPr>
           <a:lstStyle/>
@@ -9752,7 +9752,7 @@
           <a:noFill/>
         </p:spPr>
         <p:txBody>
-          <a:bodyPr wrap="square">
+          <a:bodyPr wrap="none">
             <a:noAutofit/>
           </a:bodyPr>
           <a:lstStyle/>
@@ -9787,7 +9787,7 @@
           <a:noFill/>
         </p:spPr>
         <p:txBody>
-          <a:bodyPr wrap="square">
+          <a:bodyPr wrap="none">
             <a:noAutofit/>
           </a:bodyPr>
           <a:lstStyle/>
@@ -9822,7 +9822,7 @@
           <a:noFill/>
         </p:spPr>
         <p:txBody>
-          <a:bodyPr wrap="square">
+          <a:bodyPr wrap="none">
             <a:noAutofit/>
           </a:bodyPr>
           <a:lstStyle/>
@@ -9857,7 +9857,7 @@
           <a:noFill/>
         </p:spPr>
         <p:txBody>
-          <a:bodyPr wrap="square">
+          <a:bodyPr wrap="none">
             <a:noAutofit/>
           </a:bodyPr>
           <a:lstStyle/>
@@ -9892,7 +9892,7 @@
           <a:noFill/>
         </p:spPr>
         <p:txBody>
-          <a:bodyPr wrap="square">
+          <a:bodyPr wrap="none">
             <a:noAutofit/>
           </a:bodyPr>
           <a:lstStyle/>
@@ -9953,7 +9953,7 @@
           <a:noFill/>
         </p:spPr>
         <p:txBody>
-          <a:bodyPr wrap="square">
+          <a:bodyPr wrap="none">
             <a:noAutofit/>
           </a:bodyPr>
           <a:lstStyle/>
@@ -9988,7 +9988,7 @@
           <a:noFill/>
         </p:spPr>
         <p:txBody>
-          <a:bodyPr wrap="square">
+          <a:bodyPr wrap="none">
             <a:noAutofit/>
           </a:bodyPr>
           <a:lstStyle/>
@@ -10023,7 +10023,7 @@
           <a:noFill/>
         </p:spPr>
         <p:txBody>
-          <a:bodyPr wrap="square">
+          <a:bodyPr wrap="none">
             <a:noAutofit/>
           </a:bodyPr>
           <a:lstStyle/>
@@ -10058,7 +10058,7 @@
           <a:noFill/>
         </p:spPr>
         <p:txBody>
-          <a:bodyPr wrap="square">
+          <a:bodyPr wrap="none">
             <a:noAutofit/>
           </a:bodyPr>
           <a:lstStyle/>
@@ -10093,7 +10093,7 @@
           <a:noFill/>
         </p:spPr>
         <p:txBody>
-          <a:bodyPr wrap="square">
+          <a:bodyPr wrap="none">
             <a:noAutofit/>
           </a:bodyPr>
           <a:lstStyle/>
@@ -10128,7 +10128,7 @@
           <a:noFill/>
         </p:spPr>
         <p:txBody>
-          <a:bodyPr wrap="square">
+          <a:bodyPr wrap="none">
             <a:noAutofit/>
           </a:bodyPr>
           <a:lstStyle/>
@@ -10163,7 +10163,7 @@
           <a:noFill/>
         </p:spPr>
         <p:txBody>
-          <a:bodyPr wrap="square">
+          <a:bodyPr wrap="none">
             <a:noAutofit/>
           </a:bodyPr>
           <a:lstStyle/>
@@ -10198,7 +10198,7 @@
           <a:noFill/>
         </p:spPr>
         <p:txBody>
-          <a:bodyPr wrap="square">
+          <a:bodyPr wrap="none">
             <a:noAutofit/>
           </a:bodyPr>
           <a:lstStyle/>
@@ -10233,7 +10233,7 @@
           <a:noFill/>
         </p:spPr>
         <p:txBody>
-          <a:bodyPr wrap="square">
+          <a:bodyPr wrap="none">
             <a:noAutofit/>
           </a:bodyPr>
           <a:lstStyle/>
@@ -10268,7 +10268,7 @@
           <a:noFill/>
         </p:spPr>
         <p:txBody>
-          <a:bodyPr wrap="square">
+          <a:bodyPr wrap="none">
             <a:noAutofit/>
           </a:bodyPr>
           <a:lstStyle/>
@@ -10303,7 +10303,7 @@
           <a:noFill/>
         </p:spPr>
         <p:txBody>
-          <a:bodyPr wrap="square">
+          <a:bodyPr wrap="none">
             <a:noAutofit/>
           </a:bodyPr>
           <a:lstStyle/>
@@ -10338,7 +10338,7 @@
           <a:noFill/>
         </p:spPr>
         <p:txBody>
-          <a:bodyPr wrap="square">
+          <a:bodyPr wrap="none">
             <a:noAutofit/>
           </a:bodyPr>
           <a:lstStyle/>
@@ -10399,7 +10399,7 @@
           <a:noFill/>
         </p:spPr>
         <p:txBody>
-          <a:bodyPr wrap="square">
+          <a:bodyPr wrap="none">
             <a:noAutofit/>
           </a:bodyPr>
           <a:lstStyle/>
@@ -10434,7 +10434,7 @@
           <a:noFill/>
         </p:spPr>
         <p:txBody>
-          <a:bodyPr wrap="square">
+          <a:bodyPr wrap="none">
             <a:noAutofit/>
           </a:bodyPr>
           <a:lstStyle/>
@@ -10469,7 +10469,7 @@
           <a:noFill/>
         </p:spPr>
         <p:txBody>
-          <a:bodyPr wrap="square">
+          <a:bodyPr wrap="none">
             <a:noAutofit/>
           </a:bodyPr>
           <a:lstStyle/>
@@ -10504,7 +10504,7 @@
           <a:noFill/>
         </p:spPr>
         <p:txBody>
-          <a:bodyPr wrap="square">
+          <a:bodyPr wrap="none">
             <a:noAutofit/>
           </a:bodyPr>
           <a:lstStyle/>
@@ -10539,7 +10539,7 @@
           <a:noFill/>
         </p:spPr>
         <p:txBody>
-          <a:bodyPr wrap="square">
+          <a:bodyPr wrap="none">
             <a:noAutofit/>
           </a:bodyPr>
           <a:lstStyle/>
@@ -10574,7 +10574,7 @@
           <a:noFill/>
         </p:spPr>
         <p:txBody>
-          <a:bodyPr wrap="square">
+          <a:bodyPr wrap="none">
             <a:noAutofit/>
           </a:bodyPr>
           <a:lstStyle/>
@@ -10609,7 +10609,7 @@
           <a:noFill/>
         </p:spPr>
         <p:txBody>
-          <a:bodyPr wrap="square">
+          <a:bodyPr wrap="none">
             <a:noAutofit/>
           </a:bodyPr>
           <a:lstStyle/>
@@ -10715,7 +10715,7 @@
           <a:noFill/>
         </p:spPr>
         <p:txBody>
-          <a:bodyPr wrap="square">
+          <a:bodyPr wrap="none">
             <a:noAutofit/>
           </a:bodyPr>
           <a:lstStyle/>
@@ -10785,7 +10785,7 @@
           <a:noFill/>
         </p:spPr>
         <p:txBody>
-          <a:bodyPr wrap="square">
+          <a:bodyPr wrap="none">
             <a:noAutofit/>
           </a:bodyPr>
           <a:lstStyle/>
@@ -10820,7 +10820,7 @@
           <a:noFill/>
         </p:spPr>
         <p:txBody>
-          <a:bodyPr wrap="square">
+          <a:bodyPr wrap="none">
             <a:noAutofit/>
           </a:bodyPr>
           <a:lstStyle/>
@@ -10882,7 +10882,7 @@
           <a:noFill/>
         </p:spPr>
         <p:txBody>
-          <a:bodyPr wrap="square">
+          <a:bodyPr wrap="none">
             <a:noAutofit/>
           </a:bodyPr>
           <a:lstStyle/>
@@ -10917,7 +10917,7 @@
           <a:noFill/>
         </p:spPr>
         <p:txBody>
-          <a:bodyPr wrap="square">
+          <a:bodyPr wrap="none">
             <a:noAutofit/>
           </a:bodyPr>
           <a:lstStyle/>
@@ -10996,7 +10996,7 @@
           <a:noFill/>
         </p:spPr>
         <p:txBody>
-          <a:bodyPr wrap="square">
+          <a:bodyPr wrap="none">
             <a:noAutofit/>
           </a:bodyPr>
           <a:lstStyle/>
@@ -11075,7 +11075,7 @@
           <a:noFill/>
         </p:spPr>
         <p:txBody>
-          <a:bodyPr wrap="square">
+          <a:bodyPr wrap="none">
             <a:noAutofit/>
           </a:bodyPr>
           <a:lstStyle/>
@@ -11110,7 +11110,7 @@
           <a:noFill/>
         </p:spPr>
         <p:txBody>
-          <a:bodyPr wrap="square">
+          <a:bodyPr wrap="none">
             <a:noAutofit/>
           </a:bodyPr>
           <a:lstStyle/>
@@ -11145,7 +11145,7 @@
           <a:noFill/>
         </p:spPr>
         <p:txBody>
-          <a:bodyPr wrap="square">
+          <a:bodyPr wrap="none">
             <a:noAutofit/>
           </a:bodyPr>
           <a:lstStyle/>
@@ -11180,7 +11180,7 @@
           <a:noFill/>
         </p:spPr>
         <p:txBody>
-          <a:bodyPr wrap="square">
+          <a:bodyPr wrap="none">
             <a:noAutofit/>
           </a:bodyPr>
           <a:lstStyle/>
@@ -11215,7 +11215,7 @@
           <a:noFill/>
         </p:spPr>
         <p:txBody>
-          <a:bodyPr wrap="square">
+          <a:bodyPr wrap="none">
             <a:noAutofit/>
           </a:bodyPr>
           <a:lstStyle/>
@@ -11250,7 +11250,7 @@
           <a:noFill/>
         </p:spPr>
         <p:txBody>
-          <a:bodyPr wrap="square">
+          <a:bodyPr wrap="none">
             <a:noAutofit/>
           </a:bodyPr>
           <a:lstStyle/>
@@ -11285,7 +11285,7 @@
           <a:noFill/>
         </p:spPr>
         <p:txBody>
-          <a:bodyPr wrap="square">
+          <a:bodyPr wrap="none">
             <a:noAutofit/>
           </a:bodyPr>
           <a:lstStyle/>
@@ -11320,7 +11320,7 @@
           <a:noFill/>
         </p:spPr>
         <p:txBody>
-          <a:bodyPr wrap="square">
+          <a:bodyPr wrap="none">
             <a:noAutofit/>
           </a:bodyPr>
           <a:lstStyle/>
@@ -11426,7 +11426,7 @@
           <a:noFill/>
         </p:spPr>
         <p:txBody>
-          <a:bodyPr wrap="square">
+          <a:bodyPr wrap="none">
             <a:noAutofit/>
           </a:bodyPr>
           <a:lstStyle/>
@@ -11461,7 +11461,7 @@
           <a:noFill/>
         </p:spPr>
         <p:txBody>
-          <a:bodyPr wrap="square">
+          <a:bodyPr wrap="none">
             <a:noAutofit/>
           </a:bodyPr>
           <a:lstStyle/>
@@ -11496,7 +11496,7 @@
           <a:noFill/>
         </p:spPr>
         <p:txBody>
-          <a:bodyPr wrap="square">
+          <a:bodyPr wrap="none">
             <a:noAutofit/>
           </a:bodyPr>
           <a:lstStyle/>
@@ -11601,7 +11601,7 @@
           <a:noFill/>
         </p:spPr>
         <p:txBody>
-          <a:bodyPr wrap="square">
+          <a:bodyPr wrap="none">
             <a:noAutofit/>
           </a:bodyPr>
           <a:lstStyle/>
@@ -11671,7 +11671,7 @@
           <a:noFill/>
         </p:spPr>
         <p:txBody>
-          <a:bodyPr wrap="square">
+          <a:bodyPr wrap="none">
             <a:noAutofit/>
           </a:bodyPr>
           <a:lstStyle/>
@@ -11706,7 +11706,7 @@
           <a:noFill/>
         </p:spPr>
         <p:txBody>
-          <a:bodyPr wrap="square">
+          <a:bodyPr wrap="none">
             <a:noAutofit/>
           </a:bodyPr>
           <a:lstStyle/>
@@ -11768,7 +11768,7 @@
           <a:noFill/>
         </p:spPr>
         <p:txBody>
-          <a:bodyPr wrap="square">
+          <a:bodyPr wrap="none">
             <a:noAutofit/>
           </a:bodyPr>
           <a:lstStyle/>
@@ -11803,7 +11803,7 @@
           <a:noFill/>
         </p:spPr>
         <p:txBody>
-          <a:bodyPr wrap="square">
+          <a:bodyPr wrap="none">
             <a:noAutofit/>
           </a:bodyPr>
           <a:lstStyle/>
@@ -11838,7 +11838,7 @@
           <a:noFill/>
         </p:spPr>
         <p:txBody>
-          <a:bodyPr wrap="square">
+          <a:bodyPr wrap="none">
             <a:noAutofit/>
           </a:bodyPr>
           <a:lstStyle/>
@@ -11873,7 +11873,7 @@
           <a:noFill/>
         </p:spPr>
         <p:txBody>
-          <a:bodyPr wrap="square">
+          <a:bodyPr wrap="none">
             <a:noAutofit/>
           </a:bodyPr>
           <a:lstStyle/>
@@ -11908,7 +11908,7 @@
           <a:noFill/>
         </p:spPr>
         <p:txBody>
-          <a:bodyPr wrap="square">
+          <a:bodyPr wrap="none">
             <a:noAutofit/>
           </a:bodyPr>
           <a:lstStyle/>
@@ -11943,7 +11943,7 @@
           <a:noFill/>
         </p:spPr>
         <p:txBody>
-          <a:bodyPr wrap="square">
+          <a:bodyPr wrap="none">
             <a:noAutofit/>
           </a:bodyPr>
           <a:lstStyle/>
@@ -12049,7 +12049,7 @@
           <a:noFill/>
         </p:spPr>
         <p:txBody>
-          <a:bodyPr wrap="square">
+          <a:bodyPr wrap="none">
             <a:noAutofit/>
           </a:bodyPr>
           <a:lstStyle/>
@@ -12119,7 +12119,7 @@
           <a:noFill/>
         </p:spPr>
         <p:txBody>
-          <a:bodyPr wrap="square">
+          <a:bodyPr wrap="none">
             <a:noAutofit/>
           </a:bodyPr>
           <a:lstStyle/>
@@ -12154,7 +12154,7 @@
           <a:noFill/>
         </p:spPr>
         <p:txBody>
-          <a:bodyPr wrap="square">
+          <a:bodyPr wrap="none">
             <a:noAutofit/>
           </a:bodyPr>
           <a:lstStyle/>
@@ -12216,7 +12216,7 @@
           <a:noFill/>
         </p:spPr>
         <p:txBody>
-          <a:bodyPr wrap="square">
+          <a:bodyPr wrap="none">
             <a:noAutofit/>
           </a:bodyPr>
           <a:lstStyle/>
@@ -12251,7 +12251,7 @@
           <a:noFill/>
         </p:spPr>
         <p:txBody>
-          <a:bodyPr wrap="square">
+          <a:bodyPr wrap="none">
             <a:noAutofit/>
           </a:bodyPr>
           <a:lstStyle/>
@@ -12330,7 +12330,7 @@
           <a:noFill/>
         </p:spPr>
         <p:txBody>
-          <a:bodyPr wrap="square">
+          <a:bodyPr wrap="none">
             <a:noAutofit/>
           </a:bodyPr>
           <a:lstStyle/>
@@ -12409,7 +12409,7 @@
           <a:noFill/>
         </p:spPr>
         <p:txBody>
-          <a:bodyPr wrap="square">
+          <a:bodyPr wrap="none">
             <a:noAutofit/>
           </a:bodyPr>
           <a:lstStyle/>
@@ -12444,7 +12444,7 @@
           <a:noFill/>
         </p:spPr>
         <p:txBody>
-          <a:bodyPr wrap="square">
+          <a:bodyPr wrap="none">
             <a:noAutofit/>
           </a:bodyPr>
           <a:lstStyle/>
@@ -12479,7 +12479,7 @@
           <a:noFill/>
         </p:spPr>
         <p:txBody>
-          <a:bodyPr wrap="square">
+          <a:bodyPr wrap="none">
             <a:noAutofit/>
           </a:bodyPr>
           <a:lstStyle/>
@@ -12514,7 +12514,7 @@
           <a:noFill/>
         </p:spPr>
         <p:txBody>
-          <a:bodyPr wrap="square">
+          <a:bodyPr wrap="none">
             <a:noAutofit/>
           </a:bodyPr>
           <a:lstStyle/>
@@ -12549,7 +12549,7 @@
           <a:noFill/>
         </p:spPr>
         <p:txBody>
-          <a:bodyPr wrap="square">
+          <a:bodyPr wrap="none">
             <a:noAutofit/>
           </a:bodyPr>
           <a:lstStyle/>
@@ -12584,7 +12584,7 @@
           <a:noFill/>
         </p:spPr>
         <p:txBody>
-          <a:bodyPr wrap="square">
+          <a:bodyPr wrap="none">
             <a:noAutofit/>
           </a:bodyPr>
           <a:lstStyle/>
@@ -12619,7 +12619,7 @@
           <a:noFill/>
         </p:spPr>
         <p:txBody>
-          <a:bodyPr wrap="square">
+          <a:bodyPr wrap="none">
             <a:noAutofit/>
           </a:bodyPr>
           <a:lstStyle/>
@@ -12654,7 +12654,7 @@
           <a:noFill/>
         </p:spPr>
         <p:txBody>
-          <a:bodyPr wrap="square">
+          <a:bodyPr wrap="none">
             <a:noAutofit/>
           </a:bodyPr>
           <a:lstStyle/>
@@ -12795,7 +12795,7 @@
           <a:noFill/>
         </p:spPr>
         <p:txBody>
-          <a:bodyPr wrap="square">
+          <a:bodyPr wrap="none">
             <a:noAutofit/>
           </a:bodyPr>
           <a:lstStyle/>
@@ -12856,7 +12856,7 @@
           <a:noFill/>
         </p:spPr>
         <p:txBody>
-          <a:bodyPr wrap="square">
+          <a:bodyPr wrap="none">
             <a:noAutofit/>
           </a:bodyPr>
           <a:lstStyle/>
@@ -12891,7 +12891,7 @@
           <a:noFill/>
         </p:spPr>
         <p:txBody>
-          <a:bodyPr wrap="square">
+          <a:bodyPr wrap="none">
             <a:noAutofit/>
           </a:bodyPr>
           <a:lstStyle/>
@@ -12926,7 +12926,7 @@
           <a:noFill/>
         </p:spPr>
         <p:txBody>
-          <a:bodyPr wrap="square">
+          <a:bodyPr wrap="none">
             <a:noAutofit/>
           </a:bodyPr>
           <a:lstStyle/>
@@ -12961,7 +12961,7 @@
           <a:noFill/>
         </p:spPr>
         <p:txBody>
-          <a:bodyPr wrap="square">
+          <a:bodyPr wrap="none">
             <a:noAutofit/>
           </a:bodyPr>
           <a:lstStyle/>
@@ -12996,7 +12996,7 @@
           <a:noFill/>
         </p:spPr>
         <p:txBody>
-          <a:bodyPr wrap="square">
+          <a:bodyPr wrap="none">
             <a:noAutofit/>
           </a:bodyPr>
           <a:lstStyle/>
@@ -13031,7 +13031,7 @@
           <a:noFill/>
         </p:spPr>
         <p:txBody>
-          <a:bodyPr wrap="square">
+          <a:bodyPr wrap="none">
             <a:noAutofit/>
           </a:bodyPr>
           <a:lstStyle/>
@@ -13066,7 +13066,7 @@
           <a:noFill/>
         </p:spPr>
         <p:txBody>
-          <a:bodyPr wrap="square">
+          <a:bodyPr wrap="none">
             <a:noAutofit/>
           </a:bodyPr>
           <a:lstStyle/>
@@ -13101,7 +13101,7 @@
           <a:noFill/>
         </p:spPr>
         <p:txBody>
-          <a:bodyPr wrap="square">
+          <a:bodyPr wrap="none">
             <a:noAutofit/>
           </a:bodyPr>
           <a:lstStyle/>
@@ -13294,7 +13294,7 @@
           <a:noFill/>
         </p:spPr>
         <p:txBody>
-          <a:bodyPr wrap="square">
+          <a:bodyPr wrap="none">
             <a:noAutofit/>
           </a:bodyPr>
           <a:lstStyle/>
@@ -13329,7 +13329,7 @@
           <a:noFill/>
         </p:spPr>
         <p:txBody>
-          <a:bodyPr wrap="square">
+          <a:bodyPr wrap="none">
             <a:noAutofit/>
           </a:bodyPr>
           <a:lstStyle/>
@@ -13364,7 +13364,7 @@
           <a:noFill/>
         </p:spPr>
         <p:txBody>
-          <a:bodyPr wrap="square">
+          <a:bodyPr wrap="none">
             <a:noAutofit/>
           </a:bodyPr>
           <a:lstStyle/>
@@ -13399,7 +13399,7 @@
           <a:noFill/>
         </p:spPr>
         <p:txBody>
-          <a:bodyPr wrap="square">
+          <a:bodyPr wrap="none">
             <a:noAutofit/>
           </a:bodyPr>
           <a:lstStyle/>
@@ -13434,7 +13434,7 @@
           <a:noFill/>
         </p:spPr>
         <p:txBody>
-          <a:bodyPr wrap="square">
+          <a:bodyPr wrap="none">
             <a:noAutofit/>
           </a:bodyPr>
           <a:lstStyle/>
@@ -13469,7 +13469,7 @@
           <a:noFill/>
         </p:spPr>
         <p:txBody>
-          <a:bodyPr wrap="square">
+          <a:bodyPr wrap="none">
             <a:noAutofit/>
           </a:bodyPr>
           <a:lstStyle/>
@@ -13504,7 +13504,7 @@
           <a:noFill/>
         </p:spPr>
         <p:txBody>
-          <a:bodyPr wrap="square">
+          <a:bodyPr wrap="none">
             <a:noAutofit/>
           </a:bodyPr>
           <a:lstStyle/>
@@ -13539,7 +13539,7 @@
           <a:noFill/>
         </p:spPr>
         <p:txBody>
-          <a:bodyPr wrap="square">
+          <a:bodyPr wrap="none">
             <a:noAutofit/>
           </a:bodyPr>
           <a:lstStyle/>
@@ -13574,7 +13574,7 @@
           <a:noFill/>
         </p:spPr>
         <p:txBody>
-          <a:bodyPr wrap="square">
+          <a:bodyPr wrap="none">
             <a:noAutofit/>
           </a:bodyPr>
           <a:lstStyle/>
@@ -13609,7 +13609,7 @@
           <a:noFill/>
         </p:spPr>
         <p:txBody>
-          <a:bodyPr wrap="square">
+          <a:bodyPr wrap="none">
             <a:noAutofit/>
           </a:bodyPr>
           <a:lstStyle/>
@@ -13644,7 +13644,7 @@
           <a:noFill/>
         </p:spPr>
         <p:txBody>
-          <a:bodyPr wrap="square">
+          <a:bodyPr wrap="none">
             <a:noAutofit/>
           </a:bodyPr>
           <a:lstStyle/>
@@ -13679,7 +13679,7 @@
           <a:noFill/>
         </p:spPr>
         <p:txBody>
-          <a:bodyPr wrap="square">
+          <a:bodyPr wrap="none">
             <a:noAutofit/>
           </a:bodyPr>
           <a:lstStyle/>
@@ -13714,7 +13714,7 @@
           <a:noFill/>
         </p:spPr>
         <p:txBody>
-          <a:bodyPr wrap="square">
+          <a:bodyPr wrap="none">
             <a:noAutofit/>
           </a:bodyPr>
           <a:lstStyle/>
@@ -13775,7 +13775,7 @@
           <a:noFill/>
         </p:spPr>
         <p:txBody>
-          <a:bodyPr wrap="square">
+          <a:bodyPr wrap="none">
             <a:noAutofit/>
           </a:bodyPr>
           <a:lstStyle/>
@@ -13810,7 +13810,7 @@
           <a:noFill/>
         </p:spPr>
         <p:txBody>
-          <a:bodyPr wrap="square">
+          <a:bodyPr wrap="none">
             <a:noAutofit/>
           </a:bodyPr>
           <a:lstStyle/>
@@ -13880,7 +13880,7 @@
           <a:noFill/>
         </p:spPr>
         <p:txBody>
-          <a:bodyPr wrap="square">
+          <a:bodyPr wrap="none">
             <a:noAutofit/>
           </a:bodyPr>
           <a:lstStyle/>
@@ -13950,7 +13950,7 @@
           <a:noFill/>
         </p:spPr>
         <p:txBody>
-          <a:bodyPr wrap="square">
+          <a:bodyPr wrap="none">
             <a:noAutofit/>
           </a:bodyPr>
           <a:lstStyle/>
@@ -14020,7 +14020,7 @@
           <a:noFill/>
         </p:spPr>
         <p:txBody>
-          <a:bodyPr wrap="square">
+          <a:bodyPr wrap="none">
             <a:noAutofit/>
           </a:bodyPr>
           <a:lstStyle/>
@@ -14090,7 +14090,7 @@
           <a:noFill/>
         </p:spPr>
         <p:txBody>
-          <a:bodyPr wrap="square">
+          <a:bodyPr wrap="none">
             <a:noAutofit/>
           </a:bodyPr>
           <a:lstStyle/>
@@ -14151,7 +14151,7 @@
           <a:noFill/>
         </p:spPr>
         <p:txBody>
-          <a:bodyPr wrap="square">
+          <a:bodyPr wrap="none">
             <a:noAutofit/>
           </a:bodyPr>
           <a:lstStyle/>
@@ -14186,7 +14186,7 @@
           <a:noFill/>
         </p:spPr>
         <p:txBody>
-          <a:bodyPr wrap="square">
+          <a:bodyPr wrap="none">
             <a:noAutofit/>
           </a:bodyPr>
           <a:lstStyle/>
@@ -14265,7 +14265,7 @@
           <a:noFill/>
         </p:spPr>
         <p:txBody>
-          <a:bodyPr wrap="square">
+          <a:bodyPr wrap="none">
             <a:noAutofit/>
           </a:bodyPr>
           <a:lstStyle/>
@@ -14335,7 +14335,7 @@
           <a:noFill/>
         </p:spPr>
         <p:txBody>
-          <a:bodyPr wrap="square">
+          <a:bodyPr wrap="none">
             <a:noAutofit/>
           </a:bodyPr>
           <a:lstStyle/>
@@ -14414,7 +14414,7 @@
           <a:noFill/>
         </p:spPr>
         <p:txBody>
-          <a:bodyPr wrap="square">
+          <a:bodyPr wrap="none">
             <a:noAutofit/>
           </a:bodyPr>
           <a:lstStyle/>
@@ -14484,7 +14484,7 @@
           <a:noFill/>
         </p:spPr>
         <p:txBody>
-          <a:bodyPr wrap="square">
+          <a:bodyPr wrap="none">
             <a:noAutofit/>
           </a:bodyPr>
           <a:lstStyle/>
@@ -14563,7 +14563,7 @@
           <a:noFill/>
         </p:spPr>
         <p:txBody>
-          <a:bodyPr wrap="square">
+          <a:bodyPr wrap="none">
             <a:noAutofit/>
           </a:bodyPr>
           <a:lstStyle/>
@@ -14633,7 +14633,7 @@
           <a:noFill/>
         </p:spPr>
         <p:txBody>
-          <a:bodyPr wrap="square">
+          <a:bodyPr wrap="none">
             <a:noAutofit/>
           </a:bodyPr>
           <a:lstStyle/>
@@ -14712,7 +14712,7 @@
           <a:noFill/>
         </p:spPr>
         <p:txBody>
-          <a:bodyPr wrap="square">
+          <a:bodyPr wrap="none">
             <a:noAutofit/>
           </a:bodyPr>
           <a:lstStyle/>
@@ -14782,7 +14782,7 @@
           <a:noFill/>
         </p:spPr>
         <p:txBody>
-          <a:bodyPr wrap="square">
+          <a:bodyPr wrap="none">
             <a:noAutofit/>
           </a:bodyPr>
           <a:lstStyle/>
@@ -14843,7 +14843,7 @@
           <a:noFill/>
         </p:spPr>
         <p:txBody>
-          <a:bodyPr wrap="square">
+          <a:bodyPr wrap="none">
             <a:noAutofit/>
           </a:bodyPr>
           <a:lstStyle/>
@@ -14878,7 +14878,7 @@
           <a:noFill/>
         </p:spPr>
         <p:txBody>
-          <a:bodyPr wrap="square">
+          <a:bodyPr wrap="none">
             <a:noAutofit/>
           </a:bodyPr>
           <a:lstStyle/>
@@ -14957,7 +14957,7 @@
           <a:noFill/>
         </p:spPr>
         <p:txBody>
-          <a:bodyPr wrap="square">
+          <a:bodyPr wrap="none">
             <a:noAutofit/>
           </a:bodyPr>
           <a:lstStyle/>
@@ -15036,7 +15036,7 @@
           <a:noFill/>
         </p:spPr>
         <p:txBody>
-          <a:bodyPr wrap="square">
+          <a:bodyPr wrap="none">
             <a:noAutofit/>
           </a:bodyPr>
           <a:lstStyle/>
@@ -15071,7 +15071,7 @@
           <a:noFill/>
         </p:spPr>
         <p:txBody>
-          <a:bodyPr wrap="square">
+          <a:bodyPr wrap="none">
             <a:noAutofit/>
           </a:bodyPr>
           <a:lstStyle/>
@@ -15106,7 +15106,7 @@
           <a:noFill/>
         </p:spPr>
         <p:txBody>
-          <a:bodyPr wrap="square">
+          <a:bodyPr wrap="none">
             <a:noAutofit/>
           </a:bodyPr>
           <a:lstStyle/>
@@ -15141,7 +15141,7 @@
           <a:noFill/>
         </p:spPr>
         <p:txBody>
-          <a:bodyPr wrap="square">
+          <a:bodyPr wrap="none">
             <a:noAutofit/>
           </a:bodyPr>
           <a:lstStyle/>
@@ -15176,7 +15176,7 @@
           <a:noFill/>
         </p:spPr>
         <p:txBody>
-          <a:bodyPr wrap="square">
+          <a:bodyPr wrap="none">
             <a:noAutofit/>
           </a:bodyPr>
           <a:lstStyle/>
@@ -15211,7 +15211,7 @@
           <a:noFill/>
         </p:spPr>
         <p:txBody>
-          <a:bodyPr wrap="square">
+          <a:bodyPr wrap="none">
             <a:noAutofit/>
           </a:bodyPr>
           <a:lstStyle/>
@@ -15246,7 +15246,7 @@
           <a:noFill/>
         </p:spPr>
         <p:txBody>
-          <a:bodyPr wrap="square">
+          <a:bodyPr wrap="none">
             <a:noAutofit/>
           </a:bodyPr>
           <a:lstStyle/>
@@ -15307,7 +15307,7 @@
           <a:noFill/>
         </p:spPr>
         <p:txBody>
-          <a:bodyPr wrap="square">
+          <a:bodyPr wrap="none">
             <a:noAutofit/>
           </a:bodyPr>
           <a:lstStyle/>
@@ -15342,7 +15342,7 @@
           <a:noFill/>
         </p:spPr>
         <p:txBody>
-          <a:bodyPr wrap="square">
+          <a:bodyPr wrap="none">
             <a:noAutofit/>
           </a:bodyPr>
           <a:lstStyle/>
@@ -15377,7 +15377,7 @@
           <a:noFill/>
         </p:spPr>
         <p:txBody>
-          <a:bodyPr wrap="square">
+          <a:bodyPr wrap="none">
             <a:noAutofit/>
           </a:bodyPr>
           <a:lstStyle/>
@@ -15456,7 +15456,7 @@
           <a:noFill/>
         </p:spPr>
         <p:txBody>
-          <a:bodyPr wrap="square">
+          <a:bodyPr wrap="none">
             <a:noAutofit/>
           </a:bodyPr>
           <a:lstStyle/>
@@ -15491,7 +15491,7 @@
           <a:noFill/>
         </p:spPr>
         <p:txBody>
-          <a:bodyPr wrap="square">
+          <a:bodyPr wrap="none">
             <a:noAutofit/>
           </a:bodyPr>
           <a:lstStyle/>
@@ -15526,7 +15526,7 @@
           <a:noFill/>
         </p:spPr>
         <p:txBody>
-          <a:bodyPr wrap="square">
+          <a:bodyPr wrap="none">
             <a:noAutofit/>
           </a:bodyPr>
           <a:lstStyle/>
@@ -15561,7 +15561,7 @@
           <a:noFill/>
         </p:spPr>
         <p:txBody>
-          <a:bodyPr wrap="square">
+          <a:bodyPr wrap="none">
             <a:noAutofit/>
           </a:bodyPr>
           <a:lstStyle/>
@@ -15596,7 +15596,7 @@
           <a:noFill/>
         </p:spPr>
         <p:txBody>
-          <a:bodyPr wrap="square">
+          <a:bodyPr wrap="none">
             <a:noAutofit/>
           </a:bodyPr>
           <a:lstStyle/>
@@ -15631,7 +15631,7 @@
           <a:noFill/>
         </p:spPr>
         <p:txBody>
-          <a:bodyPr wrap="square">
+          <a:bodyPr wrap="none">
             <a:noAutofit/>
           </a:bodyPr>
           <a:lstStyle/>
@@ -15666,7 +15666,7 @@
           <a:noFill/>
         </p:spPr>
         <p:txBody>
-          <a:bodyPr wrap="square">
+          <a:bodyPr wrap="none">
             <a:noAutofit/>
           </a:bodyPr>
           <a:lstStyle/>
@@ -15701,7 +15701,7 @@
           <a:noFill/>
         </p:spPr>
         <p:txBody>
-          <a:bodyPr wrap="square">
+          <a:bodyPr wrap="none">
             <a:noAutofit/>
           </a:bodyPr>
           <a:lstStyle/>
@@ -15736,7 +15736,7 @@
           <a:noFill/>
         </p:spPr>
         <p:txBody>
-          <a:bodyPr wrap="square">
+          <a:bodyPr wrap="none">
             <a:noAutofit/>
           </a:bodyPr>
           <a:lstStyle/>

--- a/examples/pptx/claude-code-for-data-scientists.pptx
+++ b/examples/pptx/claude-code-for-data-scientists.pptx
@@ -3274,7 +3274,7 @@
         <p:spPr>
           <a:xfrm>
             <a:off x="457200" y="2109215"/>
-            <a:ext cx="11277600" cy="1383793"/>
+            <a:ext cx="11734800" cy="1383793"/>
           </a:xfrm>
           <a:prstGeom prst="rect">
             <a:avLst/>
@@ -3344,7 +3344,7 @@
         <p:spPr>
           <a:xfrm>
             <a:off x="457200" y="4376927"/>
-            <a:ext cx="11277600" cy="1383793"/>
+            <a:ext cx="11734800" cy="1383793"/>
           </a:xfrm>
           <a:prstGeom prst="rect">
             <a:avLst/>
@@ -3414,7 +3414,7 @@
         <p:spPr>
           <a:xfrm>
             <a:off x="9262170" y="6035040"/>
-            <a:ext cx="826710" cy="365760"/>
+            <a:ext cx="1213008" cy="365760"/>
           </a:xfrm>
           <a:prstGeom prst="rect">
             <a:avLst/>
@@ -3511,7 +3511,7 @@
         <p:spPr>
           <a:xfrm>
             <a:off x="457200" y="1908050"/>
-            <a:ext cx="11277600" cy="518159"/>
+            <a:ext cx="11734800" cy="518159"/>
           </a:xfrm>
           <a:prstGeom prst="rect">
             <a:avLst/>
@@ -3791,7 +3791,7 @@
         <p:spPr>
           <a:xfrm>
             <a:off x="996696" y="3063240"/>
-            <a:ext cx="10738104" cy="731520"/>
+            <a:ext cx="11195304" cy="731520"/>
           </a:xfrm>
           <a:prstGeom prst="rect">
             <a:avLst/>
@@ -3922,7 +3922,7 @@
         <p:spPr>
           <a:xfrm>
             <a:off x="457200" y="2395729"/>
-            <a:ext cx="11277600" cy="518159"/>
+            <a:ext cx="11734800" cy="518159"/>
           </a:xfrm>
           <a:prstGeom prst="rect">
             <a:avLst/>
@@ -3957,7 +3957,7 @@
         <p:spPr>
           <a:xfrm>
             <a:off x="457200" y="3371088"/>
-            <a:ext cx="11277600" cy="518159"/>
+            <a:ext cx="11734800" cy="518159"/>
           </a:xfrm>
           <a:prstGeom prst="rect">
             <a:avLst/>
@@ -3992,7 +3992,7 @@
         <p:spPr>
           <a:xfrm>
             <a:off x="457200" y="4346447"/>
-            <a:ext cx="11277600" cy="518159"/>
+            <a:ext cx="11734800" cy="518159"/>
           </a:xfrm>
           <a:prstGeom prst="rect">
             <a:avLst/>
@@ -4062,7 +4062,7 @@
         <p:spPr>
           <a:xfrm>
             <a:off x="9262170" y="6035040"/>
-            <a:ext cx="826710" cy="365760"/>
+            <a:ext cx="1213008" cy="365760"/>
           </a:xfrm>
           <a:prstGeom prst="rect">
             <a:avLst/>
@@ -4158,8 +4158,8 @@
         </p:nvSpPr>
         <p:spPr>
           <a:xfrm>
-            <a:off x="3889248" y="1499616"/>
-            <a:ext cx="2432304" cy="518159"/>
+            <a:off x="3599816" y="1499616"/>
+            <a:ext cx="3011169" cy="518159"/>
           </a:xfrm>
           <a:prstGeom prst="rect">
             <a:avLst/>
@@ -4228,8 +4228,8 @@
         </p:nvSpPr>
         <p:spPr>
           <a:xfrm>
-            <a:off x="9302496" y="1499616"/>
-            <a:ext cx="2432304" cy="518159"/>
+            <a:off x="9064340" y="1499616"/>
+            <a:ext cx="2908617" cy="518159"/>
           </a:xfrm>
           <a:prstGeom prst="rect">
             <a:avLst/>
@@ -4377,8 +4377,8 @@
         </p:nvSpPr>
         <p:spPr>
           <a:xfrm>
-            <a:off x="6595872" y="2401823"/>
-            <a:ext cx="2432304" cy="1542288"/>
+            <a:off x="6203549" y="2401823"/>
+            <a:ext cx="3216950" cy="1542288"/>
           </a:xfrm>
           <a:prstGeom prst="rect">
             <a:avLst/>
@@ -4482,8 +4482,8 @@
         </p:nvSpPr>
         <p:spPr>
           <a:xfrm>
-            <a:off x="3889248" y="4218431"/>
-            <a:ext cx="2432304" cy="1542288"/>
+            <a:off x="3478034" y="4218431"/>
+            <a:ext cx="3254732" cy="1542288"/>
           </a:xfrm>
           <a:prstGeom prst="rect">
             <a:avLst/>
@@ -4561,8 +4561,8 @@
         </p:nvSpPr>
         <p:spPr>
           <a:xfrm>
-            <a:off x="7107682" y="4218431"/>
-            <a:ext cx="1408684" cy="518159"/>
+            <a:off x="6856984" y="4218431"/>
+            <a:ext cx="1910080" cy="518159"/>
           </a:xfrm>
           <a:prstGeom prst="rect">
             <a:avLst/>
@@ -4596,8 +4596,8 @@
         </p:nvSpPr>
         <p:spPr>
           <a:xfrm>
-            <a:off x="9302496" y="4218431"/>
-            <a:ext cx="2432304" cy="1542288"/>
+            <a:off x="8852488" y="4218431"/>
+            <a:ext cx="3332321" cy="1542288"/>
           </a:xfrm>
           <a:prstGeom prst="rect">
             <a:avLst/>
@@ -4667,7 +4667,7 @@
         <p:spPr>
           <a:xfrm>
             <a:off x="9262170" y="6035040"/>
-            <a:ext cx="826710" cy="365760"/>
+            <a:ext cx="1213008" cy="365760"/>
           </a:xfrm>
           <a:prstGeom prst="rect">
             <a:avLst/>
@@ -4799,7 +4799,7 @@
         <p:spPr>
           <a:xfrm>
             <a:off x="457200" y="2109215"/>
-            <a:ext cx="11277600" cy="627889"/>
+            <a:ext cx="11734800" cy="627889"/>
           </a:xfrm>
           <a:prstGeom prst="rect">
             <a:avLst/>
@@ -4869,7 +4869,7 @@
         <p:spPr>
           <a:xfrm>
             <a:off x="457200" y="3621023"/>
-            <a:ext cx="11277600" cy="627889"/>
+            <a:ext cx="11280814" cy="627889"/>
           </a:xfrm>
           <a:prstGeom prst="rect">
             <a:avLst/>
@@ -4939,7 +4939,7 @@
         <p:spPr>
           <a:xfrm>
             <a:off x="457200" y="5132831"/>
-            <a:ext cx="11277600" cy="627889"/>
+            <a:ext cx="11734800" cy="627889"/>
           </a:xfrm>
           <a:prstGeom prst="rect">
             <a:avLst/>
@@ -5009,7 +5009,7 @@
         <p:spPr>
           <a:xfrm>
             <a:off x="9262170" y="6035040"/>
-            <a:ext cx="826710" cy="365760"/>
+            <a:ext cx="1213008" cy="365760"/>
           </a:xfrm>
           <a:prstGeom prst="rect">
             <a:avLst/>
@@ -5106,7 +5106,7 @@
         <p:spPr>
           <a:xfrm>
             <a:off x="457200" y="2395729"/>
-            <a:ext cx="11277600" cy="518159"/>
+            <a:ext cx="11734800" cy="518159"/>
           </a:xfrm>
           <a:prstGeom prst="rect">
             <a:avLst/>
@@ -5141,7 +5141,7 @@
         <p:spPr>
           <a:xfrm>
             <a:off x="457200" y="3371088"/>
-            <a:ext cx="11277600" cy="518159"/>
+            <a:ext cx="11734800" cy="518159"/>
           </a:xfrm>
           <a:prstGeom prst="rect">
             <a:avLst/>
@@ -5176,7 +5176,7 @@
         <p:spPr>
           <a:xfrm>
             <a:off x="457200" y="4346447"/>
-            <a:ext cx="11277600" cy="518159"/>
+            <a:ext cx="11734800" cy="518159"/>
           </a:xfrm>
           <a:prstGeom prst="rect">
             <a:avLst/>
@@ -5246,7 +5246,7 @@
         <p:spPr>
           <a:xfrm>
             <a:off x="9262170" y="6035040"/>
-            <a:ext cx="826710" cy="365760"/>
+            <a:ext cx="1213008" cy="365760"/>
           </a:xfrm>
           <a:prstGeom prst="rect">
             <a:avLst/>
@@ -5518,7 +5518,7 @@
         <p:spPr>
           <a:xfrm>
             <a:off x="457200" y="1499616"/>
-            <a:ext cx="776183" cy="640080"/>
+            <a:ext cx="1132164" cy="640080"/>
           </a:xfrm>
           <a:prstGeom prst="rect">
             <a:avLst/>
@@ -5623,7 +5623,7 @@
         <p:spPr>
           <a:xfrm>
             <a:off x="457200" y="3011424"/>
-            <a:ext cx="776183" cy="640080"/>
+            <a:ext cx="1132164" cy="640080"/>
           </a:xfrm>
           <a:prstGeom prst="rect">
             <a:avLst/>
@@ -5693,7 +5693,7 @@
         <p:spPr>
           <a:xfrm>
             <a:off x="1461983" y="3697224"/>
-            <a:ext cx="10272817" cy="551688"/>
+            <a:ext cx="10730017" cy="551688"/>
           </a:xfrm>
           <a:prstGeom prst="rect">
             <a:avLst/>
@@ -5728,7 +5728,7 @@
         <p:spPr>
           <a:xfrm>
             <a:off x="457200" y="4523232"/>
-            <a:ext cx="776183" cy="640080"/>
+            <a:ext cx="1132164" cy="640080"/>
           </a:xfrm>
           <a:prstGeom prst="rect">
             <a:avLst/>
@@ -5798,7 +5798,7 @@
         <p:spPr>
           <a:xfrm>
             <a:off x="1461983" y="5209032"/>
-            <a:ext cx="10272817" cy="551688"/>
+            <a:ext cx="10730017" cy="551688"/>
           </a:xfrm>
           <a:prstGeom prst="rect">
             <a:avLst/>
@@ -5868,7 +5868,7 @@
         <p:spPr>
           <a:xfrm>
             <a:off x="9262170" y="6035040"/>
-            <a:ext cx="826710" cy="365760"/>
+            <a:ext cx="1213008" cy="365760"/>
           </a:xfrm>
           <a:prstGeom prst="rect">
             <a:avLst/>
@@ -5965,7 +5965,7 @@
         <p:spPr>
           <a:xfrm>
             <a:off x="457200" y="1499616"/>
-            <a:ext cx="776183" cy="640080"/>
+            <a:ext cx="1132164" cy="640080"/>
           </a:xfrm>
           <a:prstGeom prst="rect">
             <a:avLst/>
@@ -6035,7 +6035,7 @@
         <p:spPr>
           <a:xfrm>
             <a:off x="1461983" y="2185416"/>
-            <a:ext cx="10272817" cy="551688"/>
+            <a:ext cx="10730017" cy="551688"/>
           </a:xfrm>
           <a:prstGeom prst="rect">
             <a:avLst/>
@@ -6070,7 +6070,7 @@
         <p:spPr>
           <a:xfrm>
             <a:off x="457200" y="3011424"/>
-            <a:ext cx="776183" cy="640080"/>
+            <a:ext cx="1132164" cy="640080"/>
           </a:xfrm>
           <a:prstGeom prst="rect">
             <a:avLst/>
@@ -6140,7 +6140,7 @@
         <p:spPr>
           <a:xfrm>
             <a:off x="1461983" y="3697224"/>
-            <a:ext cx="10272817" cy="551688"/>
+            <a:ext cx="10730017" cy="551688"/>
           </a:xfrm>
           <a:prstGeom prst="rect">
             <a:avLst/>
@@ -6175,7 +6175,7 @@
         <p:spPr>
           <a:xfrm>
             <a:off x="457200" y="4523232"/>
-            <a:ext cx="776183" cy="640080"/>
+            <a:ext cx="1132164" cy="640080"/>
           </a:xfrm>
           <a:prstGeom prst="rect">
             <a:avLst/>
@@ -6245,7 +6245,7 @@
         <p:spPr>
           <a:xfrm>
             <a:off x="1461983" y="5209032"/>
-            <a:ext cx="10272817" cy="551688"/>
+            <a:ext cx="10730017" cy="551688"/>
           </a:xfrm>
           <a:prstGeom prst="rect">
             <a:avLst/>
@@ -6315,7 +6315,7 @@
         <p:spPr>
           <a:xfrm>
             <a:off x="9262170" y="6035040"/>
-            <a:ext cx="826710" cy="365760"/>
+            <a:ext cx="1213008" cy="365760"/>
           </a:xfrm>
           <a:prstGeom prst="rect">
             <a:avLst/>
@@ -6587,7 +6587,7 @@
         <p:spPr>
           <a:xfrm>
             <a:off x="457200" y="2883409"/>
-            <a:ext cx="11277600" cy="518159"/>
+            <a:ext cx="11734800" cy="518159"/>
           </a:xfrm>
           <a:prstGeom prst="rect">
             <a:avLst/>
@@ -6622,7 +6622,7 @@
         <p:spPr>
           <a:xfrm>
             <a:off x="457200" y="3858768"/>
-            <a:ext cx="11277600" cy="518159"/>
+            <a:ext cx="11734800" cy="518159"/>
           </a:xfrm>
           <a:prstGeom prst="rect">
             <a:avLst/>
@@ -6692,7 +6692,7 @@
         <p:spPr>
           <a:xfrm>
             <a:off x="9262170" y="6035040"/>
-            <a:ext cx="826710" cy="365760"/>
+            <a:ext cx="1213008" cy="365760"/>
           </a:xfrm>
           <a:prstGeom prst="rect">
             <a:avLst/>
@@ -6921,7 +6921,7 @@
         <p:spPr>
           <a:xfrm>
             <a:off x="457200" y="1837944"/>
-            <a:ext cx="423027" cy="518159"/>
+            <a:ext cx="567115" cy="518159"/>
           </a:xfrm>
           <a:prstGeom prst="rect">
             <a:avLst/>
@@ -6956,7 +6956,7 @@
         <p:spPr>
           <a:xfrm>
             <a:off x="697347" y="1837944"/>
-            <a:ext cx="3015092" cy="518159"/>
+            <a:ext cx="4714419" cy="518159"/>
           </a:xfrm>
           <a:prstGeom prst="rect">
             <a:avLst/>
@@ -6991,7 +6991,7 @@
         <p:spPr>
           <a:xfrm>
             <a:off x="457200" y="2356103"/>
-            <a:ext cx="3254606" cy="518159"/>
+            <a:ext cx="5097641" cy="518159"/>
           </a:xfrm>
           <a:prstGeom prst="rect">
             <a:avLst/>
@@ -7026,7 +7026,7 @@
         <p:spPr>
           <a:xfrm>
             <a:off x="3528926" y="2356103"/>
-            <a:ext cx="518959" cy="518159"/>
+            <a:ext cx="720606" cy="518159"/>
           </a:xfrm>
           <a:prstGeom prst="rect">
             <a:avLst/>
@@ -7061,7 +7061,7 @@
         <p:spPr>
           <a:xfrm>
             <a:off x="3865004" y="2356103"/>
-            <a:ext cx="2175317" cy="518159"/>
+            <a:ext cx="3370779" cy="518159"/>
           </a:xfrm>
           <a:prstGeom prst="rect">
             <a:avLst/>
@@ -7096,7 +7096,7 @@
         <p:spPr>
           <a:xfrm>
             <a:off x="457200" y="3392421"/>
-            <a:ext cx="5475171" cy="518159"/>
+            <a:ext cx="8650545" cy="518159"/>
           </a:xfrm>
           <a:prstGeom prst="rect">
             <a:avLst/>
@@ -7131,7 +7131,7 @@
         <p:spPr>
           <a:xfrm>
             <a:off x="457200" y="3910580"/>
-            <a:ext cx="423027" cy="518159"/>
+            <a:ext cx="567115" cy="518159"/>
           </a:xfrm>
           <a:prstGeom prst="rect">
             <a:avLst/>
@@ -7166,7 +7166,7 @@
         <p:spPr>
           <a:xfrm>
             <a:off x="697347" y="3910580"/>
-            <a:ext cx="3423067" cy="518159"/>
+            <a:ext cx="5367179" cy="518159"/>
           </a:xfrm>
           <a:prstGeom prst="rect">
             <a:avLst/>
@@ -7201,7 +7201,7 @@
         <p:spPr>
           <a:xfrm>
             <a:off x="457200" y="4946898"/>
-            <a:ext cx="6470757" cy="518159"/>
+            <a:ext cx="10243483" cy="518159"/>
           </a:xfrm>
           <a:prstGeom prst="rect">
             <a:avLst/>
@@ -7236,7 +7236,7 @@
         <p:spPr>
           <a:xfrm>
             <a:off x="457200" y="5465057"/>
-            <a:ext cx="3279906" cy="518159"/>
+            <a:ext cx="5138121" cy="518159"/>
           </a:xfrm>
           <a:prstGeom prst="rect">
             <a:avLst/>
@@ -7271,7 +7271,7 @@
         <p:spPr>
           <a:xfrm>
             <a:off x="3554226" y="5465057"/>
-            <a:ext cx="903320" cy="518159"/>
+            <a:ext cx="1335584" cy="518159"/>
           </a:xfrm>
           <a:prstGeom prst="rect">
             <a:avLst/>
@@ -7306,7 +7306,7 @@
         <p:spPr>
           <a:xfrm>
             <a:off x="4274666" y="5465057"/>
-            <a:ext cx="1934748" cy="518159"/>
+            <a:ext cx="2985868" cy="518159"/>
           </a:xfrm>
           <a:prstGeom prst="rect">
             <a:avLst/>
@@ -7726,7 +7726,7 @@
         <p:spPr>
           <a:xfrm>
             <a:off x="9262170" y="6035040"/>
-            <a:ext cx="826710" cy="365760"/>
+            <a:ext cx="1213008" cy="365760"/>
           </a:xfrm>
           <a:prstGeom prst="rect">
             <a:avLst/>
@@ -7823,7 +7823,7 @@
         <p:spPr>
           <a:xfrm>
             <a:off x="457200" y="2395729"/>
-            <a:ext cx="11277600" cy="518159"/>
+            <a:ext cx="11703169" cy="518159"/>
           </a:xfrm>
           <a:prstGeom prst="rect">
             <a:avLst/>
@@ -7963,7 +7963,7 @@
         <p:spPr>
           <a:xfrm>
             <a:off x="9262170" y="6035040"/>
-            <a:ext cx="826710" cy="365760"/>
+            <a:ext cx="1213008" cy="365760"/>
           </a:xfrm>
           <a:prstGeom prst="rect">
             <a:avLst/>
@@ -8218,7 +8218,7 @@
         <p:spPr>
           <a:xfrm>
             <a:off x="457200" y="2395727"/>
-            <a:ext cx="5501640" cy="609600"/>
+            <a:ext cx="6866334" cy="609600"/>
           </a:xfrm>
           <a:prstGeom prst="rect">
             <a:avLst/>
@@ -8253,7 +8253,7 @@
         <p:spPr>
           <a:xfrm>
             <a:off x="457200" y="3608831"/>
-            <a:ext cx="5501640" cy="609600"/>
+            <a:ext cx="7480300" cy="609600"/>
           </a:xfrm>
           <a:prstGeom prst="rect">
             <a:avLst/>
@@ -8288,7 +8288,7 @@
         <p:spPr>
           <a:xfrm>
             <a:off x="457200" y="4821935"/>
-            <a:ext cx="5501640" cy="609600"/>
+            <a:ext cx="7055921" cy="609600"/>
           </a:xfrm>
           <a:prstGeom prst="rect">
             <a:avLst/>
@@ -8323,7 +8323,7 @@
         <p:spPr>
           <a:xfrm>
             <a:off x="6233160" y="2395727"/>
-            <a:ext cx="5501640" cy="609600"/>
+            <a:ext cx="5958840" cy="609600"/>
           </a:xfrm>
           <a:prstGeom prst="rect">
             <a:avLst/>
@@ -8358,7 +8358,7 @@
         <p:spPr>
           <a:xfrm>
             <a:off x="6233160" y="3608831"/>
-            <a:ext cx="5501640" cy="609600"/>
+            <a:ext cx="5958840" cy="609600"/>
           </a:xfrm>
           <a:prstGeom prst="rect">
             <a:avLst/>
@@ -8393,7 +8393,7 @@
         <p:spPr>
           <a:xfrm>
             <a:off x="6233160" y="4821935"/>
-            <a:ext cx="5501640" cy="609600"/>
+            <a:ext cx="5958840" cy="609600"/>
           </a:xfrm>
           <a:prstGeom prst="rect">
             <a:avLst/>
@@ -8463,7 +8463,7 @@
         <p:spPr>
           <a:xfrm>
             <a:off x="9262170" y="6035040"/>
-            <a:ext cx="826710" cy="365760"/>
+            <a:ext cx="1213008" cy="365760"/>
           </a:xfrm>
           <a:prstGeom prst="rect">
             <a:avLst/>
@@ -8525,7 +8525,7 @@
         <p:spPr>
           <a:xfrm>
             <a:off x="457200" y="457200"/>
-            <a:ext cx="11277600" cy="768096"/>
+            <a:ext cx="11734800" cy="768096"/>
           </a:xfrm>
           <a:prstGeom prst="rect">
             <a:avLst/>
@@ -8560,7 +8560,7 @@
         <p:spPr>
           <a:xfrm>
             <a:off x="457200" y="1499616"/>
-            <a:ext cx="2069768" cy="518159"/>
+            <a:ext cx="2334121" cy="518159"/>
           </a:xfrm>
           <a:prstGeom prst="rect">
             <a:avLst/>
@@ -8595,7 +8595,7 @@
         <p:spPr>
           <a:xfrm>
             <a:off x="3075608" y="1499616"/>
-            <a:ext cx="4492107" cy="518159"/>
+            <a:ext cx="6785035" cy="518159"/>
           </a:xfrm>
           <a:prstGeom prst="rect">
             <a:avLst/>
@@ -8709,7 +8709,7 @@
         <p:spPr>
           <a:xfrm>
             <a:off x="3075608" y="2401823"/>
-            <a:ext cx="4492107" cy="633984"/>
+            <a:ext cx="5713630" cy="633984"/>
           </a:xfrm>
           <a:prstGeom prst="rect">
             <a:avLst/>
@@ -8779,7 +8779,7 @@
         <p:spPr>
           <a:xfrm>
             <a:off x="3075608" y="3310127"/>
-            <a:ext cx="4492107" cy="633984"/>
+            <a:ext cx="4560590" cy="633984"/>
           </a:xfrm>
           <a:prstGeom prst="rect">
             <a:avLst/>
@@ -8849,7 +8849,7 @@
         <p:spPr>
           <a:xfrm>
             <a:off x="3075608" y="4218431"/>
-            <a:ext cx="4492107" cy="633984"/>
+            <a:ext cx="5789532" cy="633984"/>
           </a:xfrm>
           <a:prstGeom prst="rect">
             <a:avLst/>
@@ -8884,7 +8884,7 @@
         <p:spPr>
           <a:xfrm>
             <a:off x="457200" y="5126735"/>
-            <a:ext cx="2069768" cy="633984"/>
+            <a:ext cx="2909292" cy="633984"/>
           </a:xfrm>
           <a:prstGeom prst="rect">
             <a:avLst/>
@@ -8919,7 +8919,7 @@
         <p:spPr>
           <a:xfrm>
             <a:off x="3075608" y="5126735"/>
-            <a:ext cx="4492107" cy="633984"/>
+            <a:ext cx="5136772" cy="633984"/>
           </a:xfrm>
           <a:prstGeom prst="rect">
             <a:avLst/>
@@ -8989,7 +8989,7 @@
         <p:spPr>
           <a:xfrm>
             <a:off x="9262170" y="6035040"/>
-            <a:ext cx="826710" cy="365760"/>
+            <a:ext cx="1213008" cy="365760"/>
           </a:xfrm>
           <a:prstGeom prst="rect">
             <a:avLst/>
@@ -9375,7 +9375,7 @@
         <p:spPr>
           <a:xfrm>
             <a:off x="9262170" y="6035040"/>
-            <a:ext cx="826710" cy="365760"/>
+            <a:ext cx="1213008" cy="365760"/>
           </a:xfrm>
           <a:prstGeom prst="rect">
             <a:avLst/>
@@ -9542,7 +9542,7 @@
         <p:spPr>
           <a:xfrm>
             <a:off x="457200" y="4346447"/>
-            <a:ext cx="11277600" cy="518159"/>
+            <a:ext cx="11280814" cy="518159"/>
           </a:xfrm>
           <a:prstGeom prst="rect">
             <a:avLst/>
@@ -9612,7 +9612,7 @@
         <p:spPr>
           <a:xfrm>
             <a:off x="9262170" y="6035040"/>
-            <a:ext cx="826710" cy="365760"/>
+            <a:ext cx="1213008" cy="365760"/>
           </a:xfrm>
           <a:prstGeom prst="rect">
             <a:avLst/>
@@ -9743,8 +9743,8 @@
         </p:nvSpPr>
         <p:spPr>
           <a:xfrm>
-            <a:off x="457200" y="4011168"/>
-            <a:ext cx="4792980" cy="518159"/>
+            <a:off x="0" y="4011168"/>
+            <a:ext cx="6955731" cy="518159"/>
           </a:xfrm>
           <a:prstGeom prst="rect">
             <a:avLst/>
@@ -9813,8 +9813,8 @@
         </p:nvSpPr>
         <p:spPr>
           <a:xfrm>
-            <a:off x="6941820" y="4011168"/>
-            <a:ext cx="4792980" cy="518159"/>
+            <a:off x="6136730" y="4011168"/>
+            <a:ext cx="6055270" cy="518159"/>
           </a:xfrm>
           <a:prstGeom prst="rect">
             <a:avLst/>
@@ -9848,8 +9848,8 @@
         </p:nvSpPr>
         <p:spPr>
           <a:xfrm>
-            <a:off x="5524500" y="3310127"/>
-            <a:ext cx="1143000" cy="640080"/>
+            <a:off x="5435323" y="3310127"/>
+            <a:ext cx="1321355" cy="640080"/>
           </a:xfrm>
           <a:prstGeom prst="rect">
             <a:avLst/>
@@ -9980,7 +9980,7 @@
         <p:spPr>
           <a:xfrm>
             <a:off x="457200" y="1371600"/>
-            <a:ext cx="4670817" cy="518159"/>
+            <a:ext cx="7363579" cy="518159"/>
           </a:xfrm>
           <a:prstGeom prst="rect">
             <a:avLst/>
@@ -10015,7 +10015,7 @@
         <p:spPr>
           <a:xfrm>
             <a:off x="457200" y="1889759"/>
-            <a:ext cx="2991056" cy="518159"/>
+            <a:ext cx="4675961" cy="518159"/>
           </a:xfrm>
           <a:prstGeom prst="rect">
             <a:avLst/>
@@ -10050,7 +10050,7 @@
         <p:spPr>
           <a:xfrm>
             <a:off x="3265376" y="1889759"/>
-            <a:ext cx="783141" cy="518159"/>
+            <a:ext cx="1143297" cy="518159"/>
           </a:xfrm>
           <a:prstGeom prst="rect">
             <a:avLst/>
@@ -10085,7 +10085,7 @@
         <p:spPr>
           <a:xfrm>
             <a:off x="3865637" y="1889759"/>
-            <a:ext cx="1598880" cy="518159"/>
+            <a:ext cx="2448480" cy="518159"/>
           </a:xfrm>
           <a:prstGeom prst="rect">
             <a:avLst/>
@@ -10120,7 +10120,7 @@
         <p:spPr>
           <a:xfrm>
             <a:off x="457200" y="2407918"/>
-            <a:ext cx="3374574" cy="518159"/>
+            <a:ext cx="5289590" cy="518159"/>
           </a:xfrm>
           <a:prstGeom prst="rect">
             <a:avLst/>
@@ -10155,7 +10155,7 @@
         <p:spPr>
           <a:xfrm>
             <a:off x="3648894" y="2407918"/>
-            <a:ext cx="518959" cy="518159"/>
+            <a:ext cx="720606" cy="518159"/>
           </a:xfrm>
           <a:prstGeom prst="rect">
             <a:avLst/>
@@ -10190,7 +10190,7 @@
         <p:spPr>
           <a:xfrm>
             <a:off x="3984972" y="2407918"/>
-            <a:ext cx="1383191" cy="518159"/>
+            <a:ext cx="2103377" cy="518159"/>
           </a:xfrm>
           <a:prstGeom prst="rect">
             <a:avLst/>
@@ -10225,7 +10225,7 @@
         <p:spPr>
           <a:xfrm>
             <a:off x="457200" y="2926077"/>
-            <a:ext cx="5173670" cy="518159"/>
+            <a:ext cx="8168144" cy="518159"/>
           </a:xfrm>
           <a:prstGeom prst="rect">
             <a:avLst/>
@@ -10260,7 +10260,7 @@
         <p:spPr>
           <a:xfrm>
             <a:off x="457200" y="3444236"/>
-            <a:ext cx="3342526" cy="518159"/>
+            <a:ext cx="5238313" cy="518159"/>
           </a:xfrm>
           <a:prstGeom prst="rect">
             <a:avLst/>
@@ -10295,7 +10295,7 @@
         <p:spPr>
           <a:xfrm>
             <a:off x="457200" y="3962395"/>
-            <a:ext cx="4494555" cy="518159"/>
+            <a:ext cx="7081560" cy="518159"/>
           </a:xfrm>
           <a:prstGeom prst="rect">
             <a:avLst/>
@@ -10601,7 +10601,7 @@
         <p:spPr>
           <a:xfrm>
             <a:off x="9262170" y="6035040"/>
-            <a:ext cx="826710" cy="365760"/>
+            <a:ext cx="1213008" cy="365760"/>
           </a:xfrm>
           <a:prstGeom prst="rect">
             <a:avLst/>
@@ -10812,7 +10812,7 @@
         <p:spPr>
           <a:xfrm>
             <a:off x="9262170" y="6035040"/>
-            <a:ext cx="826710" cy="365760"/>
+            <a:ext cx="1213008" cy="365760"/>
           </a:xfrm>
           <a:prstGeom prst="rect">
             <a:avLst/>
@@ -11067,7 +11067,7 @@
         <p:spPr>
           <a:xfrm>
             <a:off x="457200" y="2395727"/>
-            <a:ext cx="5501640" cy="609600"/>
+            <a:ext cx="5520332" cy="609600"/>
           </a:xfrm>
           <a:prstGeom prst="rect">
             <a:avLst/>
@@ -11102,7 +11102,7 @@
         <p:spPr>
           <a:xfrm>
             <a:off x="457200" y="3608831"/>
-            <a:ext cx="5501640" cy="609600"/>
+            <a:ext cx="5673486" cy="609600"/>
           </a:xfrm>
           <a:prstGeom prst="rect">
             <a:avLst/>
@@ -11137,7 +11137,7 @@
         <p:spPr>
           <a:xfrm>
             <a:off x="457200" y="4821935"/>
-            <a:ext cx="5501640" cy="609600"/>
+            <a:ext cx="5866785" cy="609600"/>
           </a:xfrm>
           <a:prstGeom prst="rect">
             <a:avLst/>
@@ -11172,7 +11172,7 @@
         <p:spPr>
           <a:xfrm>
             <a:off x="6233160" y="2395727"/>
-            <a:ext cx="5501640" cy="609600"/>
+            <a:ext cx="5958840" cy="609600"/>
           </a:xfrm>
           <a:prstGeom prst="rect">
             <a:avLst/>
@@ -11207,7 +11207,7 @@
         <p:spPr>
           <a:xfrm>
             <a:off x="6233160" y="3608831"/>
-            <a:ext cx="5501640" cy="609600"/>
+            <a:ext cx="5958840" cy="609600"/>
           </a:xfrm>
           <a:prstGeom prst="rect">
             <a:avLst/>
@@ -11242,7 +11242,7 @@
         <p:spPr>
           <a:xfrm>
             <a:off x="6233160" y="4821935"/>
-            <a:ext cx="5501640" cy="609600"/>
+            <a:ext cx="5958840" cy="609600"/>
           </a:xfrm>
           <a:prstGeom prst="rect">
             <a:avLst/>
@@ -11312,7 +11312,7 @@
         <p:spPr>
           <a:xfrm>
             <a:off x="9262170" y="6035040"/>
-            <a:ext cx="826710" cy="365760"/>
+            <a:ext cx="1213008" cy="365760"/>
           </a:xfrm>
           <a:prstGeom prst="rect">
             <a:avLst/>
@@ -11698,7 +11698,7 @@
         <p:spPr>
           <a:xfrm>
             <a:off x="9262170" y="6035040"/>
-            <a:ext cx="826710" cy="365760"/>
+            <a:ext cx="1213008" cy="365760"/>
           </a:xfrm>
           <a:prstGeom prst="rect">
             <a:avLst/>
@@ -11830,7 +11830,7 @@
         <p:spPr>
           <a:xfrm>
             <a:off x="457200" y="3371088"/>
-            <a:ext cx="11277600" cy="518159"/>
+            <a:ext cx="11734800" cy="518159"/>
           </a:xfrm>
           <a:prstGeom prst="rect">
             <a:avLst/>
@@ -11865,7 +11865,7 @@
         <p:spPr>
           <a:xfrm>
             <a:off x="457200" y="4346447"/>
-            <a:ext cx="11277600" cy="518159"/>
+            <a:ext cx="11734800" cy="518159"/>
           </a:xfrm>
           <a:prstGeom prst="rect">
             <a:avLst/>
@@ -11935,7 +11935,7 @@
         <p:spPr>
           <a:xfrm>
             <a:off x="9262170" y="6035040"/>
-            <a:ext cx="826710" cy="365760"/>
+            <a:ext cx="1213008" cy="365760"/>
           </a:xfrm>
           <a:prstGeom prst="rect">
             <a:avLst/>
@@ -12146,7 +12146,7 @@
         <p:spPr>
           <a:xfrm>
             <a:off x="9262170" y="6035040"/>
-            <a:ext cx="826710" cy="365760"/>
+            <a:ext cx="1213008" cy="365760"/>
           </a:xfrm>
           <a:prstGeom prst="rect">
             <a:avLst/>
@@ -12401,7 +12401,7 @@
         <p:spPr>
           <a:xfrm>
             <a:off x="457200" y="2395727"/>
-            <a:ext cx="5501640" cy="609600"/>
+            <a:ext cx="6250681" cy="609600"/>
           </a:xfrm>
           <a:prstGeom prst="rect">
             <a:avLst/>
@@ -12436,7 +12436,7 @@
         <p:spPr>
           <a:xfrm>
             <a:off x="457200" y="3608831"/>
-            <a:ext cx="5501640" cy="609600"/>
+            <a:ext cx="6709806" cy="609600"/>
           </a:xfrm>
           <a:prstGeom prst="rect">
             <a:avLst/>
@@ -12471,7 +12471,7 @@
         <p:spPr>
           <a:xfrm>
             <a:off x="457200" y="4821935"/>
-            <a:ext cx="5501640" cy="609600"/>
+            <a:ext cx="6442968" cy="609600"/>
           </a:xfrm>
           <a:prstGeom prst="rect">
             <a:avLst/>
@@ -12506,7 +12506,7 @@
         <p:spPr>
           <a:xfrm>
             <a:off x="6233160" y="2395727"/>
-            <a:ext cx="5501640" cy="609600"/>
+            <a:ext cx="5944036" cy="609600"/>
           </a:xfrm>
           <a:prstGeom prst="rect">
             <a:avLst/>
@@ -12541,7 +12541,7 @@
         <p:spPr>
           <a:xfrm>
             <a:off x="6233160" y="3608831"/>
-            <a:ext cx="5501640" cy="609600"/>
+            <a:ext cx="5958840" cy="609600"/>
           </a:xfrm>
           <a:prstGeom prst="rect">
             <a:avLst/>
@@ -12576,7 +12576,7 @@
         <p:spPr>
           <a:xfrm>
             <a:off x="6233160" y="4821935"/>
-            <a:ext cx="5501640" cy="609600"/>
+            <a:ext cx="5958840" cy="609600"/>
           </a:xfrm>
           <a:prstGeom prst="rect">
             <a:avLst/>
@@ -12646,7 +12646,7 @@
         <p:spPr>
           <a:xfrm>
             <a:off x="9262170" y="6035040"/>
-            <a:ext cx="826710" cy="365760"/>
+            <a:ext cx="1213008" cy="365760"/>
           </a:xfrm>
           <a:prstGeom prst="rect">
             <a:avLst/>
@@ -12848,7 +12848,7 @@
         <p:spPr>
           <a:xfrm>
             <a:off x="457200" y="457200"/>
-            <a:ext cx="11277600" cy="768096"/>
+            <a:ext cx="11734800" cy="768096"/>
           </a:xfrm>
           <a:prstGeom prst="rect">
             <a:avLst/>
@@ -12918,7 +12918,7 @@
         <p:spPr>
           <a:xfrm>
             <a:off x="457200" y="2109215"/>
-            <a:ext cx="11277600" cy="627889"/>
+            <a:ext cx="11512232" cy="627889"/>
           </a:xfrm>
           <a:prstGeom prst="rect">
             <a:avLst/>
@@ -13058,7 +13058,7 @@
         <p:spPr>
           <a:xfrm>
             <a:off x="457200" y="5132831"/>
-            <a:ext cx="11277600" cy="627889"/>
+            <a:ext cx="11357054" cy="627889"/>
           </a:xfrm>
           <a:prstGeom prst="rect">
             <a:avLst/>
@@ -13321,7 +13321,7 @@
         <p:spPr>
           <a:xfrm>
             <a:off x="457200" y="1837944"/>
-            <a:ext cx="423027" cy="518159"/>
+            <a:ext cx="567115" cy="518159"/>
           </a:xfrm>
           <a:prstGeom prst="rect">
             <a:avLst/>
@@ -13356,7 +13356,7 @@
         <p:spPr>
           <a:xfrm>
             <a:off x="697347" y="1837944"/>
-            <a:ext cx="5679053" cy="518159"/>
+            <a:ext cx="8976756" cy="518159"/>
           </a:xfrm>
           <a:prstGeom prst="rect">
             <a:avLst/>
@@ -13391,7 +13391,7 @@
         <p:spPr>
           <a:xfrm>
             <a:off x="457200" y="2874262"/>
-            <a:ext cx="6434703" cy="518159"/>
+            <a:ext cx="10185796" cy="518159"/>
           </a:xfrm>
           <a:prstGeom prst="rect">
             <a:avLst/>
@@ -13426,7 +13426,7 @@
         <p:spPr>
           <a:xfrm>
             <a:off x="457200" y="3392421"/>
-            <a:ext cx="5990674" cy="518159"/>
+            <a:ext cx="9475350" cy="518159"/>
           </a:xfrm>
           <a:prstGeom prst="rect">
             <a:avLst/>
@@ -13461,7 +13461,7 @@
         <p:spPr>
           <a:xfrm>
             <a:off x="457200" y="4428739"/>
-            <a:ext cx="3950799" cy="518159"/>
+            <a:ext cx="6211550" cy="518159"/>
           </a:xfrm>
           <a:prstGeom prst="rect">
             <a:avLst/>
@@ -13496,7 +13496,7 @@
         <p:spPr>
           <a:xfrm>
             <a:off x="4225119" y="4428739"/>
-            <a:ext cx="423027" cy="518159"/>
+            <a:ext cx="567115" cy="518159"/>
           </a:xfrm>
           <a:prstGeom prst="rect">
             <a:avLst/>
@@ -13531,7 +13531,7 @@
         <p:spPr>
           <a:xfrm>
             <a:off x="4465265" y="4428739"/>
-            <a:ext cx="2438023" cy="518159"/>
+            <a:ext cx="3791108" cy="518159"/>
           </a:xfrm>
           <a:prstGeom prst="rect">
             <a:avLst/>
@@ -13566,7 +13566,7 @@
         <p:spPr>
           <a:xfrm>
             <a:off x="457200" y="4946898"/>
-            <a:ext cx="4934999" cy="518159"/>
+            <a:ext cx="7786270" cy="518159"/>
           </a:xfrm>
           <a:prstGeom prst="rect">
             <a:avLst/>
@@ -13601,7 +13601,7 @@
         <p:spPr>
           <a:xfrm>
             <a:off x="457200" y="5465057"/>
-            <a:ext cx="3582462" cy="518159"/>
+            <a:ext cx="5622211" cy="518159"/>
           </a:xfrm>
           <a:prstGeom prst="rect">
             <a:avLst/>
@@ -13636,7 +13636,7 @@
         <p:spPr>
           <a:xfrm>
             <a:off x="3856782" y="5465057"/>
-            <a:ext cx="423027" cy="518159"/>
+            <a:ext cx="567115" cy="518159"/>
           </a:xfrm>
           <a:prstGeom prst="rect">
             <a:avLst/>
@@ -13671,7 +13671,7 @@
         <p:spPr>
           <a:xfrm>
             <a:off x="4096928" y="5465057"/>
-            <a:ext cx="1911134" cy="518159"/>
+            <a:ext cx="2948086" cy="518159"/>
           </a:xfrm>
           <a:prstGeom prst="rect">
             <a:avLst/>
@@ -13872,7 +13872,7 @@
         <p:spPr>
           <a:xfrm>
             <a:off x="3345180" y="1499616"/>
-            <a:ext cx="2613660" cy="518159"/>
+            <a:ext cx="3100228" cy="518159"/>
           </a:xfrm>
           <a:prstGeom prst="rect">
             <a:avLst/>
@@ -13942,7 +13942,7 @@
         <p:spPr>
           <a:xfrm>
             <a:off x="6233160" y="1499616"/>
-            <a:ext cx="2613660" cy="518159"/>
+            <a:ext cx="3214588" cy="518159"/>
           </a:xfrm>
           <a:prstGeom prst="rect">
             <a:avLst/>
@@ -14012,7 +14012,7 @@
         <p:spPr>
           <a:xfrm>
             <a:off x="9121140" y="1499616"/>
-            <a:ext cx="2613660" cy="518159"/>
+            <a:ext cx="3070860" cy="518159"/>
           </a:xfrm>
           <a:prstGeom prst="rect">
             <a:avLst/>
@@ -14257,7 +14257,7 @@
         <p:spPr>
           <a:xfrm>
             <a:off x="457200" y="2414016"/>
-            <a:ext cx="2613660" cy="518159"/>
+            <a:ext cx="2717006" cy="518159"/>
           </a:xfrm>
           <a:prstGeom prst="rect">
             <a:avLst/>
@@ -14555,7 +14555,7 @@
         <p:spPr>
           <a:xfrm>
             <a:off x="6233160" y="2414016"/>
-            <a:ext cx="2613660" cy="518159"/>
+            <a:ext cx="2832715" cy="518159"/>
           </a:xfrm>
           <a:prstGeom prst="rect">
             <a:avLst/>
@@ -14949,7 +14949,7 @@
         <p:spPr>
           <a:xfrm>
             <a:off x="6233160" y="1499616"/>
-            <a:ext cx="5501640" cy="621791"/>
+            <a:ext cx="5958840" cy="621791"/>
           </a:xfrm>
           <a:prstGeom prst="rect">
             <a:avLst/>
@@ -15028,7 +15028,7 @@
         <p:spPr>
           <a:xfrm>
             <a:off x="457200" y="2395727"/>
-            <a:ext cx="5501640" cy="609600"/>
+            <a:ext cx="8556427" cy="609600"/>
           </a:xfrm>
           <a:prstGeom prst="rect">
             <a:avLst/>
@@ -15063,7 +15063,7 @@
         <p:spPr>
           <a:xfrm>
             <a:off x="457200" y="3608831"/>
-            <a:ext cx="5501640" cy="609600"/>
+            <a:ext cx="7324784" cy="609600"/>
           </a:xfrm>
           <a:prstGeom prst="rect">
             <a:avLst/>
@@ -15133,7 +15133,7 @@
         <p:spPr>
           <a:xfrm>
             <a:off x="6233160" y="2395727"/>
-            <a:ext cx="5501640" cy="609600"/>
+            <a:ext cx="5958840" cy="609600"/>
           </a:xfrm>
           <a:prstGeom prst="rect">
             <a:avLst/>
@@ -15168,7 +15168,7 @@
         <p:spPr>
           <a:xfrm>
             <a:off x="6233160" y="3608831"/>
-            <a:ext cx="5501640" cy="609600"/>
+            <a:ext cx="5958840" cy="609600"/>
           </a:xfrm>
           <a:prstGeom prst="rect">
             <a:avLst/>
@@ -15203,7 +15203,7 @@
         <p:spPr>
           <a:xfrm>
             <a:off x="6233160" y="4821935"/>
-            <a:ext cx="5501640" cy="609600"/>
+            <a:ext cx="5958840" cy="609600"/>
           </a:xfrm>
           <a:prstGeom prst="rect">
             <a:avLst/>
@@ -15299,7 +15299,7 @@
         <p:spPr>
           <a:xfrm>
             <a:off x="457200" y="457200"/>
-            <a:ext cx="11277600" cy="768096"/>
+            <a:ext cx="11355942" cy="768096"/>
           </a:xfrm>
           <a:prstGeom prst="rect">
             <a:avLst/>
@@ -15334,7 +15334,7 @@
         <p:spPr>
           <a:xfrm>
             <a:off x="457200" y="1499616"/>
-            <a:ext cx="2476899" cy="518159"/>
+            <a:ext cx="3560702" cy="518159"/>
           </a:xfrm>
           <a:prstGeom prst="rect">
             <a:avLst/>
@@ -15369,7 +15369,7 @@
         <p:spPr>
           <a:xfrm>
             <a:off x="3482739" y="1499616"/>
-            <a:ext cx="3956784" cy="518159"/>
+            <a:ext cx="4289702" cy="518159"/>
           </a:xfrm>
           <a:prstGeom prst="rect">
             <a:avLst/>
@@ -15483,7 +15483,7 @@
         <p:spPr>
           <a:xfrm>
             <a:off x="3482739" y="2401823"/>
-            <a:ext cx="3956784" cy="633984"/>
+            <a:ext cx="4752539" cy="633984"/>
           </a:xfrm>
           <a:prstGeom prst="rect">
             <a:avLst/>
@@ -15553,7 +15553,7 @@
         <p:spPr>
           <a:xfrm>
             <a:off x="3482739" y="3310127"/>
-            <a:ext cx="3956784" cy="633984"/>
+            <a:ext cx="5928518" cy="633984"/>
           </a:xfrm>
           <a:prstGeom prst="rect">
             <a:avLst/>
@@ -15588,7 +15588,7 @@
         <p:spPr>
           <a:xfrm>
             <a:off x="457200" y="4218431"/>
-            <a:ext cx="2476899" cy="633984"/>
+            <a:ext cx="2985868" cy="633984"/>
           </a:xfrm>
           <a:prstGeom prst="rect">
             <a:avLst/>
@@ -15623,7 +15623,7 @@
         <p:spPr>
           <a:xfrm>
             <a:off x="3482739" y="4218431"/>
-            <a:ext cx="3956784" cy="633984"/>
+            <a:ext cx="5110123" cy="633984"/>
           </a:xfrm>
           <a:prstGeom prst="rect">
             <a:avLst/>
@@ -15658,7 +15658,7 @@
         <p:spPr>
           <a:xfrm>
             <a:off x="457200" y="5126735"/>
-            <a:ext cx="2476899" cy="633984"/>
+            <a:ext cx="3025001" cy="633984"/>
           </a:xfrm>
           <a:prstGeom prst="rect">
             <a:avLst/>
@@ -15693,7 +15693,7 @@
         <p:spPr>
           <a:xfrm>
             <a:off x="3482739" y="5126735"/>
-            <a:ext cx="3956784" cy="633984"/>
+            <a:ext cx="4944824" cy="633984"/>
           </a:xfrm>
           <a:prstGeom prst="rect">
             <a:avLst/>

--- a/examples/pptx/claude-code-for-data-scientists.pptx
+++ b/examples/pptx/claude-code-for-data-scientists.pptx
@@ -3393,7 +3393,7 @@
           <a:lstStyle/>
           <a:p>
             <a:pPr algn="l"/>
-            <a:r>
+            <a:fld id="{4B0E1F8A-6C1D-4E2A-9F3B-7A5C8D2E1F60}" type="slidenum">
               <a:rPr sz="1600" b="0" i="0">
                 <a:solidFill>
                   <a:srgbClr val="8A8A9A"/>
@@ -3401,7 +3401,7 @@
                 <a:latin typeface="Arial"/>
               </a:rPr>
               <a:t>10</a:t>
-            </a:r>
+            </a:fld>
           </a:p>
         </p:txBody>
       </p:sp>
@@ -3665,7 +3665,7 @@
           <a:lstStyle/>
           <a:p>
             <a:pPr algn="l"/>
-            <a:r>
+            <a:fld id="{4B0E1F8A-6C1D-4E2A-9F3B-7A5C8D2E1F60}" type="slidenum">
               <a:rPr sz="1600" b="0" i="0">
                 <a:solidFill>
                   <a:srgbClr val="8A8A9A"/>
@@ -3673,7 +3673,7 @@
                 <a:latin typeface="Arial"/>
               </a:rPr>
               <a:t>11</a:t>
-            </a:r>
+            </a:fld>
           </a:p>
         </p:txBody>
       </p:sp>
@@ -3840,7 +3840,7 @@
           <a:lstStyle/>
           <a:p>
             <a:pPr algn="l"/>
-            <a:r>
+            <a:fld id="{4B0E1F8A-6C1D-4E2A-9F3B-7A5C8D2E1F60}" type="slidenum">
               <a:rPr sz="1600" b="0" i="0">
                 <a:solidFill>
                   <a:srgbClr val="8A8A9A"/>
@@ -3848,7 +3848,7 @@
                 <a:latin typeface="Arial"/>
               </a:rPr>
               <a:t>12</a:t>
-            </a:r>
+            </a:fld>
           </a:p>
         </p:txBody>
       </p:sp>
@@ -4041,7 +4041,7 @@
           <a:lstStyle/>
           <a:p>
             <a:pPr algn="l"/>
-            <a:r>
+            <a:fld id="{4B0E1F8A-6C1D-4E2A-9F3B-7A5C8D2E1F60}" type="slidenum">
               <a:rPr sz="1600" b="0" i="0">
                 <a:solidFill>
                   <a:srgbClr val="8A8A9A"/>
@@ -4049,7 +4049,7 @@
                 <a:latin typeface="Arial"/>
               </a:rPr>
               <a:t>13</a:t>
-            </a:r>
+            </a:fld>
           </a:p>
         </p:txBody>
       </p:sp>
@@ -4646,7 +4646,7 @@
           <a:lstStyle/>
           <a:p>
             <a:pPr algn="l"/>
-            <a:r>
+            <a:fld id="{4B0E1F8A-6C1D-4E2A-9F3B-7A5C8D2E1F60}" type="slidenum">
               <a:rPr sz="1600" b="0" i="0">
                 <a:solidFill>
                   <a:srgbClr val="8A8A9A"/>
@@ -4654,7 +4654,7 @@
                 <a:latin typeface="Arial"/>
               </a:rPr>
               <a:t>14</a:t>
-            </a:r>
+            </a:fld>
           </a:p>
         </p:txBody>
       </p:sp>
@@ -4988,7 +4988,7 @@
           <a:lstStyle/>
           <a:p>
             <a:pPr algn="l"/>
-            <a:r>
+            <a:fld id="{4B0E1F8A-6C1D-4E2A-9F3B-7A5C8D2E1F60}" type="slidenum">
               <a:rPr sz="1600" b="0" i="0">
                 <a:solidFill>
                   <a:srgbClr val="8A8A9A"/>
@@ -4996,7 +4996,7 @@
                 <a:latin typeface="Arial"/>
               </a:rPr>
               <a:t>15</a:t>
-            </a:r>
+            </a:fld>
           </a:p>
         </p:txBody>
       </p:sp>
@@ -5225,7 +5225,7 @@
           <a:lstStyle/>
           <a:p>
             <a:pPr algn="l"/>
-            <a:r>
+            <a:fld id="{4B0E1F8A-6C1D-4E2A-9F3B-7A5C8D2E1F60}" type="slidenum">
               <a:rPr sz="1600" b="0" i="0">
                 <a:solidFill>
                   <a:srgbClr val="8A8A9A"/>
@@ -5233,7 +5233,7 @@
                 <a:latin typeface="Arial"/>
               </a:rPr>
               <a:t>16</a:t>
-            </a:r>
+            </a:fld>
           </a:p>
         </p:txBody>
       </p:sp>
@@ -5436,7 +5436,7 @@
           <a:lstStyle/>
           <a:p>
             <a:pPr algn="l"/>
-            <a:r>
+            <a:fld id="{4B0E1F8A-6C1D-4E2A-9F3B-7A5C8D2E1F60}" type="slidenum">
               <a:rPr sz="1600" b="0" i="0">
                 <a:solidFill>
                   <a:srgbClr val="8A8A9A"/>
@@ -5444,7 +5444,7 @@
                 <a:latin typeface="Arial"/>
               </a:rPr>
               <a:t>17</a:t>
-            </a:r>
+            </a:fld>
           </a:p>
         </p:txBody>
       </p:sp>
@@ -5847,7 +5847,7 @@
           <a:lstStyle/>
           <a:p>
             <a:pPr algn="l"/>
-            <a:r>
+            <a:fld id="{4B0E1F8A-6C1D-4E2A-9F3B-7A5C8D2E1F60}" type="slidenum">
               <a:rPr sz="1600" b="0" i="0">
                 <a:solidFill>
                   <a:srgbClr val="8A8A9A"/>
@@ -5855,7 +5855,7 @@
                 <a:latin typeface="Arial"/>
               </a:rPr>
               <a:t>18</a:t>
-            </a:r>
+            </a:fld>
           </a:p>
         </p:txBody>
       </p:sp>
@@ -6294,7 +6294,7 @@
           <a:lstStyle/>
           <a:p>
             <a:pPr algn="l"/>
-            <a:r>
+            <a:fld id="{4B0E1F8A-6C1D-4E2A-9F3B-7A5C8D2E1F60}" type="slidenum">
               <a:rPr sz="1600" b="0" i="0">
                 <a:solidFill>
                   <a:srgbClr val="8A8A9A"/>
@@ -6302,7 +6302,7 @@
                 <a:latin typeface="Arial"/>
               </a:rPr>
               <a:t>19</a:t>
-            </a:r>
+            </a:fld>
           </a:p>
         </p:txBody>
       </p:sp>
@@ -6505,7 +6505,7 @@
           <a:lstStyle/>
           <a:p>
             <a:pPr algn="l"/>
-            <a:r>
+            <a:fld id="{4B0E1F8A-6C1D-4E2A-9F3B-7A5C8D2E1F60}" type="slidenum">
               <a:rPr sz="1600" b="0" i="0">
                 <a:solidFill>
                   <a:srgbClr val="8A8A9A"/>
@@ -6513,7 +6513,7 @@
                 <a:latin typeface="Arial"/>
               </a:rPr>
               <a:t>2</a:t>
-            </a:r>
+            </a:fld>
           </a:p>
         </p:txBody>
       </p:sp>
@@ -6671,7 +6671,7 @@
           <a:lstStyle/>
           <a:p>
             <a:pPr algn="l"/>
-            <a:r>
+            <a:fld id="{4B0E1F8A-6C1D-4E2A-9F3B-7A5C8D2E1F60}" type="slidenum">
               <a:rPr sz="1600" b="0" i="0">
                 <a:solidFill>
                   <a:srgbClr val="8A8A9A"/>
@@ -6679,7 +6679,7 @@
                 <a:latin typeface="Arial"/>
               </a:rPr>
               <a:t>20</a:t>
-            </a:r>
+            </a:fld>
           </a:p>
         </p:txBody>
       </p:sp>
@@ -7355,7 +7355,7 @@
           <a:lstStyle/>
           <a:p>
             <a:pPr algn="l"/>
-            <a:r>
+            <a:fld id="{4B0E1F8A-6C1D-4E2A-9F3B-7A5C8D2E1F60}" type="slidenum">
               <a:rPr sz="1600" b="0" i="0">
                 <a:solidFill>
                   <a:srgbClr val="8A8A9A"/>
@@ -7363,7 +7363,7 @@
                 <a:latin typeface="Arial"/>
               </a:rPr>
               <a:t>21</a:t>
-            </a:r>
+            </a:fld>
           </a:p>
         </p:txBody>
       </p:sp>
@@ -7530,7 +7530,7 @@
           <a:lstStyle/>
           <a:p>
             <a:pPr algn="l"/>
-            <a:r>
+            <a:fld id="{4B0E1F8A-6C1D-4E2A-9F3B-7A5C8D2E1F60}" type="slidenum">
               <a:rPr sz="1600" b="0" i="0">
                 <a:solidFill>
                   <a:srgbClr val="8A8A9A"/>
@@ -7538,7 +7538,7 @@
                 <a:latin typeface="Arial"/>
               </a:rPr>
               <a:t>22</a:t>
-            </a:r>
+            </a:fld>
           </a:p>
         </p:txBody>
       </p:sp>
@@ -7705,7 +7705,7 @@
           <a:lstStyle/>
           <a:p>
             <a:pPr algn="l"/>
-            <a:r>
+            <a:fld id="{4B0E1F8A-6C1D-4E2A-9F3B-7A5C8D2E1F60}" type="slidenum">
               <a:rPr sz="1600" b="0" i="0">
                 <a:solidFill>
                   <a:srgbClr val="8A8A9A"/>
@@ -7713,7 +7713,7 @@
                 <a:latin typeface="Arial"/>
               </a:rPr>
               <a:t>23</a:t>
-            </a:r>
+            </a:fld>
           </a:p>
         </p:txBody>
       </p:sp>
@@ -7942,7 +7942,7 @@
           <a:lstStyle/>
           <a:p>
             <a:pPr algn="l"/>
-            <a:r>
+            <a:fld id="{4B0E1F8A-6C1D-4E2A-9F3B-7A5C8D2E1F60}" type="slidenum">
               <a:rPr sz="1600" b="0" i="0">
                 <a:solidFill>
                   <a:srgbClr val="8A8A9A"/>
@@ -7950,7 +7950,7 @@
                 <a:latin typeface="Arial"/>
               </a:rPr>
               <a:t>24</a:t>
-            </a:r>
+            </a:fld>
           </a:p>
         </p:txBody>
       </p:sp>
@@ -8442,7 +8442,7 @@
           <a:lstStyle/>
           <a:p>
             <a:pPr algn="l"/>
-            <a:r>
+            <a:fld id="{4B0E1F8A-6C1D-4E2A-9F3B-7A5C8D2E1F60}" type="slidenum">
               <a:rPr sz="1600" b="0" i="0">
                 <a:solidFill>
                   <a:srgbClr val="8A8A9A"/>
@@ -8450,7 +8450,7 @@
                 <a:latin typeface="Arial"/>
               </a:rPr>
               <a:t>25</a:t>
-            </a:r>
+            </a:fld>
           </a:p>
         </p:txBody>
       </p:sp>
@@ -8968,7 +8968,7 @@
           <a:lstStyle/>
           <a:p>
             <a:pPr algn="l"/>
-            <a:r>
+            <a:fld id="{4B0E1F8A-6C1D-4E2A-9F3B-7A5C8D2E1F60}" type="slidenum">
               <a:rPr sz="1600" b="0" i="0">
                 <a:solidFill>
                   <a:srgbClr val="8A8A9A"/>
@@ -8976,7 +8976,7 @@
                 <a:latin typeface="Arial"/>
               </a:rPr>
               <a:t>26</a:t>
-            </a:r>
+            </a:fld>
           </a:p>
         </p:txBody>
       </p:sp>
@@ -9179,7 +9179,7 @@
           <a:lstStyle/>
           <a:p>
             <a:pPr algn="l"/>
-            <a:r>
+            <a:fld id="{4B0E1F8A-6C1D-4E2A-9F3B-7A5C8D2E1F60}" type="slidenum">
               <a:rPr sz="1600" b="0" i="0">
                 <a:solidFill>
                   <a:srgbClr val="8A8A9A"/>
@@ -9187,7 +9187,7 @@
                 <a:latin typeface="Arial"/>
               </a:rPr>
               <a:t>27</a:t>
-            </a:r>
+            </a:fld>
           </a:p>
         </p:txBody>
       </p:sp>
@@ -9354,7 +9354,7 @@
           <a:lstStyle/>
           <a:p>
             <a:pPr algn="l"/>
-            <a:r>
+            <a:fld id="{4B0E1F8A-6C1D-4E2A-9F3B-7A5C8D2E1F60}" type="slidenum">
               <a:rPr sz="1600" b="0" i="0">
                 <a:solidFill>
                   <a:srgbClr val="8A8A9A"/>
@@ -9362,7 +9362,7 @@
                 <a:latin typeface="Arial"/>
               </a:rPr>
               <a:t>28</a:t>
-            </a:r>
+            </a:fld>
           </a:p>
         </p:txBody>
       </p:sp>
@@ -9591,7 +9591,7 @@
           <a:lstStyle/>
           <a:p>
             <a:pPr algn="l"/>
-            <a:r>
+            <a:fld id="{4B0E1F8A-6C1D-4E2A-9F3B-7A5C8D2E1F60}" type="slidenum">
               <a:rPr sz="1600" b="0" i="0">
                 <a:solidFill>
                   <a:srgbClr val="8A8A9A"/>
@@ -9599,7 +9599,7 @@
                 <a:latin typeface="Arial"/>
               </a:rPr>
               <a:t>29</a:t>
-            </a:r>
+            </a:fld>
           </a:p>
         </p:txBody>
       </p:sp>
@@ -9898,7 +9898,7 @@
           <a:lstStyle/>
           <a:p>
             <a:pPr algn="l"/>
-            <a:r>
+            <a:fld id="{4B0E1F8A-6C1D-4E2A-9F3B-7A5C8D2E1F60}" type="slidenum">
               <a:rPr sz="1600" b="0" i="0">
                 <a:solidFill>
                   <a:srgbClr val="8A8A9A"/>
@@ -9906,7 +9906,7 @@
                 <a:latin typeface="Arial"/>
               </a:rPr>
               <a:t>3</a:t>
-            </a:r>
+            </a:fld>
           </a:p>
         </p:txBody>
       </p:sp>
@@ -10344,7 +10344,7 @@
           <a:lstStyle/>
           <a:p>
             <a:pPr algn="l"/>
-            <a:r>
+            <a:fld id="{4B0E1F8A-6C1D-4E2A-9F3B-7A5C8D2E1F60}" type="slidenum">
               <a:rPr sz="1600" b="0" i="0">
                 <a:solidFill>
                   <a:srgbClr val="8A8A9A"/>
@@ -10352,7 +10352,7 @@
                 <a:latin typeface="Arial"/>
               </a:rPr>
               <a:t>30</a:t>
-            </a:r>
+            </a:fld>
           </a:p>
         </p:txBody>
       </p:sp>
@@ -10580,7 +10580,7 @@
           <a:lstStyle/>
           <a:p>
             <a:pPr algn="l"/>
-            <a:r>
+            <a:fld id="{4B0E1F8A-6C1D-4E2A-9F3B-7A5C8D2E1F60}" type="slidenum">
               <a:rPr sz="1600" b="0" i="0">
                 <a:solidFill>
                   <a:srgbClr val="8A8A9A"/>
@@ -10588,7 +10588,7 @@
                 <a:latin typeface="Arial"/>
               </a:rPr>
               <a:t>31</a:t>
-            </a:r>
+            </a:fld>
           </a:p>
         </p:txBody>
       </p:sp>
@@ -10791,7 +10791,7 @@
           <a:lstStyle/>
           <a:p>
             <a:pPr algn="l"/>
-            <a:r>
+            <a:fld id="{4B0E1F8A-6C1D-4E2A-9F3B-7A5C8D2E1F60}" type="slidenum">
               <a:rPr sz="1600" b="0" i="0">
                 <a:solidFill>
                   <a:srgbClr val="8A8A9A"/>
@@ -10799,7 +10799,7 @@
                 <a:latin typeface="Arial"/>
               </a:rPr>
               <a:t>32</a:t>
-            </a:r>
+            </a:fld>
           </a:p>
         </p:txBody>
       </p:sp>
@@ -11291,7 +11291,7 @@
           <a:lstStyle/>
           <a:p>
             <a:pPr algn="l"/>
-            <a:r>
+            <a:fld id="{4B0E1F8A-6C1D-4E2A-9F3B-7A5C8D2E1F60}" type="slidenum">
               <a:rPr sz="1600" b="0" i="0">
                 <a:solidFill>
                   <a:srgbClr val="8A8A9A"/>
@@ -11299,7 +11299,7 @@
                 <a:latin typeface="Arial"/>
               </a:rPr>
               <a:t>33</a:t>
-            </a:r>
+            </a:fld>
           </a:p>
         </p:txBody>
       </p:sp>
@@ -11502,7 +11502,7 @@
           <a:lstStyle/>
           <a:p>
             <a:pPr algn="l"/>
-            <a:r>
+            <a:fld id="{4B0E1F8A-6C1D-4E2A-9F3B-7A5C8D2E1F60}" type="slidenum">
               <a:rPr sz="1600" b="0" i="0">
                 <a:solidFill>
                   <a:srgbClr val="8A8A9A"/>
@@ -11510,7 +11510,7 @@
                 <a:latin typeface="Arial"/>
               </a:rPr>
               <a:t>34</a:t>
-            </a:r>
+            </a:fld>
           </a:p>
         </p:txBody>
       </p:sp>
@@ -11677,7 +11677,7 @@
           <a:lstStyle/>
           <a:p>
             <a:pPr algn="l"/>
-            <a:r>
+            <a:fld id="{4B0E1F8A-6C1D-4E2A-9F3B-7A5C8D2E1F60}" type="slidenum">
               <a:rPr sz="1600" b="0" i="0">
                 <a:solidFill>
                   <a:srgbClr val="8A8A9A"/>
@@ -11685,7 +11685,7 @@
                 <a:latin typeface="Arial"/>
               </a:rPr>
               <a:t>35</a:t>
-            </a:r>
+            </a:fld>
           </a:p>
         </p:txBody>
       </p:sp>
@@ -11914,7 +11914,7 @@
           <a:lstStyle/>
           <a:p>
             <a:pPr algn="l"/>
-            <a:r>
+            <a:fld id="{4B0E1F8A-6C1D-4E2A-9F3B-7A5C8D2E1F60}" type="slidenum">
               <a:rPr sz="1600" b="0" i="0">
                 <a:solidFill>
                   <a:srgbClr val="8A8A9A"/>
@@ -11922,7 +11922,7 @@
                 <a:latin typeface="Arial"/>
               </a:rPr>
               <a:t>36</a:t>
-            </a:r>
+            </a:fld>
           </a:p>
         </p:txBody>
       </p:sp>
@@ -12125,7 +12125,7 @@
           <a:lstStyle/>
           <a:p>
             <a:pPr algn="l"/>
-            <a:r>
+            <a:fld id="{4B0E1F8A-6C1D-4E2A-9F3B-7A5C8D2E1F60}" type="slidenum">
               <a:rPr sz="1600" b="0" i="0">
                 <a:solidFill>
                   <a:srgbClr val="8A8A9A"/>
@@ -12133,7 +12133,7 @@
                 <a:latin typeface="Arial"/>
               </a:rPr>
               <a:t>37</a:t>
-            </a:r>
+            </a:fld>
           </a:p>
         </p:txBody>
       </p:sp>
@@ -12625,7 +12625,7 @@
           <a:lstStyle/>
           <a:p>
             <a:pPr algn="l"/>
-            <a:r>
+            <a:fld id="{4B0E1F8A-6C1D-4E2A-9F3B-7A5C8D2E1F60}" type="slidenum">
               <a:rPr sz="1600" b="0" i="0">
                 <a:solidFill>
                   <a:srgbClr val="8A8A9A"/>
@@ -12633,7 +12633,7 @@
                 <a:latin typeface="Arial"/>
               </a:rPr>
               <a:t>38</a:t>
-            </a:r>
+            </a:fld>
           </a:p>
         </p:txBody>
       </p:sp>
@@ -12801,7 +12801,7 @@
           <a:lstStyle/>
           <a:p>
             <a:pPr algn="l"/>
-            <a:r>
+            <a:fld id="{4B0E1F8A-6C1D-4E2A-9F3B-7A5C8D2E1F60}" type="slidenum">
               <a:rPr sz="1600" b="0" i="0">
                 <a:solidFill>
                   <a:srgbClr val="8A8A9A"/>
@@ -12809,7 +12809,7 @@
                 <a:latin typeface="Arial"/>
               </a:rPr>
               <a:t>39</a:t>
-            </a:r>
+            </a:fld>
           </a:p>
         </p:txBody>
       </p:sp>
@@ -13107,7 +13107,7 @@
           <a:lstStyle/>
           <a:p>
             <a:pPr algn="l"/>
-            <a:r>
+            <a:fld id="{4B0E1F8A-6C1D-4E2A-9F3B-7A5C8D2E1F60}" type="slidenum">
               <a:rPr sz="1600" b="0" i="0">
                 <a:solidFill>
                   <a:srgbClr val="8A8A9A"/>
@@ -13115,7 +13115,7 @@
                 <a:latin typeface="Arial"/>
               </a:rPr>
               <a:t>4</a:t>
-            </a:r>
+            </a:fld>
           </a:p>
         </p:txBody>
       </p:sp>
@@ -13720,7 +13720,7 @@
           <a:lstStyle/>
           <a:p>
             <a:pPr algn="l"/>
-            <a:r>
+            <a:fld id="{4B0E1F8A-6C1D-4E2A-9F3B-7A5C8D2E1F60}" type="slidenum">
               <a:rPr sz="1600" b="0" i="0">
                 <a:solidFill>
                   <a:srgbClr val="8A8A9A"/>
@@ -13728,7 +13728,7 @@
                 <a:latin typeface="Arial"/>
               </a:rPr>
               <a:t>5</a:t>
-            </a:r>
+            </a:fld>
           </a:p>
         </p:txBody>
       </p:sp>
@@ -14096,7 +14096,7 @@
           <a:lstStyle/>
           <a:p>
             <a:pPr algn="l"/>
-            <a:r>
+            <a:fld id="{4B0E1F8A-6C1D-4E2A-9F3B-7A5C8D2E1F60}" type="slidenum">
               <a:rPr sz="1600" b="0" i="0">
                 <a:solidFill>
                   <a:srgbClr val="8A8A9A"/>
@@ -14104,7 +14104,7 @@
                 <a:latin typeface="Arial"/>
               </a:rPr>
               <a:t>6</a:t>
-            </a:r>
+            </a:fld>
           </a:p>
         </p:txBody>
       </p:sp>
@@ -14788,7 +14788,7 @@
           <a:lstStyle/>
           <a:p>
             <a:pPr algn="l"/>
-            <a:r>
+            <a:fld id="{4B0E1F8A-6C1D-4E2A-9F3B-7A5C8D2E1F60}" type="slidenum">
               <a:rPr sz="1600" b="0" i="0">
                 <a:solidFill>
                   <a:srgbClr val="8A8A9A"/>
@@ -14796,7 +14796,7 @@
                 <a:latin typeface="Arial"/>
               </a:rPr>
               <a:t>7</a:t>
-            </a:r>
+            </a:fld>
           </a:p>
         </p:txBody>
       </p:sp>
@@ -15252,7 +15252,7 @@
           <a:lstStyle/>
           <a:p>
             <a:pPr algn="l"/>
-            <a:r>
+            <a:fld id="{4B0E1F8A-6C1D-4E2A-9F3B-7A5C8D2E1F60}" type="slidenum">
               <a:rPr sz="1600" b="0" i="0">
                 <a:solidFill>
                   <a:srgbClr val="8A8A9A"/>
@@ -15260,7 +15260,7 @@
                 <a:latin typeface="Arial"/>
               </a:rPr>
               <a:t>8</a:t>
-            </a:r>
+            </a:fld>
           </a:p>
         </p:txBody>
       </p:sp>
@@ -15742,7 +15742,7 @@
           <a:lstStyle/>
           <a:p>
             <a:pPr algn="l"/>
-            <a:r>
+            <a:fld id="{4B0E1F8A-6C1D-4E2A-9F3B-7A5C8D2E1F60}" type="slidenum">
               <a:rPr sz="1600" b="0" i="0">
                 <a:solidFill>
                   <a:srgbClr val="8A8A9A"/>
@@ -15750,7 +15750,7 @@
                 <a:latin typeface="Arial"/>
               </a:rPr>
               <a:t>9</a:t>
-            </a:r>
+            </a:fld>
           </a:p>
         </p:txBody>
       </p:sp>

--- a/examples/pptx/claude-code-for-data-scientists.pptx
+++ b/examples/pptx/claude-code-for-data-scientists.pptx
@@ -7453,7 +7453,7 @@
         <p:spPr>
           <a:xfrm>
             <a:off x="0" y="4011168"/>
-            <a:ext cx="6557328" cy="518159"/>
+            <a:ext cx="5707380" cy="518159"/>
           </a:xfrm>
           <a:prstGeom prst="rect">
             <a:avLst/>
@@ -7526,8 +7526,8 @@
         </p:nvSpPr>
         <p:spPr>
           <a:xfrm>
-            <a:off x="5599341" y="4011168"/>
-            <a:ext cx="6592659" cy="518159"/>
+            <a:off x="6484620" y="4011168"/>
+            <a:ext cx="5707380" cy="518159"/>
           </a:xfrm>
           <a:prstGeom prst="rect">
             <a:avLst/>
@@ -7564,7 +7564,7 @@
         <p:spPr>
           <a:xfrm>
             <a:off x="5435323" y="3310127"/>
-            <a:ext cx="1321355" cy="640080"/>
+            <a:ext cx="1321354" cy="640080"/>
           </a:xfrm>
           <a:prstGeom prst="rect">
             <a:avLst/>
@@ -7984,8 +7984,8 @@
         </p:nvSpPr>
         <p:spPr>
           <a:xfrm>
-            <a:off x="7685236" y="2593848"/>
-            <a:ext cx="4506764" cy="609600"/>
+            <a:off x="7701280" y="2593848"/>
+            <a:ext cx="4490720" cy="609600"/>
           </a:xfrm>
           <a:prstGeom prst="rect">
             <a:avLst/>
@@ -8091,7 +8091,7 @@
         <p:spPr>
           <a:xfrm>
             <a:off x="0" y="4861560"/>
-            <a:ext cx="5405972" cy="609600"/>
+            <a:ext cx="4490720" cy="609600"/>
           </a:xfrm>
           <a:prstGeom prst="rect">
             <a:avLst/>
@@ -8302,8 +8302,8 @@
         </p:nvSpPr>
         <p:spPr>
           <a:xfrm>
-            <a:off x="7550805" y="4861560"/>
-            <a:ext cx="4641195" cy="609600"/>
+            <a:off x="7701280" y="4861560"/>
+            <a:ext cx="4490720" cy="609600"/>
           </a:xfrm>
           <a:prstGeom prst="rect">
             <a:avLst/>
@@ -9729,7 +9729,7 @@
         <p:spPr>
           <a:xfrm>
             <a:off x="290235" y="2029968"/>
-            <a:ext cx="3910251" cy="1005840"/>
+            <a:ext cx="3910250" cy="1005840"/>
           </a:xfrm>
           <a:prstGeom prst="rect">
             <a:avLst/>
@@ -9978,7 +9978,7 @@
         <p:spPr>
           <a:xfrm>
             <a:off x="4795183" y="4712208"/>
-            <a:ext cx="2601635" cy="518159"/>
+            <a:ext cx="2601634" cy="518159"/>
           </a:xfrm>
           <a:prstGeom prst="rect">
             <a:avLst/>
@@ -10121,7 +10121,7 @@
         <p:spPr>
           <a:xfrm>
             <a:off x="9288294" y="4712208"/>
-            <a:ext cx="1316692" cy="518159"/>
+            <a:ext cx="1316691" cy="518159"/>
           </a:xfrm>
           <a:prstGeom prst="rect">
             <a:avLst/>
@@ -12128,7 +12128,7 @@
         <p:spPr>
           <a:xfrm>
             <a:off x="5235159" y="5583935"/>
-            <a:ext cx="1721683" cy="426720"/>
+            <a:ext cx="1721682" cy="426720"/>
           </a:xfrm>
           <a:prstGeom prst="rect">
             <a:avLst/>
@@ -13499,7 +13499,7 @@
         <p:spPr>
           <a:xfrm>
             <a:off x="5973987" y="1499616"/>
-            <a:ext cx="3676075" cy="518159"/>
+            <a:ext cx="3676074" cy="518159"/>
           </a:xfrm>
           <a:prstGeom prst="rect">
             <a:avLst/>
@@ -13535,8 +13535,8 @@
         </p:nvSpPr>
         <p:spPr>
           <a:xfrm>
-            <a:off x="8680611" y="1499616"/>
-            <a:ext cx="3511389" cy="518159"/>
+            <a:off x="8845296" y="1499616"/>
+            <a:ext cx="3346704" cy="518159"/>
           </a:xfrm>
           <a:prstGeom prst="rect">
             <a:avLst/>
@@ -13711,7 +13711,7 @@
         <p:spPr>
           <a:xfrm>
             <a:off x="6491979" y="2401823"/>
-            <a:ext cx="2640091" cy="936752"/>
+            <a:ext cx="2640090" cy="936752"/>
           </a:xfrm>
           <a:prstGeom prst="rect">
             <a:avLst/>
@@ -13822,7 +13822,7 @@
         <p:spPr>
           <a:xfrm>
             <a:off x="3785355" y="3612895"/>
-            <a:ext cx="2640091" cy="936752"/>
+            <a:ext cx="2640090" cy="936752"/>
           </a:xfrm>
           <a:prstGeom prst="rect">
             <a:avLst/>
@@ -13896,7 +13896,7 @@
         <p:spPr>
           <a:xfrm>
             <a:off x="9198603" y="3612895"/>
-            <a:ext cx="2640091" cy="936752"/>
+            <a:ext cx="2640090" cy="936752"/>
           </a:xfrm>
           <a:prstGeom prst="rect">
             <a:avLst/>
@@ -14076,7 +14076,7 @@
         <p:spPr>
           <a:xfrm>
             <a:off x="9198603" y="4823967"/>
-            <a:ext cx="2640091" cy="936752"/>
+            <a:ext cx="2640090" cy="936752"/>
           </a:xfrm>
           <a:prstGeom prst="rect">
             <a:avLst/>
@@ -16871,7 +16871,7 @@
         <p:spPr>
           <a:xfrm>
             <a:off x="3599816" y="1499616"/>
-            <a:ext cx="3011169" cy="518159"/>
+            <a:ext cx="3011168" cy="518159"/>
           </a:xfrm>
           <a:prstGeom prst="rect">
             <a:avLst/>
@@ -16941,7 +16941,7 @@
         <p:spPr>
           <a:xfrm>
             <a:off x="9064340" y="1499616"/>
-            <a:ext cx="2908617" cy="518159"/>
+            <a:ext cx="2908616" cy="518159"/>
           </a:xfrm>
           <a:prstGeom prst="rect">
             <a:avLst/>
@@ -17309,7 +17309,7 @@
         <p:spPr>
           <a:xfrm>
             <a:off x="8852488" y="4218431"/>
-            <a:ext cx="3332321" cy="1542288"/>
+            <a:ext cx="3332320" cy="1542288"/>
           </a:xfrm>
           <a:prstGeom prst="rect">
             <a:avLst/>
@@ -22490,7 +22490,7 @@
         <p:spPr>
           <a:xfrm>
             <a:off x="0" y="4011168"/>
-            <a:ext cx="6955731" cy="518159"/>
+            <a:ext cx="5707380" cy="518159"/>
           </a:xfrm>
           <a:prstGeom prst="rect">
             <a:avLst/>
@@ -22559,8 +22559,8 @@
         </p:nvSpPr>
         <p:spPr>
           <a:xfrm>
-            <a:off x="6136730" y="4011168"/>
-            <a:ext cx="6055270" cy="518159"/>
+            <a:off x="6484620" y="4011168"/>
+            <a:ext cx="5707380" cy="518159"/>
           </a:xfrm>
           <a:prstGeom prst="rect">
             <a:avLst/>
@@ -22595,7 +22595,7 @@
         <p:spPr>
           <a:xfrm>
             <a:off x="5435323" y="3310127"/>
-            <a:ext cx="1321355" cy="640080"/>
+            <a:ext cx="1321354" cy="640080"/>
           </a:xfrm>
           <a:prstGeom prst="rect">
             <a:avLst/>

--- a/examples/pptx/claude-code-for-data-scientists.pptx
+++ b/examples/pptx/claude-code-for-data-scientists.pptx
@@ -774,8 +774,8 @@
         </p:nvSpPr>
         <p:spPr>
           <a:xfrm>
-            <a:off x="10363200" y="6035040"/>
-            <a:ext cx="1371600" cy="365760"/>
+            <a:off x="11186160" y="6035040"/>
+            <a:ext cx="548640" cy="365760"/>
           </a:xfrm>
         </p:spPr>
         <p:txBody>
@@ -877,8 +877,8 @@
         </p:nvSpPr>
         <p:spPr>
           <a:xfrm>
-            <a:off x="10363200" y="6035040"/>
-            <a:ext cx="1371600" cy="365760"/>
+            <a:off x="11186160" y="6035040"/>
+            <a:ext cx="548640" cy="365760"/>
           </a:xfrm>
         </p:spPr>
         <p:txBody>
@@ -1202,8 +1202,8 @@
         </p:nvSpPr>
         <p:spPr>
           <a:xfrm>
-            <a:off x="10363200" y="6035040"/>
-            <a:ext cx="1371600" cy="365760"/>
+            <a:off x="11186160" y="6035040"/>
+            <a:ext cx="548640" cy="365760"/>
           </a:xfrm>
         </p:spPr>
         <p:txBody>
@@ -1527,8 +1527,8 @@
         </p:nvSpPr>
         <p:spPr>
           <a:xfrm>
-            <a:off x="10363200" y="6035040"/>
-            <a:ext cx="1371600" cy="365760"/>
+            <a:off x="11186160" y="6035040"/>
+            <a:ext cx="548640" cy="365760"/>
           </a:xfrm>
         </p:spPr>
         <p:txBody>
@@ -1926,8 +1926,8 @@
         </p:nvSpPr>
         <p:spPr>
           <a:xfrm>
-            <a:off x="10363200" y="6035040"/>
-            <a:ext cx="1371600" cy="365760"/>
+            <a:off x="11186160" y="6035040"/>
+            <a:ext cx="548640" cy="365760"/>
           </a:xfrm>
         </p:spPr>
         <p:txBody>
@@ -2473,8 +2473,8 @@
         </p:nvSpPr>
         <p:spPr>
           <a:xfrm>
-            <a:off x="10363200" y="6035040"/>
-            <a:ext cx="1371600" cy="365760"/>
+            <a:off x="11186160" y="6035040"/>
+            <a:ext cx="548640" cy="365760"/>
           </a:xfrm>
         </p:spPr>
         <p:txBody>
@@ -2650,8 +2650,8 @@
         </p:nvSpPr>
         <p:spPr>
           <a:xfrm>
-            <a:off x="10363200" y="6035040"/>
-            <a:ext cx="1371600" cy="365760"/>
+            <a:off x="11186160" y="6035040"/>
+            <a:ext cx="548640" cy="365760"/>
           </a:xfrm>
         </p:spPr>
         <p:txBody>
@@ -3049,8 +3049,8 @@
         </p:nvSpPr>
         <p:spPr>
           <a:xfrm>
-            <a:off x="10363200" y="6035040"/>
-            <a:ext cx="1371600" cy="365760"/>
+            <a:off x="11186160" y="6035040"/>
+            <a:ext cx="548640" cy="365760"/>
           </a:xfrm>
         </p:spPr>
         <p:txBody>
@@ -3391,8 +3391,8 @@
         </p:nvSpPr>
         <p:spPr>
           <a:xfrm>
-            <a:off x="10363200" y="6035040"/>
-            <a:ext cx="1371600" cy="365760"/>
+            <a:off x="11186160" y="6035040"/>
+            <a:ext cx="548640" cy="365760"/>
           </a:xfrm>
         </p:spPr>
         <p:txBody>
@@ -3896,8 +3896,8 @@
         </p:nvSpPr>
         <p:spPr>
           <a:xfrm>
-            <a:off x="10363200" y="6035040"/>
-            <a:ext cx="1371600" cy="365760"/>
+            <a:off x="11186160" y="6035040"/>
+            <a:ext cx="548640" cy="365760"/>
           </a:xfrm>
         </p:spPr>
         <p:txBody>
@@ -4068,8 +4068,8 @@
         </p:nvSpPr>
         <p:spPr>
           <a:xfrm>
-            <a:off x="10363200" y="6035040"/>
-            <a:ext cx="1371600" cy="365760"/>
+            <a:off x="11186160" y="6035040"/>
+            <a:ext cx="548640" cy="365760"/>
           </a:xfrm>
         </p:spPr>
         <p:txBody>
@@ -4240,8 +4240,8 @@
         </p:nvSpPr>
         <p:spPr>
           <a:xfrm>
-            <a:off x="10363200" y="6035040"/>
-            <a:ext cx="1371600" cy="365760"/>
+            <a:off x="11186160" y="6035040"/>
+            <a:ext cx="548640" cy="365760"/>
           </a:xfrm>
         </p:spPr>
         <p:txBody>
@@ -4412,8 +4412,8 @@
         </p:nvSpPr>
         <p:spPr>
           <a:xfrm>
-            <a:off x="10363200" y="6035040"/>
-            <a:ext cx="1371600" cy="365760"/>
+            <a:off x="11186160" y="6035040"/>
+            <a:ext cx="548640" cy="365760"/>
           </a:xfrm>
         </p:spPr>
         <p:txBody>
@@ -4547,8 +4547,8 @@
         </p:nvSpPr>
         <p:spPr>
           <a:xfrm>
-            <a:off x="10363200" y="6035040"/>
-            <a:ext cx="1371600" cy="365760"/>
+            <a:off x="11186160" y="6035040"/>
+            <a:ext cx="548640" cy="365760"/>
           </a:xfrm>
         </p:spPr>
         <p:txBody>
@@ -4761,8 +4761,8 @@
         </p:nvSpPr>
         <p:spPr>
           <a:xfrm>
-            <a:off x="10363200" y="6035040"/>
-            <a:ext cx="1371600" cy="365760"/>
+            <a:off x="11186160" y="6035040"/>
+            <a:ext cx="548640" cy="365760"/>
           </a:xfrm>
         </p:spPr>
         <p:txBody>
@@ -5515,8 +5515,8 @@
         </p:nvSpPr>
         <p:spPr>
           <a:xfrm>
-            <a:off x="10363200" y="6035040"/>
-            <a:ext cx="1371600" cy="365760"/>
+            <a:off x="11186160" y="6035040"/>
+            <a:ext cx="548640" cy="365760"/>
           </a:xfrm>
         </p:spPr>
         <p:txBody>
@@ -6207,8 +6207,8 @@
         </p:nvSpPr>
         <p:spPr>
           <a:xfrm>
-            <a:off x="10363200" y="6035040"/>
-            <a:ext cx="1371600" cy="365760"/>
+            <a:off x="11186160" y="6035040"/>
+            <a:ext cx="548640" cy="365760"/>
           </a:xfrm>
         </p:spPr>
         <p:txBody>
@@ -6643,8 +6643,8 @@
         </p:nvSpPr>
         <p:spPr>
           <a:xfrm>
-            <a:off x="10363200" y="6035040"/>
-            <a:ext cx="1371600" cy="365760"/>
+            <a:off x="11186160" y="6035040"/>
+            <a:ext cx="548640" cy="365760"/>
           </a:xfrm>
         </p:spPr>
         <p:txBody>
@@ -7352,8 +7352,8 @@
         </p:nvSpPr>
         <p:spPr>
           <a:xfrm>
-            <a:off x="10363200" y="6035040"/>
-            <a:ext cx="1371600" cy="365760"/>
+            <a:off x="11186160" y="6035040"/>
+            <a:ext cx="548640" cy="365760"/>
           </a:xfrm>
         </p:spPr>
         <p:txBody>
@@ -7640,8 +7640,8 @@
         </p:nvSpPr>
         <p:spPr>
           <a:xfrm>
-            <a:off x="10363200" y="6035040"/>
-            <a:ext cx="1371600" cy="365760"/>
+            <a:off x="11186160" y="6035040"/>
+            <a:ext cx="548640" cy="365760"/>
           </a:xfrm>
         </p:spPr>
         <p:txBody>
@@ -8379,8 +8379,8 @@
         </p:nvSpPr>
         <p:spPr>
           <a:xfrm>
-            <a:off x="10363200" y="6035040"/>
-            <a:ext cx="1371600" cy="365760"/>
+            <a:off x="11186160" y="6035040"/>
+            <a:ext cx="548640" cy="365760"/>
           </a:xfrm>
         </p:spPr>
         <p:txBody>
@@ -8975,8 +8975,8 @@
         </p:nvSpPr>
         <p:spPr>
           <a:xfrm>
-            <a:off x="10363200" y="6035040"/>
-            <a:ext cx="1371600" cy="365760"/>
+            <a:off x="11186160" y="6035040"/>
+            <a:ext cx="548640" cy="365760"/>
           </a:xfrm>
         </p:spPr>
         <p:txBody>
@@ -9665,8 +9665,8 @@
         </p:nvSpPr>
         <p:spPr>
           <a:xfrm>
-            <a:off x="10363200" y="6035040"/>
-            <a:ext cx="1371600" cy="365760"/>
+            <a:off x="11186160" y="6035040"/>
+            <a:ext cx="548640" cy="365760"/>
           </a:xfrm>
         </p:spPr>
         <p:txBody>
@@ -10197,8 +10197,8 @@
         </p:nvSpPr>
         <p:spPr>
           <a:xfrm>
-            <a:off x="10363200" y="6035040"/>
-            <a:ext cx="1371600" cy="365760"/>
+            <a:off x="11186160" y="6035040"/>
+            <a:ext cx="548640" cy="365760"/>
           </a:xfrm>
         </p:spPr>
         <p:txBody>
@@ -10872,8 +10872,8 @@
         </p:nvSpPr>
         <p:spPr>
           <a:xfrm>
-            <a:off x="10363200" y="6035040"/>
-            <a:ext cx="1371600" cy="365760"/>
+            <a:off x="11186160" y="6035040"/>
+            <a:ext cx="548640" cy="365760"/>
           </a:xfrm>
         </p:spPr>
         <p:txBody>
@@ -11404,8 +11404,8 @@
         </p:nvSpPr>
         <p:spPr>
           <a:xfrm>
-            <a:off x="10363200" y="6035040"/>
-            <a:ext cx="1371600" cy="365760"/>
+            <a:off x="11186160" y="6035040"/>
+            <a:ext cx="548640" cy="365760"/>
           </a:xfrm>
         </p:spPr>
         <p:txBody>
@@ -11783,8 +11783,8 @@
         </p:nvSpPr>
         <p:spPr>
           <a:xfrm>
-            <a:off x="10363200" y="6035040"/>
-            <a:ext cx="1371600" cy="365760"/>
+            <a:off x="11186160" y="6035040"/>
+            <a:ext cx="548640" cy="365760"/>
           </a:xfrm>
         </p:spPr>
         <p:txBody>
@@ -12204,8 +12204,8 @@
         </p:nvSpPr>
         <p:spPr>
           <a:xfrm>
-            <a:off x="10363200" y="6035040"/>
-            <a:ext cx="1371600" cy="365760"/>
+            <a:off x="11186160" y="6035040"/>
+            <a:ext cx="548640" cy="365760"/>
           </a:xfrm>
         </p:spPr>
         <p:txBody>
@@ -12871,8 +12871,8 @@
         </p:nvSpPr>
         <p:spPr>
           <a:xfrm>
-            <a:off x="10363200" y="6035040"/>
-            <a:ext cx="1371600" cy="365760"/>
+            <a:off x="11186160" y="6035040"/>
+            <a:ext cx="548640" cy="365760"/>
           </a:xfrm>
         </p:spPr>
         <p:txBody>
@@ -13398,8 +13398,8 @@
         </p:nvSpPr>
         <p:spPr>
           <a:xfrm>
-            <a:off x="10363200" y="6035040"/>
-            <a:ext cx="1371600" cy="365760"/>
+            <a:off x="11186160" y="6035040"/>
+            <a:ext cx="548640" cy="365760"/>
           </a:xfrm>
         </p:spPr>
         <p:txBody>
@@ -16084,21 +16084,21 @@
         </p:nvSpPr>
         <p:spPr>
           <a:xfrm>
-            <a:off x="10363200" y="6035040"/>
-            <a:ext cx="1371600" cy="365760"/>
-          </a:xfrm>
-          <a:prstGeom prst="rect">
-            <a:avLst/>
-          </a:prstGeom>
-          <a:noFill/>
-        </p:spPr>
-        <p:txBody>
-          <a:bodyPr wrap="none" lIns="0" rIns="0">
-            <a:noAutofit/>
-          </a:bodyPr>
-          <a:lstStyle/>
-          <a:p>
-            <a:pPr algn="l"/>
+            <a:off x="11186160" y="6035040"/>
+            <a:ext cx="548640" cy="365760"/>
+          </a:xfrm>
+          <a:prstGeom prst="rect">
+            <a:avLst/>
+          </a:prstGeom>
+          <a:noFill/>
+        </p:spPr>
+        <p:txBody>
+          <a:bodyPr wrap="none" lIns="0" rIns="0">
+            <a:noAutofit/>
+          </a:bodyPr>
+          <a:lstStyle/>
+          <a:p>
+            <a:pPr algn="r"/>
             <a:fld id="{4B0E1F8A-6C1D-4E2A-9F3B-7A5C8D2E1F60}" type="slidenum">
               <a:rPr sz="1600" b="0" i="0">
                 <a:solidFill>
@@ -16119,7 +16119,7 @@
         </p:nvSpPr>
         <p:spPr>
           <a:xfrm>
-            <a:off x="9262170" y="6035040"/>
+            <a:off x="10085130" y="6035040"/>
             <a:ext cx="1213008" cy="365760"/>
           </a:xfrm>
           <a:prstGeom prst="rect">
@@ -16358,21 +16358,21 @@
         </p:nvSpPr>
         <p:spPr>
           <a:xfrm>
-            <a:off x="10363200" y="6035040"/>
-            <a:ext cx="1371600" cy="365760"/>
-          </a:xfrm>
-          <a:prstGeom prst="rect">
-            <a:avLst/>
-          </a:prstGeom>
-          <a:noFill/>
-        </p:spPr>
-        <p:txBody>
-          <a:bodyPr wrap="none" lIns="0" rIns="0">
-            <a:noAutofit/>
-          </a:bodyPr>
-          <a:lstStyle/>
-          <a:p>
-            <a:pPr algn="l"/>
+            <a:off x="11186160" y="6035040"/>
+            <a:ext cx="548640" cy="365760"/>
+          </a:xfrm>
+          <a:prstGeom prst="rect">
+            <a:avLst/>
+          </a:prstGeom>
+          <a:noFill/>
+        </p:spPr>
+        <p:txBody>
+          <a:bodyPr wrap="none" lIns="0" rIns="0">
+            <a:noAutofit/>
+          </a:bodyPr>
+          <a:lstStyle/>
+          <a:p>
+            <a:pPr algn="r"/>
             <a:fld id="{4B0E1F8A-6C1D-4E2A-9F3B-7A5C8D2E1F60}" type="slidenum">
               <a:rPr sz="1600" b="0" i="0">
                 <a:solidFill>
@@ -16535,21 +16535,21 @@
         </p:nvSpPr>
         <p:spPr>
           <a:xfrm>
-            <a:off x="10363200" y="6035040"/>
-            <a:ext cx="1371600" cy="365760"/>
-          </a:xfrm>
-          <a:prstGeom prst="rect">
-            <a:avLst/>
-          </a:prstGeom>
-          <a:noFill/>
-        </p:spPr>
-        <p:txBody>
-          <a:bodyPr wrap="none" lIns="0" rIns="0">
-            <a:noAutofit/>
-          </a:bodyPr>
-          <a:lstStyle/>
-          <a:p>
-            <a:pPr algn="l"/>
+            <a:off x="11186160" y="6035040"/>
+            <a:ext cx="548640" cy="365760"/>
+          </a:xfrm>
+          <a:prstGeom prst="rect">
+            <a:avLst/>
+          </a:prstGeom>
+          <a:noFill/>
+        </p:spPr>
+        <p:txBody>
+          <a:bodyPr wrap="none" lIns="0" rIns="0">
+            <a:noAutofit/>
+          </a:bodyPr>
+          <a:lstStyle/>
+          <a:p>
+            <a:pPr algn="r"/>
             <a:fld id="{4B0E1F8A-6C1D-4E2A-9F3B-7A5C8D2E1F60}" type="slidenum">
               <a:rPr sz="1600" b="0" i="0">
                 <a:solidFill>
@@ -16738,21 +16738,21 @@
         </p:nvSpPr>
         <p:spPr>
           <a:xfrm>
-            <a:off x="10363200" y="6035040"/>
-            <a:ext cx="1371600" cy="365760"/>
-          </a:xfrm>
-          <a:prstGeom prst="rect">
-            <a:avLst/>
-          </a:prstGeom>
-          <a:noFill/>
-        </p:spPr>
-        <p:txBody>
-          <a:bodyPr wrap="none" lIns="0" rIns="0">
-            <a:noAutofit/>
-          </a:bodyPr>
-          <a:lstStyle/>
-          <a:p>
-            <a:pPr algn="l"/>
+            <a:off x="11186160" y="6035040"/>
+            <a:ext cx="548640" cy="365760"/>
+          </a:xfrm>
+          <a:prstGeom prst="rect">
+            <a:avLst/>
+          </a:prstGeom>
+          <a:noFill/>
+        </p:spPr>
+        <p:txBody>
+          <a:bodyPr wrap="none" lIns="0" rIns="0">
+            <a:noAutofit/>
+          </a:bodyPr>
+          <a:lstStyle/>
+          <a:p>
+            <a:pPr algn="r"/>
             <a:fld id="{4B0E1F8A-6C1D-4E2A-9F3B-7A5C8D2E1F60}" type="slidenum">
               <a:rPr sz="1600" b="0" i="0">
                 <a:solidFill>
@@ -16773,7 +16773,7 @@
         </p:nvSpPr>
         <p:spPr>
           <a:xfrm>
-            <a:off x="9262170" y="6035040"/>
+            <a:off x="10085130" y="6035040"/>
             <a:ext cx="1213008" cy="365760"/>
           </a:xfrm>
           <a:prstGeom prst="rect">
@@ -17345,21 +17345,21 @@
         </p:nvSpPr>
         <p:spPr>
           <a:xfrm>
-            <a:off x="10363200" y="6035040"/>
-            <a:ext cx="1371600" cy="365760"/>
-          </a:xfrm>
-          <a:prstGeom prst="rect">
-            <a:avLst/>
-          </a:prstGeom>
-          <a:noFill/>
-        </p:spPr>
-        <p:txBody>
-          <a:bodyPr wrap="none" lIns="0" rIns="0">
-            <a:noAutofit/>
-          </a:bodyPr>
-          <a:lstStyle/>
-          <a:p>
-            <a:pPr algn="l"/>
+            <a:off x="11186160" y="6035040"/>
+            <a:ext cx="548640" cy="365760"/>
+          </a:xfrm>
+          <a:prstGeom prst="rect">
+            <a:avLst/>
+          </a:prstGeom>
+          <a:noFill/>
+        </p:spPr>
+        <p:txBody>
+          <a:bodyPr wrap="none" lIns="0" rIns="0">
+            <a:noAutofit/>
+          </a:bodyPr>
+          <a:lstStyle/>
+          <a:p>
+            <a:pPr algn="r"/>
             <a:fld id="{4B0E1F8A-6C1D-4E2A-9F3B-7A5C8D2E1F60}" type="slidenum">
               <a:rPr sz="1600" b="0" i="0">
                 <a:solidFill>
@@ -17380,7 +17380,7 @@
         </p:nvSpPr>
         <p:spPr>
           <a:xfrm>
-            <a:off x="9262170" y="6035040"/>
+            <a:off x="10085130" y="6035040"/>
             <a:ext cx="1213008" cy="365760"/>
           </a:xfrm>
           <a:prstGeom prst="rect">
@@ -17689,21 +17689,21 @@
         </p:nvSpPr>
         <p:spPr>
           <a:xfrm>
-            <a:off x="10363200" y="6035040"/>
-            <a:ext cx="1371600" cy="365760"/>
-          </a:xfrm>
-          <a:prstGeom prst="rect">
-            <a:avLst/>
-          </a:prstGeom>
-          <a:noFill/>
-        </p:spPr>
-        <p:txBody>
-          <a:bodyPr wrap="none" lIns="0" rIns="0">
-            <a:noAutofit/>
-          </a:bodyPr>
-          <a:lstStyle/>
-          <a:p>
-            <a:pPr algn="l"/>
+            <a:off x="11186160" y="6035040"/>
+            <a:ext cx="548640" cy="365760"/>
+          </a:xfrm>
+          <a:prstGeom prst="rect">
+            <a:avLst/>
+          </a:prstGeom>
+          <a:noFill/>
+        </p:spPr>
+        <p:txBody>
+          <a:bodyPr wrap="none" lIns="0" rIns="0">
+            <a:noAutofit/>
+          </a:bodyPr>
+          <a:lstStyle/>
+          <a:p>
+            <a:pPr algn="r"/>
             <a:fld id="{4B0E1F8A-6C1D-4E2A-9F3B-7A5C8D2E1F60}" type="slidenum">
               <a:rPr sz="1600" b="0" i="0">
                 <a:solidFill>
@@ -17724,7 +17724,7 @@
         </p:nvSpPr>
         <p:spPr>
           <a:xfrm>
-            <a:off x="9262170" y="6035040"/>
+            <a:off x="10085130" y="6035040"/>
             <a:ext cx="1213008" cy="365760"/>
           </a:xfrm>
           <a:prstGeom prst="rect">
@@ -17928,21 +17928,21 @@
         </p:nvSpPr>
         <p:spPr>
           <a:xfrm>
-            <a:off x="10363200" y="6035040"/>
-            <a:ext cx="1371600" cy="365760"/>
-          </a:xfrm>
-          <a:prstGeom prst="rect">
-            <a:avLst/>
-          </a:prstGeom>
-          <a:noFill/>
-        </p:spPr>
-        <p:txBody>
-          <a:bodyPr wrap="none" lIns="0" rIns="0">
-            <a:noAutofit/>
-          </a:bodyPr>
-          <a:lstStyle/>
-          <a:p>
-            <a:pPr algn="l"/>
+            <a:off x="11186160" y="6035040"/>
+            <a:ext cx="548640" cy="365760"/>
+          </a:xfrm>
+          <a:prstGeom prst="rect">
+            <a:avLst/>
+          </a:prstGeom>
+          <a:noFill/>
+        </p:spPr>
+        <p:txBody>
+          <a:bodyPr wrap="none" lIns="0" rIns="0">
+            <a:noAutofit/>
+          </a:bodyPr>
+          <a:lstStyle/>
+          <a:p>
+            <a:pPr algn="r"/>
             <a:fld id="{4B0E1F8A-6C1D-4E2A-9F3B-7A5C8D2E1F60}" type="slidenum">
               <a:rPr sz="1600" b="0" i="0">
                 <a:solidFill>
@@ -17963,7 +17963,7 @@
         </p:nvSpPr>
         <p:spPr>
           <a:xfrm>
-            <a:off x="9262170" y="6035040"/>
+            <a:off x="10085130" y="6035040"/>
             <a:ext cx="1213008" cy="365760"/>
           </a:xfrm>
           <a:prstGeom prst="rect">
@@ -18141,21 +18141,21 @@
         </p:nvSpPr>
         <p:spPr>
           <a:xfrm>
-            <a:off x="10363200" y="6035040"/>
-            <a:ext cx="1371600" cy="365760"/>
-          </a:xfrm>
-          <a:prstGeom prst="rect">
-            <a:avLst/>
-          </a:prstGeom>
-          <a:noFill/>
-        </p:spPr>
-        <p:txBody>
-          <a:bodyPr wrap="none" lIns="0" rIns="0">
-            <a:noAutofit/>
-          </a:bodyPr>
-          <a:lstStyle/>
-          <a:p>
-            <a:pPr algn="l"/>
+            <a:off x="11186160" y="6035040"/>
+            <a:ext cx="548640" cy="365760"/>
+          </a:xfrm>
+          <a:prstGeom prst="rect">
+            <a:avLst/>
+          </a:prstGeom>
+          <a:noFill/>
+        </p:spPr>
+        <p:txBody>
+          <a:bodyPr wrap="none" lIns="0" rIns="0">
+            <a:noAutofit/>
+          </a:bodyPr>
+          <a:lstStyle/>
+          <a:p>
+            <a:pPr algn="r"/>
             <a:fld id="{4B0E1F8A-6C1D-4E2A-9F3B-7A5C8D2E1F60}" type="slidenum">
               <a:rPr sz="1600" b="0" i="0">
                 <a:solidFill>
@@ -18554,21 +18554,21 @@
         </p:nvSpPr>
         <p:spPr>
           <a:xfrm>
-            <a:off x="10363200" y="6035040"/>
-            <a:ext cx="1371600" cy="365760"/>
-          </a:xfrm>
-          <a:prstGeom prst="rect">
-            <a:avLst/>
-          </a:prstGeom>
-          <a:noFill/>
-        </p:spPr>
-        <p:txBody>
-          <a:bodyPr wrap="none" lIns="0" rIns="0">
-            <a:noAutofit/>
-          </a:bodyPr>
-          <a:lstStyle/>
-          <a:p>
-            <a:pPr algn="l"/>
+            <a:off x="11186160" y="6035040"/>
+            <a:ext cx="548640" cy="365760"/>
+          </a:xfrm>
+          <a:prstGeom prst="rect">
+            <a:avLst/>
+          </a:prstGeom>
+          <a:noFill/>
+        </p:spPr>
+        <p:txBody>
+          <a:bodyPr wrap="none" lIns="0" rIns="0">
+            <a:noAutofit/>
+          </a:bodyPr>
+          <a:lstStyle/>
+          <a:p>
+            <a:pPr algn="r"/>
             <a:fld id="{4B0E1F8A-6C1D-4E2A-9F3B-7A5C8D2E1F60}" type="slidenum">
               <a:rPr sz="1600" b="0" i="0">
                 <a:solidFill>
@@ -18589,7 +18589,7 @@
         </p:nvSpPr>
         <p:spPr>
           <a:xfrm>
-            <a:off x="9262170" y="6035040"/>
+            <a:off x="10085130" y="6035040"/>
             <a:ext cx="1213008" cy="365760"/>
           </a:xfrm>
           <a:prstGeom prst="rect">
@@ -19003,21 +19003,21 @@
         </p:nvSpPr>
         <p:spPr>
           <a:xfrm>
-            <a:off x="10363200" y="6035040"/>
-            <a:ext cx="1371600" cy="365760"/>
-          </a:xfrm>
-          <a:prstGeom prst="rect">
-            <a:avLst/>
-          </a:prstGeom>
-          <a:noFill/>
-        </p:spPr>
-        <p:txBody>
-          <a:bodyPr wrap="none" lIns="0" rIns="0">
-            <a:noAutofit/>
-          </a:bodyPr>
-          <a:lstStyle/>
-          <a:p>
-            <a:pPr algn="l"/>
+            <a:off x="11186160" y="6035040"/>
+            <a:ext cx="548640" cy="365760"/>
+          </a:xfrm>
+          <a:prstGeom prst="rect">
+            <a:avLst/>
+          </a:prstGeom>
+          <a:noFill/>
+        </p:spPr>
+        <p:txBody>
+          <a:bodyPr wrap="none" lIns="0" rIns="0">
+            <a:noAutofit/>
+          </a:bodyPr>
+          <a:lstStyle/>
+          <a:p>
+            <a:pPr algn="r"/>
             <a:fld id="{4B0E1F8A-6C1D-4E2A-9F3B-7A5C8D2E1F60}" type="slidenum">
               <a:rPr sz="1600" b="0" i="0">
                 <a:solidFill>
@@ -19038,7 +19038,7 @@
         </p:nvSpPr>
         <p:spPr>
           <a:xfrm>
-            <a:off x="9262170" y="6035040"/>
+            <a:off x="10085130" y="6035040"/>
             <a:ext cx="1213008" cy="365760"/>
           </a:xfrm>
           <a:prstGeom prst="rect">
@@ -19216,21 +19216,21 @@
         </p:nvSpPr>
         <p:spPr>
           <a:xfrm>
-            <a:off x="10363200" y="6035040"/>
-            <a:ext cx="1371600" cy="365760"/>
-          </a:xfrm>
-          <a:prstGeom prst="rect">
-            <a:avLst/>
-          </a:prstGeom>
-          <a:noFill/>
-        </p:spPr>
-        <p:txBody>
-          <a:bodyPr wrap="none" lIns="0" rIns="0">
-            <a:noAutofit/>
-          </a:bodyPr>
-          <a:lstStyle/>
-          <a:p>
-            <a:pPr algn="l"/>
+            <a:off x="11186160" y="6035040"/>
+            <a:ext cx="548640" cy="365760"/>
+          </a:xfrm>
+          <a:prstGeom prst="rect">
+            <a:avLst/>
+          </a:prstGeom>
+          <a:noFill/>
+        </p:spPr>
+        <p:txBody>
+          <a:bodyPr wrap="none" lIns="0" rIns="0">
+            <a:noAutofit/>
+          </a:bodyPr>
+          <a:lstStyle/>
+          <a:p>
+            <a:pPr algn="r"/>
             <a:fld id="{4B0E1F8A-6C1D-4E2A-9F3B-7A5C8D2E1F60}" type="slidenum">
               <a:rPr sz="1600" b="0" i="0">
                 <a:solidFill>
@@ -19384,21 +19384,21 @@
         </p:nvSpPr>
         <p:spPr>
           <a:xfrm>
-            <a:off x="10363200" y="6035040"/>
-            <a:ext cx="1371600" cy="365760"/>
-          </a:xfrm>
-          <a:prstGeom prst="rect">
-            <a:avLst/>
-          </a:prstGeom>
-          <a:noFill/>
-        </p:spPr>
-        <p:txBody>
-          <a:bodyPr wrap="none" lIns="0" rIns="0">
-            <a:noAutofit/>
-          </a:bodyPr>
-          <a:lstStyle/>
-          <a:p>
-            <a:pPr algn="l"/>
+            <a:off x="11186160" y="6035040"/>
+            <a:ext cx="548640" cy="365760"/>
+          </a:xfrm>
+          <a:prstGeom prst="rect">
+            <a:avLst/>
+          </a:prstGeom>
+          <a:noFill/>
+        </p:spPr>
+        <p:txBody>
+          <a:bodyPr wrap="none" lIns="0" rIns="0">
+            <a:noAutofit/>
+          </a:bodyPr>
+          <a:lstStyle/>
+          <a:p>
+            <a:pPr algn="r"/>
             <a:fld id="{4B0E1F8A-6C1D-4E2A-9F3B-7A5C8D2E1F60}" type="slidenum">
               <a:rPr sz="1600" b="0" i="0">
                 <a:solidFill>
@@ -19419,7 +19419,7 @@
         </p:nvSpPr>
         <p:spPr>
           <a:xfrm>
-            <a:off x="9262170" y="6035040"/>
+            <a:off x="10085130" y="6035040"/>
             <a:ext cx="1213008" cy="365760"/>
           </a:xfrm>
           <a:prstGeom prst="rect">
@@ -20070,21 +20070,21 @@
         </p:nvSpPr>
         <p:spPr>
           <a:xfrm>
-            <a:off x="10363200" y="6035040"/>
-            <a:ext cx="1371600" cy="365760"/>
-          </a:xfrm>
-          <a:prstGeom prst="rect">
-            <a:avLst/>
-          </a:prstGeom>
-          <a:noFill/>
-        </p:spPr>
-        <p:txBody>
-          <a:bodyPr wrap="none" lIns="0" rIns="0">
-            <a:noAutofit/>
-          </a:bodyPr>
-          <a:lstStyle/>
-          <a:p>
-            <a:pPr algn="l"/>
+            <a:off x="11186160" y="6035040"/>
+            <a:ext cx="548640" cy="365760"/>
+          </a:xfrm>
+          <a:prstGeom prst="rect">
+            <a:avLst/>
+          </a:prstGeom>
+          <a:noFill/>
+        </p:spPr>
+        <p:txBody>
+          <a:bodyPr wrap="none" lIns="0" rIns="0">
+            <a:noAutofit/>
+          </a:bodyPr>
+          <a:lstStyle/>
+          <a:p>
+            <a:pPr algn="r"/>
             <a:fld id="{4B0E1F8A-6C1D-4E2A-9F3B-7A5C8D2E1F60}" type="slidenum">
               <a:rPr sz="1600" b="0" i="0">
                 <a:solidFill>
@@ -20247,21 +20247,21 @@
         </p:nvSpPr>
         <p:spPr>
           <a:xfrm>
-            <a:off x="10363200" y="6035040"/>
-            <a:ext cx="1371600" cy="365760"/>
-          </a:xfrm>
-          <a:prstGeom prst="rect">
-            <a:avLst/>
-          </a:prstGeom>
-          <a:noFill/>
-        </p:spPr>
-        <p:txBody>
-          <a:bodyPr wrap="none" lIns="0" rIns="0">
-            <a:noAutofit/>
-          </a:bodyPr>
-          <a:lstStyle/>
-          <a:p>
-            <a:pPr algn="l"/>
+            <a:off x="11186160" y="6035040"/>
+            <a:ext cx="548640" cy="365760"/>
+          </a:xfrm>
+          <a:prstGeom prst="rect">
+            <a:avLst/>
+          </a:prstGeom>
+          <a:noFill/>
+        </p:spPr>
+        <p:txBody>
+          <a:bodyPr wrap="none" lIns="0" rIns="0">
+            <a:noAutofit/>
+          </a:bodyPr>
+          <a:lstStyle/>
+          <a:p>
+            <a:pPr algn="r"/>
             <a:fld id="{4B0E1F8A-6C1D-4E2A-9F3B-7A5C8D2E1F60}" type="slidenum">
               <a:rPr sz="1600" b="0" i="0">
                 <a:solidFill>
@@ -20424,21 +20424,21 @@
         </p:nvSpPr>
         <p:spPr>
           <a:xfrm>
-            <a:off x="10363200" y="6035040"/>
-            <a:ext cx="1371600" cy="365760"/>
-          </a:xfrm>
-          <a:prstGeom prst="rect">
-            <a:avLst/>
-          </a:prstGeom>
-          <a:noFill/>
-        </p:spPr>
-        <p:txBody>
-          <a:bodyPr wrap="none" lIns="0" rIns="0">
-            <a:noAutofit/>
-          </a:bodyPr>
-          <a:lstStyle/>
-          <a:p>
-            <a:pPr algn="l"/>
+            <a:off x="11186160" y="6035040"/>
+            <a:ext cx="548640" cy="365760"/>
+          </a:xfrm>
+          <a:prstGeom prst="rect">
+            <a:avLst/>
+          </a:prstGeom>
+          <a:noFill/>
+        </p:spPr>
+        <p:txBody>
+          <a:bodyPr wrap="none" lIns="0" rIns="0">
+            <a:noAutofit/>
+          </a:bodyPr>
+          <a:lstStyle/>
+          <a:p>
+            <a:pPr algn="r"/>
             <a:fld id="{4B0E1F8A-6C1D-4E2A-9F3B-7A5C8D2E1F60}" type="slidenum">
               <a:rPr sz="1600" b="0" i="0">
                 <a:solidFill>
@@ -20459,7 +20459,7 @@
         </p:nvSpPr>
         <p:spPr>
           <a:xfrm>
-            <a:off x="9262170" y="6035040"/>
+            <a:off x="10085130" y="6035040"/>
             <a:ext cx="1213008" cy="365760"/>
           </a:xfrm>
           <a:prstGeom prst="rect">
@@ -20663,21 +20663,21 @@
         </p:nvSpPr>
         <p:spPr>
           <a:xfrm>
-            <a:off x="10363200" y="6035040"/>
-            <a:ext cx="1371600" cy="365760"/>
-          </a:xfrm>
-          <a:prstGeom prst="rect">
-            <a:avLst/>
-          </a:prstGeom>
-          <a:noFill/>
-        </p:spPr>
-        <p:txBody>
-          <a:bodyPr wrap="none" lIns="0" rIns="0">
-            <a:noAutofit/>
-          </a:bodyPr>
-          <a:lstStyle/>
-          <a:p>
-            <a:pPr algn="l"/>
+            <a:off x="11186160" y="6035040"/>
+            <a:ext cx="548640" cy="365760"/>
+          </a:xfrm>
+          <a:prstGeom prst="rect">
+            <a:avLst/>
+          </a:prstGeom>
+          <a:noFill/>
+        </p:spPr>
+        <p:txBody>
+          <a:bodyPr wrap="none" lIns="0" rIns="0">
+            <a:noAutofit/>
+          </a:bodyPr>
+          <a:lstStyle/>
+          <a:p>
+            <a:pPr algn="r"/>
             <a:fld id="{4B0E1F8A-6C1D-4E2A-9F3B-7A5C8D2E1F60}" type="slidenum">
               <a:rPr sz="1600" b="0" i="0">
                 <a:solidFill>
@@ -20698,7 +20698,7 @@
         </p:nvSpPr>
         <p:spPr>
           <a:xfrm>
-            <a:off x="9262170" y="6035040"/>
+            <a:off x="10085130" y="6035040"/>
             <a:ext cx="1213008" cy="365760"/>
           </a:xfrm>
           <a:prstGeom prst="rect">
@@ -21165,21 +21165,21 @@
         </p:nvSpPr>
         <p:spPr>
           <a:xfrm>
-            <a:off x="10363200" y="6035040"/>
-            <a:ext cx="1371600" cy="365760"/>
-          </a:xfrm>
-          <a:prstGeom prst="rect">
-            <a:avLst/>
-          </a:prstGeom>
-          <a:noFill/>
-        </p:spPr>
-        <p:txBody>
-          <a:bodyPr wrap="none" lIns="0" rIns="0">
-            <a:noAutofit/>
-          </a:bodyPr>
-          <a:lstStyle/>
-          <a:p>
-            <a:pPr algn="l"/>
+            <a:off x="11186160" y="6035040"/>
+            <a:ext cx="548640" cy="365760"/>
+          </a:xfrm>
+          <a:prstGeom prst="rect">
+            <a:avLst/>
+          </a:prstGeom>
+          <a:noFill/>
+        </p:spPr>
+        <p:txBody>
+          <a:bodyPr wrap="none" lIns="0" rIns="0">
+            <a:noAutofit/>
+          </a:bodyPr>
+          <a:lstStyle/>
+          <a:p>
+            <a:pPr algn="r"/>
             <a:fld id="{4B0E1F8A-6C1D-4E2A-9F3B-7A5C8D2E1F60}" type="slidenum">
               <a:rPr sz="1600" b="0" i="0">
                 <a:solidFill>
@@ -21200,7 +21200,7 @@
         </p:nvSpPr>
         <p:spPr>
           <a:xfrm>
-            <a:off x="9262170" y="6035040"/>
+            <a:off x="10085130" y="6035040"/>
             <a:ext cx="1213008" cy="365760"/>
           </a:xfrm>
           <a:prstGeom prst="rect">
@@ -21693,21 +21693,21 @@
         </p:nvSpPr>
         <p:spPr>
           <a:xfrm>
-            <a:off x="10363200" y="6035040"/>
-            <a:ext cx="1371600" cy="365760"/>
-          </a:xfrm>
-          <a:prstGeom prst="rect">
-            <a:avLst/>
-          </a:prstGeom>
-          <a:noFill/>
-        </p:spPr>
-        <p:txBody>
-          <a:bodyPr wrap="none" lIns="0" rIns="0">
-            <a:noAutofit/>
-          </a:bodyPr>
-          <a:lstStyle/>
-          <a:p>
-            <a:pPr algn="l"/>
+            <a:off x="11186160" y="6035040"/>
+            <a:ext cx="548640" cy="365760"/>
+          </a:xfrm>
+          <a:prstGeom prst="rect">
+            <a:avLst/>
+          </a:prstGeom>
+          <a:noFill/>
+        </p:spPr>
+        <p:txBody>
+          <a:bodyPr wrap="none" lIns="0" rIns="0">
+            <a:noAutofit/>
+          </a:bodyPr>
+          <a:lstStyle/>
+          <a:p>
+            <a:pPr algn="r"/>
             <a:fld id="{4B0E1F8A-6C1D-4E2A-9F3B-7A5C8D2E1F60}" type="slidenum">
               <a:rPr sz="1600" b="0" i="0">
                 <a:solidFill>
@@ -21728,7 +21728,7 @@
         </p:nvSpPr>
         <p:spPr>
           <a:xfrm>
-            <a:off x="9262170" y="6035040"/>
+            <a:off x="10085130" y="6035040"/>
             <a:ext cx="1213008" cy="365760"/>
           </a:xfrm>
           <a:prstGeom prst="rect">
@@ -21906,21 +21906,21 @@
         </p:nvSpPr>
         <p:spPr>
           <a:xfrm>
-            <a:off x="10363200" y="6035040"/>
-            <a:ext cx="1371600" cy="365760"/>
-          </a:xfrm>
-          <a:prstGeom prst="rect">
-            <a:avLst/>
-          </a:prstGeom>
-          <a:noFill/>
-        </p:spPr>
-        <p:txBody>
-          <a:bodyPr wrap="none" lIns="0" rIns="0">
-            <a:noAutofit/>
-          </a:bodyPr>
-          <a:lstStyle/>
-          <a:p>
-            <a:pPr algn="l"/>
+            <a:off x="11186160" y="6035040"/>
+            <a:ext cx="548640" cy="365760"/>
+          </a:xfrm>
+          <a:prstGeom prst="rect">
+            <a:avLst/>
+          </a:prstGeom>
+          <a:noFill/>
+        </p:spPr>
+        <p:txBody>
+          <a:bodyPr wrap="none" lIns="0" rIns="0">
+            <a:noAutofit/>
+          </a:bodyPr>
+          <a:lstStyle/>
+          <a:p>
+            <a:pPr algn="r"/>
             <a:fld id="{4B0E1F8A-6C1D-4E2A-9F3B-7A5C8D2E1F60}" type="slidenum">
               <a:rPr sz="1600" b="0" i="0">
                 <a:solidFill>
@@ -22083,21 +22083,21 @@
         </p:nvSpPr>
         <p:spPr>
           <a:xfrm>
-            <a:off x="10363200" y="6035040"/>
-            <a:ext cx="1371600" cy="365760"/>
-          </a:xfrm>
-          <a:prstGeom prst="rect">
-            <a:avLst/>
-          </a:prstGeom>
-          <a:noFill/>
-        </p:spPr>
-        <p:txBody>
-          <a:bodyPr wrap="none" lIns="0" rIns="0">
-            <a:noAutofit/>
-          </a:bodyPr>
-          <a:lstStyle/>
-          <a:p>
-            <a:pPr algn="l"/>
+            <a:off x="11186160" y="6035040"/>
+            <a:ext cx="548640" cy="365760"/>
+          </a:xfrm>
+          <a:prstGeom prst="rect">
+            <a:avLst/>
+          </a:prstGeom>
+          <a:noFill/>
+        </p:spPr>
+        <p:txBody>
+          <a:bodyPr wrap="none" lIns="0" rIns="0">
+            <a:noAutofit/>
+          </a:bodyPr>
+          <a:lstStyle/>
+          <a:p>
+            <a:pPr algn="r"/>
             <a:fld id="{4B0E1F8A-6C1D-4E2A-9F3B-7A5C8D2E1F60}" type="slidenum">
               <a:rPr sz="1600" b="0" i="0">
                 <a:solidFill>
@@ -22118,7 +22118,7 @@
         </p:nvSpPr>
         <p:spPr>
           <a:xfrm>
-            <a:off x="9262170" y="6035040"/>
+            <a:off x="10085130" y="6035040"/>
             <a:ext cx="1213008" cy="365760"/>
           </a:xfrm>
           <a:prstGeom prst="rect">
@@ -22322,21 +22322,21 @@
         </p:nvSpPr>
         <p:spPr>
           <a:xfrm>
-            <a:off x="10363200" y="6035040"/>
-            <a:ext cx="1371600" cy="365760"/>
-          </a:xfrm>
-          <a:prstGeom prst="rect">
-            <a:avLst/>
-          </a:prstGeom>
-          <a:noFill/>
-        </p:spPr>
-        <p:txBody>
-          <a:bodyPr wrap="none" lIns="0" rIns="0">
-            <a:noAutofit/>
-          </a:bodyPr>
-          <a:lstStyle/>
-          <a:p>
-            <a:pPr algn="l"/>
+            <a:off x="11186160" y="6035040"/>
+            <a:ext cx="548640" cy="365760"/>
+          </a:xfrm>
+          <a:prstGeom prst="rect">
+            <a:avLst/>
+          </a:prstGeom>
+          <a:noFill/>
+        </p:spPr>
+        <p:txBody>
+          <a:bodyPr wrap="none" lIns="0" rIns="0">
+            <a:noAutofit/>
+          </a:bodyPr>
+          <a:lstStyle/>
+          <a:p>
+            <a:pPr algn="r"/>
             <a:fld id="{4B0E1F8A-6C1D-4E2A-9F3B-7A5C8D2E1F60}" type="slidenum">
               <a:rPr sz="1600" b="0" i="0">
                 <a:solidFill>
@@ -22357,7 +22357,7 @@
         </p:nvSpPr>
         <p:spPr>
           <a:xfrm>
-            <a:off x="9262170" y="6035040"/>
+            <a:off x="10085130" y="6035040"/>
             <a:ext cx="1213008" cy="365760"/>
           </a:xfrm>
           <a:prstGeom prst="rect">
@@ -22631,21 +22631,21 @@
         </p:nvSpPr>
         <p:spPr>
           <a:xfrm>
-            <a:off x="10363200" y="6035040"/>
-            <a:ext cx="1371600" cy="365760"/>
-          </a:xfrm>
-          <a:prstGeom prst="rect">
-            <a:avLst/>
-          </a:prstGeom>
-          <a:noFill/>
-        </p:spPr>
-        <p:txBody>
-          <a:bodyPr wrap="none" lIns="0" rIns="0">
-            <a:noAutofit/>
-          </a:bodyPr>
-          <a:lstStyle/>
-          <a:p>
-            <a:pPr algn="l"/>
+            <a:off x="11186160" y="6035040"/>
+            <a:ext cx="548640" cy="365760"/>
+          </a:xfrm>
+          <a:prstGeom prst="rect">
+            <a:avLst/>
+          </a:prstGeom>
+          <a:noFill/>
+        </p:spPr>
+        <p:txBody>
+          <a:bodyPr wrap="none" lIns="0" rIns="0">
+            <a:noAutofit/>
+          </a:bodyPr>
+          <a:lstStyle/>
+          <a:p>
+            <a:pPr algn="r"/>
             <a:fld id="{4B0E1F8A-6C1D-4E2A-9F3B-7A5C8D2E1F60}" type="slidenum">
               <a:rPr sz="1600" b="0" i="0">
                 <a:solidFill>
@@ -23079,21 +23079,21 @@
         </p:nvSpPr>
         <p:spPr>
           <a:xfrm>
-            <a:off x="10363200" y="6035040"/>
-            <a:ext cx="1371600" cy="365760"/>
-          </a:xfrm>
-          <a:prstGeom prst="rect">
-            <a:avLst/>
-          </a:prstGeom>
-          <a:noFill/>
-        </p:spPr>
-        <p:txBody>
-          <a:bodyPr wrap="none" lIns="0" rIns="0">
-            <a:noAutofit/>
-          </a:bodyPr>
-          <a:lstStyle/>
-          <a:p>
-            <a:pPr algn="l"/>
+            <a:off x="11186160" y="6035040"/>
+            <a:ext cx="548640" cy="365760"/>
+          </a:xfrm>
+          <a:prstGeom prst="rect">
+            <a:avLst/>
+          </a:prstGeom>
+          <a:noFill/>
+        </p:spPr>
+        <p:txBody>
+          <a:bodyPr wrap="none" lIns="0" rIns="0">
+            <a:noAutofit/>
+          </a:bodyPr>
+          <a:lstStyle/>
+          <a:p>
+            <a:pPr algn="r"/>
             <a:fld id="{4B0E1F8A-6C1D-4E2A-9F3B-7A5C8D2E1F60}" type="slidenum">
               <a:rPr sz="1600" b="0" i="0">
                 <a:solidFill>
@@ -23317,21 +23317,21 @@
         </p:nvSpPr>
         <p:spPr>
           <a:xfrm>
-            <a:off x="10363200" y="6035040"/>
-            <a:ext cx="1371600" cy="365760"/>
-          </a:xfrm>
-          <a:prstGeom prst="rect">
-            <a:avLst/>
-          </a:prstGeom>
-          <a:noFill/>
-        </p:spPr>
-        <p:txBody>
-          <a:bodyPr wrap="none" lIns="0" rIns="0">
-            <a:noAutofit/>
-          </a:bodyPr>
-          <a:lstStyle/>
-          <a:p>
-            <a:pPr algn="l"/>
+            <a:off x="11186160" y="6035040"/>
+            <a:ext cx="548640" cy="365760"/>
+          </a:xfrm>
+          <a:prstGeom prst="rect">
+            <a:avLst/>
+          </a:prstGeom>
+          <a:noFill/>
+        </p:spPr>
+        <p:txBody>
+          <a:bodyPr wrap="none" lIns="0" rIns="0">
+            <a:noAutofit/>
+          </a:bodyPr>
+          <a:lstStyle/>
+          <a:p>
+            <a:pPr algn="r"/>
             <a:fld id="{4B0E1F8A-6C1D-4E2A-9F3B-7A5C8D2E1F60}" type="slidenum">
               <a:rPr sz="1600" b="0" i="0">
                 <a:solidFill>
@@ -23352,7 +23352,7 @@
         </p:nvSpPr>
         <p:spPr>
           <a:xfrm>
-            <a:off x="9262170" y="6035040"/>
+            <a:off x="10085130" y="6035040"/>
             <a:ext cx="1213008" cy="365760"/>
           </a:xfrm>
           <a:prstGeom prst="rect">
@@ -23530,21 +23530,21 @@
         </p:nvSpPr>
         <p:spPr>
           <a:xfrm>
-            <a:off x="10363200" y="6035040"/>
-            <a:ext cx="1371600" cy="365760"/>
-          </a:xfrm>
-          <a:prstGeom prst="rect">
-            <a:avLst/>
-          </a:prstGeom>
-          <a:noFill/>
-        </p:spPr>
-        <p:txBody>
-          <a:bodyPr wrap="none" lIns="0" rIns="0">
-            <a:noAutofit/>
-          </a:bodyPr>
-          <a:lstStyle/>
-          <a:p>
-            <a:pPr algn="l"/>
+            <a:off x="11186160" y="6035040"/>
+            <a:ext cx="548640" cy="365760"/>
+          </a:xfrm>
+          <a:prstGeom prst="rect">
+            <a:avLst/>
+          </a:prstGeom>
+          <a:noFill/>
+        </p:spPr>
+        <p:txBody>
+          <a:bodyPr wrap="none" lIns="0" rIns="0">
+            <a:noAutofit/>
+          </a:bodyPr>
+          <a:lstStyle/>
+          <a:p>
+            <a:pPr algn="r"/>
             <a:fld id="{4B0E1F8A-6C1D-4E2A-9F3B-7A5C8D2E1F60}" type="slidenum">
               <a:rPr sz="1600" b="0" i="0">
                 <a:solidFill>
@@ -23565,7 +23565,7 @@
         </p:nvSpPr>
         <p:spPr>
           <a:xfrm>
-            <a:off x="9262170" y="6035040"/>
+            <a:off x="10085130" y="6035040"/>
             <a:ext cx="1213008" cy="365760"/>
           </a:xfrm>
           <a:prstGeom prst="rect">
@@ -24032,21 +24032,21 @@
         </p:nvSpPr>
         <p:spPr>
           <a:xfrm>
-            <a:off x="10363200" y="6035040"/>
-            <a:ext cx="1371600" cy="365760"/>
-          </a:xfrm>
-          <a:prstGeom prst="rect">
-            <a:avLst/>
-          </a:prstGeom>
-          <a:noFill/>
-        </p:spPr>
-        <p:txBody>
-          <a:bodyPr wrap="none" lIns="0" rIns="0">
-            <a:noAutofit/>
-          </a:bodyPr>
-          <a:lstStyle/>
-          <a:p>
-            <a:pPr algn="l"/>
+            <a:off x="11186160" y="6035040"/>
+            <a:ext cx="548640" cy="365760"/>
+          </a:xfrm>
+          <a:prstGeom prst="rect">
+            <a:avLst/>
+          </a:prstGeom>
+          <a:noFill/>
+        </p:spPr>
+        <p:txBody>
+          <a:bodyPr wrap="none" lIns="0" rIns="0">
+            <a:noAutofit/>
+          </a:bodyPr>
+          <a:lstStyle/>
+          <a:p>
+            <a:pPr algn="r"/>
             <a:fld id="{4B0E1F8A-6C1D-4E2A-9F3B-7A5C8D2E1F60}" type="slidenum">
               <a:rPr sz="1600" b="0" i="0">
                 <a:solidFill>
@@ -24067,7 +24067,7 @@
         </p:nvSpPr>
         <p:spPr>
           <a:xfrm>
-            <a:off x="9262170" y="6035040"/>
+            <a:off x="10085130" y="6035040"/>
             <a:ext cx="1213008" cy="365760"/>
           </a:xfrm>
           <a:prstGeom prst="rect">
@@ -24245,21 +24245,21 @@
         </p:nvSpPr>
         <p:spPr>
           <a:xfrm>
-            <a:off x="10363200" y="6035040"/>
-            <a:ext cx="1371600" cy="365760"/>
-          </a:xfrm>
-          <a:prstGeom prst="rect">
-            <a:avLst/>
-          </a:prstGeom>
-          <a:noFill/>
-        </p:spPr>
-        <p:txBody>
-          <a:bodyPr wrap="none" lIns="0" rIns="0">
-            <a:noAutofit/>
-          </a:bodyPr>
-          <a:lstStyle/>
-          <a:p>
-            <a:pPr algn="l"/>
+            <a:off x="11186160" y="6035040"/>
+            <a:ext cx="548640" cy="365760"/>
+          </a:xfrm>
+          <a:prstGeom prst="rect">
+            <a:avLst/>
+          </a:prstGeom>
+          <a:noFill/>
+        </p:spPr>
+        <p:txBody>
+          <a:bodyPr wrap="none" lIns="0" rIns="0">
+            <a:noAutofit/>
+          </a:bodyPr>
+          <a:lstStyle/>
+          <a:p>
+            <a:pPr algn="r"/>
             <a:fld id="{4B0E1F8A-6C1D-4E2A-9F3B-7A5C8D2E1F60}" type="slidenum">
               <a:rPr sz="1600" b="0" i="0">
                 <a:solidFill>
@@ -24422,21 +24422,21 @@
         </p:nvSpPr>
         <p:spPr>
           <a:xfrm>
-            <a:off x="10363200" y="6035040"/>
-            <a:ext cx="1371600" cy="365760"/>
-          </a:xfrm>
-          <a:prstGeom prst="rect">
-            <a:avLst/>
-          </a:prstGeom>
-          <a:noFill/>
-        </p:spPr>
-        <p:txBody>
-          <a:bodyPr wrap="none" lIns="0" rIns="0">
-            <a:noAutofit/>
-          </a:bodyPr>
-          <a:lstStyle/>
-          <a:p>
-            <a:pPr algn="l"/>
+            <a:off x="11186160" y="6035040"/>
+            <a:ext cx="548640" cy="365760"/>
+          </a:xfrm>
+          <a:prstGeom prst="rect">
+            <a:avLst/>
+          </a:prstGeom>
+          <a:noFill/>
+        </p:spPr>
+        <p:txBody>
+          <a:bodyPr wrap="none" lIns="0" rIns="0">
+            <a:noAutofit/>
+          </a:bodyPr>
+          <a:lstStyle/>
+          <a:p>
+            <a:pPr algn="r"/>
             <a:fld id="{4B0E1F8A-6C1D-4E2A-9F3B-7A5C8D2E1F60}" type="slidenum">
               <a:rPr sz="1600" b="0" i="0">
                 <a:solidFill>
@@ -24457,7 +24457,7 @@
         </p:nvSpPr>
         <p:spPr>
           <a:xfrm>
-            <a:off x="9262170" y="6035040"/>
+            <a:off x="10085130" y="6035040"/>
             <a:ext cx="1213008" cy="365760"/>
           </a:xfrm>
           <a:prstGeom prst="rect">
@@ -24661,21 +24661,21 @@
         </p:nvSpPr>
         <p:spPr>
           <a:xfrm>
-            <a:off x="10363200" y="6035040"/>
-            <a:ext cx="1371600" cy="365760"/>
-          </a:xfrm>
-          <a:prstGeom prst="rect">
-            <a:avLst/>
-          </a:prstGeom>
-          <a:noFill/>
-        </p:spPr>
-        <p:txBody>
-          <a:bodyPr wrap="none" lIns="0" rIns="0">
-            <a:noAutofit/>
-          </a:bodyPr>
-          <a:lstStyle/>
-          <a:p>
-            <a:pPr algn="l"/>
+            <a:off x="11186160" y="6035040"/>
+            <a:ext cx="548640" cy="365760"/>
+          </a:xfrm>
+          <a:prstGeom prst="rect">
+            <a:avLst/>
+          </a:prstGeom>
+          <a:noFill/>
+        </p:spPr>
+        <p:txBody>
+          <a:bodyPr wrap="none" lIns="0" rIns="0">
+            <a:noAutofit/>
+          </a:bodyPr>
+          <a:lstStyle/>
+          <a:p>
+            <a:pPr algn="r"/>
             <a:fld id="{4B0E1F8A-6C1D-4E2A-9F3B-7A5C8D2E1F60}" type="slidenum">
               <a:rPr sz="1600" b="0" i="0">
                 <a:solidFill>
@@ -24696,7 +24696,7 @@
         </p:nvSpPr>
         <p:spPr>
           <a:xfrm>
-            <a:off x="9262170" y="6035040"/>
+            <a:off x="10085130" y="6035040"/>
             <a:ext cx="1213008" cy="365760"/>
           </a:xfrm>
           <a:prstGeom prst="rect">
@@ -24874,21 +24874,21 @@
         </p:nvSpPr>
         <p:spPr>
           <a:xfrm>
-            <a:off x="10363200" y="6035040"/>
-            <a:ext cx="1371600" cy="365760"/>
-          </a:xfrm>
-          <a:prstGeom prst="rect">
-            <a:avLst/>
-          </a:prstGeom>
-          <a:noFill/>
-        </p:spPr>
-        <p:txBody>
-          <a:bodyPr wrap="none" lIns="0" rIns="0">
-            <a:noAutofit/>
-          </a:bodyPr>
-          <a:lstStyle/>
-          <a:p>
-            <a:pPr algn="l"/>
+            <a:off x="11186160" y="6035040"/>
+            <a:ext cx="548640" cy="365760"/>
+          </a:xfrm>
+          <a:prstGeom prst="rect">
+            <a:avLst/>
+          </a:prstGeom>
+          <a:noFill/>
+        </p:spPr>
+        <p:txBody>
+          <a:bodyPr wrap="none" lIns="0" rIns="0">
+            <a:noAutofit/>
+          </a:bodyPr>
+          <a:lstStyle/>
+          <a:p>
+            <a:pPr algn="r"/>
             <a:fld id="{4B0E1F8A-6C1D-4E2A-9F3B-7A5C8D2E1F60}" type="slidenum">
               <a:rPr sz="1600" b="0" i="0">
                 <a:solidFill>
@@ -24909,7 +24909,7 @@
         </p:nvSpPr>
         <p:spPr>
           <a:xfrm>
-            <a:off x="9262170" y="6035040"/>
+            <a:off x="10085130" y="6035040"/>
             <a:ext cx="1213008" cy="365760"/>
           </a:xfrm>
           <a:prstGeom prst="rect">
@@ -25376,21 +25376,21 @@
         </p:nvSpPr>
         <p:spPr>
           <a:xfrm>
-            <a:off x="10363200" y="6035040"/>
-            <a:ext cx="1371600" cy="365760"/>
-          </a:xfrm>
-          <a:prstGeom prst="rect">
-            <a:avLst/>
-          </a:prstGeom>
-          <a:noFill/>
-        </p:spPr>
-        <p:txBody>
-          <a:bodyPr wrap="none" lIns="0" rIns="0">
-            <a:noAutofit/>
-          </a:bodyPr>
-          <a:lstStyle/>
-          <a:p>
-            <a:pPr algn="l"/>
+            <a:off x="11186160" y="6035040"/>
+            <a:ext cx="548640" cy="365760"/>
+          </a:xfrm>
+          <a:prstGeom prst="rect">
+            <a:avLst/>
+          </a:prstGeom>
+          <a:noFill/>
+        </p:spPr>
+        <p:txBody>
+          <a:bodyPr wrap="none" lIns="0" rIns="0">
+            <a:noAutofit/>
+          </a:bodyPr>
+          <a:lstStyle/>
+          <a:p>
+            <a:pPr algn="r"/>
             <a:fld id="{4B0E1F8A-6C1D-4E2A-9F3B-7A5C8D2E1F60}" type="slidenum">
               <a:rPr sz="1600" b="0" i="0">
                 <a:solidFill>
@@ -25411,7 +25411,7 @@
         </p:nvSpPr>
         <p:spPr>
           <a:xfrm>
-            <a:off x="9262170" y="6035040"/>
+            <a:off x="10085130" y="6035040"/>
             <a:ext cx="1213008" cy="365760"/>
           </a:xfrm>
           <a:prstGeom prst="rect">
@@ -25554,21 +25554,21 @@
         </p:nvSpPr>
         <p:spPr>
           <a:xfrm>
-            <a:off x="10363200" y="6035040"/>
-            <a:ext cx="1371600" cy="365760"/>
-          </a:xfrm>
-          <a:prstGeom prst="rect">
-            <a:avLst/>
-          </a:prstGeom>
-          <a:noFill/>
-        </p:spPr>
-        <p:txBody>
-          <a:bodyPr wrap="none" lIns="0" rIns="0">
-            <a:noAutofit/>
-          </a:bodyPr>
-          <a:lstStyle/>
-          <a:p>
-            <a:pPr algn="l"/>
+            <a:off x="11186160" y="6035040"/>
+            <a:ext cx="548640" cy="365760"/>
+          </a:xfrm>
+          <a:prstGeom prst="rect">
+            <a:avLst/>
+          </a:prstGeom>
+          <a:noFill/>
+        </p:spPr>
+        <p:txBody>
+          <a:bodyPr wrap="none" lIns="0" rIns="0">
+            <a:noAutofit/>
+          </a:bodyPr>
+          <a:lstStyle/>
+          <a:p>
+            <a:pPr algn="r"/>
             <a:fld id="{4B0E1F8A-6C1D-4E2A-9F3B-7A5C8D2E1F60}" type="slidenum">
               <a:rPr sz="1600" b="0" i="0">
                 <a:solidFill>
@@ -25862,21 +25862,21 @@
         </p:nvSpPr>
         <p:spPr>
           <a:xfrm>
-            <a:off x="10363200" y="6035040"/>
-            <a:ext cx="1371600" cy="365760"/>
-          </a:xfrm>
-          <a:prstGeom prst="rect">
-            <a:avLst/>
-          </a:prstGeom>
-          <a:noFill/>
-        </p:spPr>
-        <p:txBody>
-          <a:bodyPr wrap="none" lIns="0" rIns="0">
-            <a:noAutofit/>
-          </a:bodyPr>
-          <a:lstStyle/>
-          <a:p>
-            <a:pPr algn="l"/>
+            <a:off x="11186160" y="6035040"/>
+            <a:ext cx="548640" cy="365760"/>
+          </a:xfrm>
+          <a:prstGeom prst="rect">
+            <a:avLst/>
+          </a:prstGeom>
+          <a:noFill/>
+        </p:spPr>
+        <p:txBody>
+          <a:bodyPr wrap="none" lIns="0" rIns="0">
+            <a:noAutofit/>
+          </a:bodyPr>
+          <a:lstStyle/>
+          <a:p>
+            <a:pPr algn="r"/>
             <a:fld id="{4B0E1F8A-6C1D-4E2A-9F3B-7A5C8D2E1F60}" type="slidenum">
               <a:rPr sz="1600" b="0" i="0">
                 <a:solidFill>
@@ -26477,21 +26477,21 @@
         </p:nvSpPr>
         <p:spPr>
           <a:xfrm>
-            <a:off x="10363200" y="6035040"/>
-            <a:ext cx="1371600" cy="365760"/>
-          </a:xfrm>
-          <a:prstGeom prst="rect">
-            <a:avLst/>
-          </a:prstGeom>
-          <a:noFill/>
-        </p:spPr>
-        <p:txBody>
-          <a:bodyPr wrap="none" lIns="0" rIns="0">
-            <a:noAutofit/>
-          </a:bodyPr>
-          <a:lstStyle/>
-          <a:p>
-            <a:pPr algn="l"/>
+            <a:off x="11186160" y="6035040"/>
+            <a:ext cx="548640" cy="365760"/>
+          </a:xfrm>
+          <a:prstGeom prst="rect">
+            <a:avLst/>
+          </a:prstGeom>
+          <a:noFill/>
+        </p:spPr>
+        <p:txBody>
+          <a:bodyPr wrap="none" lIns="0" rIns="0">
+            <a:noAutofit/>
+          </a:bodyPr>
+          <a:lstStyle/>
+          <a:p>
+            <a:pPr algn="r"/>
             <a:fld id="{4B0E1F8A-6C1D-4E2A-9F3B-7A5C8D2E1F60}" type="slidenum">
               <a:rPr sz="1600" b="0" i="0">
                 <a:solidFill>
@@ -26855,21 +26855,21 @@
         </p:nvSpPr>
         <p:spPr>
           <a:xfrm>
-            <a:off x="10363200" y="6035040"/>
-            <a:ext cx="1371600" cy="365760"/>
-          </a:xfrm>
-          <a:prstGeom prst="rect">
-            <a:avLst/>
-          </a:prstGeom>
-          <a:noFill/>
-        </p:spPr>
-        <p:txBody>
-          <a:bodyPr wrap="none" lIns="0" rIns="0">
-            <a:noAutofit/>
-          </a:bodyPr>
-          <a:lstStyle/>
-          <a:p>
-            <a:pPr algn="l"/>
+            <a:off x="11186160" y="6035040"/>
+            <a:ext cx="548640" cy="365760"/>
+          </a:xfrm>
+          <a:prstGeom prst="rect">
+            <a:avLst/>
+          </a:prstGeom>
+          <a:noFill/>
+        </p:spPr>
+        <p:txBody>
+          <a:bodyPr wrap="none" lIns="0" rIns="0">
+            <a:noAutofit/>
+          </a:bodyPr>
+          <a:lstStyle/>
+          <a:p>
+            <a:pPr algn="r"/>
             <a:fld id="{4B0E1F8A-6C1D-4E2A-9F3B-7A5C8D2E1F60}" type="slidenum">
               <a:rPr sz="1600" b="0" i="0">
                 <a:solidFill>
@@ -27549,21 +27549,21 @@
         </p:nvSpPr>
         <p:spPr>
           <a:xfrm>
-            <a:off x="10363200" y="6035040"/>
-            <a:ext cx="1371600" cy="365760"/>
-          </a:xfrm>
-          <a:prstGeom prst="rect">
-            <a:avLst/>
-          </a:prstGeom>
-          <a:noFill/>
-        </p:spPr>
-        <p:txBody>
-          <a:bodyPr wrap="none" lIns="0" rIns="0">
-            <a:noAutofit/>
-          </a:bodyPr>
-          <a:lstStyle/>
-          <a:p>
-            <a:pPr algn="l"/>
+            <a:off x="11186160" y="6035040"/>
+            <a:ext cx="548640" cy="365760"/>
+          </a:xfrm>
+          <a:prstGeom prst="rect">
+            <a:avLst/>
+          </a:prstGeom>
+          <a:noFill/>
+        </p:spPr>
+        <p:txBody>
+          <a:bodyPr wrap="none" lIns="0" rIns="0">
+            <a:noAutofit/>
+          </a:bodyPr>
+          <a:lstStyle/>
+          <a:p>
+            <a:pPr algn="r"/>
             <a:fld id="{4B0E1F8A-6C1D-4E2A-9F3B-7A5C8D2E1F60}" type="slidenum">
               <a:rPr sz="1600" b="0" i="0">
                 <a:solidFill>
@@ -28015,21 +28015,21 @@
         </p:nvSpPr>
         <p:spPr>
           <a:xfrm>
-            <a:off x="10363200" y="6035040"/>
-            <a:ext cx="1371600" cy="365760"/>
-          </a:xfrm>
-          <a:prstGeom prst="rect">
-            <a:avLst/>
-          </a:prstGeom>
-          <a:noFill/>
-        </p:spPr>
-        <p:txBody>
-          <a:bodyPr wrap="none" lIns="0" rIns="0">
-            <a:noAutofit/>
-          </a:bodyPr>
-          <a:lstStyle/>
-          <a:p>
-            <a:pPr algn="l"/>
+            <a:off x="11186160" y="6035040"/>
+            <a:ext cx="548640" cy="365760"/>
+          </a:xfrm>
+          <a:prstGeom prst="rect">
+            <a:avLst/>
+          </a:prstGeom>
+          <a:noFill/>
+        </p:spPr>
+        <p:txBody>
+          <a:bodyPr wrap="none" lIns="0" rIns="0">
+            <a:noAutofit/>
+          </a:bodyPr>
+          <a:lstStyle/>
+          <a:p>
+            <a:pPr algn="r"/>
             <a:fld id="{4B0E1F8A-6C1D-4E2A-9F3B-7A5C8D2E1F60}" type="slidenum">
               <a:rPr sz="1600" b="0" i="0">
                 <a:solidFill>
@@ -28507,21 +28507,21 @@
         </p:nvSpPr>
         <p:spPr>
           <a:xfrm>
-            <a:off x="10363200" y="6035040"/>
-            <a:ext cx="1371600" cy="365760"/>
-          </a:xfrm>
-          <a:prstGeom prst="rect">
-            <a:avLst/>
-          </a:prstGeom>
-          <a:noFill/>
-        </p:spPr>
-        <p:txBody>
-          <a:bodyPr wrap="none" lIns="0" rIns="0">
-            <a:noAutofit/>
-          </a:bodyPr>
-          <a:lstStyle/>
-          <a:p>
-            <a:pPr algn="l"/>
+            <a:off x="11186160" y="6035040"/>
+            <a:ext cx="548640" cy="365760"/>
+          </a:xfrm>
+          <a:prstGeom prst="rect">
+            <a:avLst/>
+          </a:prstGeom>
+          <a:noFill/>
+        </p:spPr>
+        <p:txBody>
+          <a:bodyPr wrap="none" lIns="0" rIns="0">
+            <a:noAutofit/>
+          </a:bodyPr>
+          <a:lstStyle/>
+          <a:p>
+            <a:pPr algn="r"/>
             <a:fld id="{4B0E1F8A-6C1D-4E2A-9F3B-7A5C8D2E1F60}" type="slidenum">
               <a:rPr sz="1600" b="0" i="0">
                 <a:solidFill>

--- a/examples/pptx/claude-code-for-data-scientists.pptx
+++ b/examples/pptx/claude-code-for-data-scientists.pptx
@@ -43,7 +43,6 @@
     <p:sldId id="291" r:id="rId42"/>
     <p:sldId id="292" r:id="rId43"/>
     <p:sldId id="293" r:id="rId44"/>
-    <p:sldId id="294" r:id="rId45"/>
   </p:sldIdLst>
   <p:sldSz cx="12192000" cy="6858000" type="screen16x9"/>
   <p:notesSz cx="6858000" cy="9144000"/>
@@ -1608,7 +1607,7 @@
             <a:r>
               <a:rPr sz="3400" b="1" i="0">
                 <a:solidFill>
-                  <a:srgbClr val="19323C"/>
+                  <a:srgbClr val="CC785C"/>
                 </a:solidFill>
                 <a:latin typeface="Arial"/>
               </a:rPr>
@@ -1645,7 +1644,7 @@
             <a:r>
               <a:rPr sz="3400" b="1" i="0">
                 <a:solidFill>
-                  <a:srgbClr val="19323C"/>
+                  <a:srgbClr val="CC785C"/>
                 </a:solidFill>
                 <a:latin typeface="Arial"/>
               </a:rPr>
@@ -2537,6 +2536,43 @@
         <p:spPr>
           <a:xfrm>
             <a:off x="6233160" y="1499616"/>
+            <a:ext cx="5958840" cy="609600"/>
+          </a:xfrm>
+          <a:prstGeom prst="rect">
+            <a:avLst/>
+          </a:prstGeom>
+          <a:noFill/>
+        </p:spPr>
+        <p:txBody>
+          <a:bodyPr wrap="none" lIns="0" rIns="0">
+            <a:noAutofit/>
+          </a:bodyPr>
+          <a:lstStyle/>
+          <a:p>
+            <a:pPr algn="l"/>
+            <a:r>
+              <a:rPr sz="3400" b="0" i="0">
+                <a:solidFill>
+                  <a:srgbClr val="1A1A2E"/>
+                </a:solidFill>
+                <a:latin typeface="Arial"/>
+              </a:rPr>
+              <a:t>Built with customers.</a:t>
+            </a:r>
+          </a:p>
+        </p:txBody>
+      </p:sp>
+      <p:sp>
+        <p:nvSpPr>
+          <p:cNvPr id="7" name="TextBox 6"/>
+          <p:cNvSpPr/>
+          <p:nvPr>
+            <p:ph type="body" idx="2"/>
+          </p:nvPr>
+        </p:nvSpPr>
+        <p:spPr>
+          <a:xfrm>
+            <a:off x="6233160" y="2383536"/>
             <a:ext cx="5501640" cy="1127760"/>
           </a:xfrm>
           <a:prstGeom prst="rect">
@@ -2558,44 +2594,7 @@
                 </a:solidFill>
                 <a:latin typeface="Arial"/>
               </a:rPr>
-              <a:t>Built with customers, not just for them.</a:t>
-            </a:r>
-          </a:p>
-        </p:txBody>
-      </p:sp>
-      <p:sp>
-        <p:nvSpPr>
-          <p:cNvPr id="7" name="TextBox 6"/>
-          <p:cNvSpPr/>
-          <p:nvPr>
-            <p:ph type="body" idx="2"/>
-          </p:nvPr>
-        </p:nvSpPr>
-        <p:spPr>
-          <a:xfrm>
-            <a:off x="6233160" y="2901696"/>
-            <a:ext cx="5501640" cy="1127760"/>
-          </a:xfrm>
-          <a:prstGeom prst="rect">
-            <a:avLst/>
-          </a:prstGeom>
-          <a:noFill/>
-        </p:spPr>
-        <p:txBody>
-          <a:bodyPr wrap="square" lIns="0" rIns="0">
-            <a:noAutofit/>
-          </a:bodyPr>
-          <a:lstStyle/>
-          <a:p>
-            <a:pPr algn="l"/>
-            <a:r>
-              <a:rPr sz="3400" b="0" i="0">
-                <a:solidFill>
-                  <a:srgbClr val="1A1A2E"/>
-                </a:solidFill>
-                <a:latin typeface="Arial"/>
-              </a:rPr>
-              <a:t>60% faster rollout; 50% fewer tickets.</a:t>
+              <a:t>60% faster; 50% fewer tickets</a:t>
             </a:r>
           </a:p>
         </p:txBody>
@@ -2614,405 +2613,6 @@
 </file>
 
 <file path=ppt/slideLayouts/slideLayout18.xml><?xml version="1.0" encoding="utf-8"?>
-<p:sldLayout xmlns:a="http://schemas.openxmlformats.org/drawingml/2006/main" xmlns:r="http://schemas.openxmlformats.org/officeDocument/2006/relationships" xmlns:p="http://schemas.openxmlformats.org/presentationml/2006/main" type="blank" preserve="1">
-  <p:cSld name="slidekit · Card Grid">
-    <p:bg>
-      <p:bgPr>
-        <a:solidFill>
-          <a:srgbClr val="FFFFFF"/>
-        </a:solidFill>
-        <a:effectLst/>
-      </p:bgPr>
-    </p:bg>
-    <p:spTree>
-      <p:nvGrpSpPr>
-        <p:cNvPr id="1" name=""/>
-        <p:cNvGrpSpPr/>
-        <p:nvPr/>
-      </p:nvGrpSpPr>
-      <p:grpSpPr>
-        <a:xfrm>
-          <a:off x="0" y="0"/>
-          <a:ext cx="0" cy="0"/>
-          <a:chOff x="0" y="0"/>
-          <a:chExt cx="0" cy="0"/>
-        </a:xfrm>
-      </p:grpSpPr>
-      <p:sp>
-        <p:nvSpPr>
-          <p:cNvPr id="4" name="Slide Number Placeholder 3"/>
-          <p:cNvSpPr>
-            <a:spLocks noGrp="1"/>
-          </p:cNvSpPr>
-          <p:nvPr>
-            <p:ph type="sldNum" sz="quarter" idx="12"/>
-          </p:nvPr>
-        </p:nvSpPr>
-        <p:spPr>
-          <a:xfrm>
-            <a:off x="11186160" y="6035040"/>
-            <a:ext cx="548640" cy="365760"/>
-          </a:xfrm>
-        </p:spPr>
-        <p:txBody>
-          <a:bodyPr/>
-          <a:lstStyle/>
-          <a:p>
-            <a:fld id="{C1FF6DA9-008F-8B48-92A6-B652298478BF}" type="slidenum">
-              <a:rPr lang="en-US" smtClean="0"/>
-              <a:t>‹#›</a:t>
-            </a:fld>
-            <a:endParaRPr lang="en-US"/>
-          </a:p>
-        </p:txBody>
-      </p:sp>
-      <p:sp>
-        <p:nvSpPr>
-          <p:cNvPr id="5" name="TextBox 4"/>
-          <p:cNvSpPr/>
-          <p:nvPr>
-            <p:ph type="title"/>
-          </p:nvPr>
-        </p:nvSpPr>
-        <p:spPr>
-          <a:xfrm>
-            <a:off x="457200" y="457200"/>
-            <a:ext cx="11277600" cy="768096"/>
-          </a:xfrm>
-          <a:prstGeom prst="rect">
-            <a:avLst/>
-          </a:prstGeom>
-          <a:noFill/>
-        </p:spPr>
-        <p:txBody>
-          <a:bodyPr wrap="none" lIns="0" rIns="0">
-            <a:noAutofit/>
-          </a:bodyPr>
-          <a:lstStyle/>
-          <a:p>
-            <a:pPr algn="l"/>
-            <a:r>
-              <a:rPr sz="4200" b="1" i="0">
-                <a:solidFill>
-                  <a:srgbClr val="CC785C"/>
-                </a:solidFill>
-                <a:latin typeface="Arial"/>
-              </a:rPr>
-              <a:t>What We Offer</a:t>
-            </a:r>
-          </a:p>
-        </p:txBody>
-      </p:sp>
-      <p:sp>
-        <p:nvSpPr>
-          <p:cNvPr id="6" name="TextBox 5"/>
-          <p:cNvSpPr/>
-          <p:nvPr>
-            <p:ph type="body" idx="1"/>
-          </p:nvPr>
-        </p:nvSpPr>
-        <p:spPr>
-          <a:xfrm>
-            <a:off x="457200" y="1499616"/>
-            <a:ext cx="2831366" cy="518159"/>
-          </a:xfrm>
-          <a:prstGeom prst="rect">
-            <a:avLst/>
-          </a:prstGeom>
-          <a:noFill/>
-        </p:spPr>
-        <p:txBody>
-          <a:bodyPr wrap="none" lIns="0" rIns="0">
-            <a:noAutofit/>
-          </a:bodyPr>
-          <a:lstStyle/>
-          <a:p>
-            <a:pPr algn="l"/>
-            <a:r>
-              <a:rPr sz="3400" b="1" i="0">
-                <a:solidFill>
-                  <a:srgbClr val="1A1A2E"/>
-                </a:solidFill>
-                <a:latin typeface="Arial"/>
-              </a:rPr>
-              <a:t>Insights</a:t>
-            </a:r>
-          </a:p>
-        </p:txBody>
-      </p:sp>
-      <p:sp>
-        <p:nvSpPr>
-          <p:cNvPr id="7" name="TextBox 6"/>
-          <p:cNvSpPr/>
-          <p:nvPr>
-            <p:ph type="body" idx="2"/>
-          </p:nvPr>
-        </p:nvSpPr>
-        <p:spPr>
-          <a:xfrm>
-            <a:off x="457200" y="2154935"/>
-            <a:ext cx="2613660" cy="3605785"/>
-          </a:xfrm>
-          <a:prstGeom prst="rect">
-            <a:avLst/>
-          </a:prstGeom>
-          <a:noFill/>
-        </p:spPr>
-        <p:txBody>
-          <a:bodyPr wrap="square" lIns="0" rIns="0">
-            <a:noAutofit/>
-          </a:bodyPr>
-          <a:lstStyle/>
-          <a:p>
-            <a:pPr algn="l"/>
-            <a:r>
-              <a:rPr sz="3400" b="0" i="0">
-                <a:solidFill>
-                  <a:srgbClr val="1A1A2E"/>
-                </a:solidFill>
-                <a:latin typeface="Arial"/>
-              </a:rPr>
-              <a:t>Live data and AI analytics.</a:t>
-            </a:r>
-          </a:p>
-        </p:txBody>
-      </p:sp>
-      <p:sp>
-        <p:nvSpPr>
-          <p:cNvPr id="8" name="TextBox 7"/>
-          <p:cNvSpPr/>
-          <p:nvPr>
-            <p:ph type="body" idx="3"/>
-          </p:nvPr>
-        </p:nvSpPr>
-        <p:spPr>
-          <a:xfrm>
-            <a:off x="3345180" y="1499616"/>
-            <a:ext cx="2909292" cy="518159"/>
-          </a:xfrm>
-          <a:prstGeom prst="rect">
-            <a:avLst/>
-          </a:prstGeom>
-          <a:noFill/>
-        </p:spPr>
-        <p:txBody>
-          <a:bodyPr wrap="none" lIns="0" rIns="0">
-            <a:noAutofit/>
-          </a:bodyPr>
-          <a:lstStyle/>
-          <a:p>
-            <a:pPr algn="l"/>
-            <a:r>
-              <a:rPr sz="3400" b="1" i="0">
-                <a:solidFill>
-                  <a:srgbClr val="1A1A2E"/>
-                </a:solidFill>
-                <a:latin typeface="Arial"/>
-              </a:rPr>
-              <a:t>Security</a:t>
-            </a:r>
-          </a:p>
-        </p:txBody>
-      </p:sp>
-      <p:sp>
-        <p:nvSpPr>
-          <p:cNvPr id="9" name="TextBox 8"/>
-          <p:cNvSpPr/>
-          <p:nvPr>
-            <p:ph type="body" idx="4"/>
-          </p:nvPr>
-        </p:nvSpPr>
-        <p:spPr>
-          <a:xfrm>
-            <a:off x="3345180" y="2154935"/>
-            <a:ext cx="2613660" cy="3605785"/>
-          </a:xfrm>
-          <a:prstGeom prst="rect">
-            <a:avLst/>
-          </a:prstGeom>
-          <a:noFill/>
-        </p:spPr>
-        <p:txBody>
-          <a:bodyPr wrap="square" lIns="0" rIns="0">
-            <a:noAutofit/>
-          </a:bodyPr>
-          <a:lstStyle/>
-          <a:p>
-            <a:pPr algn="l"/>
-            <a:r>
-              <a:rPr sz="3400" b="0" i="0">
-                <a:solidFill>
-                  <a:srgbClr val="1A1A2E"/>
-                </a:solidFill>
-                <a:latin typeface="Arial"/>
-              </a:rPr>
-              <a:t>Zero-trust, SOC 2 ready.</a:t>
-            </a:r>
-          </a:p>
-        </p:txBody>
-      </p:sp>
-      <p:sp>
-        <p:nvSpPr>
-          <p:cNvPr id="10" name="TextBox 9"/>
-          <p:cNvSpPr/>
-          <p:nvPr>
-            <p:ph type="body" idx="5"/>
-          </p:nvPr>
-        </p:nvSpPr>
-        <p:spPr>
-          <a:xfrm>
-            <a:off x="6233160" y="1499616"/>
-            <a:ext cx="2613660" cy="518159"/>
-          </a:xfrm>
-          <a:prstGeom prst="rect">
-            <a:avLst/>
-          </a:prstGeom>
-          <a:noFill/>
-        </p:spPr>
-        <p:txBody>
-          <a:bodyPr wrap="none" lIns="0" rIns="0">
-            <a:noAutofit/>
-          </a:bodyPr>
-          <a:lstStyle/>
-          <a:p>
-            <a:pPr algn="l"/>
-            <a:r>
-              <a:rPr sz="3400" b="1" i="0">
-                <a:solidFill>
-                  <a:srgbClr val="1A1A2E"/>
-                </a:solidFill>
-                <a:latin typeface="Arial"/>
-              </a:rPr>
-              <a:t>Speed</a:t>
-            </a:r>
-          </a:p>
-        </p:txBody>
-      </p:sp>
-      <p:sp>
-        <p:nvSpPr>
-          <p:cNvPr id="11" name="TextBox 10"/>
-          <p:cNvSpPr/>
-          <p:nvPr>
-            <p:ph type="body" idx="6"/>
-          </p:nvPr>
-        </p:nvSpPr>
-        <p:spPr>
-          <a:xfrm>
-            <a:off x="6233160" y="2154935"/>
-            <a:ext cx="2613660" cy="3605785"/>
-          </a:xfrm>
-          <a:prstGeom prst="rect">
-            <a:avLst/>
-          </a:prstGeom>
-          <a:noFill/>
-        </p:spPr>
-        <p:txBody>
-          <a:bodyPr wrap="square" lIns="0" rIns="0">
-            <a:noAutofit/>
-          </a:bodyPr>
-          <a:lstStyle/>
-          <a:p>
-            <a:pPr algn="l"/>
-            <a:r>
-              <a:rPr sz="3400" b="0" i="0">
-                <a:solidFill>
-                  <a:srgbClr val="1A1A2E"/>
-                </a:solidFill>
-                <a:latin typeface="Arial"/>
-              </a:rPr>
-              <a:t>Sub-100ms p99 latency.</a:t>
-            </a:r>
-          </a:p>
-        </p:txBody>
-      </p:sp>
-      <p:sp>
-        <p:nvSpPr>
-          <p:cNvPr id="12" name="TextBox 11"/>
-          <p:cNvSpPr/>
-          <p:nvPr>
-            <p:ph type="body" idx="7"/>
-          </p:nvPr>
-        </p:nvSpPr>
-        <p:spPr>
-          <a:xfrm>
-            <a:off x="9121140" y="1499616"/>
-            <a:ext cx="2613660" cy="518159"/>
-          </a:xfrm>
-          <a:prstGeom prst="rect">
-            <a:avLst/>
-          </a:prstGeom>
-          <a:noFill/>
-        </p:spPr>
-        <p:txBody>
-          <a:bodyPr wrap="none" lIns="0" rIns="0">
-            <a:noAutofit/>
-          </a:bodyPr>
-          <a:lstStyle/>
-          <a:p>
-            <a:pPr algn="l"/>
-            <a:r>
-              <a:rPr sz="3400" b="1" i="0">
-                <a:solidFill>
-                  <a:srgbClr val="1A1A2E"/>
-                </a:solidFill>
-                <a:latin typeface="Arial"/>
-              </a:rPr>
-              <a:t>APIs</a:t>
-            </a:r>
-          </a:p>
-        </p:txBody>
-      </p:sp>
-      <p:sp>
-        <p:nvSpPr>
-          <p:cNvPr id="13" name="TextBox 12"/>
-          <p:cNvSpPr/>
-          <p:nvPr>
-            <p:ph type="body" idx="8"/>
-          </p:nvPr>
-        </p:nvSpPr>
-        <p:spPr>
-          <a:xfrm>
-            <a:off x="9121140" y="2154935"/>
-            <a:ext cx="2613660" cy="3605785"/>
-          </a:xfrm>
-          <a:prstGeom prst="rect">
-            <a:avLst/>
-          </a:prstGeom>
-          <a:noFill/>
-        </p:spPr>
-        <p:txBody>
-          <a:bodyPr wrap="square" lIns="0" rIns="0">
-            <a:noAutofit/>
-          </a:bodyPr>
-          <a:lstStyle/>
-          <a:p>
-            <a:pPr algn="l"/>
-            <a:r>
-              <a:rPr sz="3400" b="0" i="0">
-                <a:solidFill>
-                  <a:srgbClr val="1A1A2E"/>
-                </a:solidFill>
-                <a:latin typeface="Arial"/>
-              </a:rPr>
-              <a:t>300+ open connectors.</a:t>
-            </a:r>
-          </a:p>
-        </p:txBody>
-      </p:sp>
-    </p:spTree>
-    <p:extLst>
-      <p:ext uri="{BB962C8B-B14F-4D97-AF65-F5344CB8AC3E}">
-        <p14:creationId xmlns:p14="http://schemas.microsoft.com/office/powerpoint/2010/main" val="1212999818"/>
-      </p:ext>
-    </p:extLst>
-  </p:cSld>
-  <p:clrMapOvr>
-    <a:masterClrMapping/>
-  </p:clrMapOvr>
-</p:sldLayout>
-</file>
-
-<file path=ppt/slideLayouts/slideLayout19.xml><?xml version="1.0" encoding="utf-8"?>
 <p:sldLayout xmlns:a="http://schemas.openxmlformats.org/drawingml/2006/main" xmlns:r="http://schemas.openxmlformats.org/officeDocument/2006/relationships" xmlns:p="http://schemas.openxmlformats.org/presentationml/2006/main" type="blank" preserve="1">
   <p:cSld name="slidekit · Section Divider">
     <p:bg>
@@ -3167,6 +2767,511 @@
                 <a:latin typeface="Arial"/>
               </a:rPr>
               <a:t>Where We Stand Today</a:t>
+            </a:r>
+          </a:p>
+        </p:txBody>
+      </p:sp>
+    </p:spTree>
+    <p:extLst>
+      <p:ext uri="{BB962C8B-B14F-4D97-AF65-F5344CB8AC3E}">
+        <p14:creationId xmlns:p14="http://schemas.microsoft.com/office/powerpoint/2010/main" val="1212999818"/>
+      </p:ext>
+    </p:extLst>
+  </p:cSld>
+  <p:clrMapOvr>
+    <a:masterClrMapping/>
+  </p:clrMapOvr>
+</p:sldLayout>
+</file>
+
+<file path=ppt/slideLayouts/slideLayout19.xml><?xml version="1.0" encoding="utf-8"?>
+<p:sldLayout xmlns:a="http://schemas.openxmlformats.org/drawingml/2006/main" xmlns:r="http://schemas.openxmlformats.org/officeDocument/2006/relationships" xmlns:p="http://schemas.openxmlformats.org/presentationml/2006/main" type="blank" preserve="1">
+  <p:cSld name="slidekit · Agenda">
+    <p:bg>
+      <p:bgPr>
+        <a:solidFill>
+          <a:srgbClr val="FFFFFF"/>
+        </a:solidFill>
+        <a:effectLst/>
+      </p:bgPr>
+    </p:bg>
+    <p:spTree>
+      <p:nvGrpSpPr>
+        <p:cNvPr id="1" name=""/>
+        <p:cNvGrpSpPr/>
+        <p:nvPr/>
+      </p:nvGrpSpPr>
+      <p:grpSpPr>
+        <a:xfrm>
+          <a:off x="0" y="0"/>
+          <a:ext cx="0" cy="0"/>
+          <a:chOff x="0" y="0"/>
+          <a:chExt cx="0" cy="0"/>
+        </a:xfrm>
+      </p:grpSpPr>
+      <p:sp>
+        <p:nvSpPr>
+          <p:cNvPr id="4" name="Slide Number Placeholder 3"/>
+          <p:cNvSpPr>
+            <a:spLocks noGrp="1"/>
+          </p:cNvSpPr>
+          <p:nvPr>
+            <p:ph type="sldNum" sz="quarter" idx="12"/>
+          </p:nvPr>
+        </p:nvSpPr>
+        <p:spPr>
+          <a:xfrm>
+            <a:off x="11186160" y="6035040"/>
+            <a:ext cx="548640" cy="365760"/>
+          </a:xfrm>
+        </p:spPr>
+        <p:txBody>
+          <a:bodyPr/>
+          <a:lstStyle/>
+          <a:p>
+            <a:fld id="{C1FF6DA9-008F-8B48-92A6-B652298478BF}" type="slidenum">
+              <a:rPr lang="en-US" smtClean="0"/>
+              <a:t>‹#›</a:t>
+            </a:fld>
+            <a:endParaRPr lang="en-US"/>
+          </a:p>
+        </p:txBody>
+      </p:sp>
+      <p:sp>
+        <p:nvSpPr>
+          <p:cNvPr id="5" name="TextBox 4"/>
+          <p:cNvSpPr/>
+          <p:nvPr>
+            <p:ph type="title"/>
+          </p:nvPr>
+        </p:nvSpPr>
+        <p:spPr>
+          <a:xfrm>
+            <a:off x="457200" y="457200"/>
+            <a:ext cx="11277600" cy="768096"/>
+          </a:xfrm>
+          <a:prstGeom prst="rect">
+            <a:avLst/>
+          </a:prstGeom>
+          <a:noFill/>
+        </p:spPr>
+        <p:txBody>
+          <a:bodyPr wrap="none" lIns="0" rIns="0">
+            <a:noAutofit/>
+          </a:bodyPr>
+          <a:lstStyle/>
+          <a:p>
+            <a:pPr algn="l"/>
+            <a:r>
+              <a:rPr sz="4200" b="1" i="0">
+                <a:solidFill>
+                  <a:srgbClr val="CC785C"/>
+                </a:solidFill>
+                <a:latin typeface="Arial"/>
+              </a:rPr>
+              <a:t>What We Will Cover</a:t>
+            </a:r>
+          </a:p>
+        </p:txBody>
+      </p:sp>
+      <p:sp>
+        <p:nvSpPr>
+          <p:cNvPr id="6" name="Rectangle 5"/>
+          <p:cNvSpPr/>
+          <p:nvPr>
+            <p:ph type="body" idx="1"/>
+          </p:nvPr>
+        </p:nvSpPr>
+        <p:spPr>
+          <a:xfrm>
+            <a:off x="457200" y="1280160"/>
+            <a:ext cx="11277600" cy="64008"/>
+          </a:xfrm>
+          <a:prstGeom prst="rect">
+            <a:avLst/>
+          </a:prstGeom>
+          <a:solidFill>
+            <a:srgbClr val="CC785C"/>
+          </a:solidFill>
+          <a:ln>
+            <a:noFill/>
+          </a:ln>
+          <a:effectLst/>
+        </p:spPr>
+        <p:txBody>
+          <a:bodyPr rtlCol="0" anchor="ctr"/>
+          <a:lstStyle/>
+          <a:p>
+            <a:pPr algn="ctr"/>
+          </a:p>
+        </p:txBody>
+      </p:sp>
+      <p:sp>
+        <p:nvSpPr>
+          <p:cNvPr id="7" name="TextBox 6"/>
+          <p:cNvSpPr/>
+          <p:nvPr>
+            <p:ph type="body" idx="2"/>
+          </p:nvPr>
+        </p:nvSpPr>
+        <p:spPr>
+          <a:xfrm>
+            <a:off x="457200" y="1618488"/>
+            <a:ext cx="951348" cy="518159"/>
+          </a:xfrm>
+          <a:prstGeom prst="rect">
+            <a:avLst/>
+          </a:prstGeom>
+          <a:noFill/>
+        </p:spPr>
+        <p:txBody>
+          <a:bodyPr wrap="none" lIns="0" rIns="0">
+            <a:noAutofit/>
+          </a:bodyPr>
+          <a:lstStyle/>
+          <a:p>
+            <a:pPr algn="l"/>
+            <a:r>
+              <a:rPr sz="3400" b="1" i="0">
+                <a:solidFill>
+                  <a:srgbClr val="CC785C"/>
+                </a:solidFill>
+                <a:latin typeface="Arial"/>
+              </a:rPr>
+              <a:t>01</a:t>
+            </a:r>
+          </a:p>
+        </p:txBody>
+      </p:sp>
+      <p:sp>
+        <p:nvSpPr>
+          <p:cNvPr id="8" name="TextBox 7"/>
+          <p:cNvSpPr/>
+          <p:nvPr>
+            <p:ph type="body" idx="3"/>
+          </p:nvPr>
+        </p:nvSpPr>
+        <p:spPr>
+          <a:xfrm>
+            <a:off x="1371600" y="1618488"/>
+            <a:ext cx="10363200" cy="518159"/>
+          </a:xfrm>
+          <a:prstGeom prst="rect">
+            <a:avLst/>
+          </a:prstGeom>
+          <a:noFill/>
+        </p:spPr>
+        <p:txBody>
+          <a:bodyPr wrap="none" lIns="0" rIns="0">
+            <a:noAutofit/>
+          </a:bodyPr>
+          <a:lstStyle/>
+          <a:p>
+            <a:pPr algn="l"/>
+            <a:r>
+              <a:rPr sz="3400" b="0" i="0">
+                <a:solidFill>
+                  <a:srgbClr val="1A1A2E"/>
+                </a:solidFill>
+                <a:latin typeface="Arial"/>
+              </a:rPr>
+              <a:t>Performance against targets</a:t>
+            </a:r>
+          </a:p>
+        </p:txBody>
+      </p:sp>
+      <p:sp>
+        <p:nvSpPr>
+          <p:cNvPr id="9" name="TextBox 8"/>
+          <p:cNvSpPr/>
+          <p:nvPr>
+            <p:ph type="body" idx="4"/>
+          </p:nvPr>
+        </p:nvSpPr>
+        <p:spPr>
+          <a:xfrm>
+            <a:off x="457200" y="2501798"/>
+            <a:ext cx="951348" cy="518159"/>
+          </a:xfrm>
+          <a:prstGeom prst="rect">
+            <a:avLst/>
+          </a:prstGeom>
+          <a:noFill/>
+        </p:spPr>
+        <p:txBody>
+          <a:bodyPr wrap="none" lIns="0" rIns="0">
+            <a:noAutofit/>
+          </a:bodyPr>
+          <a:lstStyle/>
+          <a:p>
+            <a:pPr algn="l"/>
+            <a:r>
+              <a:rPr sz="3400" b="1" i="0">
+                <a:solidFill>
+                  <a:srgbClr val="CC785C"/>
+                </a:solidFill>
+                <a:latin typeface="Arial"/>
+              </a:rPr>
+              <a:t>02</a:t>
+            </a:r>
+          </a:p>
+        </p:txBody>
+      </p:sp>
+      <p:sp>
+        <p:nvSpPr>
+          <p:cNvPr id="10" name="TextBox 9"/>
+          <p:cNvSpPr/>
+          <p:nvPr>
+            <p:ph type="body" idx="5"/>
+          </p:nvPr>
+        </p:nvSpPr>
+        <p:spPr>
+          <a:xfrm>
+            <a:off x="1371600" y="2501798"/>
+            <a:ext cx="10363200" cy="518159"/>
+          </a:xfrm>
+          <a:prstGeom prst="rect">
+            <a:avLst/>
+          </a:prstGeom>
+          <a:noFill/>
+        </p:spPr>
+        <p:txBody>
+          <a:bodyPr wrap="none" lIns="0" rIns="0">
+            <a:noAutofit/>
+          </a:bodyPr>
+          <a:lstStyle/>
+          <a:p>
+            <a:pPr algn="l"/>
+            <a:r>
+              <a:rPr sz="3400" b="0" i="0">
+                <a:solidFill>
+                  <a:srgbClr val="1A1A2E"/>
+                </a:solidFill>
+                <a:latin typeface="Arial"/>
+              </a:rPr>
+              <a:t>Customer and market signals</a:t>
+            </a:r>
+          </a:p>
+        </p:txBody>
+      </p:sp>
+      <p:sp>
+        <p:nvSpPr>
+          <p:cNvPr id="11" name="TextBox 10"/>
+          <p:cNvSpPr/>
+          <p:nvPr>
+            <p:ph type="body" idx="6"/>
+          </p:nvPr>
+        </p:nvSpPr>
+        <p:spPr>
+          <a:xfrm>
+            <a:off x="457200" y="3385108"/>
+            <a:ext cx="951348" cy="518159"/>
+          </a:xfrm>
+          <a:prstGeom prst="rect">
+            <a:avLst/>
+          </a:prstGeom>
+          <a:noFill/>
+        </p:spPr>
+        <p:txBody>
+          <a:bodyPr wrap="none" lIns="0" rIns="0">
+            <a:noAutofit/>
+          </a:bodyPr>
+          <a:lstStyle/>
+          <a:p>
+            <a:pPr algn="l"/>
+            <a:r>
+              <a:rPr sz="3400" b="1" i="0">
+                <a:solidFill>
+                  <a:srgbClr val="CC785C"/>
+                </a:solidFill>
+                <a:latin typeface="Arial"/>
+              </a:rPr>
+              <a:t>03</a:t>
+            </a:r>
+          </a:p>
+        </p:txBody>
+      </p:sp>
+      <p:sp>
+        <p:nvSpPr>
+          <p:cNvPr id="12" name="TextBox 11"/>
+          <p:cNvSpPr/>
+          <p:nvPr>
+            <p:ph type="body" idx="7"/>
+          </p:nvPr>
+        </p:nvSpPr>
+        <p:spPr>
+          <a:xfrm>
+            <a:off x="1371600" y="3385108"/>
+            <a:ext cx="10363200" cy="518159"/>
+          </a:xfrm>
+          <a:prstGeom prst="rect">
+            <a:avLst/>
+          </a:prstGeom>
+          <a:noFill/>
+        </p:spPr>
+        <p:txBody>
+          <a:bodyPr wrap="none" lIns="0" rIns="0">
+            <a:noAutofit/>
+          </a:bodyPr>
+          <a:lstStyle/>
+          <a:p>
+            <a:pPr algn="l"/>
+            <a:r>
+              <a:rPr sz="3400" b="0" i="0">
+                <a:solidFill>
+                  <a:srgbClr val="1A1A2E"/>
+                </a:solidFill>
+                <a:latin typeface="Arial"/>
+              </a:rPr>
+              <a:t>Operational health and risks</a:t>
+            </a:r>
+          </a:p>
+        </p:txBody>
+      </p:sp>
+      <p:sp>
+        <p:nvSpPr>
+          <p:cNvPr id="13" name="TextBox 12"/>
+          <p:cNvSpPr/>
+          <p:nvPr>
+            <p:ph type="body" idx="8"/>
+          </p:nvPr>
+        </p:nvSpPr>
+        <p:spPr>
+          <a:xfrm>
+            <a:off x="457200" y="4268418"/>
+            <a:ext cx="951348" cy="518159"/>
+          </a:xfrm>
+          <a:prstGeom prst="rect">
+            <a:avLst/>
+          </a:prstGeom>
+          <a:noFill/>
+        </p:spPr>
+        <p:txBody>
+          <a:bodyPr wrap="none" lIns="0" rIns="0">
+            <a:noAutofit/>
+          </a:bodyPr>
+          <a:lstStyle/>
+          <a:p>
+            <a:pPr algn="l"/>
+            <a:r>
+              <a:rPr sz="3400" b="1" i="0">
+                <a:solidFill>
+                  <a:srgbClr val="CC785C"/>
+                </a:solidFill>
+                <a:latin typeface="Arial"/>
+              </a:rPr>
+              <a:t>04</a:t>
+            </a:r>
+          </a:p>
+        </p:txBody>
+      </p:sp>
+      <p:sp>
+        <p:nvSpPr>
+          <p:cNvPr id="14" name="TextBox 13"/>
+          <p:cNvSpPr/>
+          <p:nvPr>
+            <p:ph type="body" idx="9"/>
+          </p:nvPr>
+        </p:nvSpPr>
+        <p:spPr>
+          <a:xfrm>
+            <a:off x="1371600" y="4268418"/>
+            <a:ext cx="10363200" cy="518159"/>
+          </a:xfrm>
+          <a:prstGeom prst="rect">
+            <a:avLst/>
+          </a:prstGeom>
+          <a:noFill/>
+        </p:spPr>
+        <p:txBody>
+          <a:bodyPr wrap="none" lIns="0" rIns="0">
+            <a:noAutofit/>
+          </a:bodyPr>
+          <a:lstStyle/>
+          <a:p>
+            <a:pPr algn="l"/>
+            <a:r>
+              <a:rPr sz="3400" b="0" i="0">
+                <a:solidFill>
+                  <a:srgbClr val="1A1A2E"/>
+                </a:solidFill>
+                <a:latin typeface="Arial"/>
+              </a:rPr>
+              <a:t>Roadmap for next quarter</a:t>
+            </a:r>
+          </a:p>
+        </p:txBody>
+      </p:sp>
+      <p:sp>
+        <p:nvSpPr>
+          <p:cNvPr id="15" name="TextBox 14"/>
+          <p:cNvSpPr/>
+          <p:nvPr>
+            <p:ph type="body" idx="13"/>
+          </p:nvPr>
+        </p:nvSpPr>
+        <p:spPr>
+          <a:xfrm>
+            <a:off x="457200" y="5151728"/>
+            <a:ext cx="951348" cy="518159"/>
+          </a:xfrm>
+          <a:prstGeom prst="rect">
+            <a:avLst/>
+          </a:prstGeom>
+          <a:noFill/>
+        </p:spPr>
+        <p:txBody>
+          <a:bodyPr wrap="none" lIns="0" rIns="0">
+            <a:noAutofit/>
+          </a:bodyPr>
+          <a:lstStyle/>
+          <a:p>
+            <a:pPr algn="l"/>
+            <a:r>
+              <a:rPr sz="3400" b="1" i="0">
+                <a:solidFill>
+                  <a:srgbClr val="CC785C"/>
+                </a:solidFill>
+                <a:latin typeface="Arial"/>
+              </a:rPr>
+              <a:t>05</a:t>
+            </a:r>
+          </a:p>
+        </p:txBody>
+      </p:sp>
+      <p:sp>
+        <p:nvSpPr>
+          <p:cNvPr id="16" name="TextBox 15"/>
+          <p:cNvSpPr/>
+          <p:nvPr>
+            <p:ph type="body" idx="14"/>
+          </p:nvPr>
+        </p:nvSpPr>
+        <p:spPr>
+          <a:xfrm>
+            <a:off x="1371600" y="5151728"/>
+            <a:ext cx="10363200" cy="518159"/>
+          </a:xfrm>
+          <a:prstGeom prst="rect">
+            <a:avLst/>
+          </a:prstGeom>
+          <a:noFill/>
+        </p:spPr>
+        <p:txBody>
+          <a:bodyPr wrap="none" lIns="0" rIns="0">
+            <a:noAutofit/>
+          </a:bodyPr>
+          <a:lstStyle/>
+          <a:p>
+            <a:pPr algn="l"/>
+            <a:r>
+              <a:rPr sz="3400" b="0" i="0">
+                <a:solidFill>
+                  <a:srgbClr val="1A1A2E"/>
+                </a:solidFill>
+                <a:latin typeface="Arial"/>
+              </a:rPr>
+              <a:t>Decisions we need today</a:t>
             </a:r>
           </a:p>
         </p:txBody>
@@ -3356,511 +3461,6 @@
 
 <file path=ppt/slideLayouts/slideLayout20.xml><?xml version="1.0" encoding="utf-8"?>
 <p:sldLayout xmlns:a="http://schemas.openxmlformats.org/drawingml/2006/main" xmlns:r="http://schemas.openxmlformats.org/officeDocument/2006/relationships" xmlns:p="http://schemas.openxmlformats.org/presentationml/2006/main" type="blank" preserve="1">
-  <p:cSld name="slidekit · Agenda">
-    <p:bg>
-      <p:bgPr>
-        <a:solidFill>
-          <a:srgbClr val="FFFFFF"/>
-        </a:solidFill>
-        <a:effectLst/>
-      </p:bgPr>
-    </p:bg>
-    <p:spTree>
-      <p:nvGrpSpPr>
-        <p:cNvPr id="1" name=""/>
-        <p:cNvGrpSpPr/>
-        <p:nvPr/>
-      </p:nvGrpSpPr>
-      <p:grpSpPr>
-        <a:xfrm>
-          <a:off x="0" y="0"/>
-          <a:ext cx="0" cy="0"/>
-          <a:chOff x="0" y="0"/>
-          <a:chExt cx="0" cy="0"/>
-        </a:xfrm>
-      </p:grpSpPr>
-      <p:sp>
-        <p:nvSpPr>
-          <p:cNvPr id="4" name="Slide Number Placeholder 3"/>
-          <p:cNvSpPr>
-            <a:spLocks noGrp="1"/>
-          </p:cNvSpPr>
-          <p:nvPr>
-            <p:ph type="sldNum" sz="quarter" idx="12"/>
-          </p:nvPr>
-        </p:nvSpPr>
-        <p:spPr>
-          <a:xfrm>
-            <a:off x="11186160" y="6035040"/>
-            <a:ext cx="548640" cy="365760"/>
-          </a:xfrm>
-        </p:spPr>
-        <p:txBody>
-          <a:bodyPr/>
-          <a:lstStyle/>
-          <a:p>
-            <a:fld id="{C1FF6DA9-008F-8B48-92A6-B652298478BF}" type="slidenum">
-              <a:rPr lang="en-US" smtClean="0"/>
-              <a:t>‹#›</a:t>
-            </a:fld>
-            <a:endParaRPr lang="en-US"/>
-          </a:p>
-        </p:txBody>
-      </p:sp>
-      <p:sp>
-        <p:nvSpPr>
-          <p:cNvPr id="5" name="TextBox 4"/>
-          <p:cNvSpPr/>
-          <p:nvPr>
-            <p:ph type="title"/>
-          </p:nvPr>
-        </p:nvSpPr>
-        <p:spPr>
-          <a:xfrm>
-            <a:off x="457200" y="457200"/>
-            <a:ext cx="11277600" cy="768096"/>
-          </a:xfrm>
-          <a:prstGeom prst="rect">
-            <a:avLst/>
-          </a:prstGeom>
-          <a:noFill/>
-        </p:spPr>
-        <p:txBody>
-          <a:bodyPr wrap="none" lIns="0" rIns="0">
-            <a:noAutofit/>
-          </a:bodyPr>
-          <a:lstStyle/>
-          <a:p>
-            <a:pPr algn="l"/>
-            <a:r>
-              <a:rPr sz="4200" b="1" i="0">
-                <a:solidFill>
-                  <a:srgbClr val="CC785C"/>
-                </a:solidFill>
-                <a:latin typeface="Arial"/>
-              </a:rPr>
-              <a:t>What We Will Cover</a:t>
-            </a:r>
-          </a:p>
-        </p:txBody>
-      </p:sp>
-      <p:sp>
-        <p:nvSpPr>
-          <p:cNvPr id="6" name="Rectangle 5"/>
-          <p:cNvSpPr/>
-          <p:nvPr>
-            <p:ph type="body" idx="1"/>
-          </p:nvPr>
-        </p:nvSpPr>
-        <p:spPr>
-          <a:xfrm>
-            <a:off x="457200" y="1280160"/>
-            <a:ext cx="11277600" cy="64008"/>
-          </a:xfrm>
-          <a:prstGeom prst="rect">
-            <a:avLst/>
-          </a:prstGeom>
-          <a:solidFill>
-            <a:srgbClr val="CC785C"/>
-          </a:solidFill>
-          <a:ln>
-            <a:noFill/>
-          </a:ln>
-          <a:effectLst/>
-        </p:spPr>
-        <p:txBody>
-          <a:bodyPr rtlCol="0" anchor="ctr"/>
-          <a:lstStyle/>
-          <a:p>
-            <a:pPr algn="ctr"/>
-          </a:p>
-        </p:txBody>
-      </p:sp>
-      <p:sp>
-        <p:nvSpPr>
-          <p:cNvPr id="7" name="TextBox 6"/>
-          <p:cNvSpPr/>
-          <p:nvPr>
-            <p:ph type="body" idx="2"/>
-          </p:nvPr>
-        </p:nvSpPr>
-        <p:spPr>
-          <a:xfrm>
-            <a:off x="457200" y="1618488"/>
-            <a:ext cx="951348" cy="518159"/>
-          </a:xfrm>
-          <a:prstGeom prst="rect">
-            <a:avLst/>
-          </a:prstGeom>
-          <a:noFill/>
-        </p:spPr>
-        <p:txBody>
-          <a:bodyPr wrap="none" lIns="0" rIns="0">
-            <a:noAutofit/>
-          </a:bodyPr>
-          <a:lstStyle/>
-          <a:p>
-            <a:pPr algn="l"/>
-            <a:r>
-              <a:rPr sz="3400" b="1" i="0">
-                <a:solidFill>
-                  <a:srgbClr val="CC785C"/>
-                </a:solidFill>
-                <a:latin typeface="Arial"/>
-              </a:rPr>
-              <a:t>01</a:t>
-            </a:r>
-          </a:p>
-        </p:txBody>
-      </p:sp>
-      <p:sp>
-        <p:nvSpPr>
-          <p:cNvPr id="8" name="TextBox 7"/>
-          <p:cNvSpPr/>
-          <p:nvPr>
-            <p:ph type="body" idx="3"/>
-          </p:nvPr>
-        </p:nvSpPr>
-        <p:spPr>
-          <a:xfrm>
-            <a:off x="1371600" y="1618488"/>
-            <a:ext cx="10363200" cy="518159"/>
-          </a:xfrm>
-          <a:prstGeom prst="rect">
-            <a:avLst/>
-          </a:prstGeom>
-          <a:noFill/>
-        </p:spPr>
-        <p:txBody>
-          <a:bodyPr wrap="none" lIns="0" rIns="0">
-            <a:noAutofit/>
-          </a:bodyPr>
-          <a:lstStyle/>
-          <a:p>
-            <a:pPr algn="l"/>
-            <a:r>
-              <a:rPr sz="3400" b="0" i="0">
-                <a:solidFill>
-                  <a:srgbClr val="1A1A2E"/>
-                </a:solidFill>
-                <a:latin typeface="Arial"/>
-              </a:rPr>
-              <a:t>Performance against targets</a:t>
-            </a:r>
-          </a:p>
-        </p:txBody>
-      </p:sp>
-      <p:sp>
-        <p:nvSpPr>
-          <p:cNvPr id="9" name="TextBox 8"/>
-          <p:cNvSpPr/>
-          <p:nvPr>
-            <p:ph type="body" idx="4"/>
-          </p:nvPr>
-        </p:nvSpPr>
-        <p:spPr>
-          <a:xfrm>
-            <a:off x="457200" y="2501798"/>
-            <a:ext cx="951348" cy="518159"/>
-          </a:xfrm>
-          <a:prstGeom prst="rect">
-            <a:avLst/>
-          </a:prstGeom>
-          <a:noFill/>
-        </p:spPr>
-        <p:txBody>
-          <a:bodyPr wrap="none" lIns="0" rIns="0">
-            <a:noAutofit/>
-          </a:bodyPr>
-          <a:lstStyle/>
-          <a:p>
-            <a:pPr algn="l"/>
-            <a:r>
-              <a:rPr sz="3400" b="1" i="0">
-                <a:solidFill>
-                  <a:srgbClr val="CC785C"/>
-                </a:solidFill>
-                <a:latin typeface="Arial"/>
-              </a:rPr>
-              <a:t>02</a:t>
-            </a:r>
-          </a:p>
-        </p:txBody>
-      </p:sp>
-      <p:sp>
-        <p:nvSpPr>
-          <p:cNvPr id="10" name="TextBox 9"/>
-          <p:cNvSpPr/>
-          <p:nvPr>
-            <p:ph type="body" idx="5"/>
-          </p:nvPr>
-        </p:nvSpPr>
-        <p:spPr>
-          <a:xfrm>
-            <a:off x="1371600" y="2501798"/>
-            <a:ext cx="10363200" cy="518159"/>
-          </a:xfrm>
-          <a:prstGeom prst="rect">
-            <a:avLst/>
-          </a:prstGeom>
-          <a:noFill/>
-        </p:spPr>
-        <p:txBody>
-          <a:bodyPr wrap="none" lIns="0" rIns="0">
-            <a:noAutofit/>
-          </a:bodyPr>
-          <a:lstStyle/>
-          <a:p>
-            <a:pPr algn="l"/>
-            <a:r>
-              <a:rPr sz="3400" b="0" i="0">
-                <a:solidFill>
-                  <a:srgbClr val="1A1A2E"/>
-                </a:solidFill>
-                <a:latin typeface="Arial"/>
-              </a:rPr>
-              <a:t>Customer and market signals</a:t>
-            </a:r>
-          </a:p>
-        </p:txBody>
-      </p:sp>
-      <p:sp>
-        <p:nvSpPr>
-          <p:cNvPr id="11" name="TextBox 10"/>
-          <p:cNvSpPr/>
-          <p:nvPr>
-            <p:ph type="body" idx="6"/>
-          </p:nvPr>
-        </p:nvSpPr>
-        <p:spPr>
-          <a:xfrm>
-            <a:off x="457200" y="3385108"/>
-            <a:ext cx="951348" cy="518159"/>
-          </a:xfrm>
-          <a:prstGeom prst="rect">
-            <a:avLst/>
-          </a:prstGeom>
-          <a:noFill/>
-        </p:spPr>
-        <p:txBody>
-          <a:bodyPr wrap="none" lIns="0" rIns="0">
-            <a:noAutofit/>
-          </a:bodyPr>
-          <a:lstStyle/>
-          <a:p>
-            <a:pPr algn="l"/>
-            <a:r>
-              <a:rPr sz="3400" b="1" i="0">
-                <a:solidFill>
-                  <a:srgbClr val="CC785C"/>
-                </a:solidFill>
-                <a:latin typeface="Arial"/>
-              </a:rPr>
-              <a:t>03</a:t>
-            </a:r>
-          </a:p>
-        </p:txBody>
-      </p:sp>
-      <p:sp>
-        <p:nvSpPr>
-          <p:cNvPr id="12" name="TextBox 11"/>
-          <p:cNvSpPr/>
-          <p:nvPr>
-            <p:ph type="body" idx="7"/>
-          </p:nvPr>
-        </p:nvSpPr>
-        <p:spPr>
-          <a:xfrm>
-            <a:off x="1371600" y="3385108"/>
-            <a:ext cx="10363200" cy="518159"/>
-          </a:xfrm>
-          <a:prstGeom prst="rect">
-            <a:avLst/>
-          </a:prstGeom>
-          <a:noFill/>
-        </p:spPr>
-        <p:txBody>
-          <a:bodyPr wrap="none" lIns="0" rIns="0">
-            <a:noAutofit/>
-          </a:bodyPr>
-          <a:lstStyle/>
-          <a:p>
-            <a:pPr algn="l"/>
-            <a:r>
-              <a:rPr sz="3400" b="0" i="0">
-                <a:solidFill>
-                  <a:srgbClr val="1A1A2E"/>
-                </a:solidFill>
-                <a:latin typeface="Arial"/>
-              </a:rPr>
-              <a:t>Operational health and risks</a:t>
-            </a:r>
-          </a:p>
-        </p:txBody>
-      </p:sp>
-      <p:sp>
-        <p:nvSpPr>
-          <p:cNvPr id="13" name="TextBox 12"/>
-          <p:cNvSpPr/>
-          <p:nvPr>
-            <p:ph type="body" idx="8"/>
-          </p:nvPr>
-        </p:nvSpPr>
-        <p:spPr>
-          <a:xfrm>
-            <a:off x="457200" y="4268418"/>
-            <a:ext cx="951348" cy="518159"/>
-          </a:xfrm>
-          <a:prstGeom prst="rect">
-            <a:avLst/>
-          </a:prstGeom>
-          <a:noFill/>
-        </p:spPr>
-        <p:txBody>
-          <a:bodyPr wrap="none" lIns="0" rIns="0">
-            <a:noAutofit/>
-          </a:bodyPr>
-          <a:lstStyle/>
-          <a:p>
-            <a:pPr algn="l"/>
-            <a:r>
-              <a:rPr sz="3400" b="1" i="0">
-                <a:solidFill>
-                  <a:srgbClr val="CC785C"/>
-                </a:solidFill>
-                <a:latin typeface="Arial"/>
-              </a:rPr>
-              <a:t>04</a:t>
-            </a:r>
-          </a:p>
-        </p:txBody>
-      </p:sp>
-      <p:sp>
-        <p:nvSpPr>
-          <p:cNvPr id="14" name="TextBox 13"/>
-          <p:cNvSpPr/>
-          <p:nvPr>
-            <p:ph type="body" idx="9"/>
-          </p:nvPr>
-        </p:nvSpPr>
-        <p:spPr>
-          <a:xfrm>
-            <a:off x="1371600" y="4268418"/>
-            <a:ext cx="10363200" cy="518159"/>
-          </a:xfrm>
-          <a:prstGeom prst="rect">
-            <a:avLst/>
-          </a:prstGeom>
-          <a:noFill/>
-        </p:spPr>
-        <p:txBody>
-          <a:bodyPr wrap="none" lIns="0" rIns="0">
-            <a:noAutofit/>
-          </a:bodyPr>
-          <a:lstStyle/>
-          <a:p>
-            <a:pPr algn="l"/>
-            <a:r>
-              <a:rPr sz="3400" b="0" i="0">
-                <a:solidFill>
-                  <a:srgbClr val="1A1A2E"/>
-                </a:solidFill>
-                <a:latin typeface="Arial"/>
-              </a:rPr>
-              <a:t>Roadmap for next quarter</a:t>
-            </a:r>
-          </a:p>
-        </p:txBody>
-      </p:sp>
-      <p:sp>
-        <p:nvSpPr>
-          <p:cNvPr id="15" name="TextBox 14"/>
-          <p:cNvSpPr/>
-          <p:nvPr>
-            <p:ph type="body" idx="13"/>
-          </p:nvPr>
-        </p:nvSpPr>
-        <p:spPr>
-          <a:xfrm>
-            <a:off x="457200" y="5151728"/>
-            <a:ext cx="951348" cy="518159"/>
-          </a:xfrm>
-          <a:prstGeom prst="rect">
-            <a:avLst/>
-          </a:prstGeom>
-          <a:noFill/>
-        </p:spPr>
-        <p:txBody>
-          <a:bodyPr wrap="none" lIns="0" rIns="0">
-            <a:noAutofit/>
-          </a:bodyPr>
-          <a:lstStyle/>
-          <a:p>
-            <a:pPr algn="l"/>
-            <a:r>
-              <a:rPr sz="3400" b="1" i="0">
-                <a:solidFill>
-                  <a:srgbClr val="CC785C"/>
-                </a:solidFill>
-                <a:latin typeface="Arial"/>
-              </a:rPr>
-              <a:t>05</a:t>
-            </a:r>
-          </a:p>
-        </p:txBody>
-      </p:sp>
-      <p:sp>
-        <p:nvSpPr>
-          <p:cNvPr id="16" name="TextBox 15"/>
-          <p:cNvSpPr/>
-          <p:nvPr>
-            <p:ph type="body" idx="14"/>
-          </p:nvPr>
-        </p:nvSpPr>
-        <p:spPr>
-          <a:xfrm>
-            <a:off x="1371600" y="5151728"/>
-            <a:ext cx="10363200" cy="518159"/>
-          </a:xfrm>
-          <a:prstGeom prst="rect">
-            <a:avLst/>
-          </a:prstGeom>
-          <a:noFill/>
-        </p:spPr>
-        <p:txBody>
-          <a:bodyPr wrap="none" lIns="0" rIns="0">
-            <a:noAutofit/>
-          </a:bodyPr>
-          <a:lstStyle/>
-          <a:p>
-            <a:pPr algn="l"/>
-            <a:r>
-              <a:rPr sz="3400" b="0" i="0">
-                <a:solidFill>
-                  <a:srgbClr val="1A1A2E"/>
-                </a:solidFill>
-                <a:latin typeface="Arial"/>
-              </a:rPr>
-              <a:t>Decisions we need today</a:t>
-            </a:r>
-          </a:p>
-        </p:txBody>
-      </p:sp>
-    </p:spTree>
-    <p:extLst>
-      <p:ext uri="{BB962C8B-B14F-4D97-AF65-F5344CB8AC3E}">
-        <p14:creationId xmlns:p14="http://schemas.microsoft.com/office/powerpoint/2010/main" val="1212999818"/>
-      </p:ext>
-    </p:extLst>
-  </p:cSld>
-  <p:clrMapOvr>
-    <a:masterClrMapping/>
-  </p:clrMapOvr>
-</p:sldLayout>
-</file>
-
-<file path=ppt/slideLayouts/slideLayout21.xml><?xml version="1.0" encoding="utf-8"?>
-<p:sldLayout xmlns:a="http://schemas.openxmlformats.org/drawingml/2006/main" xmlns:r="http://schemas.openxmlformats.org/officeDocument/2006/relationships" xmlns:p="http://schemas.openxmlformats.org/presentationml/2006/main" type="blank" preserve="1">
   <p:cSld name="slidekit · Big Number">
     <p:bg>
       <p:bgPr>
@@ -4031,7 +3631,7 @@
 </p:sldLayout>
 </file>
 
-<file path=ppt/slideLayouts/slideLayout22.xml><?xml version="1.0" encoding="utf-8"?>
+<file path=ppt/slideLayouts/slideLayout21.xml><?xml version="1.0" encoding="utf-8"?>
 <p:sldLayout xmlns:a="http://schemas.openxmlformats.org/drawingml/2006/main" xmlns:r="http://schemas.openxmlformats.org/officeDocument/2006/relationships" xmlns:p="http://schemas.openxmlformats.org/presentationml/2006/main" type="blank" preserve="1">
   <p:cSld name="slidekit · Pull Quote">
     <p:bg>
@@ -4094,8 +3694,8 @@
         </p:nvSpPr>
         <p:spPr>
           <a:xfrm>
-            <a:off x="457200" y="2301240"/>
-            <a:ext cx="128016" cy="2255520"/>
+            <a:off x="457200" y="2621280"/>
+            <a:ext cx="128016" cy="1615440"/>
           </a:xfrm>
           <a:prstGeom prst="rect">
             <a:avLst/>
@@ -4126,16 +3726,16 @@
         </p:nvSpPr>
         <p:spPr>
           <a:xfrm>
-            <a:off x="996696" y="2301240"/>
-            <a:ext cx="10738104" cy="1371600"/>
-          </a:xfrm>
-          <a:prstGeom prst="rect">
-            <a:avLst/>
-          </a:prstGeom>
-          <a:noFill/>
-        </p:spPr>
-        <p:txBody>
-          <a:bodyPr wrap="square" lIns="0" rIns="0">
+            <a:off x="996696" y="2621280"/>
+            <a:ext cx="11195304" cy="731520"/>
+          </a:xfrm>
+          <a:prstGeom prst="rect">
+            <a:avLst/>
+          </a:prstGeom>
+          <a:noFill/>
+        </p:spPr>
+        <p:txBody>
+          <a:bodyPr wrap="none" lIns="0" rIns="0">
             <a:noAutofit/>
           </a:bodyPr>
           <a:lstStyle/>
@@ -4148,7 +3748,7 @@
                 </a:solidFill>
                 <a:latin typeface="Arial"/>
               </a:rPr>
-              <a:t>"We stopped buying tools and started buying outcomes."</a:t>
+              <a:t>"We buy outcomes, not tools."</a:t>
             </a:r>
           </a:p>
         </p:txBody>
@@ -4163,7 +3763,7 @@
         </p:nvSpPr>
         <p:spPr>
           <a:xfrm>
-            <a:off x="996696" y="3947160"/>
+            <a:off x="996696" y="3627120"/>
             <a:ext cx="11195304" cy="609600"/>
           </a:xfrm>
           <a:prstGeom prst="rect">
@@ -4181,7 +3781,7 @@
             <a:r>
               <a:rPr sz="3400" b="0" i="0">
                 <a:solidFill>
-                  <a:srgbClr val="8A8A9A"/>
+                  <a:srgbClr val="1A1A2E"/>
                 </a:solidFill>
                 <a:latin typeface="Arial"/>
               </a:rPr>
@@ -4203,7 +3803,7 @@
 </p:sldLayout>
 </file>
 
-<file path=ppt/slideLayouts/slideLayout23.xml><?xml version="1.0" encoding="utf-8"?>
+<file path=ppt/slideLayouts/slideLayout22.xml><?xml version="1.0" encoding="utf-8"?>
 <p:sldLayout xmlns:a="http://schemas.openxmlformats.org/drawingml/2006/main" xmlns:r="http://schemas.openxmlformats.org/officeDocument/2006/relationships" xmlns:p="http://schemas.openxmlformats.org/presentationml/2006/main" type="blank" preserve="1">
   <p:cSld name="slidekit · Definition">
     <p:bg>
@@ -4266,8 +3866,8 @@
         </p:nvSpPr>
         <p:spPr>
           <a:xfrm>
-            <a:off x="457200" y="1920240"/>
-            <a:ext cx="128016" cy="3017520"/>
+            <a:off x="457200" y="2438400"/>
+            <a:ext cx="128016" cy="1981200"/>
           </a:xfrm>
           <a:prstGeom prst="rect">
             <a:avLst/>
@@ -4298,7 +3898,7 @@
         </p:nvSpPr>
         <p:spPr>
           <a:xfrm>
-            <a:off x="996696" y="1920240"/>
+            <a:off x="996696" y="2438400"/>
             <a:ext cx="11195304" cy="1097280"/>
           </a:xfrm>
           <a:prstGeom prst="rect">
@@ -4335,16 +3935,16 @@
         </p:nvSpPr>
         <p:spPr>
           <a:xfrm>
-            <a:off x="996696" y="3291840"/>
-            <a:ext cx="10738104" cy="1645920"/>
-          </a:xfrm>
-          <a:prstGeom prst="rect">
-            <a:avLst/>
-          </a:prstGeom>
-          <a:noFill/>
-        </p:spPr>
-        <p:txBody>
-          <a:bodyPr wrap="square" lIns="0" rIns="0">
+            <a:off x="996696" y="3810000"/>
+            <a:ext cx="11195304" cy="609600"/>
+          </a:xfrm>
+          <a:prstGeom prst="rect">
+            <a:avLst/>
+          </a:prstGeom>
+          <a:noFill/>
+        </p:spPr>
+        <p:txBody>
+          <a:bodyPr wrap="none" lIns="0" rIns="0">
             <a:noAutofit/>
           </a:bodyPr>
           <a:lstStyle/>
@@ -4357,7 +3957,7 @@
                 </a:solidFill>
                 <a:latin typeface="Arial"/>
               </a:rPr>
-              <a:t>The percentage of recurring revenue retained from existing customers over a period, including expansion and after churn.</a:t>
+              <a:t>Revenue kept from existing customers.</a:t>
             </a:r>
           </a:p>
         </p:txBody>
@@ -4375,7 +3975,7 @@
 </p:sldLayout>
 </file>
 
-<file path=ppt/slideLayouts/slideLayout24.xml><?xml version="1.0" encoding="utf-8"?>
+<file path=ppt/slideLayouts/slideLayout23.xml><?xml version="1.0" encoding="utf-8"?>
 <p:sldLayout xmlns:a="http://schemas.openxmlformats.org/drawingml/2006/main" xmlns:r="http://schemas.openxmlformats.org/officeDocument/2006/relationships" xmlns:p="http://schemas.openxmlformats.org/presentationml/2006/main" type="blank" preserve="1">
   <p:cSld name="slidekit · Question">
     <p:bg>
@@ -4438,8 +4038,8 @@
         </p:nvSpPr>
         <p:spPr>
           <a:xfrm>
-            <a:off x="457200" y="1874520"/>
-            <a:ext cx="128016" cy="3108960"/>
+            <a:off x="457200" y="2880360"/>
+            <a:ext cx="128016" cy="1097280"/>
           </a:xfrm>
           <a:prstGeom prst="rect">
             <a:avLst/>
@@ -4470,16 +4070,16 @@
         </p:nvSpPr>
         <p:spPr>
           <a:xfrm>
-            <a:off x="996696" y="1874520"/>
-            <a:ext cx="10738104" cy="3108960"/>
-          </a:xfrm>
-          <a:prstGeom prst="rect">
-            <a:avLst/>
-          </a:prstGeom>
-          <a:noFill/>
-        </p:spPr>
-        <p:txBody>
-          <a:bodyPr wrap="square" lIns="0" rIns="0">
+            <a:off x="996696" y="2880360"/>
+            <a:ext cx="11195304" cy="1097280"/>
+          </a:xfrm>
+          <a:prstGeom prst="rect">
+            <a:avLst/>
+          </a:prstGeom>
+          <a:noFill/>
+        </p:spPr>
+        <p:txBody>
+          <a:bodyPr wrap="none" lIns="0" rIns="0">
             <a:noAutofit/>
           </a:bodyPr>
           <a:lstStyle/>
@@ -4492,7 +4092,7 @@
                 </a:solidFill>
                 <a:latin typeface="Arial"/>
               </a:rPr>
-              <a:t>What would we build if we trusted our customers completely?</a:t>
+              <a:t>What if we trusted users?</a:t>
             </a:r>
           </a:p>
         </p:txBody>
@@ -4510,7 +4110,7 @@
 </p:sldLayout>
 </file>
 
-<file path=ppt/slideLayouts/slideLayout25.xml><?xml version="1.0" encoding="utf-8"?>
+<file path=ppt/slideLayouts/slideLayout24.xml><?xml version="1.0" encoding="utf-8"?>
 <p:sldLayout xmlns:a="http://schemas.openxmlformats.org/drawingml/2006/main" xmlns:r="http://schemas.openxmlformats.org/officeDocument/2006/relationships" xmlns:p="http://schemas.openxmlformats.org/presentationml/2006/main" type="blank" preserve="1">
   <p:cSld name="slidekit · Bullet List">
     <p:bg>
@@ -4724,7 +4324,7 @@
 </p:sldLayout>
 </file>
 
-<file path=ppt/slideLayouts/slideLayout26.xml><?xml version="1.0" encoding="utf-8"?>
+<file path=ppt/slideLayouts/slideLayout25.xml><?xml version="1.0" encoding="utf-8"?>
 <p:sldLayout xmlns:a="http://schemas.openxmlformats.org/drawingml/2006/main" xmlns:r="http://schemas.openxmlformats.org/officeDocument/2006/relationships" xmlns:p="http://schemas.openxmlformats.org/presentationml/2006/main" type="blank" preserve="1">
   <p:cSld name="slidekit · Code Block">
     <p:bg>
@@ -4794,7 +4394,7 @@
             <a:avLst/>
           </a:prstGeom>
           <a:solidFill>
-            <a:srgbClr val="FF5F56"/>
+            <a:srgbClr val="FFFFFF"/>
           </a:solidFill>
           <a:ln>
             <a:noFill/>
@@ -4826,7 +4426,7 @@
             <a:avLst/>
           </a:prstGeom>
           <a:solidFill>
-            <a:srgbClr val="FFBD2E"/>
+            <a:srgbClr val="FFFFFF"/>
           </a:solidFill>
           <a:ln>
             <a:noFill/>
@@ -4858,7 +4458,7 @@
             <a:avLst/>
           </a:prstGeom>
           <a:solidFill>
-            <a:srgbClr val="27C93F"/>
+            <a:srgbClr val="FFFFFF"/>
           </a:solidFill>
           <a:ln>
             <a:noFill/>
@@ -4901,7 +4501,7 @@
             <a:r>
               <a:rPr sz="4200" b="0" i="0">
                 <a:solidFill>
-                  <a:srgbClr val="D4D4D4"/>
+                  <a:srgbClr val="FFFFFF"/>
                 </a:solidFill>
                 <a:latin typeface="Arial"/>
               </a:rPr>
@@ -4938,7 +4538,7 @@
             <a:r>
               <a:rPr sz="3400" b="0" i="0">
                 <a:solidFill>
-                  <a:srgbClr val="6A9955"/>
+                  <a:srgbClr val="FFFFFF"/>
                 </a:solidFill>
                 <a:latin typeface="Arial"/>
               </a:rPr>
@@ -4995,7 +4595,7 @@
         <p:spPr>
           <a:xfrm>
             <a:off x="1057461" y="2356103"/>
-            <a:ext cx="302848" cy="518159"/>
+            <a:ext cx="2524382" cy="518159"/>
           </a:xfrm>
           <a:prstGeom prst="rect">
             <a:avLst/>
@@ -5012,11 +4612,11 @@
             <a:r>
               <a:rPr sz="3400" b="0" i="0">
                 <a:solidFill>
-                  <a:srgbClr val="D4D4D4"/>
-                </a:solidFill>
-                <a:latin typeface="Arial"/>
-              </a:rPr>
-              <a:t> </a:t>
+                  <a:srgbClr val="FFFFFF"/>
+                </a:solidFill>
+                <a:latin typeface="Arial"/>
+              </a:rPr>
+              <a:t> main():</a:t>
             </a:r>
           </a:p>
         </p:txBody>
@@ -5031,8 +4631,8 @@
         </p:nvSpPr>
         <p:spPr>
           <a:xfrm>
-            <a:off x="1177429" y="2356103"/>
-            <a:ext cx="1680348" cy="518159"/>
+            <a:off x="457200" y="2874262"/>
+            <a:ext cx="7046475" cy="518159"/>
           </a:xfrm>
           <a:prstGeom prst="rect">
             <a:avLst/>
@@ -5049,11 +4649,11 @@
             <a:r>
               <a:rPr sz="3400" b="0" i="0">
                 <a:solidFill>
-                  <a:srgbClr val="DCDCAA"/>
-                </a:solidFill>
-                <a:latin typeface="Arial"/>
-              </a:rPr>
-              <a:t>main</a:t>
+                  <a:srgbClr val="FFFFFF"/>
+                </a:solidFill>
+                <a:latin typeface="Arial"/>
+              </a:rPr>
+              <a:t>    print("Hello, world!")</a:t>
             </a:r>
           </a:p>
         </p:txBody>
@@ -5068,8 +4668,8 @@
         </p:nvSpPr>
         <p:spPr>
           <a:xfrm>
-            <a:off x="2113347" y="2356103"/>
-            <a:ext cx="834964" cy="518159"/>
+            <a:off x="457200" y="3910580"/>
+            <a:ext cx="2140486" cy="518159"/>
           </a:xfrm>
           <a:prstGeom prst="rect">
             <a:avLst/>
@@ -5086,11 +4686,11 @@
             <a:r>
               <a:rPr sz="3400" b="0" i="0">
                 <a:solidFill>
-                  <a:srgbClr val="D4D4D4"/>
-                </a:solidFill>
-                <a:latin typeface="Arial"/>
-              </a:rPr>
-              <a:t>():</a:t>
+                  <a:srgbClr val="FFFFFF"/>
+                </a:solidFill>
+                <a:latin typeface="Arial"/>
+              </a:rPr>
+              <a:t>main()</a:t>
             </a:r>
           </a:p>
         </p:txBody>
@@ -5101,265 +4701,6 @@
           <p:cNvSpPr/>
           <p:nvPr>
             <p:ph type="body" idx="13"/>
-          </p:nvPr>
-        </p:nvSpPr>
-        <p:spPr>
-          <a:xfrm>
-            <a:off x="457200" y="2874262"/>
-            <a:ext cx="662751" cy="518159"/>
-          </a:xfrm>
-          <a:prstGeom prst="rect">
-            <a:avLst/>
-          </a:prstGeom>
-          <a:noFill/>
-        </p:spPr>
-        <p:txBody>
-          <a:bodyPr wrap="none" lIns="0" rIns="0">
-            <a:noAutofit/>
-          </a:bodyPr>
-          <a:lstStyle/>
-          <a:p>
-            <a:pPr algn="l"/>
-            <a:r>
-              <a:rPr sz="3400" b="0" i="0">
-                <a:solidFill>
-                  <a:srgbClr val="D4D4D4"/>
-                </a:solidFill>
-                <a:latin typeface="Arial"/>
-              </a:rPr>
-              <a:t>    </a:t>
-            </a:r>
-          </a:p>
-        </p:txBody>
-      </p:sp>
-      <p:sp>
-        <p:nvSpPr>
-          <p:cNvPr id="15" name="TextBox 14"/>
-          <p:cNvSpPr/>
-          <p:nvPr>
-            <p:ph type="body" idx="14"/>
-          </p:nvPr>
-        </p:nvSpPr>
-        <p:spPr>
-          <a:xfrm>
-            <a:off x="937071" y="2874262"/>
-            <a:ext cx="1526857" cy="518159"/>
-          </a:xfrm>
-          <a:prstGeom prst="rect">
-            <a:avLst/>
-          </a:prstGeom>
-          <a:noFill/>
-        </p:spPr>
-        <p:txBody>
-          <a:bodyPr wrap="none" lIns="0" rIns="0">
-            <a:noAutofit/>
-          </a:bodyPr>
-          <a:lstStyle/>
-          <a:p>
-            <a:pPr algn="l"/>
-            <a:r>
-              <a:rPr sz="3400" b="0" i="0">
-                <a:solidFill>
-                  <a:srgbClr val="DCDCAA"/>
-                </a:solidFill>
-                <a:latin typeface="Arial"/>
-              </a:rPr>
-              <a:t>print</a:t>
-            </a:r>
-          </a:p>
-        </p:txBody>
-      </p:sp>
-      <p:sp>
-        <p:nvSpPr>
-          <p:cNvPr id="16" name="TextBox 15"/>
-          <p:cNvSpPr/>
-          <p:nvPr>
-            <p:ph type="body" idx="15"/>
-          </p:nvPr>
-        </p:nvSpPr>
-        <p:spPr>
-          <a:xfrm>
-            <a:off x="1777057" y="2874262"/>
-            <a:ext cx="412948" cy="518159"/>
-          </a:xfrm>
-          <a:prstGeom prst="rect">
-            <a:avLst/>
-          </a:prstGeom>
-          <a:noFill/>
-        </p:spPr>
-        <p:txBody>
-          <a:bodyPr wrap="none" lIns="0" rIns="0">
-            <a:noAutofit/>
-          </a:bodyPr>
-          <a:lstStyle/>
-          <a:p>
-            <a:pPr algn="l"/>
-            <a:r>
-              <a:rPr sz="3400" b="0" i="0">
-                <a:solidFill>
-                  <a:srgbClr val="D4D4D4"/>
-                </a:solidFill>
-                <a:latin typeface="Arial"/>
-              </a:rPr>
-              <a:t>(</a:t>
-            </a:r>
-          </a:p>
-        </p:txBody>
-      </p:sp>
-      <p:sp>
-        <p:nvSpPr>
-          <p:cNvPr id="17" name="TextBox 16"/>
-          <p:cNvSpPr/>
-          <p:nvPr>
-            <p:ph type="body" idx="16"/>
-          </p:nvPr>
-        </p:nvSpPr>
-        <p:spPr>
-          <a:xfrm>
-            <a:off x="1920850" y="2874262"/>
-            <a:ext cx="4474566" cy="518159"/>
-          </a:xfrm>
-          <a:prstGeom prst="rect">
-            <a:avLst/>
-          </a:prstGeom>
-          <a:noFill/>
-        </p:spPr>
-        <p:txBody>
-          <a:bodyPr wrap="none" lIns="0" rIns="0">
-            <a:noAutofit/>
-          </a:bodyPr>
-          <a:lstStyle/>
-          <a:p>
-            <a:pPr algn="l"/>
-            <a:r>
-              <a:rPr sz="3400" b="0" i="0">
-                <a:solidFill>
-                  <a:srgbClr val="CE9178"/>
-                </a:solidFill>
-                <a:latin typeface="Arial"/>
-              </a:rPr>
-              <a:t>"Hello, world!"</a:t>
-            </a:r>
-          </a:p>
-        </p:txBody>
-      </p:sp>
-      <p:sp>
-        <p:nvSpPr>
-          <p:cNvPr id="18" name="TextBox 17"/>
-          <p:cNvSpPr/>
-          <p:nvPr>
-            <p:ph type="body" idx="17"/>
-          </p:nvPr>
-        </p:nvSpPr>
-        <p:spPr>
-          <a:xfrm>
-            <a:off x="4603155" y="2874262"/>
-            <a:ext cx="412948" cy="518159"/>
-          </a:xfrm>
-          <a:prstGeom prst="rect">
-            <a:avLst/>
-          </a:prstGeom>
-          <a:noFill/>
-        </p:spPr>
-        <p:txBody>
-          <a:bodyPr wrap="none" lIns="0" rIns="0">
-            <a:noAutofit/>
-          </a:bodyPr>
-          <a:lstStyle/>
-          <a:p>
-            <a:pPr algn="l"/>
-            <a:r>
-              <a:rPr sz="3400" b="0" i="0">
-                <a:solidFill>
-                  <a:srgbClr val="D4D4D4"/>
-                </a:solidFill>
-                <a:latin typeface="Arial"/>
-              </a:rPr>
-              <a:t>)</a:t>
-            </a:r>
-          </a:p>
-        </p:txBody>
-      </p:sp>
-      <p:sp>
-        <p:nvSpPr>
-          <p:cNvPr id="19" name="TextBox 18"/>
-          <p:cNvSpPr/>
-          <p:nvPr>
-            <p:ph type="body" idx="18"/>
-          </p:nvPr>
-        </p:nvSpPr>
-        <p:spPr>
-          <a:xfrm>
-            <a:off x="457200" y="3910580"/>
-            <a:ext cx="1680348" cy="518159"/>
-          </a:xfrm>
-          <a:prstGeom prst="rect">
-            <a:avLst/>
-          </a:prstGeom>
-          <a:noFill/>
-        </p:spPr>
-        <p:txBody>
-          <a:bodyPr wrap="none" lIns="0" rIns="0">
-            <a:noAutofit/>
-          </a:bodyPr>
-          <a:lstStyle/>
-          <a:p>
-            <a:pPr algn="l"/>
-            <a:r>
-              <a:rPr sz="3400" b="0" i="0">
-                <a:solidFill>
-                  <a:srgbClr val="DCDCAA"/>
-                </a:solidFill>
-                <a:latin typeface="Arial"/>
-              </a:rPr>
-              <a:t>main</a:t>
-            </a:r>
-          </a:p>
-        </p:txBody>
-      </p:sp>
-      <p:sp>
-        <p:nvSpPr>
-          <p:cNvPr id="20" name="TextBox 19"/>
-          <p:cNvSpPr/>
-          <p:nvPr>
-            <p:ph type="body" idx="19"/>
-          </p:nvPr>
-        </p:nvSpPr>
-        <p:spPr>
-          <a:xfrm>
-            <a:off x="1393118" y="3910580"/>
-            <a:ext cx="643017" cy="518159"/>
-          </a:xfrm>
-          <a:prstGeom prst="rect">
-            <a:avLst/>
-          </a:prstGeom>
-          <a:noFill/>
-        </p:spPr>
-        <p:txBody>
-          <a:bodyPr wrap="none" lIns="0" rIns="0">
-            <a:noAutofit/>
-          </a:bodyPr>
-          <a:lstStyle/>
-          <a:p>
-            <a:pPr algn="l"/>
-            <a:r>
-              <a:rPr sz="3400" b="0" i="0">
-                <a:solidFill>
-                  <a:srgbClr val="D4D4D4"/>
-                </a:solidFill>
-                <a:latin typeface="Arial"/>
-              </a:rPr>
-              <a:t>()</a:t>
-            </a:r>
-          </a:p>
-        </p:txBody>
-      </p:sp>
-      <p:sp>
-        <p:nvSpPr>
-          <p:cNvPr id="21" name="TextBox 20"/>
-          <p:cNvSpPr/>
-          <p:nvPr>
-            <p:ph type="body" idx="20"/>
           </p:nvPr>
         </p:nvSpPr>
         <p:spPr>
@@ -5382,7 +4723,7 @@
             <a:r>
               <a:rPr sz="3400" b="0" i="0">
                 <a:solidFill>
-                  <a:srgbClr val="4EC9B0"/>
+                  <a:srgbClr val="569CD6"/>
                 </a:solidFill>
                 <a:latin typeface="Arial"/>
               </a:rPr>
@@ -5393,10 +4734,10 @@
       </p:sp>
       <p:sp>
         <p:nvSpPr>
-          <p:cNvPr id="22" name="TextBox 21"/>
-          <p:cNvSpPr/>
-          <p:nvPr>
-            <p:ph type="body" idx="21"/>
+          <p:cNvPr id="15" name="TextBox 14"/>
+          <p:cNvSpPr/>
+          <p:nvPr>
+            <p:ph type="body" idx="14"/>
           </p:nvPr>
         </p:nvSpPr>
         <p:spPr>
@@ -5419,7 +4760,7 @@
             <a:r>
               <a:rPr sz="3400" b="0" i="0">
                 <a:solidFill>
-                  <a:srgbClr val="D4D4D4"/>
+                  <a:srgbClr val="FFFFFF"/>
                 </a:solidFill>
                 <a:latin typeface="Arial"/>
               </a:rPr>
@@ -5430,10 +4771,10 @@
       </p:sp>
       <p:sp>
         <p:nvSpPr>
-          <p:cNvPr id="23" name="TextBox 22"/>
-          <p:cNvSpPr/>
-          <p:nvPr>
-            <p:ph type="body" idx="22"/>
+          <p:cNvPr id="16" name="TextBox 15"/>
+          <p:cNvSpPr/>
+          <p:nvPr>
+            <p:ph type="body" idx="15"/>
           </p:nvPr>
         </p:nvSpPr>
         <p:spPr>
@@ -5456,7 +4797,7 @@
             <a:r>
               <a:rPr sz="3400" b="0" i="0">
                 <a:solidFill>
-                  <a:srgbClr val="D4D4D4"/>
+                  <a:srgbClr val="FFFFFF"/>
                 </a:solidFill>
                 <a:latin typeface="Arial"/>
               </a:rPr>
@@ -5478,7 +4819,7 @@
 </p:sldLayout>
 </file>
 
-<file path=ppt/slideLayouts/slideLayout27.xml><?xml version="1.0" encoding="utf-8"?>
+<file path=ppt/slideLayouts/slideLayout26.xml><?xml version="1.0" encoding="utf-8"?>
 <p:sldLayout xmlns:a="http://schemas.openxmlformats.org/drawingml/2006/main" xmlns:r="http://schemas.openxmlformats.org/officeDocument/2006/relationships" xmlns:p="http://schemas.openxmlformats.org/presentationml/2006/main" type="blank" preserve="1">
   <p:cSld name="slidekit · File Tree">
     <p:bg>
@@ -5587,7 +4928,7 @@
             </a:avLst>
           </a:prstGeom>
           <a:solidFill>
-            <a:srgbClr val="0C1A1C"/>
+            <a:srgbClr val="1A1A2E"/>
           </a:solidFill>
           <a:ln>
             <a:noFill/>
@@ -5630,7 +4971,7 @@
             <a:r>
               <a:rPr sz="2600" b="1" i="0">
                 <a:solidFill>
-                  <a:srgbClr val="569CD6"/>
+                  <a:srgbClr val="CC785C"/>
                 </a:solidFill>
                 <a:latin typeface="Courier New"/>
               </a:rPr>
@@ -5667,7 +5008,7 @@
             <a:r>
               <a:rPr sz="2600" b="0" i="0">
                 <a:solidFill>
-                  <a:srgbClr val="55707A"/>
+                  <a:srgbClr val="CC785C"/>
                 </a:solidFill>
                 <a:latin typeface="Courier New"/>
               </a:rPr>
@@ -5704,7 +5045,7 @@
             <a:r>
               <a:rPr sz="2600" b="1" i="0">
                 <a:solidFill>
-                  <a:srgbClr val="569CD6"/>
+                  <a:srgbClr val="CC785C"/>
                 </a:solidFill>
                 <a:latin typeface="Courier New"/>
               </a:rPr>
@@ -5741,7 +5082,7 @@
             <a:r>
               <a:rPr sz="2600" b="0" i="0">
                 <a:solidFill>
-                  <a:srgbClr val="55707A"/>
+                  <a:srgbClr val="CC785C"/>
                 </a:solidFill>
                 <a:latin typeface="Courier New"/>
               </a:rPr>
@@ -5778,7 +5119,7 @@
             <a:r>
               <a:rPr sz="2600" b="1" i="0">
                 <a:solidFill>
-                  <a:srgbClr val="569CD6"/>
+                  <a:srgbClr val="CC785C"/>
                 </a:solidFill>
                 <a:latin typeface="Courier New"/>
               </a:rPr>
@@ -5815,7 +5156,7 @@
             <a:r>
               <a:rPr sz="2600" b="0" i="0">
                 <a:solidFill>
-                  <a:srgbClr val="55707A"/>
+                  <a:srgbClr val="CC785C"/>
                 </a:solidFill>
                 <a:latin typeface="Courier New"/>
               </a:rPr>
@@ -5852,7 +5193,7 @@
             <a:r>
               <a:rPr sz="2600" b="0" i="0">
                 <a:solidFill>
-                  <a:srgbClr val="D4D4D4"/>
+                  <a:srgbClr val="FFFFFF"/>
                 </a:solidFill>
                 <a:latin typeface="Courier New"/>
               </a:rPr>
@@ -5889,7 +5230,7 @@
             <a:r>
               <a:rPr sz="2600" b="0" i="0">
                 <a:solidFill>
-                  <a:srgbClr val="55707A"/>
+                  <a:srgbClr val="CC785C"/>
                 </a:solidFill>
                 <a:latin typeface="Courier New"/>
               </a:rPr>
@@ -5926,7 +5267,7 @@
             <a:r>
               <a:rPr sz="2600" b="0" i="0">
                 <a:solidFill>
-                  <a:srgbClr val="D4D4D4"/>
+                  <a:srgbClr val="FFFFFF"/>
                 </a:solidFill>
                 <a:latin typeface="Courier New"/>
               </a:rPr>
@@ -5963,7 +5304,7 @@
             <a:r>
               <a:rPr sz="2600" b="0" i="0">
                 <a:solidFill>
-                  <a:srgbClr val="55707A"/>
+                  <a:srgbClr val="CC785C"/>
                 </a:solidFill>
                 <a:latin typeface="Courier New"/>
               </a:rPr>
@@ -6000,7 +5341,7 @@
             <a:r>
               <a:rPr sz="2600" b="0" i="0">
                 <a:solidFill>
-                  <a:srgbClr val="D4D4D4"/>
+                  <a:srgbClr val="FFFFFF"/>
                 </a:solidFill>
                 <a:latin typeface="Courier New"/>
               </a:rPr>
@@ -6037,7 +5378,7 @@
             <a:r>
               <a:rPr sz="2600" b="0" i="0">
                 <a:solidFill>
-                  <a:srgbClr val="55707A"/>
+                  <a:srgbClr val="CC785C"/>
                 </a:solidFill>
                 <a:latin typeface="Courier New"/>
               </a:rPr>
@@ -6074,7 +5415,7 @@
             <a:r>
               <a:rPr sz="2600" b="0" i="0">
                 <a:solidFill>
-                  <a:srgbClr val="D4D4D4"/>
+                  <a:srgbClr val="FFFFFF"/>
                 </a:solidFill>
                 <a:latin typeface="Courier New"/>
               </a:rPr>
@@ -6111,7 +5452,7 @@
             <a:r>
               <a:rPr sz="2600" b="0" i="0">
                 <a:solidFill>
-                  <a:srgbClr val="55707A"/>
+                  <a:srgbClr val="CC785C"/>
                 </a:solidFill>
                 <a:latin typeface="Courier New"/>
               </a:rPr>
@@ -6148,7 +5489,7 @@
             <a:r>
               <a:rPr sz="2600" b="0" i="0">
                 <a:solidFill>
-                  <a:srgbClr val="D4D4D4"/>
+                  <a:srgbClr val="FFFFFF"/>
                 </a:solidFill>
                 <a:latin typeface="Courier New"/>
               </a:rPr>
@@ -6170,7 +5511,7 @@
 </p:sldLayout>
 </file>
 
-<file path=ppt/slideLayouts/slideLayout28.xml><?xml version="1.0" encoding="utf-8"?>
+<file path=ppt/slideLayouts/slideLayout27.xml><?xml version="1.0" encoding="utf-8"?>
 <p:sldLayout xmlns:a="http://schemas.openxmlformats.org/drawingml/2006/main" xmlns:r="http://schemas.openxmlformats.org/officeDocument/2006/relationships" xmlns:p="http://schemas.openxmlformats.org/presentationml/2006/main" type="blank" preserve="1">
   <p:cSld name="slidekit · Numbered Steps">
     <p:bg>
@@ -6288,7 +5629,7 @@
             <a:r>
               <a:rPr sz="4200" b="1" i="0">
                 <a:solidFill>
-                  <a:srgbClr val="19323C"/>
+                  <a:srgbClr val="CC785C"/>
                 </a:solidFill>
                 <a:latin typeface="Arial"/>
               </a:rPr>
@@ -6325,7 +5666,7 @@
             <a:r>
               <a:rPr sz="4200" b="1" i="0">
                 <a:solidFill>
-                  <a:srgbClr val="19323C"/>
+                  <a:srgbClr val="CC785C"/>
                 </a:solidFill>
                 <a:latin typeface="Arial"/>
               </a:rPr>
@@ -6399,7 +5740,7 @@
             <a:r>
               <a:rPr sz="4200" b="1" i="0">
                 <a:solidFill>
-                  <a:srgbClr val="19323C"/>
+                  <a:srgbClr val="CC785C"/>
                 </a:solidFill>
                 <a:latin typeface="Arial"/>
               </a:rPr>
@@ -6436,7 +5777,7 @@
             <a:r>
               <a:rPr sz="4200" b="1" i="0">
                 <a:solidFill>
-                  <a:srgbClr val="19323C"/>
+                  <a:srgbClr val="CC785C"/>
                 </a:solidFill>
                 <a:latin typeface="Arial"/>
               </a:rPr>
@@ -6510,7 +5851,7 @@
             <a:r>
               <a:rPr sz="4200" b="1" i="0">
                 <a:solidFill>
-                  <a:srgbClr val="19323C"/>
+                  <a:srgbClr val="CC785C"/>
                 </a:solidFill>
                 <a:latin typeface="Arial"/>
               </a:rPr>
@@ -6547,7 +5888,7 @@
             <a:r>
               <a:rPr sz="4200" b="1" i="0">
                 <a:solidFill>
-                  <a:srgbClr val="19323C"/>
+                  <a:srgbClr val="CC785C"/>
                 </a:solidFill>
                 <a:latin typeface="Arial"/>
               </a:rPr>
@@ -6606,7 +5947,7 @@
 </p:sldLayout>
 </file>
 
-<file path=ppt/slideLayouts/slideLayout29.xml><?xml version="1.0" encoding="utf-8"?>
+<file path=ppt/slideLayouts/slideLayout28.xml><?xml version="1.0" encoding="utf-8"?>
 <p:sldLayout xmlns:a="http://schemas.openxmlformats.org/drawingml/2006/main" xmlns:r="http://schemas.openxmlformats.org/officeDocument/2006/relationships" xmlns:p="http://schemas.openxmlformats.org/presentationml/2006/main" type="blank" preserve="1">
   <p:cSld name="slidekit · Two Panel List">
     <p:bg>
@@ -6724,7 +6065,7 @@
             <a:r>
               <a:rPr sz="3400" b="1" i="0">
                 <a:solidFill>
-                  <a:srgbClr val="19323C"/>
+                  <a:srgbClr val="CC785C"/>
                 </a:solidFill>
                 <a:latin typeface="Arial"/>
               </a:rPr>
@@ -6743,14 +6084,14 @@
         </p:nvSpPr>
         <p:spPr>
           <a:xfrm>
-            <a:off x="548640" y="2176271"/>
-            <a:ext cx="1650492" cy="54864"/>
+            <a:off x="457200" y="2176271"/>
+            <a:ext cx="1367718" cy="54864"/>
           </a:xfrm>
           <a:prstGeom prst="rect">
             <a:avLst/>
           </a:prstGeom>
           <a:solidFill>
-            <a:srgbClr val="19323C"/>
+            <a:srgbClr val="CC785C"/>
           </a:solidFill>
           <a:ln>
             <a:noFill/>
@@ -6793,7 +6134,7 @@
             <a:r>
               <a:rPr sz="3400" b="1" i="0">
                 <a:solidFill>
-                  <a:srgbClr val="8A8A9A"/>
+                  <a:srgbClr val="1A1A2E"/>
                 </a:solidFill>
                 <a:latin typeface="Arial"/>
               </a:rPr>
@@ -6812,14 +6153,14 @@
         </p:nvSpPr>
         <p:spPr>
           <a:xfrm>
-            <a:off x="6324600" y="2176271"/>
-            <a:ext cx="1650492" cy="54864"/>
+            <a:off x="6233160" y="2176271"/>
+            <a:ext cx="1007604" cy="54864"/>
           </a:xfrm>
           <a:prstGeom prst="rect">
             <a:avLst/>
           </a:prstGeom>
           <a:solidFill>
-            <a:srgbClr val="8A8A9A"/>
+            <a:srgbClr val="1A1A2E"/>
           </a:solidFill>
           <a:ln>
             <a:noFill/>
@@ -7052,6 +6393,294 @@
                 <a:latin typeface="Arial"/>
               </a:rPr>
               <a:t>In-product live chat</a:t>
+            </a:r>
+          </a:p>
+        </p:txBody>
+      </p:sp>
+    </p:spTree>
+    <p:extLst>
+      <p:ext uri="{BB962C8B-B14F-4D97-AF65-F5344CB8AC3E}">
+        <p14:creationId xmlns:p14="http://schemas.microsoft.com/office/powerpoint/2010/main" val="1212999818"/>
+      </p:ext>
+    </p:extLst>
+  </p:cSld>
+  <p:clrMapOvr>
+    <a:masterClrMapping/>
+  </p:clrMapOvr>
+</p:sldLayout>
+</file>
+
+<file path=ppt/slideLayouts/slideLayout29.xml><?xml version="1.0" encoding="utf-8"?>
+<p:sldLayout xmlns:a="http://schemas.openxmlformats.org/drawingml/2006/main" xmlns:r="http://schemas.openxmlformats.org/officeDocument/2006/relationships" xmlns:p="http://schemas.openxmlformats.org/presentationml/2006/main" type="blank" preserve="1">
+  <p:cSld name="slidekit · This vs That">
+    <p:bg>
+      <p:bgPr>
+        <a:solidFill>
+          <a:srgbClr val="FFFFFF"/>
+        </a:solidFill>
+        <a:effectLst/>
+      </p:bgPr>
+    </p:bg>
+    <p:spTree>
+      <p:nvGrpSpPr>
+        <p:cNvPr id="1" name=""/>
+        <p:cNvGrpSpPr/>
+        <p:nvPr/>
+      </p:nvGrpSpPr>
+      <p:grpSpPr>
+        <a:xfrm>
+          <a:off x="0" y="0"/>
+          <a:ext cx="0" cy="0"/>
+          <a:chOff x="0" y="0"/>
+          <a:chExt cx="0" cy="0"/>
+        </a:xfrm>
+      </p:grpSpPr>
+      <p:sp>
+        <p:nvSpPr>
+          <p:cNvPr id="4" name="Slide Number Placeholder 3"/>
+          <p:cNvSpPr>
+            <a:spLocks noGrp="1"/>
+          </p:cNvSpPr>
+          <p:nvPr>
+            <p:ph type="sldNum" sz="quarter" idx="12"/>
+          </p:nvPr>
+        </p:nvSpPr>
+        <p:spPr>
+          <a:xfrm>
+            <a:off x="11186160" y="6035040"/>
+            <a:ext cx="548640" cy="365760"/>
+          </a:xfrm>
+        </p:spPr>
+        <p:txBody>
+          <a:bodyPr/>
+          <a:lstStyle/>
+          <a:p>
+            <a:fld id="{C1FF6DA9-008F-8B48-92A6-B652298478BF}" type="slidenum">
+              <a:rPr lang="en-US" smtClean="0"/>
+              <a:t>‹#›</a:t>
+            </a:fld>
+            <a:endParaRPr lang="en-US"/>
+          </a:p>
+        </p:txBody>
+      </p:sp>
+      <p:sp>
+        <p:nvSpPr>
+          <p:cNvPr id="5" name="TextBox 4"/>
+          <p:cNvSpPr/>
+          <p:nvPr>
+            <p:ph type="title"/>
+          </p:nvPr>
+        </p:nvSpPr>
+        <p:spPr>
+          <a:xfrm>
+            <a:off x="457200" y="457200"/>
+            <a:ext cx="11277600" cy="768096"/>
+          </a:xfrm>
+          <a:prstGeom prst="rect">
+            <a:avLst/>
+          </a:prstGeom>
+          <a:noFill/>
+        </p:spPr>
+        <p:txBody>
+          <a:bodyPr wrap="none" lIns="0" rIns="0">
+            <a:noAutofit/>
+          </a:bodyPr>
+          <a:lstStyle/>
+          <a:p>
+            <a:pPr algn="l"/>
+            <a:r>
+              <a:rPr sz="4200" b="1" i="0">
+                <a:solidFill>
+                  <a:srgbClr val="CC785C"/>
+                </a:solidFill>
+                <a:latin typeface="Arial"/>
+              </a:rPr>
+              <a:t>Cloud or On-Prem</a:t>
+            </a:r>
+          </a:p>
+        </p:txBody>
+      </p:sp>
+      <p:sp>
+        <p:nvSpPr>
+          <p:cNvPr id="6" name="TextBox 5"/>
+          <p:cNvSpPr/>
+          <p:nvPr>
+            <p:ph type="body" idx="1"/>
+          </p:nvPr>
+        </p:nvSpPr>
+        <p:spPr>
+          <a:xfrm>
+            <a:off x="457200" y="2731008"/>
+            <a:ext cx="4792980" cy="1005840"/>
+          </a:xfrm>
+          <a:prstGeom prst="rect">
+            <a:avLst/>
+          </a:prstGeom>
+          <a:noFill/>
+        </p:spPr>
+        <p:txBody>
+          <a:bodyPr wrap="none" lIns="0" rIns="0">
+            <a:noAutofit/>
+          </a:bodyPr>
+          <a:lstStyle/>
+          <a:p>
+            <a:pPr algn="ctr"/>
+            <a:r>
+              <a:rPr sz="6600" b="1" i="0">
+                <a:solidFill>
+                  <a:srgbClr val="1A1A2E"/>
+                </a:solidFill>
+                <a:latin typeface="Arial"/>
+              </a:rPr>
+              <a:t>3 wks</a:t>
+            </a:r>
+          </a:p>
+        </p:txBody>
+      </p:sp>
+      <p:sp>
+        <p:nvSpPr>
+          <p:cNvPr id="7" name="TextBox 6"/>
+          <p:cNvSpPr/>
+          <p:nvPr>
+            <p:ph type="body" idx="2"/>
+          </p:nvPr>
+        </p:nvSpPr>
+        <p:spPr>
+          <a:xfrm>
+            <a:off x="0" y="4011168"/>
+            <a:ext cx="5707380" cy="518159"/>
+          </a:xfrm>
+          <a:prstGeom prst="rect">
+            <a:avLst/>
+          </a:prstGeom>
+          <a:noFill/>
+        </p:spPr>
+        <p:txBody>
+          <a:bodyPr wrap="none" lIns="0" rIns="0">
+            <a:noAutofit/>
+          </a:bodyPr>
+          <a:lstStyle/>
+          <a:p>
+            <a:pPr algn="ctr"/>
+            <a:r>
+              <a:rPr sz="3400" b="0" i="0">
+                <a:solidFill>
+                  <a:srgbClr val="1A1A2E"/>
+                </a:solidFill>
+                <a:latin typeface="Arial"/>
+              </a:rPr>
+              <a:t>Cloud time-to-launch</a:t>
+            </a:r>
+          </a:p>
+        </p:txBody>
+      </p:sp>
+      <p:sp>
+        <p:nvSpPr>
+          <p:cNvPr id="8" name="TextBox 7"/>
+          <p:cNvSpPr/>
+          <p:nvPr>
+            <p:ph type="body" idx="3"/>
+          </p:nvPr>
+        </p:nvSpPr>
+        <p:spPr>
+          <a:xfrm>
+            <a:off x="6941820" y="2731008"/>
+            <a:ext cx="4792980" cy="1005840"/>
+          </a:xfrm>
+          <a:prstGeom prst="rect">
+            <a:avLst/>
+          </a:prstGeom>
+          <a:noFill/>
+        </p:spPr>
+        <p:txBody>
+          <a:bodyPr wrap="none" lIns="0" rIns="0">
+            <a:noAutofit/>
+          </a:bodyPr>
+          <a:lstStyle/>
+          <a:p>
+            <a:pPr algn="ctr"/>
+            <a:r>
+              <a:rPr sz="6600" b="1" i="0">
+                <a:solidFill>
+                  <a:srgbClr val="1A1A2E"/>
+                </a:solidFill>
+                <a:latin typeface="Arial"/>
+              </a:rPr>
+              <a:t>6 mo</a:t>
+            </a:r>
+          </a:p>
+        </p:txBody>
+      </p:sp>
+      <p:sp>
+        <p:nvSpPr>
+          <p:cNvPr id="9" name="TextBox 8"/>
+          <p:cNvSpPr/>
+          <p:nvPr>
+            <p:ph type="body" idx="4"/>
+          </p:nvPr>
+        </p:nvSpPr>
+        <p:spPr>
+          <a:xfrm>
+            <a:off x="6484620" y="4011168"/>
+            <a:ext cx="5707380" cy="518159"/>
+          </a:xfrm>
+          <a:prstGeom prst="rect">
+            <a:avLst/>
+          </a:prstGeom>
+          <a:noFill/>
+        </p:spPr>
+        <p:txBody>
+          <a:bodyPr wrap="none" lIns="0" rIns="0">
+            <a:noAutofit/>
+          </a:bodyPr>
+          <a:lstStyle/>
+          <a:p>
+            <a:pPr algn="ctr"/>
+            <a:r>
+              <a:rPr sz="3400" b="0" i="0">
+                <a:solidFill>
+                  <a:srgbClr val="1A1A2E"/>
+                </a:solidFill>
+                <a:latin typeface="Arial"/>
+              </a:rPr>
+              <a:t>On-prem time-to-launch</a:t>
+            </a:r>
+          </a:p>
+        </p:txBody>
+      </p:sp>
+      <p:sp>
+        <p:nvSpPr>
+          <p:cNvPr id="10" name="TextBox 9"/>
+          <p:cNvSpPr/>
+          <p:nvPr>
+            <p:ph type="body" idx="5"/>
+          </p:nvPr>
+        </p:nvSpPr>
+        <p:spPr>
+          <a:xfrm>
+            <a:off x="5435323" y="3310127"/>
+            <a:ext cx="1321354" cy="640080"/>
+          </a:xfrm>
+          <a:prstGeom prst="rect">
+            <a:avLst/>
+          </a:prstGeom>
+          <a:noFill/>
+        </p:spPr>
+        <p:txBody>
+          <a:bodyPr wrap="none" lIns="0" rIns="0">
+            <a:noAutofit/>
+          </a:bodyPr>
+          <a:lstStyle/>
+          <a:p>
+            <a:pPr algn="ctr"/>
+            <a:r>
+              <a:rPr sz="4200" b="1" i="0">
+                <a:solidFill>
+                  <a:srgbClr val="1A1A2E"/>
+                </a:solidFill>
+                <a:latin typeface="Arial"/>
+              </a:rPr>
+              <a:t>VS</a:t>
             </a:r>
           </a:p>
         </p:txBody>
@@ -7317,294 +6946,6 @@
 
 <file path=ppt/slideLayouts/slideLayout30.xml><?xml version="1.0" encoding="utf-8"?>
 <p:sldLayout xmlns:a="http://schemas.openxmlformats.org/drawingml/2006/main" xmlns:r="http://schemas.openxmlformats.org/officeDocument/2006/relationships" xmlns:p="http://schemas.openxmlformats.org/presentationml/2006/main" type="blank" preserve="1">
-  <p:cSld name="slidekit · This vs That">
-    <p:bg>
-      <p:bgPr>
-        <a:solidFill>
-          <a:srgbClr val="FFFFFF"/>
-        </a:solidFill>
-        <a:effectLst/>
-      </p:bgPr>
-    </p:bg>
-    <p:spTree>
-      <p:nvGrpSpPr>
-        <p:cNvPr id="1" name=""/>
-        <p:cNvGrpSpPr/>
-        <p:nvPr/>
-      </p:nvGrpSpPr>
-      <p:grpSpPr>
-        <a:xfrm>
-          <a:off x="0" y="0"/>
-          <a:ext cx="0" cy="0"/>
-          <a:chOff x="0" y="0"/>
-          <a:chExt cx="0" cy="0"/>
-        </a:xfrm>
-      </p:grpSpPr>
-      <p:sp>
-        <p:nvSpPr>
-          <p:cNvPr id="4" name="Slide Number Placeholder 3"/>
-          <p:cNvSpPr>
-            <a:spLocks noGrp="1"/>
-          </p:cNvSpPr>
-          <p:nvPr>
-            <p:ph type="sldNum" sz="quarter" idx="12"/>
-          </p:nvPr>
-        </p:nvSpPr>
-        <p:spPr>
-          <a:xfrm>
-            <a:off x="11186160" y="6035040"/>
-            <a:ext cx="548640" cy="365760"/>
-          </a:xfrm>
-        </p:spPr>
-        <p:txBody>
-          <a:bodyPr/>
-          <a:lstStyle/>
-          <a:p>
-            <a:fld id="{C1FF6DA9-008F-8B48-92A6-B652298478BF}" type="slidenum">
-              <a:rPr lang="en-US" smtClean="0"/>
-              <a:t>‹#›</a:t>
-            </a:fld>
-            <a:endParaRPr lang="en-US"/>
-          </a:p>
-        </p:txBody>
-      </p:sp>
-      <p:sp>
-        <p:nvSpPr>
-          <p:cNvPr id="5" name="TextBox 4"/>
-          <p:cNvSpPr/>
-          <p:nvPr>
-            <p:ph type="title"/>
-          </p:nvPr>
-        </p:nvSpPr>
-        <p:spPr>
-          <a:xfrm>
-            <a:off x="457200" y="457200"/>
-            <a:ext cx="11277600" cy="768096"/>
-          </a:xfrm>
-          <a:prstGeom prst="rect">
-            <a:avLst/>
-          </a:prstGeom>
-          <a:noFill/>
-        </p:spPr>
-        <p:txBody>
-          <a:bodyPr wrap="none" lIns="0" rIns="0">
-            <a:noAutofit/>
-          </a:bodyPr>
-          <a:lstStyle/>
-          <a:p>
-            <a:pPr algn="l"/>
-            <a:r>
-              <a:rPr sz="4200" b="1" i="0">
-                <a:solidFill>
-                  <a:srgbClr val="CC785C"/>
-                </a:solidFill>
-                <a:latin typeface="Arial"/>
-              </a:rPr>
-              <a:t>Cloud or On-Prem</a:t>
-            </a:r>
-          </a:p>
-        </p:txBody>
-      </p:sp>
-      <p:sp>
-        <p:nvSpPr>
-          <p:cNvPr id="6" name="TextBox 5"/>
-          <p:cNvSpPr/>
-          <p:nvPr>
-            <p:ph type="body" idx="1"/>
-          </p:nvPr>
-        </p:nvSpPr>
-        <p:spPr>
-          <a:xfrm>
-            <a:off x="457200" y="2731008"/>
-            <a:ext cx="4792980" cy="1005840"/>
-          </a:xfrm>
-          <a:prstGeom prst="rect">
-            <a:avLst/>
-          </a:prstGeom>
-          <a:noFill/>
-        </p:spPr>
-        <p:txBody>
-          <a:bodyPr wrap="none" lIns="0" rIns="0">
-            <a:noAutofit/>
-          </a:bodyPr>
-          <a:lstStyle/>
-          <a:p>
-            <a:pPr algn="ctr"/>
-            <a:r>
-              <a:rPr sz="6600" b="1" i="0">
-                <a:solidFill>
-                  <a:srgbClr val="1A1A2E"/>
-                </a:solidFill>
-                <a:latin typeface="Arial"/>
-              </a:rPr>
-              <a:t>3 wks</a:t>
-            </a:r>
-          </a:p>
-        </p:txBody>
-      </p:sp>
-      <p:sp>
-        <p:nvSpPr>
-          <p:cNvPr id="7" name="TextBox 6"/>
-          <p:cNvSpPr/>
-          <p:nvPr>
-            <p:ph type="body" idx="2"/>
-          </p:nvPr>
-        </p:nvSpPr>
-        <p:spPr>
-          <a:xfrm>
-            <a:off x="0" y="4011168"/>
-            <a:ext cx="5707380" cy="518159"/>
-          </a:xfrm>
-          <a:prstGeom prst="rect">
-            <a:avLst/>
-          </a:prstGeom>
-          <a:noFill/>
-        </p:spPr>
-        <p:txBody>
-          <a:bodyPr wrap="none" lIns="0" rIns="0">
-            <a:noAutofit/>
-          </a:bodyPr>
-          <a:lstStyle/>
-          <a:p>
-            <a:pPr algn="ctr"/>
-            <a:r>
-              <a:rPr sz="3400" b="0" i="0">
-                <a:solidFill>
-                  <a:srgbClr val="1A1A2E"/>
-                </a:solidFill>
-                <a:latin typeface="Arial"/>
-              </a:rPr>
-              <a:t>Cloud time-to-launch</a:t>
-            </a:r>
-          </a:p>
-        </p:txBody>
-      </p:sp>
-      <p:sp>
-        <p:nvSpPr>
-          <p:cNvPr id="8" name="TextBox 7"/>
-          <p:cNvSpPr/>
-          <p:nvPr>
-            <p:ph type="body" idx="3"/>
-          </p:nvPr>
-        </p:nvSpPr>
-        <p:spPr>
-          <a:xfrm>
-            <a:off x="6941820" y="2731008"/>
-            <a:ext cx="4792980" cy="1005840"/>
-          </a:xfrm>
-          <a:prstGeom prst="rect">
-            <a:avLst/>
-          </a:prstGeom>
-          <a:noFill/>
-        </p:spPr>
-        <p:txBody>
-          <a:bodyPr wrap="none" lIns="0" rIns="0">
-            <a:noAutofit/>
-          </a:bodyPr>
-          <a:lstStyle/>
-          <a:p>
-            <a:pPr algn="ctr"/>
-            <a:r>
-              <a:rPr sz="6600" b="1" i="0">
-                <a:solidFill>
-                  <a:srgbClr val="1A1A2E"/>
-                </a:solidFill>
-                <a:latin typeface="Arial"/>
-              </a:rPr>
-              <a:t>6 mo</a:t>
-            </a:r>
-          </a:p>
-        </p:txBody>
-      </p:sp>
-      <p:sp>
-        <p:nvSpPr>
-          <p:cNvPr id="9" name="TextBox 8"/>
-          <p:cNvSpPr/>
-          <p:nvPr>
-            <p:ph type="body" idx="4"/>
-          </p:nvPr>
-        </p:nvSpPr>
-        <p:spPr>
-          <a:xfrm>
-            <a:off x="6484620" y="4011168"/>
-            <a:ext cx="5707380" cy="518159"/>
-          </a:xfrm>
-          <a:prstGeom prst="rect">
-            <a:avLst/>
-          </a:prstGeom>
-          <a:noFill/>
-        </p:spPr>
-        <p:txBody>
-          <a:bodyPr wrap="none" lIns="0" rIns="0">
-            <a:noAutofit/>
-          </a:bodyPr>
-          <a:lstStyle/>
-          <a:p>
-            <a:pPr algn="ctr"/>
-            <a:r>
-              <a:rPr sz="3400" b="0" i="0">
-                <a:solidFill>
-                  <a:srgbClr val="1A1A2E"/>
-                </a:solidFill>
-                <a:latin typeface="Arial"/>
-              </a:rPr>
-              <a:t>On-prem time-to-launch</a:t>
-            </a:r>
-          </a:p>
-        </p:txBody>
-      </p:sp>
-      <p:sp>
-        <p:nvSpPr>
-          <p:cNvPr id="10" name="TextBox 9"/>
-          <p:cNvSpPr/>
-          <p:nvPr>
-            <p:ph type="body" idx="5"/>
-          </p:nvPr>
-        </p:nvSpPr>
-        <p:spPr>
-          <a:xfrm>
-            <a:off x="5435323" y="3310127"/>
-            <a:ext cx="1321354" cy="640080"/>
-          </a:xfrm>
-          <a:prstGeom prst="rect">
-            <a:avLst/>
-          </a:prstGeom>
-          <a:noFill/>
-        </p:spPr>
-        <p:txBody>
-          <a:bodyPr wrap="none" lIns="0" rIns="0">
-            <a:noAutofit/>
-          </a:bodyPr>
-          <a:lstStyle/>
-          <a:p>
-            <a:pPr algn="ctr"/>
-            <a:r>
-              <a:rPr sz="4200" b="1" i="0">
-                <a:solidFill>
-                  <a:srgbClr val="8A8A9A"/>
-                </a:solidFill>
-                <a:latin typeface="Arial"/>
-              </a:rPr>
-              <a:t>VS</a:t>
-            </a:r>
-          </a:p>
-        </p:txBody>
-      </p:sp>
-    </p:spTree>
-    <p:extLst>
-      <p:ext uri="{BB962C8B-B14F-4D97-AF65-F5344CB8AC3E}">
-        <p14:creationId xmlns:p14="http://schemas.microsoft.com/office/powerpoint/2010/main" val="1212999818"/>
-      </p:ext>
-    </p:extLst>
-  </p:cSld>
-  <p:clrMapOvr>
-    <a:masterClrMapping/>
-  </p:clrMapOvr>
-</p:sldLayout>
-</file>
-
-<file path=ppt/slideLayouts/slideLayout31.xml><?xml version="1.0" encoding="utf-8"?>
-<p:sldLayout xmlns:a="http://schemas.openxmlformats.org/drawingml/2006/main" xmlns:r="http://schemas.openxmlformats.org/officeDocument/2006/relationships" xmlns:p="http://schemas.openxmlformats.org/presentationml/2006/main" type="blank" preserve="1">
   <p:cSld name="slidekit · KPI Grid">
     <p:bg>
       <p:bgPr>
@@ -8127,7 +7468,7 @@
         </p:nvSpPr>
         <p:spPr>
           <a:xfrm>
-            <a:off x="4307840" y="3797808"/>
+            <a:off x="4307840" y="4056888"/>
             <a:ext cx="3576320" cy="640080"/>
           </a:xfrm>
           <a:prstGeom prst="rect">
@@ -8164,7 +7505,7 @@
         </p:nvSpPr>
         <p:spPr>
           <a:xfrm>
-            <a:off x="5559552" y="4492752"/>
+            <a:off x="5559552" y="4751832"/>
             <a:ext cx="1072896" cy="54864"/>
           </a:xfrm>
           <a:prstGeom prst="rect">
@@ -8196,16 +7537,16 @@
         </p:nvSpPr>
         <p:spPr>
           <a:xfrm>
-            <a:off x="4307840" y="4602480"/>
-            <a:ext cx="3576320" cy="1127760"/>
-          </a:xfrm>
-          <a:prstGeom prst="rect">
-            <a:avLst/>
-          </a:prstGeom>
-          <a:noFill/>
-        </p:spPr>
-        <p:txBody>
-          <a:bodyPr wrap="square" lIns="0" rIns="0">
+            <a:off x="3943896" y="4861560"/>
+            <a:ext cx="4304208" cy="609600"/>
+          </a:xfrm>
+          <a:prstGeom prst="rect">
+            <a:avLst/>
+          </a:prstGeom>
+          <a:noFill/>
+        </p:spPr>
+        <p:txBody>
+          <a:bodyPr wrap="none" lIns="0" rIns="0">
             <a:noAutofit/>
           </a:bodyPr>
           <a:lstStyle/>
@@ -8218,7 +7559,7 @@
                 </a:solidFill>
                 <a:latin typeface="Arial"/>
               </a:rPr>
-              <a:t>Avg. time to value</a:t>
+              <a:t>Time to value</a:t>
             </a:r>
           </a:p>
         </p:txBody>
@@ -8342,7 +7683,7 @@
 </p:sldLayout>
 </file>
 
-<file path=ppt/slideLayouts/slideLayout32.xml><?xml version="1.0" encoding="utf-8"?>
+<file path=ppt/slideLayouts/slideLayout31.xml><?xml version="1.0" encoding="utf-8"?>
 <p:sldLayout xmlns:a="http://schemas.openxmlformats.org/drawingml/2006/main" xmlns:r="http://schemas.openxmlformats.org/officeDocument/2006/relationships" xmlns:p="http://schemas.openxmlformats.org/presentationml/2006/main" type="blank" preserve="1">
   <p:cSld name="slidekit · Chart With Insight">
     <p:bg>
@@ -8529,7 +7870,7 @@
             <a:r>
               <a:rPr sz="2500" b="0" i="0">
                 <a:solidFill>
-                  <a:srgbClr val="8A8A9A"/>
+                  <a:srgbClr val="1A1A2E"/>
                 </a:solidFill>
                 <a:latin typeface="Arial"/>
               </a:rPr>
@@ -8635,7 +7976,7 @@
             <a:r>
               <a:rPr sz="2500" b="0" i="0">
                 <a:solidFill>
-                  <a:srgbClr val="8A8A9A"/>
+                  <a:srgbClr val="1A1A2E"/>
                 </a:solidFill>
                 <a:latin typeface="Arial"/>
               </a:rPr>
@@ -8741,7 +8082,7 @@
             <a:r>
               <a:rPr sz="2500" b="0" i="0">
                 <a:solidFill>
-                  <a:srgbClr val="8A8A9A"/>
+                  <a:srgbClr val="1A1A2E"/>
                 </a:solidFill>
                 <a:latin typeface="Arial"/>
               </a:rPr>
@@ -8847,7 +8188,7 @@
             <a:r>
               <a:rPr sz="2500" b="0" i="0">
                 <a:solidFill>
-                  <a:srgbClr val="8A8A9A"/>
+                  <a:srgbClr val="1A1A2E"/>
                 </a:solidFill>
                 <a:latin typeface="Arial"/>
               </a:rPr>
@@ -8866,8 +8207,8 @@
         </p:nvSpPr>
         <p:spPr>
           <a:xfrm>
-            <a:off x="7498080" y="1770888"/>
-            <a:ext cx="128016" cy="3718560"/>
+            <a:off x="7498080" y="3325368"/>
+            <a:ext cx="128016" cy="609600"/>
           </a:xfrm>
           <a:prstGeom prst="rect">
             <a:avLst/>
@@ -8898,16 +8239,16 @@
         </p:nvSpPr>
         <p:spPr>
           <a:xfrm>
-            <a:off x="8037576" y="1770888"/>
-            <a:ext cx="3697224" cy="3718560"/>
-          </a:xfrm>
-          <a:prstGeom prst="rect">
-            <a:avLst/>
-          </a:prstGeom>
-          <a:noFill/>
-        </p:spPr>
-        <p:txBody>
-          <a:bodyPr wrap="square" lIns="0" rIns="0">
+            <a:off x="8037576" y="3325368"/>
+            <a:ext cx="4154424" cy="609600"/>
+          </a:xfrm>
+          <a:prstGeom prst="rect">
+            <a:avLst/>
+          </a:prstGeom>
+          <a:noFill/>
+        </p:spPr>
+        <p:txBody>
+          <a:bodyPr wrap="none" lIns="0" rIns="0">
             <a:noAutofit/>
           </a:bodyPr>
           <a:lstStyle/>
@@ -8920,7 +8261,7 @@
                 </a:solidFill>
                 <a:latin typeface="Arial"/>
               </a:rPr>
-              <a:t>Activations nearly quadrupled once self-serve onboarding shipped in February.</a:t>
+              <a:t>Activations 4x.</a:t>
             </a:r>
           </a:p>
         </p:txBody>
@@ -8938,7 +8279,7 @@
 </p:sldLayout>
 </file>
 
-<file path=ppt/slideLayouts/slideLayout33.xml><?xml version="1.0" encoding="utf-8"?>
+<file path=ppt/slideLayouts/slideLayout32.xml><?xml version="1.0" encoding="utf-8"?>
 <p:sldLayout xmlns:a="http://schemas.openxmlformats.org/drawingml/2006/main" xmlns:r="http://schemas.openxmlformats.org/officeDocument/2006/relationships" xmlns:p="http://schemas.openxmlformats.org/presentationml/2006/main" type="blank" preserve="1">
   <p:cSld name="slidekit · Table">
     <p:bg>
@@ -9056,7 +8397,7 @@
             <a:r>
               <a:rPr sz="3400" b="1" i="0">
                 <a:solidFill>
-                  <a:srgbClr val="19323C"/>
+                  <a:srgbClr val="CC785C"/>
                 </a:solidFill>
                 <a:latin typeface="Arial"/>
               </a:rPr>
@@ -9093,7 +8434,7 @@
             <a:r>
               <a:rPr sz="3400" b="1" i="0">
                 <a:solidFill>
-                  <a:srgbClr val="19323C"/>
+                  <a:srgbClr val="CC785C"/>
                 </a:solidFill>
                 <a:latin typeface="Arial"/>
               </a:rPr>
@@ -9130,7 +8471,7 @@
             <a:r>
               <a:rPr sz="3400" b="1" i="0">
                 <a:solidFill>
-                  <a:srgbClr val="19323C"/>
+                  <a:srgbClr val="CC785C"/>
                 </a:solidFill>
                 <a:latin typeface="Arial"/>
               </a:rPr>
@@ -9628,7 +8969,7 @@
 </p:sldLayout>
 </file>
 
-<file path=ppt/slideLayouts/slideLayout34.xml><?xml version="1.0" encoding="utf-8"?>
+<file path=ppt/slideLayouts/slideLayout33.xml><?xml version="1.0" encoding="utf-8"?>
 <p:sldLayout xmlns:a="http://schemas.openxmlformats.org/drawingml/2006/main" xmlns:r="http://schemas.openxmlformats.org/officeDocument/2006/relationships" xmlns:p="http://schemas.openxmlformats.org/presentationml/2006/main" type="blank" preserve="1">
   <p:cSld name="slidekit · Metric Comparison">
     <p:bg>
@@ -9728,7 +9069,7 @@
         </p:nvSpPr>
         <p:spPr>
           <a:xfrm>
-            <a:off x="290235" y="2029968"/>
+            <a:off x="290235" y="2289048"/>
             <a:ext cx="3910250" cy="1005840"/>
           </a:xfrm>
           <a:prstGeom prst="rect">
@@ -9765,16 +9106,16 @@
         </p:nvSpPr>
         <p:spPr>
           <a:xfrm>
-            <a:off x="457200" y="3310128"/>
-            <a:ext cx="3576320" cy="1127760"/>
-          </a:xfrm>
-          <a:prstGeom prst="rect">
-            <a:avLst/>
-          </a:prstGeom>
-          <a:noFill/>
-        </p:spPr>
-        <p:txBody>
-          <a:bodyPr wrap="square" lIns="0" rIns="0">
+            <a:off x="457200" y="3569208"/>
+            <a:ext cx="3576320" cy="609600"/>
+          </a:xfrm>
+          <a:prstGeom prst="rect">
+            <a:avLst/>
+          </a:prstGeom>
+          <a:noFill/>
+        </p:spPr>
+        <p:txBody>
+          <a:bodyPr wrap="none" lIns="0" rIns="0">
             <a:noAutofit/>
           </a:bodyPr>
           <a:lstStyle/>
@@ -9787,7 +9128,7 @@
                 </a:solidFill>
                 <a:latin typeface="Arial"/>
               </a:rPr>
-              <a:t>Annual recurring revenue</a:t>
+              <a:t>Revenue</a:t>
             </a:r>
           </a:p>
         </p:txBody>
@@ -9802,7 +9143,7 @@
         </p:nvSpPr>
         <p:spPr>
           <a:xfrm>
-            <a:off x="1522569" y="4712208"/>
+            <a:off x="1522569" y="4453128"/>
             <a:ext cx="1445581" cy="518159"/>
           </a:xfrm>
           <a:prstGeom prst="rect">
@@ -9834,7 +9175,7 @@
         </p:nvSpPr>
         <p:spPr>
           <a:xfrm>
-            <a:off x="1260802" y="4712208"/>
+            <a:off x="1260802" y="4453128"/>
             <a:ext cx="1969115" cy="518159"/>
           </a:xfrm>
           <a:prstGeom prst="rect">
@@ -9871,7 +9212,7 @@
         </p:nvSpPr>
         <p:spPr>
           <a:xfrm>
-            <a:off x="4307840" y="2029968"/>
+            <a:off x="4307840" y="2289048"/>
             <a:ext cx="3576320" cy="1005840"/>
           </a:xfrm>
           <a:prstGeom prst="rect">
@@ -9908,8 +9249,8 @@
         </p:nvSpPr>
         <p:spPr>
           <a:xfrm>
-            <a:off x="3834934" y="3310128"/>
-            <a:ext cx="4522132" cy="1127760"/>
+            <a:off x="3834934" y="3569208"/>
+            <a:ext cx="4522132" cy="609600"/>
           </a:xfrm>
           <a:prstGeom prst="rect">
             <a:avLst/>
@@ -9945,7 +9286,7 @@
         </p:nvSpPr>
         <p:spPr>
           <a:xfrm>
-            <a:off x="5175547" y="4712208"/>
+            <a:off x="5175547" y="4453128"/>
             <a:ext cx="1840906" cy="518159"/>
           </a:xfrm>
           <a:prstGeom prst="rect">
@@ -9977,7 +9318,7 @@
         </p:nvSpPr>
         <p:spPr>
           <a:xfrm>
-            <a:off x="4795183" y="4712208"/>
+            <a:off x="4795183" y="4453128"/>
             <a:ext cx="2601634" cy="518159"/>
           </a:xfrm>
           <a:prstGeom prst="rect">
@@ -10014,7 +9355,7 @@
         </p:nvSpPr>
         <p:spPr>
           <a:xfrm>
-            <a:off x="8158480" y="2029968"/>
+            <a:off x="8158480" y="2289048"/>
             <a:ext cx="3576320" cy="1005840"/>
           </a:xfrm>
           <a:prstGeom prst="rect">
@@ -10051,16 +9392,16 @@
         </p:nvSpPr>
         <p:spPr>
           <a:xfrm>
-            <a:off x="8158480" y="3310128"/>
-            <a:ext cx="3576320" cy="1127760"/>
-          </a:xfrm>
-          <a:prstGeom prst="rect">
-            <a:avLst/>
-          </a:prstGeom>
-          <a:noFill/>
-        </p:spPr>
-        <p:txBody>
-          <a:bodyPr wrap="square" lIns="0" rIns="0">
+            <a:off x="7701280" y="3569208"/>
+            <a:ext cx="4490720" cy="609600"/>
+          </a:xfrm>
+          <a:prstGeom prst="rect">
+            <a:avLst/>
+          </a:prstGeom>
+          <a:noFill/>
+        </p:spPr>
+        <p:txBody>
+          <a:bodyPr wrap="none" lIns="0" rIns="0">
             <a:noAutofit/>
           </a:bodyPr>
           <a:lstStyle/>
@@ -10073,7 +9414,7 @@
                 </a:solidFill>
                 <a:latin typeface="Arial"/>
               </a:rPr>
-              <a:t>Net promoter score</a:t>
+              <a:t>Promoter score</a:t>
             </a:r>
           </a:p>
         </p:txBody>
@@ -10088,7 +9429,7 @@
         </p:nvSpPr>
         <p:spPr>
           <a:xfrm>
-            <a:off x="9427731" y="4712208"/>
+            <a:off x="9427731" y="4453128"/>
             <a:ext cx="1037817" cy="518159"/>
           </a:xfrm>
           <a:prstGeom prst="rect">
@@ -10120,7 +9461,7 @@
         </p:nvSpPr>
         <p:spPr>
           <a:xfrm>
-            <a:off x="9288294" y="4712208"/>
+            <a:off x="9288294" y="4453128"/>
             <a:ext cx="1316691" cy="518159"/>
           </a:xfrm>
           <a:prstGeom prst="rect">
@@ -10160,7 +9501,7 @@
 </p:sldLayout>
 </file>
 
-<file path=ppt/slideLayouts/slideLayout35.xml><?xml version="1.0" encoding="utf-8"?>
+<file path=ppt/slideLayouts/slideLayout34.xml><?xml version="1.0" encoding="utf-8"?>
 <p:sldLayout xmlns:a="http://schemas.openxmlformats.org/drawingml/2006/main" xmlns:r="http://schemas.openxmlformats.org/officeDocument/2006/relationships" xmlns:p="http://schemas.openxmlformats.org/presentationml/2006/main" type="blank" preserve="1">
   <p:cSld name="slidekit · Process Steps">
     <p:bg>
@@ -10278,7 +9619,7 @@
             <a:r>
               <a:rPr sz="4200" b="1" i="0">
                 <a:solidFill>
-                  <a:srgbClr val="19323C"/>
+                  <a:srgbClr val="CC785C"/>
                 </a:solidFill>
                 <a:latin typeface="Arial"/>
               </a:rPr>
@@ -10298,13 +9639,13 @@
         <p:spPr>
           <a:xfrm>
             <a:off x="457200" y="2194560"/>
-            <a:ext cx="784098" cy="54864"/>
+            <a:ext cx="593303" cy="54864"/>
           </a:xfrm>
           <a:prstGeom prst="rect">
             <a:avLst/>
           </a:prstGeom>
           <a:solidFill>
-            <a:srgbClr val="19323C"/>
+            <a:srgbClr val="CC785C"/>
           </a:solidFill>
           <a:ln>
             <a:noFill/>
@@ -10347,7 +9688,7 @@
             <a:r>
               <a:rPr sz="3400" b="1" i="0">
                 <a:solidFill>
-                  <a:srgbClr val="19323C"/>
+                  <a:srgbClr val="CC785C"/>
                 </a:solidFill>
                 <a:latin typeface="Arial"/>
               </a:rPr>
@@ -10421,7 +9762,7 @@
             <a:r>
               <a:rPr sz="4200" b="1" i="0">
                 <a:solidFill>
-                  <a:srgbClr val="19323C"/>
+                  <a:srgbClr val="CC785C"/>
                 </a:solidFill>
                 <a:latin typeface="Arial"/>
               </a:rPr>
@@ -10441,13 +9782,13 @@
         <p:spPr>
           <a:xfrm>
             <a:off x="3345180" y="2194560"/>
-            <a:ext cx="784098" cy="54864"/>
+            <a:ext cx="593303" cy="54864"/>
           </a:xfrm>
           <a:prstGeom prst="rect">
             <a:avLst/>
           </a:prstGeom>
           <a:solidFill>
-            <a:srgbClr val="19323C"/>
+            <a:srgbClr val="CC785C"/>
           </a:solidFill>
           <a:ln>
             <a:noFill/>
@@ -10490,7 +9831,7 @@
             <a:r>
               <a:rPr sz="3400" b="1" i="0">
                 <a:solidFill>
-                  <a:srgbClr val="19323C"/>
+                  <a:srgbClr val="CC785C"/>
                 </a:solidFill>
                 <a:latin typeface="Arial"/>
               </a:rPr>
@@ -10564,7 +9905,7 @@
             <a:r>
               <a:rPr sz="4200" b="1" i="0">
                 <a:solidFill>
-                  <a:srgbClr val="19323C"/>
+                  <a:srgbClr val="CC785C"/>
                 </a:solidFill>
                 <a:latin typeface="Arial"/>
               </a:rPr>
@@ -10584,13 +9925,13 @@
         <p:spPr>
           <a:xfrm>
             <a:off x="6233160" y="2194560"/>
-            <a:ext cx="784098" cy="54864"/>
+            <a:ext cx="593303" cy="54864"/>
           </a:xfrm>
           <a:prstGeom prst="rect">
             <a:avLst/>
           </a:prstGeom>
           <a:solidFill>
-            <a:srgbClr val="19323C"/>
+            <a:srgbClr val="CC785C"/>
           </a:solidFill>
           <a:ln>
             <a:noFill/>
@@ -10633,7 +9974,7 @@
             <a:r>
               <a:rPr sz="3400" b="1" i="0">
                 <a:solidFill>
-                  <a:srgbClr val="19323C"/>
+                  <a:srgbClr val="CC785C"/>
                 </a:solidFill>
                 <a:latin typeface="Arial"/>
               </a:rPr>
@@ -10707,7 +10048,7 @@
             <a:r>
               <a:rPr sz="4200" b="1" i="0">
                 <a:solidFill>
-                  <a:srgbClr val="19323C"/>
+                  <a:srgbClr val="CC785C"/>
                 </a:solidFill>
                 <a:latin typeface="Arial"/>
               </a:rPr>
@@ -10727,13 +10068,13 @@
         <p:spPr>
           <a:xfrm>
             <a:off x="9121140" y="2194560"/>
-            <a:ext cx="784098" cy="54864"/>
+            <a:ext cx="593303" cy="54864"/>
           </a:xfrm>
           <a:prstGeom prst="rect">
             <a:avLst/>
           </a:prstGeom>
           <a:solidFill>
-            <a:srgbClr val="19323C"/>
+            <a:srgbClr val="CC785C"/>
           </a:solidFill>
           <a:ln>
             <a:noFill/>
@@ -10776,7 +10117,7 @@
             <a:r>
               <a:rPr sz="3400" b="1" i="0">
                 <a:solidFill>
-                  <a:srgbClr val="19323C"/>
+                  <a:srgbClr val="CC785C"/>
                 </a:solidFill>
                 <a:latin typeface="Arial"/>
               </a:rPr>
@@ -10835,7 +10176,7 @@
 </p:sldLayout>
 </file>
 
-<file path=ppt/slideLayouts/slideLayout36.xml><?xml version="1.0" encoding="utf-8"?>
+<file path=ppt/slideLayouts/slideLayout35.xml><?xml version="1.0" encoding="utf-8"?>
 <p:sldLayout xmlns:a="http://schemas.openxmlformats.org/drawingml/2006/main" xmlns:r="http://schemas.openxmlformats.org/officeDocument/2006/relationships" xmlns:p="http://schemas.openxmlformats.org/presentationml/2006/main" type="blank" preserve="1">
   <p:cSld name="slidekit · Roadmap">
     <p:bg>
@@ -11367,7 +10708,7 @@
 </p:sldLayout>
 </file>
 
-<file path=ppt/slideLayouts/slideLayout37.xml><?xml version="1.0" encoding="utf-8"?>
+<file path=ppt/slideLayouts/slideLayout36.xml><?xml version="1.0" encoding="utf-8"?>
 <p:sldLayout xmlns:a="http://schemas.openxmlformats.org/drawingml/2006/main" xmlns:r="http://schemas.openxmlformats.org/officeDocument/2006/relationships" xmlns:p="http://schemas.openxmlformats.org/presentationml/2006/main" type="blank" preserve="1">
   <p:cSld name="slidekit · Funnel">
     <p:bg>
@@ -11746,7 +11087,7 @@
 </p:sldLayout>
 </file>
 
-<file path=ppt/slideLayouts/slideLayout38.xml><?xml version="1.0" encoding="utf-8"?>
+<file path=ppt/slideLayouts/slideLayout37.xml><?xml version="1.0" encoding="utf-8"?>
 <p:sldLayout xmlns:a="http://schemas.openxmlformats.org/drawingml/2006/main" xmlns:r="http://schemas.openxmlformats.org/officeDocument/2006/relationships" xmlns:p="http://schemas.openxmlformats.org/presentationml/2006/main" type="blank" preserve="1">
   <p:cSld name="slidekit · Nested Circles">
     <p:bg>
@@ -11853,7 +11194,7 @@
             <a:avLst/>
           </a:prstGeom>
           <a:solidFill>
-            <a:srgbClr val="8A8A9A"/>
+            <a:srgbClr val="1A1A2E"/>
           </a:solidFill>
           <a:ln>
             <a:noFill/>
@@ -11917,7 +11258,7 @@
             <a:avLst/>
           </a:prstGeom>
           <a:solidFill>
-            <a:srgbClr val="19323C"/>
+            <a:srgbClr val="1A1A2E"/>
           </a:solidFill>
           <a:ln>
             <a:noFill/>
@@ -12167,7 +11508,7 @@
 </p:sldLayout>
 </file>
 
-<file path=ppt/slideLayouts/slideLayout39.xml><?xml version="1.0" encoding="utf-8"?>
+<file path=ppt/slideLayouts/slideLayout38.xml><?xml version="1.0" encoding="utf-8"?>
 <p:sldLayout xmlns:a="http://schemas.openxmlformats.org/drawingml/2006/main" xmlns:r="http://schemas.openxmlformats.org/officeDocument/2006/relationships" xmlns:p="http://schemas.openxmlformats.org/presentationml/2006/main" type="blank" preserve="1">
   <p:cSld name="slidekit · Pyramid">
     <p:bg>
@@ -12274,7 +11615,7 @@
             <a:avLst/>
           </a:prstGeom>
           <a:solidFill>
-            <a:srgbClr val="19323C"/>
+            <a:srgbClr val="CC785C"/>
           </a:solidFill>
           <a:ln>
             <a:noFill/>
@@ -12412,7 +11753,7 @@
             <a:avLst/>
           </a:prstGeom>
           <a:solidFill>
-            <a:srgbClr val="19323C"/>
+            <a:srgbClr val="CC785C"/>
           </a:solidFill>
           <a:ln>
             <a:noFill/>
@@ -12529,6 +11870,533 @@
                 <a:latin typeface="Arial"/>
               </a:rPr>
               <a:t>Tactics</a:t>
+            </a:r>
+          </a:p>
+        </p:txBody>
+      </p:sp>
+    </p:spTree>
+    <p:extLst>
+      <p:ext uri="{BB962C8B-B14F-4D97-AF65-F5344CB8AC3E}">
+        <p14:creationId xmlns:p14="http://schemas.microsoft.com/office/powerpoint/2010/main" val="1212999818"/>
+      </p:ext>
+    </p:extLst>
+  </p:cSld>
+  <p:clrMapOvr>
+    <a:masterClrMapping/>
+  </p:clrMapOvr>
+</p:sldLayout>
+</file>
+
+<file path=ppt/slideLayouts/slideLayout39.xml><?xml version="1.0" encoding="utf-8"?>
+<p:sldLayout xmlns:a="http://schemas.openxmlformats.org/drawingml/2006/main" xmlns:r="http://schemas.openxmlformats.org/officeDocument/2006/relationships" xmlns:p="http://schemas.openxmlformats.org/presentationml/2006/main" type="blank" preserve="1">
+  <p:cSld name="slidekit · SWOT">
+    <p:bg>
+      <p:bgPr>
+        <a:solidFill>
+          <a:srgbClr val="FFFFFF"/>
+        </a:solidFill>
+        <a:effectLst/>
+      </p:bgPr>
+    </p:bg>
+    <p:spTree>
+      <p:nvGrpSpPr>
+        <p:cNvPr id="1" name=""/>
+        <p:cNvGrpSpPr/>
+        <p:nvPr/>
+      </p:nvGrpSpPr>
+      <p:grpSpPr>
+        <a:xfrm>
+          <a:off x="0" y="0"/>
+          <a:ext cx="0" cy="0"/>
+          <a:chOff x="0" y="0"/>
+          <a:chExt cx="0" cy="0"/>
+        </a:xfrm>
+      </p:grpSpPr>
+      <p:sp>
+        <p:nvSpPr>
+          <p:cNvPr id="4" name="Slide Number Placeholder 3"/>
+          <p:cNvSpPr>
+            <a:spLocks noGrp="1"/>
+          </p:cNvSpPr>
+          <p:nvPr>
+            <p:ph type="sldNum" sz="quarter" idx="12"/>
+          </p:nvPr>
+        </p:nvSpPr>
+        <p:spPr>
+          <a:xfrm>
+            <a:off x="11186160" y="6035040"/>
+            <a:ext cx="548640" cy="365760"/>
+          </a:xfrm>
+        </p:spPr>
+        <p:txBody>
+          <a:bodyPr/>
+          <a:lstStyle/>
+          <a:p>
+            <a:fld id="{C1FF6DA9-008F-8B48-92A6-B652298478BF}" type="slidenum">
+              <a:rPr lang="en-US" smtClean="0"/>
+              <a:t>‹#›</a:t>
+            </a:fld>
+            <a:endParaRPr lang="en-US"/>
+          </a:p>
+        </p:txBody>
+      </p:sp>
+      <p:sp>
+        <p:nvSpPr>
+          <p:cNvPr id="5" name="TextBox 4"/>
+          <p:cNvSpPr/>
+          <p:nvPr>
+            <p:ph type="title"/>
+          </p:nvPr>
+        </p:nvSpPr>
+        <p:spPr>
+          <a:xfrm>
+            <a:off x="457200" y="457200"/>
+            <a:ext cx="11277600" cy="768096"/>
+          </a:xfrm>
+          <a:prstGeom prst="rect">
+            <a:avLst/>
+          </a:prstGeom>
+          <a:noFill/>
+        </p:spPr>
+        <p:txBody>
+          <a:bodyPr wrap="none" lIns="0" rIns="0">
+            <a:noAutofit/>
+          </a:bodyPr>
+          <a:lstStyle/>
+          <a:p>
+            <a:pPr algn="l"/>
+            <a:r>
+              <a:rPr sz="4200" b="1" i="0">
+                <a:solidFill>
+                  <a:srgbClr val="CC785C"/>
+                </a:solidFill>
+                <a:latin typeface="Arial"/>
+              </a:rPr>
+              <a:t>SWOT Analysis</a:t>
+            </a:r>
+          </a:p>
+        </p:txBody>
+      </p:sp>
+      <p:sp>
+        <p:nvSpPr>
+          <p:cNvPr id="6" name="TextBox 5"/>
+          <p:cNvSpPr/>
+          <p:nvPr>
+            <p:ph type="body" idx="1"/>
+          </p:nvPr>
+        </p:nvSpPr>
+        <p:spPr>
+          <a:xfrm>
+            <a:off x="457200" y="1499616"/>
+            <a:ext cx="5501640" cy="621791"/>
+          </a:xfrm>
+          <a:prstGeom prst="rect">
+            <a:avLst/>
+          </a:prstGeom>
+          <a:noFill/>
+        </p:spPr>
+        <p:txBody>
+          <a:bodyPr wrap="none" lIns="0" rIns="0">
+            <a:noAutofit/>
+          </a:bodyPr>
+          <a:lstStyle/>
+          <a:p>
+            <a:pPr algn="l"/>
+            <a:r>
+              <a:rPr sz="3400" b="1" i="0">
+                <a:solidFill>
+                  <a:srgbClr val="CC785C"/>
+                </a:solidFill>
+                <a:latin typeface="Arial"/>
+              </a:rPr>
+              <a:t>Strengths</a:t>
+            </a:r>
+          </a:p>
+        </p:txBody>
+      </p:sp>
+      <p:sp>
+        <p:nvSpPr>
+          <p:cNvPr id="7" name="Rectangle 6"/>
+          <p:cNvSpPr/>
+          <p:nvPr>
+            <p:ph type="body" idx="2"/>
+          </p:nvPr>
+        </p:nvSpPr>
+        <p:spPr>
+          <a:xfrm>
+            <a:off x="457200" y="2176271"/>
+            <a:ext cx="2015207" cy="54864"/>
+          </a:xfrm>
+          <a:prstGeom prst="rect">
+            <a:avLst/>
+          </a:prstGeom>
+          <a:solidFill>
+            <a:srgbClr val="CC785C"/>
+          </a:solidFill>
+          <a:ln>
+            <a:noFill/>
+          </a:ln>
+          <a:effectLst/>
+        </p:spPr>
+        <p:txBody>
+          <a:bodyPr rtlCol="0" anchor="ctr"/>
+          <a:lstStyle/>
+          <a:p>
+            <a:pPr algn="ctr"/>
+          </a:p>
+        </p:txBody>
+      </p:sp>
+      <p:sp>
+        <p:nvSpPr>
+          <p:cNvPr id="8" name="TextBox 7"/>
+          <p:cNvSpPr/>
+          <p:nvPr>
+            <p:ph type="body" idx="3"/>
+          </p:nvPr>
+        </p:nvSpPr>
+        <p:spPr>
+          <a:xfrm>
+            <a:off x="457200" y="2395727"/>
+            <a:ext cx="7863523" cy="609600"/>
+          </a:xfrm>
+          <a:prstGeom prst="rect">
+            <a:avLst/>
+          </a:prstGeom>
+          <a:noFill/>
+        </p:spPr>
+        <p:txBody>
+          <a:bodyPr wrap="none" lIns="0" rIns="0">
+            <a:noAutofit/>
+          </a:bodyPr>
+          <a:lstStyle/>
+          <a:p>
+            <a:pPr algn="l"/>
+            <a:r>
+              <a:rPr sz="3400" b="0" i="0">
+                <a:solidFill>
+                  <a:srgbClr val="1A1A2E"/>
+                </a:solidFill>
+                <a:latin typeface="Arial"/>
+              </a:rPr>
+              <a:t>Strong brand, loyal users</a:t>
+            </a:r>
+          </a:p>
+        </p:txBody>
+      </p:sp>
+      <p:sp>
+        <p:nvSpPr>
+          <p:cNvPr id="9" name="TextBox 8"/>
+          <p:cNvSpPr/>
+          <p:nvPr>
+            <p:ph type="body" idx="4"/>
+          </p:nvPr>
+        </p:nvSpPr>
+        <p:spPr>
+          <a:xfrm>
+            <a:off x="6233160" y="1499616"/>
+            <a:ext cx="5501640" cy="621791"/>
+          </a:xfrm>
+          <a:prstGeom prst="rect">
+            <a:avLst/>
+          </a:prstGeom>
+          <a:noFill/>
+        </p:spPr>
+        <p:txBody>
+          <a:bodyPr wrap="none" lIns="0" rIns="0">
+            <a:noAutofit/>
+          </a:bodyPr>
+          <a:lstStyle/>
+          <a:p>
+            <a:pPr algn="l"/>
+            <a:r>
+              <a:rPr sz="3400" b="1" i="0">
+                <a:solidFill>
+                  <a:srgbClr val="1A1A2E"/>
+                </a:solidFill>
+                <a:latin typeface="Arial"/>
+              </a:rPr>
+              <a:t>Weaknesses</a:t>
+            </a:r>
+          </a:p>
+        </p:txBody>
+      </p:sp>
+      <p:sp>
+        <p:nvSpPr>
+          <p:cNvPr id="10" name="Rectangle 9"/>
+          <p:cNvSpPr/>
+          <p:nvPr>
+            <p:ph type="body" idx="5"/>
+          </p:nvPr>
+        </p:nvSpPr>
+        <p:spPr>
+          <a:xfrm>
+            <a:off x="6233160" y="2176271"/>
+            <a:ext cx="2584686" cy="54864"/>
+          </a:xfrm>
+          <a:prstGeom prst="rect">
+            <a:avLst/>
+          </a:prstGeom>
+          <a:solidFill>
+            <a:srgbClr val="1A1A2E"/>
+          </a:solidFill>
+          <a:ln>
+            <a:noFill/>
+          </a:ln>
+          <a:effectLst/>
+        </p:spPr>
+        <p:txBody>
+          <a:bodyPr rtlCol="0" anchor="ctr"/>
+          <a:lstStyle/>
+          <a:p>
+            <a:pPr algn="ctr"/>
+          </a:p>
+        </p:txBody>
+      </p:sp>
+      <p:sp>
+        <p:nvSpPr>
+          <p:cNvPr id="11" name="TextBox 10"/>
+          <p:cNvSpPr/>
+          <p:nvPr>
+            <p:ph type="body" idx="6"/>
+          </p:nvPr>
+        </p:nvSpPr>
+        <p:spPr>
+          <a:xfrm>
+            <a:off x="6233160" y="2395727"/>
+            <a:ext cx="5958840" cy="609600"/>
+          </a:xfrm>
+          <a:prstGeom prst="rect">
+            <a:avLst/>
+          </a:prstGeom>
+          <a:noFill/>
+        </p:spPr>
+        <p:txBody>
+          <a:bodyPr wrap="none" lIns="0" rIns="0">
+            <a:noAutofit/>
+          </a:bodyPr>
+          <a:lstStyle/>
+          <a:p>
+            <a:pPr algn="l"/>
+            <a:r>
+              <a:rPr sz="3400" b="0" i="0">
+                <a:solidFill>
+                  <a:srgbClr val="1A1A2E"/>
+                </a:solidFill>
+                <a:latin typeface="Arial"/>
+              </a:rPr>
+              <a:t>Thin margins, small team</a:t>
+            </a:r>
+          </a:p>
+        </p:txBody>
+      </p:sp>
+      <p:sp>
+        <p:nvSpPr>
+          <p:cNvPr id="12" name="TextBox 11"/>
+          <p:cNvSpPr/>
+          <p:nvPr>
+            <p:ph type="body" idx="7"/>
+          </p:nvPr>
+        </p:nvSpPr>
+        <p:spPr>
+          <a:xfrm>
+            <a:off x="457200" y="3767328"/>
+            <a:ext cx="5501640" cy="621791"/>
+          </a:xfrm>
+          <a:prstGeom prst="rect">
+            <a:avLst/>
+          </a:prstGeom>
+          <a:noFill/>
+        </p:spPr>
+        <p:txBody>
+          <a:bodyPr wrap="none" lIns="0" rIns="0">
+            <a:noAutofit/>
+          </a:bodyPr>
+          <a:lstStyle/>
+          <a:p>
+            <a:pPr algn="l"/>
+            <a:r>
+              <a:rPr sz="3400" b="1" i="0">
+                <a:solidFill>
+                  <a:srgbClr val="CC785C"/>
+                </a:solidFill>
+                <a:latin typeface="Arial"/>
+              </a:rPr>
+              <a:t>Opportunities</a:t>
+            </a:r>
+          </a:p>
+        </p:txBody>
+      </p:sp>
+      <p:sp>
+        <p:nvSpPr>
+          <p:cNvPr id="13" name="Rectangle 12"/>
+          <p:cNvSpPr/>
+          <p:nvPr>
+            <p:ph type="body" idx="8"/>
+          </p:nvPr>
+        </p:nvSpPr>
+        <p:spPr>
+          <a:xfrm>
+            <a:off x="457200" y="4443983"/>
+            <a:ext cx="2830525" cy="54864"/>
+          </a:xfrm>
+          <a:prstGeom prst="rect">
+            <a:avLst/>
+          </a:prstGeom>
+          <a:solidFill>
+            <a:srgbClr val="CC785C"/>
+          </a:solidFill>
+          <a:ln>
+            <a:noFill/>
+          </a:ln>
+          <a:effectLst/>
+        </p:spPr>
+        <p:txBody>
+          <a:bodyPr rtlCol="0" anchor="ctr"/>
+          <a:lstStyle/>
+          <a:p>
+            <a:pPr algn="ctr"/>
+          </a:p>
+        </p:txBody>
+      </p:sp>
+      <p:sp>
+        <p:nvSpPr>
+          <p:cNvPr id="14" name="TextBox 13"/>
+          <p:cNvSpPr/>
+          <p:nvPr>
+            <p:ph type="body" idx="9"/>
+          </p:nvPr>
+        </p:nvSpPr>
+        <p:spPr>
+          <a:xfrm>
+            <a:off x="457200" y="4663439"/>
+            <a:ext cx="8015326" cy="609600"/>
+          </a:xfrm>
+          <a:prstGeom prst="rect">
+            <a:avLst/>
+          </a:prstGeom>
+          <a:noFill/>
+        </p:spPr>
+        <p:txBody>
+          <a:bodyPr wrap="none" lIns="0" rIns="0">
+            <a:noAutofit/>
+          </a:bodyPr>
+          <a:lstStyle/>
+          <a:p>
+            <a:pPr algn="l"/>
+            <a:r>
+              <a:rPr sz="3400" b="0" i="0">
+                <a:solidFill>
+                  <a:srgbClr val="1A1A2E"/>
+                </a:solidFill>
+                <a:latin typeface="Arial"/>
+              </a:rPr>
+              <a:t>New markets via partners</a:t>
+            </a:r>
+          </a:p>
+        </p:txBody>
+      </p:sp>
+      <p:sp>
+        <p:nvSpPr>
+          <p:cNvPr id="15" name="TextBox 14"/>
+          <p:cNvSpPr/>
+          <p:nvPr>
+            <p:ph type="body" idx="13"/>
+          </p:nvPr>
+        </p:nvSpPr>
+        <p:spPr>
+          <a:xfrm>
+            <a:off x="6233160" y="3767328"/>
+            <a:ext cx="5501640" cy="621791"/>
+          </a:xfrm>
+          <a:prstGeom prst="rect">
+            <a:avLst/>
+          </a:prstGeom>
+          <a:noFill/>
+        </p:spPr>
+        <p:txBody>
+          <a:bodyPr wrap="none" lIns="0" rIns="0">
+            <a:noAutofit/>
+          </a:bodyPr>
+          <a:lstStyle/>
+          <a:p>
+            <a:pPr algn="l"/>
+            <a:r>
+              <a:rPr sz="3400" b="1" i="0">
+                <a:solidFill>
+                  <a:srgbClr val="1A1A2E"/>
+                </a:solidFill>
+                <a:latin typeface="Arial"/>
+              </a:rPr>
+              <a:t>Threats</a:t>
+            </a:r>
+          </a:p>
+        </p:txBody>
+      </p:sp>
+      <p:sp>
+        <p:nvSpPr>
+          <p:cNvPr id="16" name="Rectangle 15"/>
+          <p:cNvSpPr/>
+          <p:nvPr>
+            <p:ph type="body" idx="14"/>
+          </p:nvPr>
+        </p:nvSpPr>
+        <p:spPr>
+          <a:xfrm>
+            <a:off x="6233160" y="4443983"/>
+            <a:ext cx="1559793" cy="54864"/>
+          </a:xfrm>
+          <a:prstGeom prst="rect">
+            <a:avLst/>
+          </a:prstGeom>
+          <a:solidFill>
+            <a:srgbClr val="1A1A2E"/>
+          </a:solidFill>
+          <a:ln>
+            <a:noFill/>
+          </a:ln>
+          <a:effectLst/>
+        </p:spPr>
+        <p:txBody>
+          <a:bodyPr rtlCol="0" anchor="ctr"/>
+          <a:lstStyle/>
+          <a:p>
+            <a:pPr algn="ctr"/>
+          </a:p>
+        </p:txBody>
+      </p:sp>
+      <p:sp>
+        <p:nvSpPr>
+          <p:cNvPr id="17" name="TextBox 16"/>
+          <p:cNvSpPr/>
+          <p:nvPr>
+            <p:ph type="body" idx="15"/>
+          </p:nvPr>
+        </p:nvSpPr>
+        <p:spPr>
+          <a:xfrm>
+            <a:off x="6233160" y="4663439"/>
+            <a:ext cx="5958840" cy="609600"/>
+          </a:xfrm>
+          <a:prstGeom prst="rect">
+            <a:avLst/>
+          </a:prstGeom>
+          <a:noFill/>
+        </p:spPr>
+        <p:txBody>
+          <a:bodyPr wrap="none" lIns="0" rIns="0">
+            <a:noAutofit/>
+          </a:bodyPr>
+          <a:lstStyle/>
+          <a:p>
+            <a:pPr algn="l"/>
+            <a:r>
+              <a:rPr sz="3400" b="0" i="0">
+                <a:solidFill>
+                  <a:srgbClr val="1A1A2E"/>
+                </a:solidFill>
+                <a:latin typeface="Arial"/>
+              </a:rPr>
+              <a:t>New entrants cut prices</a:t>
             </a:r>
           </a:p>
         </p:txBody>
@@ -12835,533 +12703,6 @@
 </file>
 
 <file path=ppt/slideLayouts/slideLayout40.xml><?xml version="1.0" encoding="utf-8"?>
-<p:sldLayout xmlns:a="http://schemas.openxmlformats.org/drawingml/2006/main" xmlns:r="http://schemas.openxmlformats.org/officeDocument/2006/relationships" xmlns:p="http://schemas.openxmlformats.org/presentationml/2006/main" type="blank" preserve="1">
-  <p:cSld name="slidekit · SWOT">
-    <p:bg>
-      <p:bgPr>
-        <a:solidFill>
-          <a:srgbClr val="FFFFFF"/>
-        </a:solidFill>
-        <a:effectLst/>
-      </p:bgPr>
-    </p:bg>
-    <p:spTree>
-      <p:nvGrpSpPr>
-        <p:cNvPr id="1" name=""/>
-        <p:cNvGrpSpPr/>
-        <p:nvPr/>
-      </p:nvGrpSpPr>
-      <p:grpSpPr>
-        <a:xfrm>
-          <a:off x="0" y="0"/>
-          <a:ext cx="0" cy="0"/>
-          <a:chOff x="0" y="0"/>
-          <a:chExt cx="0" cy="0"/>
-        </a:xfrm>
-      </p:grpSpPr>
-      <p:sp>
-        <p:nvSpPr>
-          <p:cNvPr id="4" name="Slide Number Placeholder 3"/>
-          <p:cNvSpPr>
-            <a:spLocks noGrp="1"/>
-          </p:cNvSpPr>
-          <p:nvPr>
-            <p:ph type="sldNum" sz="quarter" idx="12"/>
-          </p:nvPr>
-        </p:nvSpPr>
-        <p:spPr>
-          <a:xfrm>
-            <a:off x="11186160" y="6035040"/>
-            <a:ext cx="548640" cy="365760"/>
-          </a:xfrm>
-        </p:spPr>
-        <p:txBody>
-          <a:bodyPr/>
-          <a:lstStyle/>
-          <a:p>
-            <a:fld id="{C1FF6DA9-008F-8B48-92A6-B652298478BF}" type="slidenum">
-              <a:rPr lang="en-US" smtClean="0"/>
-              <a:t>‹#›</a:t>
-            </a:fld>
-            <a:endParaRPr lang="en-US"/>
-          </a:p>
-        </p:txBody>
-      </p:sp>
-      <p:sp>
-        <p:nvSpPr>
-          <p:cNvPr id="5" name="TextBox 4"/>
-          <p:cNvSpPr/>
-          <p:nvPr>
-            <p:ph type="title"/>
-          </p:nvPr>
-        </p:nvSpPr>
-        <p:spPr>
-          <a:xfrm>
-            <a:off x="457200" y="457200"/>
-            <a:ext cx="11277600" cy="768096"/>
-          </a:xfrm>
-          <a:prstGeom prst="rect">
-            <a:avLst/>
-          </a:prstGeom>
-          <a:noFill/>
-        </p:spPr>
-        <p:txBody>
-          <a:bodyPr wrap="none" lIns="0" rIns="0">
-            <a:noAutofit/>
-          </a:bodyPr>
-          <a:lstStyle/>
-          <a:p>
-            <a:pPr algn="l"/>
-            <a:r>
-              <a:rPr sz="4200" b="1" i="0">
-                <a:solidFill>
-                  <a:srgbClr val="CC785C"/>
-                </a:solidFill>
-                <a:latin typeface="Arial"/>
-              </a:rPr>
-              <a:t>SWOT Analysis</a:t>
-            </a:r>
-          </a:p>
-        </p:txBody>
-      </p:sp>
-      <p:sp>
-        <p:nvSpPr>
-          <p:cNvPr id="6" name="TextBox 5"/>
-          <p:cNvSpPr/>
-          <p:nvPr>
-            <p:ph type="body" idx="1"/>
-          </p:nvPr>
-        </p:nvSpPr>
-        <p:spPr>
-          <a:xfrm>
-            <a:off x="457200" y="1499616"/>
-            <a:ext cx="5501640" cy="621791"/>
-          </a:xfrm>
-          <a:prstGeom prst="rect">
-            <a:avLst/>
-          </a:prstGeom>
-          <a:noFill/>
-        </p:spPr>
-        <p:txBody>
-          <a:bodyPr wrap="none" lIns="0" rIns="0">
-            <a:noAutofit/>
-          </a:bodyPr>
-          <a:lstStyle/>
-          <a:p>
-            <a:pPr algn="l"/>
-            <a:r>
-              <a:rPr sz="3400" b="1" i="0">
-                <a:solidFill>
-                  <a:srgbClr val="CC785C"/>
-                </a:solidFill>
-                <a:latin typeface="Arial"/>
-              </a:rPr>
-              <a:t>Strengths</a:t>
-            </a:r>
-          </a:p>
-        </p:txBody>
-      </p:sp>
-      <p:sp>
-        <p:nvSpPr>
-          <p:cNvPr id="7" name="Rectangle 6"/>
-          <p:cNvSpPr/>
-          <p:nvPr>
-            <p:ph type="body" idx="2"/>
-          </p:nvPr>
-        </p:nvSpPr>
-        <p:spPr>
-          <a:xfrm>
-            <a:off x="457200" y="2176271"/>
-            <a:ext cx="1650492" cy="54864"/>
-          </a:xfrm>
-          <a:prstGeom prst="rect">
-            <a:avLst/>
-          </a:prstGeom>
-          <a:solidFill>
-            <a:srgbClr val="CC785C"/>
-          </a:solidFill>
-          <a:ln>
-            <a:noFill/>
-          </a:ln>
-          <a:effectLst/>
-        </p:spPr>
-        <p:txBody>
-          <a:bodyPr rtlCol="0" anchor="ctr"/>
-          <a:lstStyle/>
-          <a:p>
-            <a:pPr algn="ctr"/>
-          </a:p>
-        </p:txBody>
-      </p:sp>
-      <p:sp>
-        <p:nvSpPr>
-          <p:cNvPr id="8" name="TextBox 7"/>
-          <p:cNvSpPr/>
-          <p:nvPr>
-            <p:ph type="body" idx="3"/>
-          </p:nvPr>
-        </p:nvSpPr>
-        <p:spPr>
-          <a:xfrm>
-            <a:off x="457200" y="2395727"/>
-            <a:ext cx="5501640" cy="1097281"/>
-          </a:xfrm>
-          <a:prstGeom prst="rect">
-            <a:avLst/>
-          </a:prstGeom>
-          <a:noFill/>
-        </p:spPr>
-        <p:txBody>
-          <a:bodyPr wrap="square" lIns="0" rIns="0">
-            <a:noAutofit/>
-          </a:bodyPr>
-          <a:lstStyle/>
-          <a:p>
-            <a:pPr algn="l"/>
-            <a:r>
-              <a:rPr sz="3400" b="0" i="0">
-                <a:solidFill>
-                  <a:srgbClr val="1A1A2E"/>
-                </a:solidFill>
-                <a:latin typeface="Arial"/>
-              </a:rPr>
-              <a:t>A strong brand with loyal users</a:t>
-            </a:r>
-          </a:p>
-        </p:txBody>
-      </p:sp>
-      <p:sp>
-        <p:nvSpPr>
-          <p:cNvPr id="9" name="TextBox 8"/>
-          <p:cNvSpPr/>
-          <p:nvPr>
-            <p:ph type="body" idx="4"/>
-          </p:nvPr>
-        </p:nvSpPr>
-        <p:spPr>
-          <a:xfrm>
-            <a:off x="6233160" y="1499616"/>
-            <a:ext cx="5501640" cy="621791"/>
-          </a:xfrm>
-          <a:prstGeom prst="rect">
-            <a:avLst/>
-          </a:prstGeom>
-          <a:noFill/>
-        </p:spPr>
-        <p:txBody>
-          <a:bodyPr wrap="none" lIns="0" rIns="0">
-            <a:noAutofit/>
-          </a:bodyPr>
-          <a:lstStyle/>
-          <a:p>
-            <a:pPr algn="l"/>
-            <a:r>
-              <a:rPr sz="3400" b="1" i="0">
-                <a:solidFill>
-                  <a:srgbClr val="8A8A9A"/>
-                </a:solidFill>
-                <a:latin typeface="Arial"/>
-              </a:rPr>
-              <a:t>Weaknesses</a:t>
-            </a:r>
-          </a:p>
-        </p:txBody>
-      </p:sp>
-      <p:sp>
-        <p:nvSpPr>
-          <p:cNvPr id="10" name="Rectangle 9"/>
-          <p:cNvSpPr/>
-          <p:nvPr>
-            <p:ph type="body" idx="5"/>
-          </p:nvPr>
-        </p:nvSpPr>
-        <p:spPr>
-          <a:xfrm>
-            <a:off x="6233160" y="2176271"/>
-            <a:ext cx="1650492" cy="54864"/>
-          </a:xfrm>
-          <a:prstGeom prst="rect">
-            <a:avLst/>
-          </a:prstGeom>
-          <a:solidFill>
-            <a:srgbClr val="8A8A9A"/>
-          </a:solidFill>
-          <a:ln>
-            <a:noFill/>
-          </a:ln>
-          <a:effectLst/>
-        </p:spPr>
-        <p:txBody>
-          <a:bodyPr rtlCol="0" anchor="ctr"/>
-          <a:lstStyle/>
-          <a:p>
-            <a:pPr algn="ctr"/>
-          </a:p>
-        </p:txBody>
-      </p:sp>
-      <p:sp>
-        <p:nvSpPr>
-          <p:cNvPr id="11" name="TextBox 10"/>
-          <p:cNvSpPr/>
-          <p:nvPr>
-            <p:ph type="body" idx="6"/>
-          </p:nvPr>
-        </p:nvSpPr>
-        <p:spPr>
-          <a:xfrm>
-            <a:off x="6233160" y="2395727"/>
-            <a:ext cx="5501640" cy="1097281"/>
-          </a:xfrm>
-          <a:prstGeom prst="rect">
-            <a:avLst/>
-          </a:prstGeom>
-          <a:noFill/>
-        </p:spPr>
-        <p:txBody>
-          <a:bodyPr wrap="square" lIns="0" rIns="0">
-            <a:noAutofit/>
-          </a:bodyPr>
-          <a:lstStyle/>
-          <a:p>
-            <a:pPr algn="l"/>
-            <a:r>
-              <a:rPr sz="3400" b="0" i="0">
-                <a:solidFill>
-                  <a:srgbClr val="1A1A2E"/>
-                </a:solidFill>
-                <a:latin typeface="Arial"/>
-              </a:rPr>
-              <a:t>Thin margins and a small team</a:t>
-            </a:r>
-          </a:p>
-        </p:txBody>
-      </p:sp>
-      <p:sp>
-        <p:nvSpPr>
-          <p:cNvPr id="12" name="TextBox 11"/>
-          <p:cNvSpPr/>
-          <p:nvPr>
-            <p:ph type="body" idx="7"/>
-          </p:nvPr>
-        </p:nvSpPr>
-        <p:spPr>
-          <a:xfrm>
-            <a:off x="457200" y="3767328"/>
-            <a:ext cx="5501640" cy="621791"/>
-          </a:xfrm>
-          <a:prstGeom prst="rect">
-            <a:avLst/>
-          </a:prstGeom>
-          <a:noFill/>
-        </p:spPr>
-        <p:txBody>
-          <a:bodyPr wrap="none" lIns="0" rIns="0">
-            <a:noAutofit/>
-          </a:bodyPr>
-          <a:lstStyle/>
-          <a:p>
-            <a:pPr algn="l"/>
-            <a:r>
-              <a:rPr sz="3400" b="1" i="0">
-                <a:solidFill>
-                  <a:srgbClr val="CC785C"/>
-                </a:solidFill>
-                <a:latin typeface="Arial"/>
-              </a:rPr>
-              <a:t>Opportunities</a:t>
-            </a:r>
-          </a:p>
-        </p:txBody>
-      </p:sp>
-      <p:sp>
-        <p:nvSpPr>
-          <p:cNvPr id="13" name="Rectangle 12"/>
-          <p:cNvSpPr/>
-          <p:nvPr>
-            <p:ph type="body" idx="8"/>
-          </p:nvPr>
-        </p:nvSpPr>
-        <p:spPr>
-          <a:xfrm>
-            <a:off x="457200" y="4443983"/>
-            <a:ext cx="1650492" cy="54864"/>
-          </a:xfrm>
-          <a:prstGeom prst="rect">
-            <a:avLst/>
-          </a:prstGeom>
-          <a:solidFill>
-            <a:srgbClr val="CC785C"/>
-          </a:solidFill>
-          <a:ln>
-            <a:noFill/>
-          </a:ln>
-          <a:effectLst/>
-        </p:spPr>
-        <p:txBody>
-          <a:bodyPr rtlCol="0" anchor="ctr"/>
-          <a:lstStyle/>
-          <a:p>
-            <a:pPr algn="ctr"/>
-          </a:p>
-        </p:txBody>
-      </p:sp>
-      <p:sp>
-        <p:nvSpPr>
-          <p:cNvPr id="14" name="TextBox 13"/>
-          <p:cNvSpPr/>
-          <p:nvPr>
-            <p:ph type="body" idx="9"/>
-          </p:nvPr>
-        </p:nvSpPr>
-        <p:spPr>
-          <a:xfrm>
-            <a:off x="457200" y="4663439"/>
-            <a:ext cx="5501640" cy="1097281"/>
-          </a:xfrm>
-          <a:prstGeom prst="rect">
-            <a:avLst/>
-          </a:prstGeom>
-          <a:noFill/>
-        </p:spPr>
-        <p:txBody>
-          <a:bodyPr wrap="square" lIns="0" rIns="0">
-            <a:noAutofit/>
-          </a:bodyPr>
-          <a:lstStyle/>
-          <a:p>
-            <a:pPr algn="l"/>
-            <a:r>
-              <a:rPr sz="3400" b="0" i="0">
-                <a:solidFill>
-                  <a:srgbClr val="1A1A2E"/>
-                </a:solidFill>
-                <a:latin typeface="Arial"/>
-              </a:rPr>
-              <a:t>New markets through partnerships</a:t>
-            </a:r>
-          </a:p>
-        </p:txBody>
-      </p:sp>
-      <p:sp>
-        <p:nvSpPr>
-          <p:cNvPr id="15" name="TextBox 14"/>
-          <p:cNvSpPr/>
-          <p:nvPr>
-            <p:ph type="body" idx="13"/>
-          </p:nvPr>
-        </p:nvSpPr>
-        <p:spPr>
-          <a:xfrm>
-            <a:off x="6233160" y="3767328"/>
-            <a:ext cx="5501640" cy="621791"/>
-          </a:xfrm>
-          <a:prstGeom prst="rect">
-            <a:avLst/>
-          </a:prstGeom>
-          <a:noFill/>
-        </p:spPr>
-        <p:txBody>
-          <a:bodyPr wrap="none" lIns="0" rIns="0">
-            <a:noAutofit/>
-          </a:bodyPr>
-          <a:lstStyle/>
-          <a:p>
-            <a:pPr algn="l"/>
-            <a:r>
-              <a:rPr sz="3400" b="1" i="0">
-                <a:solidFill>
-                  <a:srgbClr val="8A8A9A"/>
-                </a:solidFill>
-                <a:latin typeface="Arial"/>
-              </a:rPr>
-              <a:t>Threats</a:t>
-            </a:r>
-          </a:p>
-        </p:txBody>
-      </p:sp>
-      <p:sp>
-        <p:nvSpPr>
-          <p:cNvPr id="16" name="Rectangle 15"/>
-          <p:cNvSpPr/>
-          <p:nvPr>
-            <p:ph type="body" idx="14"/>
-          </p:nvPr>
-        </p:nvSpPr>
-        <p:spPr>
-          <a:xfrm>
-            <a:off x="6233160" y="4443983"/>
-            <a:ext cx="1650492" cy="54864"/>
-          </a:xfrm>
-          <a:prstGeom prst="rect">
-            <a:avLst/>
-          </a:prstGeom>
-          <a:solidFill>
-            <a:srgbClr val="8A8A9A"/>
-          </a:solidFill>
-          <a:ln>
-            <a:noFill/>
-          </a:ln>
-          <a:effectLst/>
-        </p:spPr>
-        <p:txBody>
-          <a:bodyPr rtlCol="0" anchor="ctr"/>
-          <a:lstStyle/>
-          <a:p>
-            <a:pPr algn="ctr"/>
-          </a:p>
-        </p:txBody>
-      </p:sp>
-      <p:sp>
-        <p:nvSpPr>
-          <p:cNvPr id="17" name="TextBox 16"/>
-          <p:cNvSpPr/>
-          <p:nvPr>
-            <p:ph type="body" idx="15"/>
-          </p:nvPr>
-        </p:nvSpPr>
-        <p:spPr>
-          <a:xfrm>
-            <a:off x="6233160" y="4663439"/>
-            <a:ext cx="5501640" cy="1097281"/>
-          </a:xfrm>
-          <a:prstGeom prst="rect">
-            <a:avLst/>
-          </a:prstGeom>
-          <a:noFill/>
-        </p:spPr>
-        <p:txBody>
-          <a:bodyPr wrap="square" lIns="0" rIns="0">
-            <a:noAutofit/>
-          </a:bodyPr>
-          <a:lstStyle/>
-          <a:p>
-            <a:pPr algn="l"/>
-            <a:r>
-              <a:rPr sz="3400" b="0" i="0">
-                <a:solidFill>
-                  <a:srgbClr val="1A1A2E"/>
-                </a:solidFill>
-                <a:latin typeface="Arial"/>
-              </a:rPr>
-              <a:t>New entrants driving price pressure</a:t>
-            </a:r>
-          </a:p>
-        </p:txBody>
-      </p:sp>
-    </p:spTree>
-    <p:extLst>
-      <p:ext uri="{BB962C8B-B14F-4D97-AF65-F5344CB8AC3E}">
-        <p14:creationId xmlns:p14="http://schemas.microsoft.com/office/powerpoint/2010/main" val="1212999818"/>
-      </p:ext>
-    </p:extLst>
-  </p:cSld>
-  <p:clrMapOvr>
-    <a:masterClrMapping/>
-  </p:clrMapOvr>
-</p:sldLayout>
-</file>
-
-<file path=ppt/slideLayouts/slideLayout41.xml><?xml version="1.0" encoding="utf-8"?>
 <p:sldLayout xmlns:a="http://schemas.openxmlformats.org/drawingml/2006/main" xmlns:r="http://schemas.openxmlformats.org/officeDocument/2006/relationships" xmlns:p="http://schemas.openxmlformats.org/presentationml/2006/main" type="blank" preserve="1">
   <p:cSld name="slidekit · Comparison Matrix">
     <p:bg>
@@ -15565,7 +14906,6 @@
     <p:sldLayoutId id="2147483738" r:id="rId39"/>
     <p:sldLayoutId id="2147483739" r:id="rId40"/>
     <p:sldLayoutId id="2147483740" r:id="rId41"/>
-    <p:sldLayoutId id="2147483741" r:id="rId42"/>
   </p:sldLayoutIdLst>
   <p:txStyles>
     <p:titleStyle>
@@ -16102,7 +15442,7 @@
             <a:fld id="{4B0E1F8A-6C1D-4E2A-9F3B-7A5C8D2E1F60}" type="slidenum">
               <a:rPr sz="1600" b="0" i="0">
                 <a:solidFill>
-                  <a:srgbClr val="8A8A9A"/>
+                  <a:srgbClr val="1A1A2E"/>
                 </a:solidFill>
                 <a:latin typeface="Arial"/>
               </a:rPr>
@@ -16376,7 +15716,7 @@
             <a:fld id="{4B0E1F8A-6C1D-4E2A-9F3B-7A5C8D2E1F60}" type="slidenum">
               <a:rPr sz="1600" b="0" i="0">
                 <a:solidFill>
-                  <a:srgbClr val="8A8A9A"/>
+                  <a:srgbClr val="1A1A2E"/>
                 </a:solidFill>
                 <a:latin typeface="Arial"/>
               </a:rPr>
@@ -16553,7 +15893,7 @@
             <a:fld id="{4B0E1F8A-6C1D-4E2A-9F3B-7A5C8D2E1F60}" type="slidenum">
               <a:rPr sz="1600" b="0" i="0">
                 <a:solidFill>
-                  <a:srgbClr val="8A8A9A"/>
+                  <a:srgbClr val="1A1A2E"/>
                 </a:solidFill>
                 <a:latin typeface="Arial"/>
               </a:rPr>
@@ -16756,7 +16096,7 @@
             <a:fld id="{4B0E1F8A-6C1D-4E2A-9F3B-7A5C8D2E1F60}" type="slidenum">
               <a:rPr sz="1600" b="0" i="0">
                 <a:solidFill>
-                  <a:srgbClr val="8A8A9A"/>
+                  <a:srgbClr val="1A1A2E"/>
                 </a:solidFill>
                 <a:latin typeface="Arial"/>
               </a:rPr>
@@ -17363,7 +16703,7 @@
             <a:fld id="{4B0E1F8A-6C1D-4E2A-9F3B-7A5C8D2E1F60}" type="slidenum">
               <a:rPr sz="1600" b="0" i="0">
                 <a:solidFill>
-                  <a:srgbClr val="8A8A9A"/>
+                  <a:srgbClr val="1A1A2E"/>
                 </a:solidFill>
                 <a:latin typeface="Arial"/>
               </a:rPr>
@@ -17707,7 +17047,7 @@
             <a:fld id="{4B0E1F8A-6C1D-4E2A-9F3B-7A5C8D2E1F60}" type="slidenum">
               <a:rPr sz="1600" b="0" i="0">
                 <a:solidFill>
-                  <a:srgbClr val="8A8A9A"/>
+                  <a:srgbClr val="1A1A2E"/>
                 </a:solidFill>
                 <a:latin typeface="Arial"/>
               </a:rPr>
@@ -17946,7 +17286,7 @@
             <a:fld id="{4B0E1F8A-6C1D-4E2A-9F3B-7A5C8D2E1F60}" type="slidenum">
               <a:rPr sz="1600" b="0" i="0">
                 <a:solidFill>
-                  <a:srgbClr val="8A8A9A"/>
+                  <a:srgbClr val="1A1A2E"/>
                 </a:solidFill>
                 <a:latin typeface="Arial"/>
               </a:rPr>
@@ -18159,7 +17499,7 @@
             <a:fld id="{4B0E1F8A-6C1D-4E2A-9F3B-7A5C8D2E1F60}" type="slidenum">
               <a:rPr sz="1600" b="0" i="0">
                 <a:solidFill>
-                  <a:srgbClr val="8A8A9A"/>
+                  <a:srgbClr val="1A1A2E"/>
                 </a:solidFill>
                 <a:latin typeface="Arial"/>
               </a:rPr>
@@ -18255,7 +17595,7 @@
             <a:r>
               <a:rPr sz="4200" b="1" i="0">
                 <a:solidFill>
-                  <a:srgbClr val="19323C"/>
+                  <a:srgbClr val="CC785C"/>
                 </a:solidFill>
                 <a:latin typeface="Arial"/>
               </a:rPr>
@@ -18290,7 +17630,7 @@
             <a:r>
               <a:rPr sz="4200" b="1" i="0">
                 <a:solidFill>
-                  <a:srgbClr val="19323C"/>
+                  <a:srgbClr val="CC785C"/>
                 </a:solidFill>
                 <a:latin typeface="Arial"/>
               </a:rPr>
@@ -18360,7 +17700,7 @@
             <a:r>
               <a:rPr sz="4200" b="1" i="0">
                 <a:solidFill>
-                  <a:srgbClr val="19323C"/>
+                  <a:srgbClr val="CC785C"/>
                 </a:solidFill>
                 <a:latin typeface="Arial"/>
               </a:rPr>
@@ -18395,7 +17735,7 @@
             <a:r>
               <a:rPr sz="4200" b="1" i="0">
                 <a:solidFill>
-                  <a:srgbClr val="19323C"/>
+                  <a:srgbClr val="CC785C"/>
                 </a:solidFill>
                 <a:latin typeface="Arial"/>
               </a:rPr>
@@ -18465,7 +17805,7 @@
             <a:r>
               <a:rPr sz="4200" b="1" i="0">
                 <a:solidFill>
-                  <a:srgbClr val="19323C"/>
+                  <a:srgbClr val="CC785C"/>
                 </a:solidFill>
                 <a:latin typeface="Arial"/>
               </a:rPr>
@@ -18500,7 +17840,7 @@
             <a:r>
               <a:rPr sz="4200" b="1" i="0">
                 <a:solidFill>
-                  <a:srgbClr val="19323C"/>
+                  <a:srgbClr val="CC785C"/>
                 </a:solidFill>
                 <a:latin typeface="Arial"/>
               </a:rPr>
@@ -18572,7 +17912,7 @@
             <a:fld id="{4B0E1F8A-6C1D-4E2A-9F3B-7A5C8D2E1F60}" type="slidenum">
               <a:rPr sz="1600" b="0" i="0">
                 <a:solidFill>
-                  <a:srgbClr val="8A8A9A"/>
+                  <a:srgbClr val="1A1A2E"/>
                 </a:solidFill>
                 <a:latin typeface="Arial"/>
               </a:rPr>
@@ -18704,7 +18044,7 @@
             <a:r>
               <a:rPr sz="4200" b="1" i="0">
                 <a:solidFill>
-                  <a:srgbClr val="19323C"/>
+                  <a:srgbClr val="CC785C"/>
                 </a:solidFill>
                 <a:latin typeface="Arial"/>
               </a:rPr>
@@ -18739,7 +18079,7 @@
             <a:r>
               <a:rPr sz="4200" b="1" i="0">
                 <a:solidFill>
-                  <a:srgbClr val="19323C"/>
+                  <a:srgbClr val="CC785C"/>
                 </a:solidFill>
                 <a:latin typeface="Arial"/>
               </a:rPr>
@@ -18809,7 +18149,7 @@
             <a:r>
               <a:rPr sz="4200" b="1" i="0">
                 <a:solidFill>
-                  <a:srgbClr val="19323C"/>
+                  <a:srgbClr val="CC785C"/>
                 </a:solidFill>
                 <a:latin typeface="Arial"/>
               </a:rPr>
@@ -18844,7 +18184,7 @@
             <a:r>
               <a:rPr sz="4200" b="1" i="0">
                 <a:solidFill>
-                  <a:srgbClr val="19323C"/>
+                  <a:srgbClr val="CC785C"/>
                 </a:solidFill>
                 <a:latin typeface="Arial"/>
               </a:rPr>
@@ -18914,7 +18254,7 @@
             <a:r>
               <a:rPr sz="4200" b="1" i="0">
                 <a:solidFill>
-                  <a:srgbClr val="19323C"/>
+                  <a:srgbClr val="CC785C"/>
                 </a:solidFill>
                 <a:latin typeface="Arial"/>
               </a:rPr>
@@ -18949,7 +18289,7 @@
             <a:r>
               <a:rPr sz="4200" b="1" i="0">
                 <a:solidFill>
-                  <a:srgbClr val="19323C"/>
+                  <a:srgbClr val="CC785C"/>
                 </a:solidFill>
                 <a:latin typeface="Arial"/>
               </a:rPr>
@@ -19021,7 +18361,7 @@
             <a:fld id="{4B0E1F8A-6C1D-4E2A-9F3B-7A5C8D2E1F60}" type="slidenum">
               <a:rPr sz="1600" b="0" i="0">
                 <a:solidFill>
-                  <a:srgbClr val="8A8A9A"/>
+                  <a:srgbClr val="1A1A2E"/>
                 </a:solidFill>
                 <a:latin typeface="Arial"/>
               </a:rPr>
@@ -19234,7 +18574,7 @@
             <a:fld id="{4B0E1F8A-6C1D-4E2A-9F3B-7A5C8D2E1F60}" type="slidenum">
               <a:rPr sz="1600" b="0" i="0">
                 <a:solidFill>
-                  <a:srgbClr val="8A8A9A"/>
+                  <a:srgbClr val="1A1A2E"/>
                 </a:solidFill>
                 <a:latin typeface="Arial"/>
               </a:rPr>
@@ -19402,7 +18742,7 @@
             <a:fld id="{4B0E1F8A-6C1D-4E2A-9F3B-7A5C8D2E1F60}" type="slidenum">
               <a:rPr sz="1600" b="0" i="0">
                 <a:solidFill>
-                  <a:srgbClr val="8A8A9A"/>
+                  <a:srgbClr val="1A1A2E"/>
                 </a:solidFill>
                 <a:latin typeface="Arial"/>
               </a:rPr>
@@ -19488,7 +18828,7 @@
             <a:avLst/>
           </a:prstGeom>
           <a:solidFill>
-            <a:srgbClr val="FF5F56"/>
+            <a:srgbClr val="FFFFFF"/>
           </a:solidFill>
           <a:ln>
             <a:noFill/>
@@ -19532,7 +18872,7 @@
             <a:avLst/>
           </a:prstGeom>
           <a:solidFill>
-            <a:srgbClr val="FFBD2E"/>
+            <a:srgbClr val="FFFFFF"/>
           </a:solidFill>
           <a:ln>
             <a:noFill/>
@@ -19576,7 +18916,7 @@
             <a:avLst/>
           </a:prstGeom>
           <a:solidFill>
-            <a:srgbClr val="27C93F"/>
+            <a:srgbClr val="FFFFFF"/>
           </a:solidFill>
           <a:ln>
             <a:noFill/>
@@ -19631,7 +18971,7 @@
             <a:r>
               <a:rPr sz="4200" b="0" i="0">
                 <a:solidFill>
-                  <a:srgbClr val="D4D4D4"/>
+                  <a:srgbClr val="FFFFFF"/>
                 </a:solidFill>
                 <a:latin typeface="Arial"/>
               </a:rPr>
@@ -19666,7 +19006,7 @@
             <a:r>
               <a:rPr sz="3400" b="0" i="0">
                 <a:solidFill>
-                  <a:srgbClr val="4EC9B0"/>
+                  <a:srgbClr val="569CD6"/>
                 </a:solidFill>
                 <a:latin typeface="Arial"/>
               </a:rPr>
@@ -19701,7 +19041,7 @@
             <a:r>
               <a:rPr sz="3400" b="0" i="0">
                 <a:solidFill>
-                  <a:srgbClr val="D4D4D4"/>
+                  <a:srgbClr val="FFFFFF"/>
                 </a:solidFill>
                 <a:latin typeface="Arial"/>
               </a:rPr>
@@ -19736,7 +19076,7 @@
             <a:r>
               <a:rPr sz="3400" b="0" i="0">
                 <a:solidFill>
-                  <a:srgbClr val="D4D4D4"/>
+                  <a:srgbClr val="FFFFFF"/>
                 </a:solidFill>
                 <a:latin typeface="Arial"/>
               </a:rPr>
@@ -19806,7 +19146,7 @@
             <a:r>
               <a:rPr sz="3400" b="0" i="0">
                 <a:solidFill>
-                  <a:srgbClr val="D4D4D4"/>
+                  <a:srgbClr val="FFFFFF"/>
                 </a:solidFill>
                 <a:latin typeface="Arial"/>
               </a:rPr>
@@ -19841,7 +19181,7 @@
             <a:r>
               <a:rPr sz="3400" b="0" i="0">
                 <a:solidFill>
-                  <a:srgbClr val="D4D4D4"/>
+                  <a:srgbClr val="FFFFFF"/>
                 </a:solidFill>
                 <a:latin typeface="Arial"/>
               </a:rPr>
@@ -19876,7 +19216,7 @@
             <a:r>
               <a:rPr sz="3400" b="0" i="0">
                 <a:solidFill>
-                  <a:srgbClr val="4EC9B0"/>
+                  <a:srgbClr val="569CD6"/>
                 </a:solidFill>
                 <a:latin typeface="Arial"/>
               </a:rPr>
@@ -19911,7 +19251,7 @@
             <a:r>
               <a:rPr sz="3400" b="0" i="0">
                 <a:solidFill>
-                  <a:srgbClr val="D4D4D4"/>
+                  <a:srgbClr val="FFFFFF"/>
                 </a:solidFill>
                 <a:latin typeface="Arial"/>
               </a:rPr>
@@ -19946,7 +19286,7 @@
             <a:r>
               <a:rPr sz="3400" b="0" i="0">
                 <a:solidFill>
-                  <a:srgbClr val="D4D4D4"/>
+                  <a:srgbClr val="FFFFFF"/>
                 </a:solidFill>
                 <a:latin typeface="Arial"/>
               </a:rPr>
@@ -19981,7 +19321,7 @@
             <a:r>
               <a:rPr sz="3400" b="0" i="0">
                 <a:solidFill>
-                  <a:srgbClr val="D4D4D4"/>
+                  <a:srgbClr val="FFFFFF"/>
                 </a:solidFill>
                 <a:latin typeface="Arial"/>
               </a:rPr>
@@ -20051,7 +19391,7 @@
             <a:r>
               <a:rPr sz="3400" b="0" i="0">
                 <a:solidFill>
-                  <a:srgbClr val="D4D4D4"/>
+                  <a:srgbClr val="FFFFFF"/>
                 </a:solidFill>
                 <a:latin typeface="Arial"/>
               </a:rPr>
@@ -20088,7 +19428,7 @@
             <a:fld id="{4B0E1F8A-6C1D-4E2A-9F3B-7A5C8D2E1F60}" type="slidenum">
               <a:rPr sz="1600" b="0" i="0">
                 <a:solidFill>
-                  <a:srgbClr val="8A8A9A"/>
+                  <a:srgbClr val="1A1A2E"/>
                 </a:solidFill>
                 <a:latin typeface="Arial"/>
               </a:rPr>
@@ -20265,7 +19605,7 @@
             <a:fld id="{4B0E1F8A-6C1D-4E2A-9F3B-7A5C8D2E1F60}" type="slidenum">
               <a:rPr sz="1600" b="0" i="0">
                 <a:solidFill>
-                  <a:srgbClr val="8A8A9A"/>
+                  <a:srgbClr val="1A1A2E"/>
                 </a:solidFill>
                 <a:latin typeface="Arial"/>
               </a:rPr>
@@ -20442,7 +19782,7 @@
             <a:fld id="{4B0E1F8A-6C1D-4E2A-9F3B-7A5C8D2E1F60}" type="slidenum">
               <a:rPr sz="1600" b="0" i="0">
                 <a:solidFill>
-                  <a:srgbClr val="8A8A9A"/>
+                  <a:srgbClr val="1A1A2E"/>
                 </a:solidFill>
                 <a:latin typeface="Arial"/>
               </a:rPr>
@@ -20681,7 +20021,7 @@
             <a:fld id="{4B0E1F8A-6C1D-4E2A-9F3B-7A5C8D2E1F60}" type="slidenum">
               <a:rPr sz="1600" b="0" i="0">
                 <a:solidFill>
-                  <a:srgbClr val="8A8A9A"/>
+                  <a:srgbClr val="1A1A2E"/>
                 </a:solidFill>
                 <a:latin typeface="Arial"/>
               </a:rPr>
@@ -20813,7 +20153,7 @@
             <a:r>
               <a:rPr sz="3400" b="1" i="0">
                 <a:solidFill>
-                  <a:srgbClr val="8A8A9A"/>
+                  <a:srgbClr val="1A1A2E"/>
                 </a:solidFill>
                 <a:latin typeface="Arial"/>
               </a:rPr>
@@ -20830,14 +20170,14 @@
         </p:nvSpPr>
         <p:spPr>
           <a:xfrm>
-            <a:off x="548640" y="2176271"/>
-            <a:ext cx="1650492" cy="54864"/>
+            <a:off x="457200" y="2176271"/>
+            <a:ext cx="2682094" cy="54864"/>
           </a:xfrm>
           <a:prstGeom prst="rect">
             <a:avLst/>
           </a:prstGeom>
           <a:solidFill>
-            <a:srgbClr val="8A8A9A"/>
+            <a:srgbClr val="1A1A2E"/>
           </a:solidFill>
           <a:ln>
             <a:noFill/>
@@ -20909,8 +20249,8 @@
         </p:nvSpPr>
         <p:spPr>
           <a:xfrm>
-            <a:off x="6324600" y="2176271"/>
-            <a:ext cx="1650492" cy="54864"/>
+            <a:off x="6233160" y="2176271"/>
+            <a:ext cx="2010780" cy="54864"/>
           </a:xfrm>
           <a:prstGeom prst="rect">
             <a:avLst/>
@@ -21183,7 +20523,7 @@
             <a:fld id="{4B0E1F8A-6C1D-4E2A-9F3B-7A5C8D2E1F60}" type="slidenum">
               <a:rPr sz="1600" b="0" i="0">
                 <a:solidFill>
-                  <a:srgbClr val="8A8A9A"/>
+                  <a:srgbClr val="1A1A2E"/>
                 </a:solidFill>
                 <a:latin typeface="Arial"/>
               </a:rPr>
@@ -21315,7 +20655,7 @@
             <a:r>
               <a:rPr sz="3400" b="1" i="0">
                 <a:solidFill>
-                  <a:srgbClr val="19323C"/>
+                  <a:srgbClr val="CC785C"/>
                 </a:solidFill>
                 <a:latin typeface="Arial"/>
               </a:rPr>
@@ -21350,7 +20690,7 @@
             <a:r>
               <a:rPr sz="3400" b="1" i="0">
                 <a:solidFill>
-                  <a:srgbClr val="19323C"/>
+                  <a:srgbClr val="CC785C"/>
                 </a:solidFill>
                 <a:latin typeface="Arial"/>
               </a:rPr>
@@ -21711,7 +21051,7 @@
             <a:fld id="{4B0E1F8A-6C1D-4E2A-9F3B-7A5C8D2E1F60}" type="slidenum">
               <a:rPr sz="1600" b="0" i="0">
                 <a:solidFill>
-                  <a:srgbClr val="8A8A9A"/>
+                  <a:srgbClr val="1A1A2E"/>
                 </a:solidFill>
                 <a:latin typeface="Arial"/>
               </a:rPr>
@@ -21924,7 +21264,7 @@
             <a:fld id="{4B0E1F8A-6C1D-4E2A-9F3B-7A5C8D2E1F60}" type="slidenum">
               <a:rPr sz="1600" b="0" i="0">
                 <a:solidFill>
-                  <a:srgbClr val="8A8A9A"/>
+                  <a:srgbClr val="1A1A2E"/>
                 </a:solidFill>
                 <a:latin typeface="Arial"/>
               </a:rPr>
@@ -22101,7 +21441,7 @@
             <a:fld id="{4B0E1F8A-6C1D-4E2A-9F3B-7A5C8D2E1F60}" type="slidenum">
               <a:rPr sz="1600" b="0" i="0">
                 <a:solidFill>
-                  <a:srgbClr val="8A8A9A"/>
+                  <a:srgbClr val="1A1A2E"/>
                 </a:solidFill>
                 <a:latin typeface="Arial"/>
               </a:rPr>
@@ -22340,7 +21680,7 @@
             <a:fld id="{4B0E1F8A-6C1D-4E2A-9F3B-7A5C8D2E1F60}" type="slidenum">
               <a:rPr sz="1600" b="0" i="0">
                 <a:solidFill>
-                  <a:srgbClr val="8A8A9A"/>
+                  <a:srgbClr val="1A1A2E"/>
                 </a:solidFill>
                 <a:latin typeface="Arial"/>
               </a:rPr>
@@ -22612,7 +21952,7 @@
             <a:r>
               <a:rPr sz="4200" b="1" i="0">
                 <a:solidFill>
-                  <a:srgbClr val="8A8A9A"/>
+                  <a:srgbClr val="1A1A2E"/>
                 </a:solidFill>
                 <a:latin typeface="Arial"/>
               </a:rPr>
@@ -22649,7 +21989,7 @@
             <a:fld id="{4B0E1F8A-6C1D-4E2A-9F3B-7A5C8D2E1F60}" type="slidenum">
               <a:rPr sz="1600" b="0" i="0">
                 <a:solidFill>
-                  <a:srgbClr val="8A8A9A"/>
+                  <a:srgbClr val="1A1A2E"/>
                 </a:solidFill>
                 <a:latin typeface="Arial"/>
               </a:rPr>
@@ -22710,7 +22050,7 @@
             <a:r>
               <a:rPr sz="4200" b="0" i="0">
                 <a:solidFill>
-                  <a:srgbClr val="D4D4D4"/>
+                  <a:srgbClr val="FFFFFF"/>
                 </a:solidFill>
                 <a:latin typeface="Arial"/>
               </a:rPr>
@@ -22745,7 +22085,7 @@
             <a:r>
               <a:rPr sz="3400" b="0" i="0">
                 <a:solidFill>
-                  <a:srgbClr val="6A9955"/>
+                  <a:srgbClr val="FFFFFF"/>
                 </a:solidFill>
                 <a:latin typeface="Arial"/>
               </a:rPr>
@@ -22780,7 +22120,7 @@
             <a:r>
               <a:rPr sz="3400" b="0" i="0">
                 <a:solidFill>
-                  <a:srgbClr val="D4D4D4"/>
+                  <a:srgbClr val="FFFFFF"/>
                 </a:solidFill>
                 <a:latin typeface="Arial"/>
               </a:rPr>
@@ -22850,7 +22190,7 @@
             <a:r>
               <a:rPr sz="3400" b="0" i="0">
                 <a:solidFill>
-                  <a:srgbClr val="D4D4D4"/>
+                  <a:srgbClr val="FFFFFF"/>
                 </a:solidFill>
                 <a:latin typeface="Arial"/>
               </a:rPr>
@@ -22885,7 +22225,7 @@
             <a:r>
               <a:rPr sz="3400" b="0" i="0">
                 <a:solidFill>
-                  <a:srgbClr val="D4D4D4"/>
+                  <a:srgbClr val="FFFFFF"/>
                 </a:solidFill>
                 <a:latin typeface="Arial"/>
               </a:rPr>
@@ -22955,7 +22295,7 @@
             <a:r>
               <a:rPr sz="3400" b="0" i="0">
                 <a:solidFill>
-                  <a:srgbClr val="D4D4D4"/>
+                  <a:srgbClr val="FFFFFF"/>
                 </a:solidFill>
                 <a:latin typeface="Arial"/>
               </a:rPr>
@@ -22990,7 +22330,7 @@
             <a:r>
               <a:rPr sz="3400" b="0" i="0">
                 <a:solidFill>
-                  <a:srgbClr val="D4D4D4"/>
+                  <a:srgbClr val="FFFFFF"/>
                 </a:solidFill>
                 <a:latin typeface="Arial"/>
               </a:rPr>
@@ -23025,7 +22365,7 @@
             <a:r>
               <a:rPr sz="3400" b="0" i="0">
                 <a:solidFill>
-                  <a:srgbClr val="D4D4D4"/>
+                  <a:srgbClr val="FFFFFF"/>
                 </a:solidFill>
                 <a:latin typeface="Arial"/>
               </a:rPr>
@@ -23060,7 +22400,7 @@
             <a:r>
               <a:rPr sz="3400" b="0" i="0">
                 <a:solidFill>
-                  <a:srgbClr val="D4D4D4"/>
+                  <a:srgbClr val="FFFFFF"/>
                 </a:solidFill>
                 <a:latin typeface="Arial"/>
               </a:rPr>
@@ -23097,7 +22437,7 @@
             <a:fld id="{4B0E1F8A-6C1D-4E2A-9F3B-7A5C8D2E1F60}" type="slidenum">
               <a:rPr sz="1600" b="0" i="0">
                 <a:solidFill>
-                  <a:srgbClr val="8A8A9A"/>
+                  <a:srgbClr val="1A1A2E"/>
                 </a:solidFill>
                 <a:latin typeface="Arial"/>
               </a:rPr>
@@ -23335,7 +22675,7 @@
             <a:fld id="{4B0E1F8A-6C1D-4E2A-9F3B-7A5C8D2E1F60}" type="slidenum">
               <a:rPr sz="1600" b="0" i="0">
                 <a:solidFill>
-                  <a:srgbClr val="8A8A9A"/>
+                  <a:srgbClr val="1A1A2E"/>
                 </a:solidFill>
                 <a:latin typeface="Arial"/>
               </a:rPr>
@@ -23548,7 +22888,7 @@
             <a:fld id="{4B0E1F8A-6C1D-4E2A-9F3B-7A5C8D2E1F60}" type="slidenum">
               <a:rPr sz="1600" b="0" i="0">
                 <a:solidFill>
-                  <a:srgbClr val="8A8A9A"/>
+                  <a:srgbClr val="1A1A2E"/>
                 </a:solidFill>
                 <a:latin typeface="Arial"/>
               </a:rPr>
@@ -23680,7 +23020,7 @@
             <a:r>
               <a:rPr sz="3400" b="1" i="0">
                 <a:solidFill>
-                  <a:srgbClr val="19323C"/>
+                  <a:srgbClr val="CC785C"/>
                 </a:solidFill>
                 <a:latin typeface="Arial"/>
               </a:rPr>
@@ -23697,14 +23037,14 @@
         </p:nvSpPr>
         <p:spPr>
           <a:xfrm>
-            <a:off x="548640" y="2176271"/>
-            <a:ext cx="1650492" cy="54864"/>
+            <a:off x="457200" y="2176271"/>
+            <a:ext cx="2566764" cy="54864"/>
           </a:xfrm>
           <a:prstGeom prst="rect">
             <a:avLst/>
           </a:prstGeom>
           <a:solidFill>
-            <a:srgbClr val="19323C"/>
+            <a:srgbClr val="CC785C"/>
           </a:solidFill>
           <a:ln>
             <a:noFill/>
@@ -23759,7 +23099,7 @@
             <a:r>
               <a:rPr sz="3400" b="1" i="0">
                 <a:solidFill>
-                  <a:srgbClr val="8A8A9A"/>
+                  <a:srgbClr val="1A1A2E"/>
                 </a:solidFill>
                 <a:latin typeface="Arial"/>
               </a:rPr>
@@ -23776,14 +23116,14 @@
         </p:nvSpPr>
         <p:spPr>
           <a:xfrm>
-            <a:off x="6324600" y="2176271"/>
-            <a:ext cx="1650492" cy="54864"/>
+            <a:off x="6233160" y="2176271"/>
+            <a:ext cx="1895872" cy="54864"/>
           </a:xfrm>
           <a:prstGeom prst="rect">
             <a:avLst/>
           </a:prstGeom>
           <a:solidFill>
-            <a:srgbClr val="8A8A9A"/>
+            <a:srgbClr val="1A1A2E"/>
           </a:solidFill>
           <a:ln>
             <a:noFill/>
@@ -24050,7 +23390,7 @@
             <a:fld id="{4B0E1F8A-6C1D-4E2A-9F3B-7A5C8D2E1F60}" type="slidenum">
               <a:rPr sz="1600" b="0" i="0">
                 <a:solidFill>
-                  <a:srgbClr val="8A8A9A"/>
+                  <a:srgbClr val="1A1A2E"/>
                 </a:solidFill>
                 <a:latin typeface="Arial"/>
               </a:rPr>
@@ -24263,7 +23603,7 @@
             <a:fld id="{4B0E1F8A-6C1D-4E2A-9F3B-7A5C8D2E1F60}" type="slidenum">
               <a:rPr sz="1600" b="0" i="0">
                 <a:solidFill>
-                  <a:srgbClr val="8A8A9A"/>
+                  <a:srgbClr val="1A1A2E"/>
                 </a:solidFill>
                 <a:latin typeface="Arial"/>
               </a:rPr>
@@ -24440,7 +23780,7 @@
             <a:fld id="{4B0E1F8A-6C1D-4E2A-9F3B-7A5C8D2E1F60}" type="slidenum">
               <a:rPr sz="1600" b="0" i="0">
                 <a:solidFill>
-                  <a:srgbClr val="8A8A9A"/>
+                  <a:srgbClr val="1A1A2E"/>
                 </a:solidFill>
                 <a:latin typeface="Arial"/>
               </a:rPr>
@@ -24679,7 +24019,7 @@
             <a:fld id="{4B0E1F8A-6C1D-4E2A-9F3B-7A5C8D2E1F60}" type="slidenum">
               <a:rPr sz="1600" b="0" i="0">
                 <a:solidFill>
-                  <a:srgbClr val="8A8A9A"/>
+                  <a:srgbClr val="1A1A2E"/>
                 </a:solidFill>
                 <a:latin typeface="Arial"/>
               </a:rPr>
@@ -24892,7 +24232,7 @@
             <a:fld id="{4B0E1F8A-6C1D-4E2A-9F3B-7A5C8D2E1F60}" type="slidenum">
               <a:rPr sz="1600" b="0" i="0">
                 <a:solidFill>
-                  <a:srgbClr val="8A8A9A"/>
+                  <a:srgbClr val="1A1A2E"/>
                 </a:solidFill>
                 <a:latin typeface="Arial"/>
               </a:rPr>
@@ -25041,8 +24381,8 @@
         </p:nvSpPr>
         <p:spPr>
           <a:xfrm>
-            <a:off x="548640" y="2176271"/>
-            <a:ext cx="1650492" cy="54864"/>
+            <a:off x="457200" y="2176271"/>
+            <a:ext cx="1655725" cy="54864"/>
           </a:xfrm>
           <a:prstGeom prst="rect">
             <a:avLst/>
@@ -25103,7 +24443,7 @@
             <a:r>
               <a:rPr sz="3400" b="1" i="0">
                 <a:solidFill>
-                  <a:srgbClr val="8A8A9A"/>
+                  <a:srgbClr val="1A1A2E"/>
                 </a:solidFill>
                 <a:latin typeface="Arial"/>
               </a:rPr>
@@ -25120,14 +24460,14 @@
         </p:nvSpPr>
         <p:spPr>
           <a:xfrm>
-            <a:off x="6324600" y="2176271"/>
-            <a:ext cx="1650492" cy="54864"/>
+            <a:off x="6233160" y="2176271"/>
+            <a:ext cx="2471886" cy="54864"/>
           </a:xfrm>
           <a:prstGeom prst="rect">
             <a:avLst/>
           </a:prstGeom>
           <a:solidFill>
-            <a:srgbClr val="8A8A9A"/>
+            <a:srgbClr val="1A1A2E"/>
           </a:solidFill>
           <a:ln>
             <a:noFill/>
@@ -25394,7 +24734,7 @@
             <a:fld id="{4B0E1F8A-6C1D-4E2A-9F3B-7A5C8D2E1F60}" type="slidenum">
               <a:rPr sz="1600" b="0" i="0">
                 <a:solidFill>
-                  <a:srgbClr val="8A8A9A"/>
+                  <a:srgbClr val="1A1A2E"/>
                 </a:solidFill>
                 <a:latin typeface="Arial"/>
               </a:rPr>
@@ -25436,148 +24776,6 @@
               </a:rPr>
               <a:t>Source</a:t>
             </a:r>
-          </a:p>
-        </p:txBody>
-      </p:sp>
-    </p:spTree>
-  </p:cSld>
-  <p:clrMapOvr>
-    <a:masterClrMapping/>
-  </p:clrMapOvr>
-</p:sld>
-</file>
-
-<file path=ppt/slides/slide39.xml><?xml version="1.0" encoding="utf-8"?>
-<p:sld xmlns:a="http://schemas.openxmlformats.org/drawingml/2006/main" xmlns:p="http://schemas.openxmlformats.org/presentationml/2006/main" xmlns:r="http://schemas.openxmlformats.org/officeDocument/2006/relationships" showMasterSp="0">
-  <p:cSld>
-    <p:bg>
-      <p:bgPr>
-        <a:solidFill>
-          <a:srgbClr val="FFFFFF"/>
-        </a:solidFill>
-        <a:effectLst/>
-      </p:bgPr>
-    </p:bg>
-    <p:spTree>
-      <p:nvGrpSpPr>
-        <p:cNvPr id="1" name=""/>
-        <p:cNvGrpSpPr/>
-        <p:nvPr/>
-      </p:nvGrpSpPr>
-      <p:grpSpPr/>
-      <p:sp>
-        <p:nvSpPr>
-          <p:cNvPr id="2" name="Rectangle 1"/>
-          <p:cNvSpPr/>
-          <p:nvPr/>
-        </p:nvSpPr>
-        <p:spPr>
-          <a:xfrm>
-            <a:off x="457200" y="2880360"/>
-            <a:ext cx="128016" cy="1097280"/>
-          </a:xfrm>
-          <a:prstGeom prst="rect">
-            <a:avLst/>
-          </a:prstGeom>
-          <a:solidFill>
-            <a:srgbClr val="CC785C"/>
-          </a:solidFill>
-          <a:ln>
-            <a:noFill/>
-          </a:ln>
-          <a:effectLst/>
-        </p:spPr>
-        <p:style>
-          <a:lnRef idx="1">
-            <a:schemeClr val="accent1"/>
-          </a:lnRef>
-          <a:fillRef idx="3">
-            <a:schemeClr val="accent1"/>
-          </a:fillRef>
-          <a:effectRef idx="2">
-            <a:schemeClr val="accent1"/>
-          </a:effectRef>
-          <a:fontRef idx="minor">
-            <a:schemeClr val="lt1"/>
-          </a:fontRef>
-        </p:style>
-        <p:txBody>
-          <a:bodyPr rtlCol="0" anchor="ctr"/>
-          <a:lstStyle/>
-          <a:p>
-            <a:pPr algn="ctr"/>
-          </a:p>
-        </p:txBody>
-      </p:sp>
-      <p:sp>
-        <p:nvSpPr>
-          <p:cNvPr id="3" name="TextBox 2"/>
-          <p:cNvSpPr txBox="1"/>
-          <p:nvPr/>
-        </p:nvSpPr>
-        <p:spPr>
-          <a:xfrm>
-            <a:off x="996696" y="2880360"/>
-            <a:ext cx="11195304" cy="1097280"/>
-          </a:xfrm>
-          <a:prstGeom prst="rect">
-            <a:avLst/>
-          </a:prstGeom>
-          <a:noFill/>
-        </p:spPr>
-        <p:txBody>
-          <a:bodyPr wrap="none" lIns="0" rIns="0">
-            <a:noAutofit/>
-          </a:bodyPr>
-          <a:lstStyle/>
-          <a:p>
-            <a:pPr algn="l"/>
-            <a:r>
-              <a:rPr sz="6600" b="1" i="0">
-                <a:solidFill>
-                  <a:srgbClr val="1A1A2E"/>
-                </a:solidFill>
-                <a:latin typeface="Arial"/>
-              </a:rPr>
-              <a:t>Build it from our phones.</a:t>
-            </a:r>
-          </a:p>
-        </p:txBody>
-      </p:sp>
-      <p:sp>
-        <p:nvSpPr>
-          <p:cNvPr id="4" name="TextBox 3"/>
-          <p:cNvSpPr/>
-          <p:nvPr>
-            <p:ph type="sldNum" idx="12"/>
-          </p:nvPr>
-        </p:nvSpPr>
-        <p:spPr>
-          <a:xfrm>
-            <a:off x="11186160" y="6035040"/>
-            <a:ext cx="548640" cy="365760"/>
-          </a:xfrm>
-          <a:prstGeom prst="rect">
-            <a:avLst/>
-          </a:prstGeom>
-          <a:noFill/>
-        </p:spPr>
-        <p:txBody>
-          <a:bodyPr wrap="none" lIns="0" rIns="0">
-            <a:noAutofit/>
-          </a:bodyPr>
-          <a:lstStyle/>
-          <a:p>
-            <a:pPr algn="r"/>
-            <a:fld id="{4B0E1F8A-6C1D-4E2A-9F3B-7A5C8D2E1F60}" type="slidenum">
-              <a:rPr sz="1600" b="0" i="0">
-                <a:solidFill>
-                  <a:srgbClr val="8A8A9A"/>
-                </a:solidFill>
-                <a:latin typeface="Arial"/>
-              </a:rPr>
-              <a:t>39</a:t>
-            </a:fld>
           </a:p>
         </p:txBody>
       </p:sp>
@@ -25880,7 +25078,7 @@
             <a:fld id="{4B0E1F8A-6C1D-4E2A-9F3B-7A5C8D2E1F60}" type="slidenum">
               <a:rPr sz="1600" b="0" i="0">
                 <a:solidFill>
-                  <a:srgbClr val="8A8A9A"/>
+                  <a:srgbClr val="1A1A2E"/>
                 </a:solidFill>
                 <a:latin typeface="Arial"/>
               </a:rPr>
@@ -25930,7 +25128,7 @@
             <a:avLst/>
           </a:prstGeom>
           <a:solidFill>
-            <a:srgbClr val="FF5F56"/>
+            <a:srgbClr val="FFFFFF"/>
           </a:solidFill>
           <a:ln>
             <a:noFill/>
@@ -25974,7 +25172,7 @@
             <a:avLst/>
           </a:prstGeom>
           <a:solidFill>
-            <a:srgbClr val="FFBD2E"/>
+            <a:srgbClr val="FFFFFF"/>
           </a:solidFill>
           <a:ln>
             <a:noFill/>
@@ -26018,7 +25216,7 @@
             <a:avLst/>
           </a:prstGeom>
           <a:solidFill>
-            <a:srgbClr val="27C93F"/>
+            <a:srgbClr val="FFFFFF"/>
           </a:solidFill>
           <a:ln>
             <a:noFill/>
@@ -26073,7 +25271,7 @@
             <a:r>
               <a:rPr sz="4200" b="0" i="0">
                 <a:solidFill>
-                  <a:srgbClr val="D4D4D4"/>
+                  <a:srgbClr val="FFFFFF"/>
                 </a:solidFill>
                 <a:latin typeface="Arial"/>
               </a:rPr>
@@ -26108,7 +25306,7 @@
             <a:r>
               <a:rPr sz="3400" b="0" i="0">
                 <a:solidFill>
-                  <a:srgbClr val="4EC9B0"/>
+                  <a:srgbClr val="569CD6"/>
                 </a:solidFill>
                 <a:latin typeface="Arial"/>
               </a:rPr>
@@ -26143,7 +25341,7 @@
             <a:r>
               <a:rPr sz="3400" b="0" i="0">
                 <a:solidFill>
-                  <a:srgbClr val="D4D4D4"/>
+                  <a:srgbClr val="FFFFFF"/>
                 </a:solidFill>
                 <a:latin typeface="Arial"/>
               </a:rPr>
@@ -26178,7 +25376,7 @@
             <a:r>
               <a:rPr sz="3400" b="0" i="0">
                 <a:solidFill>
-                  <a:srgbClr val="D4D4D4"/>
+                  <a:srgbClr val="FFFFFF"/>
                 </a:solidFill>
                 <a:latin typeface="Arial"/>
               </a:rPr>
@@ -26213,7 +25411,7 @@
             <a:r>
               <a:rPr sz="3400" b="0" i="0">
                 <a:solidFill>
-                  <a:srgbClr val="D4D4D4"/>
+                  <a:srgbClr val="FFFFFF"/>
                 </a:solidFill>
                 <a:latin typeface="Arial"/>
               </a:rPr>
@@ -26231,7 +25429,7 @@
         <p:spPr>
           <a:xfrm>
             <a:off x="457200" y="4428739"/>
-            <a:ext cx="6211550" cy="518159"/>
+            <a:ext cx="10204012" cy="518159"/>
           </a:xfrm>
           <a:prstGeom prst="rect">
             <a:avLst/>
@@ -26248,11 +25446,11 @@
             <a:r>
               <a:rPr sz="3400" b="0" i="0">
                 <a:solidFill>
-                  <a:srgbClr val="D4D4D4"/>
-                </a:solidFill>
-                <a:latin typeface="Arial"/>
-              </a:rPr>
-              <a:t>Reading sales.csv (</a:t>
+                  <a:srgbClr val="FFFFFF"/>
+                </a:solidFill>
+                <a:latin typeface="Arial"/>
+              </a:rPr>
+              <a:t>Reading sales.csv (1.2M rows)...</a:t>
             </a:r>
           </a:p>
         </p:txBody>
@@ -26265,8 +25463,8 @@
         </p:nvSpPr>
         <p:spPr>
           <a:xfrm>
-            <a:off x="4225119" y="4428739"/>
-            <a:ext cx="567115" cy="518159"/>
+            <a:off x="457200" y="4946898"/>
+            <a:ext cx="7786270" cy="518159"/>
           </a:xfrm>
           <a:prstGeom prst="rect">
             <a:avLst/>
@@ -26283,11 +25481,11 @@
             <a:r>
               <a:rPr sz="3400" b="0" i="0">
                 <a:solidFill>
-                  <a:srgbClr val="B5CEA8"/>
-                </a:solidFill>
-                <a:latin typeface="Arial"/>
-              </a:rPr>
-              <a:t>1</a:t>
+                  <a:srgbClr val="FFFFFF"/>
+                </a:solidFill>
+                <a:latin typeface="Arial"/>
+              </a:rPr>
+              <a:t>Running profiling script...</a:t>
             </a:r>
           </a:p>
         </p:txBody>
@@ -26300,8 +25498,8 @@
         </p:nvSpPr>
         <p:spPr>
           <a:xfrm>
-            <a:off x="4465265" y="4428739"/>
-            <a:ext cx="3791108" cy="518159"/>
+            <a:off x="457200" y="5465057"/>
+            <a:ext cx="8771651" cy="518159"/>
           </a:xfrm>
           <a:prstGeom prst="rect">
             <a:avLst/>
@@ -26318,11 +25516,11 @@
             <a:r>
               <a:rPr sz="3400" b="0" i="0">
                 <a:solidFill>
-                  <a:srgbClr val="D4D4D4"/>
-                </a:solidFill>
-                <a:latin typeface="Arial"/>
-              </a:rPr>
-              <a:t>.2M rows)...</a:t>
+                  <a:srgbClr val="FFFFFF"/>
+                </a:solidFill>
+                <a:latin typeface="Arial"/>
+              </a:rPr>
+              <a:t>Wrote profile.md: 3 findings.</a:t>
             </a:r>
           </a:p>
         </p:txBody>
@@ -26330,146 +25528,6 @@
       <p:sp>
         <p:nvSpPr>
           <p:cNvPr id="13" name="TextBox 12"/>
-          <p:cNvSpPr txBox="1"/>
-          <p:nvPr/>
-        </p:nvSpPr>
-        <p:spPr>
-          <a:xfrm>
-            <a:off x="457200" y="4946898"/>
-            <a:ext cx="7786270" cy="518159"/>
-          </a:xfrm>
-          <a:prstGeom prst="rect">
-            <a:avLst/>
-          </a:prstGeom>
-          <a:noFill/>
-        </p:spPr>
-        <p:txBody>
-          <a:bodyPr wrap="none" lIns="0" rIns="0">
-            <a:noAutofit/>
-          </a:bodyPr>
-          <a:lstStyle/>
-          <a:p>
-            <a:pPr algn="l"/>
-            <a:r>
-              <a:rPr sz="3400" b="0" i="0">
-                <a:solidFill>
-                  <a:srgbClr val="D4D4D4"/>
-                </a:solidFill>
-                <a:latin typeface="Arial"/>
-              </a:rPr>
-              <a:t>Running profiling script...</a:t>
-            </a:r>
-          </a:p>
-        </p:txBody>
-      </p:sp>
-      <p:sp>
-        <p:nvSpPr>
-          <p:cNvPr id="14" name="TextBox 13"/>
-          <p:cNvSpPr txBox="1"/>
-          <p:nvPr/>
-        </p:nvSpPr>
-        <p:spPr>
-          <a:xfrm>
-            <a:off x="457200" y="5465057"/>
-            <a:ext cx="5622211" cy="518159"/>
-          </a:xfrm>
-          <a:prstGeom prst="rect">
-            <a:avLst/>
-          </a:prstGeom>
-          <a:noFill/>
-        </p:spPr>
-        <p:txBody>
-          <a:bodyPr wrap="none" lIns="0" rIns="0">
-            <a:noAutofit/>
-          </a:bodyPr>
-          <a:lstStyle/>
-          <a:p>
-            <a:pPr algn="l"/>
-            <a:r>
-              <a:rPr sz="3400" b="0" i="0">
-                <a:solidFill>
-                  <a:srgbClr val="D4D4D4"/>
-                </a:solidFill>
-                <a:latin typeface="Arial"/>
-              </a:rPr>
-              <a:t>Wrote profile.md: </a:t>
-            </a:r>
-          </a:p>
-        </p:txBody>
-      </p:sp>
-      <p:sp>
-        <p:nvSpPr>
-          <p:cNvPr id="15" name="TextBox 14"/>
-          <p:cNvSpPr txBox="1"/>
-          <p:nvPr/>
-        </p:nvSpPr>
-        <p:spPr>
-          <a:xfrm>
-            <a:off x="3856782" y="5465057"/>
-            <a:ext cx="567115" cy="518159"/>
-          </a:xfrm>
-          <a:prstGeom prst="rect">
-            <a:avLst/>
-          </a:prstGeom>
-          <a:noFill/>
-        </p:spPr>
-        <p:txBody>
-          <a:bodyPr wrap="none" lIns="0" rIns="0">
-            <a:noAutofit/>
-          </a:bodyPr>
-          <a:lstStyle/>
-          <a:p>
-            <a:pPr algn="l"/>
-            <a:r>
-              <a:rPr sz="3400" b="0" i="0">
-                <a:solidFill>
-                  <a:srgbClr val="B5CEA8"/>
-                </a:solidFill>
-                <a:latin typeface="Arial"/>
-              </a:rPr>
-              <a:t>3</a:t>
-            </a:r>
-          </a:p>
-        </p:txBody>
-      </p:sp>
-      <p:sp>
-        <p:nvSpPr>
-          <p:cNvPr id="16" name="TextBox 15"/>
-          <p:cNvSpPr txBox="1"/>
-          <p:nvPr/>
-        </p:nvSpPr>
-        <p:spPr>
-          <a:xfrm>
-            <a:off x="4096928" y="5465057"/>
-            <a:ext cx="2948086" cy="518159"/>
-          </a:xfrm>
-          <a:prstGeom prst="rect">
-            <a:avLst/>
-          </a:prstGeom>
-          <a:noFill/>
-        </p:spPr>
-        <p:txBody>
-          <a:bodyPr wrap="none" lIns="0" rIns="0">
-            <a:noAutofit/>
-          </a:bodyPr>
-          <a:lstStyle/>
-          <a:p>
-            <a:pPr algn="l"/>
-            <a:r>
-              <a:rPr sz="3400" b="0" i="0">
-                <a:solidFill>
-                  <a:srgbClr val="D4D4D4"/>
-                </a:solidFill>
-                <a:latin typeface="Arial"/>
-              </a:rPr>
-              <a:t> findings.</a:t>
-            </a:r>
-          </a:p>
-        </p:txBody>
-      </p:sp>
-      <p:sp>
-        <p:nvSpPr>
-          <p:cNvPr id="17" name="TextBox 16"/>
           <p:cNvSpPr/>
           <p:nvPr>
             <p:ph type="sldNum" idx="12"/>
@@ -26495,7 +25553,7 @@
             <a:fld id="{4B0E1F8A-6C1D-4E2A-9F3B-7A5C8D2E1F60}" type="slidenum">
               <a:rPr sz="1600" b="0" i="0">
                 <a:solidFill>
-                  <a:srgbClr val="8A8A9A"/>
+                  <a:srgbClr val="1A1A2E"/>
                 </a:solidFill>
                 <a:latin typeface="Arial"/>
               </a:rPr>
@@ -26574,7 +25632,7 @@
         <p:spPr>
           <a:xfrm>
             <a:off x="457200" y="1499616"/>
-            <a:ext cx="2613660" cy="518159"/>
+            <a:ext cx="3279020" cy="518159"/>
           </a:xfrm>
           <a:prstGeom prst="rect">
             <a:avLst/>
@@ -26591,11 +25649,11 @@
             <a:r>
               <a:rPr sz="3400" b="1" i="0">
                 <a:solidFill>
-                  <a:srgbClr val="1A1A2E"/>
-                </a:solidFill>
-                <a:latin typeface="Arial"/>
-              </a:rPr>
-              <a:t>EDA</a:t>
+                  <a:srgbClr val="CC785C"/>
+                </a:solidFill>
+                <a:latin typeface="Arial"/>
+              </a:rPr>
+              <a:t>Workflow</a:t>
             </a:r>
           </a:p>
         </p:txBody>
@@ -26608,43 +25666,8 @@
         </p:nvSpPr>
         <p:spPr>
           <a:xfrm>
-            <a:off x="457200" y="2154935"/>
-            <a:ext cx="2613660" cy="3605785"/>
-          </a:xfrm>
-          <a:prstGeom prst="rect">
-            <a:avLst/>
-          </a:prstGeom>
-          <a:noFill/>
-        </p:spPr>
-        <p:txBody>
-          <a:bodyPr wrap="square" lIns="0" rIns="0">
-            <a:noAutofit/>
-          </a:bodyPr>
-          <a:lstStyle/>
-          <a:p>
-            <a:pPr algn="l"/>
-            <a:r>
-              <a:rPr sz="3400" b="0" i="0">
-                <a:solidFill>
-                  <a:srgbClr val="1A1A2E"/>
-                </a:solidFill>
-                <a:latin typeface="Arial"/>
-              </a:rPr>
-              <a:t>Profile new data in minutes.</a:t>
-            </a:r>
-          </a:p>
-        </p:txBody>
-      </p:sp>
-      <p:sp>
-        <p:nvSpPr>
-          <p:cNvPr id="5" name="TextBox 4"/>
-          <p:cNvSpPr txBox="1"/>
-          <p:nvPr/>
-        </p:nvSpPr>
-        <p:spPr>
-          <a:xfrm>
-            <a:off x="3345180" y="1499616"/>
-            <a:ext cx="3100228" cy="518159"/>
+            <a:off x="3306688" y="1499616"/>
+            <a:ext cx="6171068" cy="518159"/>
           </a:xfrm>
           <a:prstGeom prst="rect">
             <a:avLst/>
@@ -26661,12 +25684,56 @@
             <a:r>
               <a:rPr sz="3400" b="1" i="0">
                 <a:solidFill>
-                  <a:srgbClr val="1A1A2E"/>
-                </a:solidFill>
-                <a:latin typeface="Arial"/>
-              </a:rPr>
-              <a:t>Cleaning</a:t>
-            </a:r>
+                  <a:srgbClr val="CC785C"/>
+                </a:solidFill>
+                <a:latin typeface="Arial"/>
+              </a:rPr>
+              <a:t>What Claude does</a:t>
+            </a:r>
+          </a:p>
+        </p:txBody>
+      </p:sp>
+      <p:sp>
+        <p:nvSpPr>
+          <p:cNvPr id="5" name="Rectangle 4"/>
+          <p:cNvSpPr/>
+          <p:nvPr/>
+        </p:nvSpPr>
+        <p:spPr>
+          <a:xfrm>
+            <a:off x="457200" y="2072639"/>
+            <a:ext cx="8399589" cy="54864"/>
+          </a:xfrm>
+          <a:prstGeom prst="rect">
+            <a:avLst/>
+          </a:prstGeom>
+          <a:solidFill>
+            <a:srgbClr val="CC785C"/>
+          </a:solidFill>
+          <a:ln>
+            <a:noFill/>
+          </a:ln>
+          <a:effectLst/>
+        </p:spPr>
+        <p:style>
+          <a:lnRef idx="1">
+            <a:schemeClr val="accent1"/>
+          </a:lnRef>
+          <a:fillRef idx="3">
+            <a:schemeClr val="accent1"/>
+          </a:fillRef>
+          <a:effectRef idx="2">
+            <a:schemeClr val="accent1"/>
+          </a:effectRef>
+          <a:fontRef idx="minor">
+            <a:schemeClr val="lt1"/>
+          </a:fontRef>
+        </p:style>
+        <p:txBody>
+          <a:bodyPr rtlCol="0" anchor="ctr"/>
+          <a:lstStyle/>
+          <a:p>
+            <a:pPr algn="ctr"/>
           </a:p>
         </p:txBody>
       </p:sp>
@@ -26678,16 +25745,16 @@
         </p:nvSpPr>
         <p:spPr>
           <a:xfrm>
-            <a:off x="3345180" y="2154935"/>
-            <a:ext cx="2613660" cy="3605785"/>
-          </a:xfrm>
-          <a:prstGeom prst="rect">
-            <a:avLst/>
-          </a:prstGeom>
-          <a:noFill/>
-        </p:spPr>
-        <p:txBody>
-          <a:bodyPr wrap="square" lIns="0" rIns="0">
+            <a:off x="457200" y="2401823"/>
+            <a:ext cx="2300848" cy="633984"/>
+          </a:xfrm>
+          <a:prstGeom prst="rect">
+            <a:avLst/>
+          </a:prstGeom>
+          <a:noFill/>
+        </p:spPr>
+        <p:txBody>
+          <a:bodyPr wrap="none" lIns="0" rIns="0">
             <a:noAutofit/>
           </a:bodyPr>
           <a:lstStyle/>
@@ -26700,7 +25767,7 @@
                 </a:solidFill>
                 <a:latin typeface="Arial"/>
               </a:rPr>
-              <a:t>Fix types, nulls, duplicates.</a:t>
+              <a:t>EDA</a:t>
             </a:r>
           </a:p>
         </p:txBody>
@@ -26713,29 +25780,29 @@
         </p:nvSpPr>
         <p:spPr>
           <a:xfrm>
-            <a:off x="6233160" y="1499616"/>
-            <a:ext cx="3214588" cy="518159"/>
-          </a:xfrm>
-          <a:prstGeom prst="rect">
-            <a:avLst/>
-          </a:prstGeom>
-          <a:noFill/>
-        </p:spPr>
-        <p:txBody>
-          <a:bodyPr wrap="none" lIns="0" rIns="0">
-            <a:noAutofit/>
-          </a:bodyPr>
-          <a:lstStyle/>
-          <a:p>
-            <a:pPr algn="l"/>
-            <a:r>
-              <a:rPr sz="3400" b="1" i="0">
+            <a:off x="3306688" y="2401823"/>
+            <a:ext cx="8477825" cy="633984"/>
+          </a:xfrm>
+          <a:prstGeom prst="rect">
+            <a:avLst/>
+          </a:prstGeom>
+          <a:noFill/>
+        </p:spPr>
+        <p:txBody>
+          <a:bodyPr wrap="none" lIns="0" rIns="0">
+            <a:noAutofit/>
+          </a:bodyPr>
+          <a:lstStyle/>
+          <a:p>
+            <a:pPr algn="l"/>
+            <a:r>
+              <a:rPr sz="3400" b="0" i="0">
                 <a:solidFill>
                   <a:srgbClr val="1A1A2E"/>
                 </a:solidFill>
                 <a:latin typeface="Arial"/>
               </a:rPr>
-              <a:t>Modeling</a:t>
+              <a:t>Profile new data in minutes</a:t>
             </a:r>
           </a:p>
         </p:txBody>
@@ -26748,16 +25815,16 @@
         </p:nvSpPr>
         <p:spPr>
           <a:xfrm>
-            <a:off x="6233160" y="2154935"/>
-            <a:ext cx="2613660" cy="3605785"/>
-          </a:xfrm>
-          <a:prstGeom prst="rect">
-            <a:avLst/>
-          </a:prstGeom>
-          <a:noFill/>
-        </p:spPr>
-        <p:txBody>
-          <a:bodyPr wrap="square" lIns="0" rIns="0">
+            <a:off x="457200" y="3310127"/>
+            <a:ext cx="2909966" cy="633984"/>
+          </a:xfrm>
+          <a:prstGeom prst="rect">
+            <a:avLst/>
+          </a:prstGeom>
+          <a:noFill/>
+        </p:spPr>
+        <p:txBody>
+          <a:bodyPr wrap="none" lIns="0" rIns="0">
             <a:noAutofit/>
           </a:bodyPr>
           <a:lstStyle/>
@@ -26770,7 +25837,7 @@
                 </a:solidFill>
                 <a:latin typeface="Arial"/>
               </a:rPr>
-              <a:t>Fast first baselines.</a:t>
+              <a:t>Cleaning</a:t>
             </a:r>
           </a:p>
         </p:txBody>
@@ -26783,29 +25850,29 @@
         </p:nvSpPr>
         <p:spPr>
           <a:xfrm>
-            <a:off x="9121140" y="1499616"/>
-            <a:ext cx="3070860" cy="518159"/>
-          </a:xfrm>
-          <a:prstGeom prst="rect">
-            <a:avLst/>
-          </a:prstGeom>
-          <a:noFill/>
-        </p:spPr>
-        <p:txBody>
-          <a:bodyPr wrap="none" lIns="0" rIns="0">
-            <a:noAutofit/>
-          </a:bodyPr>
-          <a:lstStyle/>
-          <a:p>
-            <a:pPr algn="l"/>
-            <a:r>
-              <a:rPr sz="3400" b="1" i="0">
+            <a:off x="3306688" y="3310127"/>
+            <a:ext cx="8246745" cy="633984"/>
+          </a:xfrm>
+          <a:prstGeom prst="rect">
+            <a:avLst/>
+          </a:prstGeom>
+          <a:noFill/>
+        </p:spPr>
+        <p:txBody>
+          <a:bodyPr wrap="none" lIns="0" rIns="0">
+            <a:noAutofit/>
+          </a:bodyPr>
+          <a:lstStyle/>
+          <a:p>
+            <a:pPr algn="l"/>
+            <a:r>
+              <a:rPr sz="3400" b="0" i="0">
                 <a:solidFill>
                   <a:srgbClr val="1A1A2E"/>
                 </a:solidFill>
                 <a:latin typeface="Arial"/>
               </a:rPr>
-              <a:t>Reporting</a:t>
+              <a:t>Fix types, nulls, duplicates</a:t>
             </a:r>
           </a:p>
         </p:txBody>
@@ -26818,16 +25885,16 @@
         </p:nvSpPr>
         <p:spPr>
           <a:xfrm>
-            <a:off x="9121140" y="2154935"/>
-            <a:ext cx="2613660" cy="3605785"/>
-          </a:xfrm>
-          <a:prstGeom prst="rect">
-            <a:avLst/>
-          </a:prstGeom>
-          <a:noFill/>
-        </p:spPr>
-        <p:txBody>
-          <a:bodyPr wrap="square" lIns="0" rIns="0">
+            <a:off x="457200" y="4218431"/>
+            <a:ext cx="2986544" cy="633984"/>
+          </a:xfrm>
+          <a:prstGeom prst="rect">
+            <a:avLst/>
+          </a:prstGeom>
+          <a:noFill/>
+        </p:spPr>
+        <p:txBody>
+          <a:bodyPr wrap="none" lIns="0" rIns="0">
             <a:noAutofit/>
           </a:bodyPr>
           <a:lstStyle/>
@@ -26840,7 +25907,7 @@
                 </a:solidFill>
                 <a:latin typeface="Arial"/>
               </a:rPr>
-              <a:t>Plots and write-ups.</a:t>
+              <a:t>Modeling</a:t>
             </a:r>
           </a:p>
         </p:txBody>
@@ -26848,6 +25915,111 @@
       <p:sp>
         <p:nvSpPr>
           <p:cNvPr id="11" name="TextBox 10"/>
+          <p:cNvSpPr txBox="1"/>
+          <p:nvPr/>
+        </p:nvSpPr>
+        <p:spPr>
+          <a:xfrm>
+            <a:off x="3306688" y="4218431"/>
+            <a:ext cx="5942350" cy="633984"/>
+          </a:xfrm>
+          <a:prstGeom prst="rect">
+            <a:avLst/>
+          </a:prstGeom>
+          <a:noFill/>
+        </p:spPr>
+        <p:txBody>
+          <a:bodyPr wrap="none" lIns="0" rIns="0">
+            <a:noAutofit/>
+          </a:bodyPr>
+          <a:lstStyle/>
+          <a:p>
+            <a:pPr algn="l"/>
+            <a:r>
+              <a:rPr sz="3400" b="0" i="0">
+                <a:solidFill>
+                  <a:srgbClr val="1A1A2E"/>
+                </a:solidFill>
+                <a:latin typeface="Arial"/>
+              </a:rPr>
+              <a:t>Fast first baselines</a:t>
+            </a:r>
+          </a:p>
+        </p:txBody>
+      </p:sp>
+      <p:sp>
+        <p:nvSpPr>
+          <p:cNvPr id="12" name="TextBox 11"/>
+          <p:cNvSpPr txBox="1"/>
+          <p:nvPr/>
+        </p:nvSpPr>
+        <p:spPr>
+          <a:xfrm>
+            <a:off x="457200" y="5126735"/>
+            <a:ext cx="3178492" cy="633984"/>
+          </a:xfrm>
+          <a:prstGeom prst="rect">
+            <a:avLst/>
+          </a:prstGeom>
+          <a:noFill/>
+        </p:spPr>
+        <p:txBody>
+          <a:bodyPr wrap="none" lIns="0" rIns="0">
+            <a:noAutofit/>
+          </a:bodyPr>
+          <a:lstStyle/>
+          <a:p>
+            <a:pPr algn="l"/>
+            <a:r>
+              <a:rPr sz="3400" b="0" i="0">
+                <a:solidFill>
+                  <a:srgbClr val="1A1A2E"/>
+                </a:solidFill>
+                <a:latin typeface="Arial"/>
+              </a:rPr>
+              <a:t>Reporting</a:t>
+            </a:r>
+          </a:p>
+        </p:txBody>
+      </p:sp>
+      <p:sp>
+        <p:nvSpPr>
+          <p:cNvPr id="13" name="TextBox 12"/>
+          <p:cNvSpPr txBox="1"/>
+          <p:nvPr/>
+        </p:nvSpPr>
+        <p:spPr>
+          <a:xfrm>
+            <a:off x="3306688" y="5126735"/>
+            <a:ext cx="6058059" cy="633984"/>
+          </a:xfrm>
+          <a:prstGeom prst="rect">
+            <a:avLst/>
+          </a:prstGeom>
+          <a:noFill/>
+        </p:spPr>
+        <p:txBody>
+          <a:bodyPr wrap="none" lIns="0" rIns="0">
+            <a:noAutofit/>
+          </a:bodyPr>
+          <a:lstStyle/>
+          <a:p>
+            <a:pPr algn="l"/>
+            <a:r>
+              <a:rPr sz="3400" b="0" i="0">
+                <a:solidFill>
+                  <a:srgbClr val="1A1A2E"/>
+                </a:solidFill>
+                <a:latin typeface="Arial"/>
+              </a:rPr>
+              <a:t>Plots and write-ups</a:t>
+            </a:r>
+          </a:p>
+        </p:txBody>
+      </p:sp>
+      <p:sp>
+        <p:nvSpPr>
+          <p:cNvPr id="14" name="TextBox 13"/>
           <p:cNvSpPr/>
           <p:nvPr>
             <p:ph type="sldNum" idx="12"/>
@@ -26873,7 +26045,7 @@
             <a:fld id="{4B0E1F8A-6C1D-4E2A-9F3B-7A5C8D2E1F60}" type="slidenum">
               <a:rPr sz="1600" b="0" i="0">
                 <a:solidFill>
-                  <a:srgbClr val="8A8A9A"/>
+                  <a:srgbClr val="1A1A2E"/>
                 </a:solidFill>
                 <a:latin typeface="Arial"/>
               </a:rPr>
@@ -26969,7 +26141,7 @@
             <a:r>
               <a:rPr sz="4200" b="1" i="0">
                 <a:solidFill>
-                  <a:srgbClr val="19323C"/>
+                  <a:srgbClr val="CC785C"/>
                 </a:solidFill>
                 <a:latin typeface="Arial"/>
               </a:rPr>
@@ -26987,13 +26159,13 @@
         <p:spPr>
           <a:xfrm>
             <a:off x="457200" y="2194560"/>
-            <a:ext cx="784098" cy="54864"/>
+            <a:ext cx="593303" cy="54864"/>
           </a:xfrm>
           <a:prstGeom prst="rect">
             <a:avLst/>
           </a:prstGeom>
           <a:solidFill>
-            <a:srgbClr val="19323C"/>
+            <a:srgbClr val="CC785C"/>
           </a:solidFill>
           <a:ln>
             <a:noFill/>
@@ -27048,7 +26220,7 @@
             <a:r>
               <a:rPr sz="3400" b="1" i="0">
                 <a:solidFill>
-                  <a:srgbClr val="19323C"/>
+                  <a:srgbClr val="CC785C"/>
                 </a:solidFill>
                 <a:latin typeface="Arial"/>
               </a:rPr>
@@ -27118,7 +26290,7 @@
             <a:r>
               <a:rPr sz="4200" b="1" i="0">
                 <a:solidFill>
-                  <a:srgbClr val="19323C"/>
+                  <a:srgbClr val="CC785C"/>
                 </a:solidFill>
                 <a:latin typeface="Arial"/>
               </a:rPr>
@@ -27136,13 +26308,13 @@
         <p:spPr>
           <a:xfrm>
             <a:off x="3345180" y="2194560"/>
-            <a:ext cx="784098" cy="54864"/>
+            <a:ext cx="593303" cy="54864"/>
           </a:xfrm>
           <a:prstGeom prst="rect">
             <a:avLst/>
           </a:prstGeom>
           <a:solidFill>
-            <a:srgbClr val="19323C"/>
+            <a:srgbClr val="CC785C"/>
           </a:solidFill>
           <a:ln>
             <a:noFill/>
@@ -27197,7 +26369,7 @@
             <a:r>
               <a:rPr sz="3400" b="1" i="0">
                 <a:solidFill>
-                  <a:srgbClr val="19323C"/>
+                  <a:srgbClr val="CC785C"/>
                 </a:solidFill>
                 <a:latin typeface="Arial"/>
               </a:rPr>
@@ -27267,7 +26439,7 @@
             <a:r>
               <a:rPr sz="4200" b="1" i="0">
                 <a:solidFill>
-                  <a:srgbClr val="19323C"/>
+                  <a:srgbClr val="CC785C"/>
                 </a:solidFill>
                 <a:latin typeface="Arial"/>
               </a:rPr>
@@ -27285,13 +26457,13 @@
         <p:spPr>
           <a:xfrm>
             <a:off x="6233160" y="2194560"/>
-            <a:ext cx="784098" cy="54864"/>
+            <a:ext cx="593303" cy="54864"/>
           </a:xfrm>
           <a:prstGeom prst="rect">
             <a:avLst/>
           </a:prstGeom>
           <a:solidFill>
-            <a:srgbClr val="19323C"/>
+            <a:srgbClr val="CC785C"/>
           </a:solidFill>
           <a:ln>
             <a:noFill/>
@@ -27346,7 +26518,7 @@
             <a:r>
               <a:rPr sz="3400" b="1" i="0">
                 <a:solidFill>
-                  <a:srgbClr val="19323C"/>
+                  <a:srgbClr val="CC785C"/>
                 </a:solidFill>
                 <a:latin typeface="Arial"/>
               </a:rPr>
@@ -27416,7 +26588,7 @@
             <a:r>
               <a:rPr sz="4200" b="1" i="0">
                 <a:solidFill>
-                  <a:srgbClr val="19323C"/>
+                  <a:srgbClr val="CC785C"/>
                 </a:solidFill>
                 <a:latin typeface="Arial"/>
               </a:rPr>
@@ -27434,13 +26606,13 @@
         <p:spPr>
           <a:xfrm>
             <a:off x="9121140" y="2194560"/>
-            <a:ext cx="784098" cy="54864"/>
+            <a:ext cx="593303" cy="54864"/>
           </a:xfrm>
           <a:prstGeom prst="rect">
             <a:avLst/>
           </a:prstGeom>
           <a:solidFill>
-            <a:srgbClr val="19323C"/>
+            <a:srgbClr val="CC785C"/>
           </a:solidFill>
           <a:ln>
             <a:noFill/>
@@ -27495,7 +26667,7 @@
             <a:r>
               <a:rPr sz="3400" b="1" i="0">
                 <a:solidFill>
-                  <a:srgbClr val="19323C"/>
+                  <a:srgbClr val="CC785C"/>
                 </a:solidFill>
                 <a:latin typeface="Arial"/>
               </a:rPr>
@@ -27567,7 +26739,7 @@
             <a:fld id="{4B0E1F8A-6C1D-4E2A-9F3B-7A5C8D2E1F60}" type="slidenum">
               <a:rPr sz="1600" b="0" i="0">
                 <a:solidFill>
-                  <a:srgbClr val="8A8A9A"/>
+                  <a:srgbClr val="1A1A2E"/>
                 </a:solidFill>
                 <a:latin typeface="Arial"/>
               </a:rPr>
@@ -27663,7 +26835,7 @@
             <a:r>
               <a:rPr sz="3400" b="1" i="0">
                 <a:solidFill>
-                  <a:srgbClr val="8A8A9A"/>
+                  <a:srgbClr val="1A1A2E"/>
                 </a:solidFill>
                 <a:latin typeface="Arial"/>
               </a:rPr>
@@ -27680,14 +26852,14 @@
         </p:nvSpPr>
         <p:spPr>
           <a:xfrm>
-            <a:off x="548640" y="2176271"/>
-            <a:ext cx="1650492" cy="54864"/>
+            <a:off x="457200" y="2176271"/>
+            <a:ext cx="1367718" cy="54864"/>
           </a:xfrm>
           <a:prstGeom prst="rect">
             <a:avLst/>
           </a:prstGeom>
           <a:solidFill>
-            <a:srgbClr val="8A8A9A"/>
+            <a:srgbClr val="1A1A2E"/>
           </a:solidFill>
           <a:ln>
             <a:noFill/>
@@ -27759,8 +26931,8 @@
         </p:nvSpPr>
         <p:spPr>
           <a:xfrm>
-            <a:off x="6324600" y="2176271"/>
-            <a:ext cx="1650492" cy="54864"/>
+            <a:off x="6233160" y="2176271"/>
+            <a:ext cx="3690330" cy="54864"/>
           </a:xfrm>
           <a:prstGeom prst="rect">
             <a:avLst/>
@@ -28033,7 +27205,7 @@
             <a:fld id="{4B0E1F8A-6C1D-4E2A-9F3B-7A5C8D2E1F60}" type="slidenum">
               <a:rPr sz="1600" b="0" i="0">
                 <a:solidFill>
-                  <a:srgbClr val="8A8A9A"/>
+                  <a:srgbClr val="1A1A2E"/>
                 </a:solidFill>
                 <a:latin typeface="Arial"/>
               </a:rPr>
@@ -28129,7 +27301,7 @@
             <a:r>
               <a:rPr sz="3400" b="1" i="0">
                 <a:solidFill>
-                  <a:srgbClr val="19323C"/>
+                  <a:srgbClr val="CC785C"/>
                 </a:solidFill>
                 <a:latin typeface="Arial"/>
               </a:rPr>
@@ -28164,7 +27336,7 @@
             <a:r>
               <a:rPr sz="3400" b="1" i="0">
                 <a:solidFill>
-                  <a:srgbClr val="19323C"/>
+                  <a:srgbClr val="CC785C"/>
                 </a:solidFill>
                 <a:latin typeface="Arial"/>
               </a:rPr>
@@ -28525,7 +27697,7 @@
             <a:fld id="{4B0E1F8A-6C1D-4E2A-9F3B-7A5C8D2E1F60}" type="slidenum">
               <a:rPr sz="1600" b="0" i="0">
                 <a:solidFill>
-                  <a:srgbClr val="8A8A9A"/>
+                  <a:srgbClr val="1A1A2E"/>
                 </a:solidFill>
                 <a:latin typeface="Arial"/>
               </a:rPr>
